--- a/msa-ppt/3.데이터 조회 API 구현.pptx
+++ b/msa-ppt/3.데이터 조회 API 구현.pptx
@@ -15,15 +15,20 @@
     <p:sldId id="263" r:id="rId9"/>
     <p:sldId id="264" r:id="rId10"/>
     <p:sldId id="265" r:id="rId11"/>
-    <p:sldId id="266" r:id="rId12"/>
-    <p:sldId id="270" r:id="rId13"/>
-    <p:sldId id="267" r:id="rId14"/>
-    <p:sldId id="268" r:id="rId15"/>
-    <p:sldId id="269" r:id="rId16"/>
-    <p:sldId id="271" r:id="rId17"/>
-    <p:sldId id="272" r:id="rId18"/>
-    <p:sldId id="273" r:id="rId19"/>
-    <p:sldId id="274" r:id="rId20"/>
+    <p:sldId id="270" r:id="rId12"/>
+    <p:sldId id="267" r:id="rId13"/>
+    <p:sldId id="268" r:id="rId14"/>
+    <p:sldId id="269" r:id="rId15"/>
+    <p:sldId id="271" r:id="rId16"/>
+    <p:sldId id="272" r:id="rId17"/>
+    <p:sldId id="273" r:id="rId18"/>
+    <p:sldId id="274" r:id="rId19"/>
+    <p:sldId id="275" r:id="rId20"/>
+    <p:sldId id="276" r:id="rId21"/>
+    <p:sldId id="277" r:id="rId22"/>
+    <p:sldId id="278" r:id="rId23"/>
+    <p:sldId id="279" r:id="rId24"/>
+    <p:sldId id="280" r:id="rId25"/>
   </p:sldIdLst>
   <p:sldSz cx="12192000" cy="6858000"/>
   <p:notesSz cx="6858000" cy="9144000"/>
@@ -143,13 +148,16 @@
             <p14:sldId id="260"/>
           </p14:sldIdLst>
         </p14:section>
-        <p14:section name="MSA API 만들기" id="{34FEFEDD-7AED-47A0-81D4-4A9B2A57DF0C}">
+        <p14:section name="MSA 사용자 서비스 API 만들기" id="{34FEFEDD-7AED-47A0-81D4-4A9B2A57DF0C}">
           <p14:sldIdLst>
             <p14:sldId id="261"/>
             <p14:sldId id="263"/>
             <p14:sldId id="264"/>
             <p14:sldId id="265"/>
-            <p14:sldId id="266"/>
+          </p14:sldIdLst>
+        </p14:section>
+        <p14:section name="MSA 게시글 서비스 API 만들기" id="{1178D11F-0D34-480D-980C-2E59246F5768}">
+          <p14:sldIdLst>
             <p14:sldId id="270"/>
             <p14:sldId id="267"/>
             <p14:sldId id="268"/>
@@ -158,6 +166,16 @@
             <p14:sldId id="272"/>
             <p14:sldId id="273"/>
             <p14:sldId id="274"/>
+          </p14:sldIdLst>
+        </p14:section>
+        <p14:section name="장애 전파 막기" id="{33F5B103-6A0B-45BD-B485-E07DC9E12EC4}">
+          <p14:sldIdLst>
+            <p14:sldId id="275"/>
+            <p14:sldId id="276"/>
+            <p14:sldId id="277"/>
+            <p14:sldId id="278"/>
+            <p14:sldId id="279"/>
+            <p14:sldId id="280"/>
           </p14:sldIdLst>
         </p14:section>
       </p14:sectionLst>
@@ -4082,61 +4100,6 @@
   <p:cSld>
     <p:spTree>
       <p:nvGrpSpPr>
-        <p:cNvPr id="1" name=""/>
-        <p:cNvGrpSpPr/>
-        <p:nvPr/>
-      </p:nvGrpSpPr>
-      <p:grpSpPr>
-        <a:xfrm>
-          <a:off x="0" y="0"/>
-          <a:ext cx="0" cy="0"/>
-          <a:chOff x="0" y="0"/>
-          <a:chExt cx="0" cy="0"/>
-        </a:xfrm>
-      </p:grpSpPr>
-      <p:sp>
-        <p:nvSpPr>
-          <p:cNvPr id="2" name="제목 1">
-            <a:extLst>
-              <a:ext uri="{FF2B5EF4-FFF2-40B4-BE49-F238E27FC236}">
-                <a16:creationId xmlns:a16="http://schemas.microsoft.com/office/drawing/2014/main" id="{8D7AC34F-DDFF-4890-AC39-8615E49DF422}"/>
-              </a:ext>
-            </a:extLst>
-          </p:cNvPr>
-          <p:cNvSpPr>
-            <a:spLocks noGrp="1"/>
-          </p:cNvSpPr>
-          <p:nvPr>
-            <p:ph type="title"/>
-          </p:nvPr>
-        </p:nvSpPr>
-        <p:spPr/>
-        <p:txBody>
-          <a:bodyPr/>
-          <a:lstStyle/>
-          <a:p>
-            <a:endParaRPr lang="ko-KR" altLang="en-US"/>
-          </a:p>
-        </p:txBody>
-      </p:sp>
-    </p:spTree>
-    <p:extLst>
-      <p:ext uri="{BB962C8B-B14F-4D97-AF65-F5344CB8AC3E}">
-        <p14:creationId xmlns:p14="http://schemas.microsoft.com/office/powerpoint/2010/main" val="2149562697"/>
-      </p:ext>
-    </p:extLst>
-  </p:cSld>
-  <p:clrMapOvr>
-    <a:masterClrMapping/>
-  </p:clrMapOvr>
-</p:sld>
-</file>
-
-<file path=ppt/slides/slide12.xml><?xml version="1.0" encoding="utf-8"?>
-<p:sld xmlns:a="http://schemas.openxmlformats.org/drawingml/2006/main" xmlns:r="http://schemas.openxmlformats.org/officeDocument/2006/relationships" xmlns:p="http://schemas.openxmlformats.org/presentationml/2006/main">
-  <p:cSld>
-    <p:spTree>
-      <p:nvGrpSpPr>
         <p:cNvPr id="1" name="">
           <a:extLst>
             <a:ext uri="{FF2B5EF4-FFF2-40B4-BE49-F238E27FC236}">
@@ -5272,7 +5235,7 @@
 </p:sld>
 </file>
 
-<file path=ppt/slides/slide13.xml><?xml version="1.0" encoding="utf-8"?>
+<file path=ppt/slides/slide12.xml><?xml version="1.0" encoding="utf-8"?>
 <p:sld xmlns:a="http://schemas.openxmlformats.org/drawingml/2006/main" xmlns:r="http://schemas.openxmlformats.org/officeDocument/2006/relationships" xmlns:p="http://schemas.openxmlformats.org/presentationml/2006/main">
   <p:cSld>
     <p:spTree>
@@ -7256,7 +7219,7 @@
 </p:sld>
 </file>
 
-<file path=ppt/slides/slide14.xml><?xml version="1.0" encoding="utf-8"?>
+<file path=ppt/slides/slide13.xml><?xml version="1.0" encoding="utf-8"?>
 <p:sld xmlns:a="http://schemas.openxmlformats.org/drawingml/2006/main" xmlns:r="http://schemas.openxmlformats.org/officeDocument/2006/relationships" xmlns:p="http://schemas.openxmlformats.org/presentationml/2006/main">
   <p:cSld>
     <p:spTree>
@@ -8622,7 +8585,7 @@
 </p:sld>
 </file>
 
-<file path=ppt/slides/slide15.xml><?xml version="1.0" encoding="utf-8"?>
+<file path=ppt/slides/slide14.xml><?xml version="1.0" encoding="utf-8"?>
 <p:sld xmlns:a="http://schemas.openxmlformats.org/drawingml/2006/main" xmlns:r="http://schemas.openxmlformats.org/officeDocument/2006/relationships" xmlns:p="http://schemas.openxmlformats.org/presentationml/2006/main">
   <p:cSld>
     <p:spTree>
@@ -10387,7 +10350,7 @@
 </p:sld>
 </file>
 
-<file path=ppt/slides/slide16.xml><?xml version="1.0" encoding="utf-8"?>
+<file path=ppt/slides/slide15.xml><?xml version="1.0" encoding="utf-8"?>
 <p:sld xmlns:a="http://schemas.openxmlformats.org/drawingml/2006/main" xmlns:r="http://schemas.openxmlformats.org/officeDocument/2006/relationships" xmlns:p="http://schemas.openxmlformats.org/presentationml/2006/main">
   <p:cSld>
     <p:spTree>
@@ -12243,7 +12206,7 @@
 </p:sld>
 </file>
 
-<file path=ppt/slides/slide17.xml><?xml version="1.0" encoding="utf-8"?>
+<file path=ppt/slides/slide16.xml><?xml version="1.0" encoding="utf-8"?>
 <p:sld xmlns:a="http://schemas.openxmlformats.org/drawingml/2006/main" xmlns:r="http://schemas.openxmlformats.org/officeDocument/2006/relationships" xmlns:p="http://schemas.openxmlformats.org/presentationml/2006/main">
   <p:cSld>
     <p:spTree>
@@ -13826,7 +13789,7 @@
 </p:sld>
 </file>
 
-<file path=ppt/slides/slide18.xml><?xml version="1.0" encoding="utf-8"?>
+<file path=ppt/slides/slide17.xml><?xml version="1.0" encoding="utf-8"?>
 <p:sld xmlns:a="http://schemas.openxmlformats.org/drawingml/2006/main" xmlns:r="http://schemas.openxmlformats.org/officeDocument/2006/relationships" xmlns:p="http://schemas.openxmlformats.org/presentationml/2006/main">
   <p:cSld>
     <p:spTree>
@@ -14615,7 +14578,7 @@
 </p:sld>
 </file>
 
-<file path=ppt/slides/slide19.xml><?xml version="1.0" encoding="utf-8"?>
+<file path=ppt/slides/slide18.xml><?xml version="1.0" encoding="utf-8"?>
 <p:sld xmlns:a="http://schemas.openxmlformats.org/drawingml/2006/main" xmlns:r="http://schemas.openxmlformats.org/officeDocument/2006/relationships" xmlns:p="http://schemas.openxmlformats.org/presentationml/2006/main">
   <p:cSld>
     <p:spTree>
@@ -14741,6 +14704,314 @@
 </p:sld>
 </file>
 
+<file path=ppt/slides/slide19.xml><?xml version="1.0" encoding="utf-8"?>
+<p:sld xmlns:a="http://schemas.openxmlformats.org/drawingml/2006/main" xmlns:r="http://schemas.openxmlformats.org/officeDocument/2006/relationships" xmlns:p="http://schemas.openxmlformats.org/presentationml/2006/main">
+  <p:cSld>
+    <p:spTree>
+      <p:nvGrpSpPr>
+        <p:cNvPr id="1" name=""/>
+        <p:cNvGrpSpPr/>
+        <p:nvPr/>
+      </p:nvGrpSpPr>
+      <p:grpSpPr>
+        <a:xfrm>
+          <a:off x="0" y="0"/>
+          <a:ext cx="0" cy="0"/>
+          <a:chOff x="0" y="0"/>
+          <a:chExt cx="0" cy="0"/>
+        </a:xfrm>
+      </p:grpSpPr>
+      <p:sp>
+        <p:nvSpPr>
+          <p:cNvPr id="2" name="제목 1">
+            <a:extLst>
+              <a:ext uri="{FF2B5EF4-FFF2-40B4-BE49-F238E27FC236}">
+                <a16:creationId xmlns:a16="http://schemas.microsoft.com/office/drawing/2014/main" id="{8BAB5D47-A3FB-1A96-CE91-562BBB3C1ECB}"/>
+              </a:ext>
+            </a:extLst>
+          </p:cNvPr>
+          <p:cNvSpPr>
+            <a:spLocks noGrp="1"/>
+          </p:cNvSpPr>
+          <p:nvPr>
+            <p:ph type="title"/>
+          </p:nvPr>
+        </p:nvSpPr>
+        <p:spPr/>
+        <p:txBody>
+          <a:bodyPr/>
+          <a:lstStyle/>
+          <a:p>
+            <a:r>
+              <a:rPr lang="ko-KR" altLang="en-US"/>
+              <a:t>장애 전파 상황 예시</a:t>
+            </a:r>
+          </a:p>
+        </p:txBody>
+      </p:sp>
+      <p:pic>
+        <p:nvPicPr>
+          <p:cNvPr id="4" name="그림 3">
+            <a:extLst>
+              <a:ext uri="{FF2B5EF4-FFF2-40B4-BE49-F238E27FC236}">
+                <a16:creationId xmlns:a16="http://schemas.microsoft.com/office/drawing/2014/main" id="{24752F24-26F6-7F2B-54F4-BDEC32B08095}"/>
+              </a:ext>
+            </a:extLst>
+          </p:cNvPr>
+          <p:cNvPicPr>
+            <a:picLocks noChangeAspect="1"/>
+          </p:cNvPicPr>
+          <p:nvPr/>
+        </p:nvPicPr>
+        <p:blipFill>
+          <a:blip r:embed="rId2"/>
+          <a:stretch>
+            <a:fillRect/>
+          </a:stretch>
+        </p:blipFill>
+        <p:spPr>
+          <a:xfrm>
+            <a:off x="450366" y="2041609"/>
+            <a:ext cx="5372380" cy="2585255"/>
+          </a:xfrm>
+          <a:prstGeom prst="rect">
+            <a:avLst/>
+          </a:prstGeom>
+          <a:ln>
+            <a:solidFill>
+              <a:schemeClr val="tx1"/>
+            </a:solidFill>
+          </a:ln>
+        </p:spPr>
+      </p:pic>
+      <p:grpSp>
+        <p:nvGrpSpPr>
+          <p:cNvPr id="8" name="그룹 7">
+            <a:extLst>
+              <a:ext uri="{FF2B5EF4-FFF2-40B4-BE49-F238E27FC236}">
+                <a16:creationId xmlns:a16="http://schemas.microsoft.com/office/drawing/2014/main" id="{A382A503-8972-84E7-389F-5A43845AB5FC}"/>
+              </a:ext>
+            </a:extLst>
+          </p:cNvPr>
+          <p:cNvGrpSpPr/>
+          <p:nvPr/>
+        </p:nvGrpSpPr>
+        <p:grpSpPr>
+          <a:xfrm>
+            <a:off x="5988820" y="2041609"/>
+            <a:ext cx="5740144" cy="2969303"/>
+            <a:chOff x="5988820" y="2041609"/>
+            <a:chExt cx="5740144" cy="2969303"/>
+          </a:xfrm>
+        </p:grpSpPr>
+        <p:pic>
+          <p:nvPicPr>
+            <p:cNvPr id="6" name="그림 5">
+              <a:extLst>
+                <a:ext uri="{FF2B5EF4-FFF2-40B4-BE49-F238E27FC236}">
+                  <a16:creationId xmlns:a16="http://schemas.microsoft.com/office/drawing/2014/main" id="{BAF9B9DE-7DDC-AAA1-6DC3-F49169A19261}"/>
+                </a:ext>
+              </a:extLst>
+            </p:cNvPr>
+            <p:cNvPicPr>
+              <a:picLocks noChangeAspect="1"/>
+            </p:cNvPicPr>
+            <p:nvPr/>
+          </p:nvPicPr>
+          <p:blipFill>
+            <a:blip r:embed="rId3"/>
+            <a:stretch>
+              <a:fillRect/>
+            </a:stretch>
+          </p:blipFill>
+          <p:spPr>
+            <a:xfrm>
+              <a:off x="5988820" y="2041609"/>
+              <a:ext cx="5740144" cy="2969303"/>
+            </a:xfrm>
+            <a:prstGeom prst="rect">
+              <a:avLst/>
+            </a:prstGeom>
+          </p:spPr>
+        </p:pic>
+        <p:sp>
+          <p:nvSpPr>
+            <p:cNvPr id="7" name="직사각형 6">
+              <a:extLst>
+                <a:ext uri="{FF2B5EF4-FFF2-40B4-BE49-F238E27FC236}">
+                  <a16:creationId xmlns:a16="http://schemas.microsoft.com/office/drawing/2014/main" id="{350CBF8C-85E8-AEF3-0FE1-8EF5ED713466}"/>
+                </a:ext>
+              </a:extLst>
+            </p:cNvPr>
+            <p:cNvSpPr/>
+            <p:nvPr/>
+          </p:nvSpPr>
+          <p:spPr>
+            <a:xfrm>
+              <a:off x="9262872" y="3429000"/>
+              <a:ext cx="1892808" cy="512064"/>
+            </a:xfrm>
+            <a:prstGeom prst="rect">
+              <a:avLst/>
+            </a:prstGeom>
+          </p:spPr>
+          <p:style>
+            <a:lnRef idx="2">
+              <a:schemeClr val="accent1">
+                <a:shade val="15000"/>
+              </a:schemeClr>
+            </a:lnRef>
+            <a:fillRef idx="1">
+              <a:schemeClr val="accent1"/>
+            </a:fillRef>
+            <a:effectRef idx="0">
+              <a:schemeClr val="accent1"/>
+            </a:effectRef>
+            <a:fontRef idx="minor">
+              <a:schemeClr val="lt1"/>
+            </a:fontRef>
+          </p:style>
+          <p:txBody>
+            <a:bodyPr rtlCol="0" anchor="ctr"/>
+            <a:lstStyle/>
+            <a:p>
+              <a:pPr algn="ctr"/>
+              <a:r>
+                <a:rPr lang="en-US" altLang="ko-KR"/>
+                <a:t>BoardService</a:t>
+              </a:r>
+              <a:endParaRPr lang="ko-KR" altLang="en-US"/>
+            </a:p>
+          </p:txBody>
+        </p:sp>
+      </p:grpSp>
+      <p:sp>
+        <p:nvSpPr>
+          <p:cNvPr id="9" name="TextBox 8">
+            <a:extLst>
+              <a:ext uri="{FF2B5EF4-FFF2-40B4-BE49-F238E27FC236}">
+                <a16:creationId xmlns:a16="http://schemas.microsoft.com/office/drawing/2014/main" id="{52EEF4F3-BF92-8CBD-19A0-741BFAECB06C}"/>
+              </a:ext>
+            </a:extLst>
+          </p:cNvPr>
+          <p:cNvSpPr txBox="1"/>
+          <p:nvPr/>
+        </p:nvSpPr>
+        <p:spPr>
+          <a:xfrm>
+            <a:off x="450366" y="5221224"/>
+            <a:ext cx="11278598" cy="738664"/>
+          </a:xfrm>
+          <a:prstGeom prst="rect">
+            <a:avLst/>
+          </a:prstGeom>
+          <a:noFill/>
+        </p:spPr>
+        <p:txBody>
+          <a:bodyPr wrap="square" rtlCol="0">
+            <a:spAutoFit/>
+          </a:bodyPr>
+          <a:lstStyle/>
+          <a:p>
+            <a:r>
+              <a:rPr lang="en-US" altLang="ko-KR" sz="1400"/>
+              <a:t>boardService </a:t>
+            </a:r>
+            <a:r>
+              <a:rPr lang="ko-KR" altLang="en-US" sz="1400"/>
+              <a:t>의 </a:t>
+            </a:r>
+            <a:r>
+              <a:rPr lang="en-US" altLang="ko-KR" sz="1400"/>
+              <a:t>getBoard</a:t>
+            </a:r>
+            <a:r>
+              <a:rPr lang="ko-KR" altLang="en-US" sz="1400"/>
+              <a:t>메소드에서 </a:t>
+            </a:r>
+            <a:r>
+              <a:rPr lang="en-US" altLang="ko-KR" sz="1400"/>
+              <a:t>UserResponseDto </a:t>
+            </a:r>
+            <a:r>
+              <a:rPr lang="ko-KR" altLang="en-US" sz="1400"/>
+              <a:t>정보를 받아오기 위해 </a:t>
+            </a:r>
+            <a:r>
+              <a:rPr lang="en-US" altLang="ko-KR" sz="1400"/>
+              <a:t>user-servic</a:t>
+            </a:r>
+            <a:r>
+              <a:rPr lang="ko-KR" altLang="en-US" sz="1400"/>
+              <a:t>와 통신한다</a:t>
+            </a:r>
+            <a:r>
+              <a:rPr lang="en-US" altLang="ko-KR" sz="1400"/>
+              <a:t>. </a:t>
+            </a:r>
+            <a:br>
+              <a:rPr lang="en-US" altLang="ko-KR" sz="1400"/>
+            </a:br>
+            <a:r>
+              <a:rPr lang="ko-KR" altLang="en-US" sz="1400"/>
+              <a:t>그러나 사용자 서비스가 죽어있는 경우라면</a:t>
+            </a:r>
+            <a:r>
+              <a:rPr lang="en-US" altLang="ko-KR" sz="1400"/>
+              <a:t>, </a:t>
+            </a:r>
+            <a:r>
+              <a:rPr lang="ko-KR" altLang="en-US" sz="1400"/>
+              <a:t>서버는 </a:t>
+            </a:r>
+            <a:r>
+              <a:rPr lang="en-US" altLang="ko-KR" sz="1400"/>
+              <a:t>UserResponseDto</a:t>
+            </a:r>
+            <a:r>
+              <a:rPr lang="ko-KR" altLang="en-US" sz="1400"/>
+              <a:t>를 받지 못할것이고 </a:t>
+            </a:r>
+            <a:r>
+              <a:rPr lang="en-US" altLang="ko-KR" sz="1400"/>
+              <a:t>Internal Server Error</a:t>
+            </a:r>
+            <a:r>
+              <a:rPr lang="ko-KR" altLang="en-US" sz="1400"/>
+              <a:t>를 발생시킬 것이다</a:t>
+            </a:r>
+            <a:r>
+              <a:rPr lang="en-US" altLang="ko-KR" sz="1400"/>
+              <a:t>. </a:t>
+            </a:r>
+            <a:r>
+              <a:rPr lang="ko-KR" altLang="en-US" sz="1400"/>
+              <a:t>이를 해결할 두 가지 대안이있다</a:t>
+            </a:r>
+            <a:r>
+              <a:rPr lang="en-US" altLang="ko-KR" sz="1400"/>
+              <a:t>.</a:t>
+            </a:r>
+            <a:r>
+              <a:rPr lang="ko-KR" altLang="en-US" sz="1400"/>
+              <a:t> </a:t>
+            </a:r>
+          </a:p>
+        </p:txBody>
+      </p:sp>
+    </p:spTree>
+    <p:extLst>
+      <p:ext uri="{BB962C8B-B14F-4D97-AF65-F5344CB8AC3E}">
+        <p14:creationId xmlns:p14="http://schemas.microsoft.com/office/powerpoint/2010/main" val="334858634"/>
+      </p:ext>
+    </p:extLst>
+  </p:cSld>
+  <p:clrMapOvr>
+    <a:masterClrMapping/>
+  </p:clrMapOvr>
+</p:sld>
+</file>
+
 <file path=ppt/slides/slide2.xml><?xml version="1.0" encoding="utf-8"?>
 <p:sld xmlns:a="http://schemas.openxmlformats.org/drawingml/2006/main" xmlns:r="http://schemas.openxmlformats.org/officeDocument/2006/relationships" xmlns:p="http://schemas.openxmlformats.org/presentationml/2006/main">
   <p:cSld>
@@ -14866,6 +15137,3648 @@
     <p:extLst>
       <p:ext uri="{BB962C8B-B14F-4D97-AF65-F5344CB8AC3E}">
         <p14:creationId xmlns:p14="http://schemas.microsoft.com/office/powerpoint/2010/main" val="1870506618"/>
+      </p:ext>
+    </p:extLst>
+  </p:cSld>
+  <p:clrMapOvr>
+    <a:masterClrMapping/>
+  </p:clrMapOvr>
+</p:sld>
+</file>
+
+<file path=ppt/slides/slide20.xml><?xml version="1.0" encoding="utf-8"?>
+<p:sld xmlns:a="http://schemas.openxmlformats.org/drawingml/2006/main" xmlns:r="http://schemas.openxmlformats.org/officeDocument/2006/relationships" xmlns:p="http://schemas.openxmlformats.org/presentationml/2006/main">
+  <p:cSld>
+    <p:spTree>
+      <p:nvGrpSpPr>
+        <p:cNvPr id="1" name=""/>
+        <p:cNvGrpSpPr/>
+        <p:nvPr/>
+      </p:nvGrpSpPr>
+      <p:grpSpPr>
+        <a:xfrm>
+          <a:off x="0" y="0"/>
+          <a:ext cx="0" cy="0"/>
+          <a:chOff x="0" y="0"/>
+          <a:chExt cx="0" cy="0"/>
+        </a:xfrm>
+      </p:grpSpPr>
+      <p:sp>
+        <p:nvSpPr>
+          <p:cNvPr id="2" name="제목 1">
+            <a:extLst>
+              <a:ext uri="{FF2B5EF4-FFF2-40B4-BE49-F238E27FC236}">
+                <a16:creationId xmlns:a16="http://schemas.microsoft.com/office/drawing/2014/main" id="{1AA49E69-9A97-FDDC-42D3-68A7ECC709F2}"/>
+              </a:ext>
+            </a:extLst>
+          </p:cNvPr>
+          <p:cNvSpPr>
+            <a:spLocks noGrp="1"/>
+          </p:cNvSpPr>
+          <p:nvPr>
+            <p:ph type="title"/>
+          </p:nvPr>
+        </p:nvSpPr>
+        <p:spPr/>
+        <p:txBody>
+          <a:bodyPr/>
+          <a:lstStyle/>
+          <a:p>
+            <a:r>
+              <a:rPr lang="ko-KR" altLang="en-US"/>
+              <a:t>장애 전파 방지 대안</a:t>
+            </a:r>
+            <a:r>
+              <a:rPr lang="en-US" altLang="ko-KR"/>
+              <a:t>1</a:t>
+            </a:r>
+            <a:endParaRPr lang="ko-KR" altLang="en-US"/>
+          </a:p>
+        </p:txBody>
+      </p:sp>
+      <p:pic>
+        <p:nvPicPr>
+          <p:cNvPr id="4" name="그림 3">
+            <a:extLst>
+              <a:ext uri="{FF2B5EF4-FFF2-40B4-BE49-F238E27FC236}">
+                <a16:creationId xmlns:a16="http://schemas.microsoft.com/office/drawing/2014/main" id="{9C41D913-A722-9E3D-500F-0329137C602A}"/>
+              </a:ext>
+            </a:extLst>
+          </p:cNvPr>
+          <p:cNvPicPr>
+            <a:picLocks noChangeAspect="1"/>
+          </p:cNvPicPr>
+          <p:nvPr/>
+        </p:nvPicPr>
+        <p:blipFill>
+          <a:blip r:embed="rId2"/>
+          <a:stretch>
+            <a:fillRect/>
+          </a:stretch>
+        </p:blipFill>
+        <p:spPr>
+          <a:xfrm>
+            <a:off x="1097280" y="2053449"/>
+            <a:ext cx="2011680" cy="2187058"/>
+          </a:xfrm>
+          <a:prstGeom prst="rect">
+            <a:avLst/>
+          </a:prstGeom>
+        </p:spPr>
+      </p:pic>
+      <p:sp>
+        <p:nvSpPr>
+          <p:cNvPr id="6" name="TextBox 5">
+            <a:extLst>
+              <a:ext uri="{FF2B5EF4-FFF2-40B4-BE49-F238E27FC236}">
+                <a16:creationId xmlns:a16="http://schemas.microsoft.com/office/drawing/2014/main" id="{24168FFB-A0CB-3927-6E53-BCFAF45139D9}"/>
+              </a:ext>
+            </a:extLst>
+          </p:cNvPr>
+          <p:cNvSpPr txBox="1"/>
+          <p:nvPr/>
+        </p:nvSpPr>
+        <p:spPr>
+          <a:xfrm>
+            <a:off x="3257550" y="2062593"/>
+            <a:ext cx="8099298" cy="1200329"/>
+          </a:xfrm>
+          <a:prstGeom prst="rect">
+            <a:avLst/>
+          </a:prstGeom>
+          <a:noFill/>
+        </p:spPr>
+        <p:txBody>
+          <a:bodyPr wrap="square">
+            <a:spAutoFit/>
+          </a:bodyPr>
+          <a:lstStyle/>
+          <a:p>
+            <a:pPr marL="228600" indent="-228600">
+              <a:buAutoNum type="arabicPeriod"/>
+            </a:pPr>
+            <a:r>
+              <a:rPr lang="ko-KR" altLang="en-US" sz="1200"/>
+              <a:t>장애가 난 서비스로부터 받아와야 하는 정보는 응답하지 않는 방법</a:t>
+            </a:r>
+            <a:endParaRPr lang="en-US" altLang="ko-KR" sz="1200"/>
+          </a:p>
+          <a:p>
+            <a:pPr marL="228600" indent="-228600">
+              <a:buFontTx/>
+              <a:buAutoNum type="arabicPeriod"/>
+            </a:pPr>
+            <a:r>
+              <a:rPr lang="ko-KR" altLang="en-US" sz="1200"/>
+              <a:t>사용자 정보를 필수로 보내지 않아도 </a:t>
+            </a:r>
+            <a:r>
+              <a:rPr lang="en-US" altLang="ko-KR" sz="1200"/>
+              <a:t>, </a:t>
+            </a:r>
+            <a:r>
+              <a:rPr lang="ko-KR" altLang="en-US" sz="1200"/>
+              <a:t>서비스 로직상 큰 문제가 안 되는 </a:t>
+            </a:r>
+            <a:r>
+              <a:rPr lang="en-US" altLang="ko-KR" sz="1200"/>
+              <a:t>API </a:t>
+            </a:r>
+            <a:r>
+              <a:rPr lang="ko-KR" altLang="en-US" sz="1200"/>
+              <a:t>일 경우에 자주 사용하는 처리 방법이다 </a:t>
+            </a:r>
+            <a:r>
+              <a:rPr lang="en-US" altLang="ko-KR" sz="1200"/>
+              <a:t>.</a:t>
+            </a:r>
+          </a:p>
+          <a:p>
+            <a:pPr marL="228600" indent="-228600">
+              <a:buFontTx/>
+              <a:buAutoNum type="arabicPeriod"/>
+            </a:pPr>
+            <a:r>
+              <a:rPr lang="ko-KR" altLang="en-US" sz="1200"/>
+              <a:t>정상적으로 응답할 수 있는 값만 사용자한테 응답하면 된다 </a:t>
+            </a:r>
+            <a:r>
+              <a:rPr lang="en-US" altLang="ko-KR" sz="1200"/>
+              <a:t>.</a:t>
+            </a:r>
+          </a:p>
+          <a:p>
+            <a:pPr marL="228600" indent="-228600">
+              <a:buAutoNum type="arabicPeriod"/>
+            </a:pPr>
+            <a:endParaRPr lang="en-US" altLang="ko-KR" sz="1200"/>
+          </a:p>
+          <a:p>
+            <a:pPr marL="228600" indent="-228600">
+              <a:buAutoNum type="arabicPeriod"/>
+            </a:pPr>
+            <a:endParaRPr lang="en-US" altLang="ko-KR" sz="1200"/>
+          </a:p>
+          <a:p>
+            <a:endParaRPr lang="ko-KR" altLang="en-US" sz="1200"/>
+          </a:p>
+        </p:txBody>
+      </p:sp>
+    </p:spTree>
+    <p:extLst>
+      <p:ext uri="{BB962C8B-B14F-4D97-AF65-F5344CB8AC3E}">
+        <p14:creationId xmlns:p14="http://schemas.microsoft.com/office/powerpoint/2010/main" val="1379021396"/>
+      </p:ext>
+    </p:extLst>
+  </p:cSld>
+  <p:clrMapOvr>
+    <a:masterClrMapping/>
+  </p:clrMapOvr>
+</p:sld>
+</file>
+
+<file path=ppt/slides/slide21.xml><?xml version="1.0" encoding="utf-8"?>
+<p:sld xmlns:a="http://schemas.openxmlformats.org/drawingml/2006/main" xmlns:r="http://schemas.openxmlformats.org/officeDocument/2006/relationships" xmlns:p="http://schemas.openxmlformats.org/presentationml/2006/main">
+  <p:cSld>
+    <p:spTree>
+      <p:nvGrpSpPr>
+        <p:cNvPr id="1" name="">
+          <a:extLst>
+            <a:ext uri="{FF2B5EF4-FFF2-40B4-BE49-F238E27FC236}">
+              <a16:creationId xmlns:a16="http://schemas.microsoft.com/office/drawing/2014/main" id="{46FBCD8E-62F7-DF1F-46C3-E43B6F72861D}"/>
+            </a:ext>
+          </a:extLst>
+        </p:cNvPr>
+        <p:cNvGrpSpPr/>
+        <p:nvPr/>
+      </p:nvGrpSpPr>
+      <p:grpSpPr>
+        <a:xfrm>
+          <a:off x="0" y="0"/>
+          <a:ext cx="0" cy="0"/>
+          <a:chOff x="0" y="0"/>
+          <a:chExt cx="0" cy="0"/>
+        </a:xfrm>
+      </p:grpSpPr>
+      <p:sp>
+        <p:nvSpPr>
+          <p:cNvPr id="2" name="제목 1">
+            <a:extLst>
+              <a:ext uri="{FF2B5EF4-FFF2-40B4-BE49-F238E27FC236}">
+                <a16:creationId xmlns:a16="http://schemas.microsoft.com/office/drawing/2014/main" id="{712B8F96-8758-FA7D-E231-884D5138509F}"/>
+              </a:ext>
+            </a:extLst>
+          </p:cNvPr>
+          <p:cNvSpPr>
+            <a:spLocks noGrp="1"/>
+          </p:cNvSpPr>
+          <p:nvPr>
+            <p:ph type="title"/>
+          </p:nvPr>
+        </p:nvSpPr>
+        <p:spPr/>
+        <p:txBody>
+          <a:bodyPr/>
+          <a:lstStyle/>
+          <a:p>
+            <a:r>
+              <a:rPr lang="ko-KR" altLang="en-US"/>
+              <a:t>장애 전파 방지 대안</a:t>
+            </a:r>
+            <a:r>
+              <a:rPr lang="en-US" altLang="ko-KR"/>
+              <a:t>2</a:t>
+            </a:r>
+            <a:endParaRPr lang="ko-KR" altLang="en-US"/>
+          </a:p>
+        </p:txBody>
+      </p:sp>
+      <p:sp>
+        <p:nvSpPr>
+          <p:cNvPr id="6" name="TextBox 5">
+            <a:extLst>
+              <a:ext uri="{FF2B5EF4-FFF2-40B4-BE49-F238E27FC236}">
+                <a16:creationId xmlns:a16="http://schemas.microsoft.com/office/drawing/2014/main" id="{C5D2DB4D-D309-C457-9A72-E1F328DC7650}"/>
+              </a:ext>
+            </a:extLst>
+          </p:cNvPr>
+          <p:cNvSpPr txBox="1"/>
+          <p:nvPr/>
+        </p:nvSpPr>
+        <p:spPr>
+          <a:xfrm>
+            <a:off x="798576" y="3602002"/>
+            <a:ext cx="8099298" cy="1015663"/>
+          </a:xfrm>
+          <a:prstGeom prst="rect">
+            <a:avLst/>
+          </a:prstGeom>
+          <a:noFill/>
+        </p:spPr>
+        <p:txBody>
+          <a:bodyPr wrap="square">
+            <a:spAutoFit/>
+          </a:bodyPr>
+          <a:lstStyle/>
+          <a:p>
+            <a:pPr marL="228600" indent="-228600">
+              <a:buAutoNum type="arabicPeriod"/>
+            </a:pPr>
+            <a:r>
+              <a:rPr lang="ko-KR" altLang="en-US" sz="1200"/>
+              <a:t>장애가 난 서비스에 대한 메세지를 작성하여 전달</a:t>
+            </a:r>
+            <a:r>
+              <a:rPr lang="en-US" altLang="ko-KR" sz="1200"/>
+              <a:t>.</a:t>
+            </a:r>
+          </a:p>
+          <a:p>
+            <a:pPr marL="228600" indent="-228600">
+              <a:buAutoNum type="arabicPeriod"/>
+            </a:pPr>
+            <a:r>
+              <a:rPr lang="ko-KR" altLang="en-US" sz="1200"/>
+              <a:t>장애가 난 서비스의 정보를 함께 제공하지 않으면 큰 일이 벌어지는 서비스에서는 에러를 안내해야한다</a:t>
+            </a:r>
+            <a:r>
+              <a:rPr lang="en-US" altLang="ko-KR" sz="1200"/>
+              <a:t>.</a:t>
+            </a:r>
+          </a:p>
+          <a:p>
+            <a:pPr marL="228600" indent="-228600">
+              <a:buAutoNum type="arabicPeriod"/>
+            </a:pPr>
+            <a:endParaRPr lang="en-US" altLang="ko-KR" sz="1200"/>
+          </a:p>
+          <a:p>
+            <a:pPr marL="228600" indent="-228600">
+              <a:buAutoNum type="arabicPeriod"/>
+            </a:pPr>
+            <a:endParaRPr lang="en-US" altLang="ko-KR" sz="1200"/>
+          </a:p>
+          <a:p>
+            <a:endParaRPr lang="ko-KR" altLang="en-US" sz="1200"/>
+          </a:p>
+        </p:txBody>
+      </p:sp>
+      <p:pic>
+        <p:nvPicPr>
+          <p:cNvPr id="5" name="그림 4">
+            <a:extLst>
+              <a:ext uri="{FF2B5EF4-FFF2-40B4-BE49-F238E27FC236}">
+                <a16:creationId xmlns:a16="http://schemas.microsoft.com/office/drawing/2014/main" id="{74B1F6B9-3D8D-DF10-B97B-ADD093E90D71}"/>
+              </a:ext>
+            </a:extLst>
+          </p:cNvPr>
+          <p:cNvPicPr>
+            <a:picLocks noChangeAspect="1"/>
+          </p:cNvPicPr>
+          <p:nvPr/>
+        </p:nvPicPr>
+        <p:blipFill>
+          <a:blip r:embed="rId2"/>
+          <a:stretch>
+            <a:fillRect/>
+          </a:stretch>
+        </p:blipFill>
+        <p:spPr>
+          <a:xfrm>
+            <a:off x="798576" y="1883759"/>
+            <a:ext cx="6849431" cy="1571844"/>
+          </a:xfrm>
+          <a:prstGeom prst="rect">
+            <a:avLst/>
+          </a:prstGeom>
+        </p:spPr>
+      </p:pic>
+    </p:spTree>
+    <p:extLst>
+      <p:ext uri="{BB962C8B-B14F-4D97-AF65-F5344CB8AC3E}">
+        <p14:creationId xmlns:p14="http://schemas.microsoft.com/office/powerpoint/2010/main" val="1493554559"/>
+      </p:ext>
+    </p:extLst>
+  </p:cSld>
+  <p:clrMapOvr>
+    <a:masterClrMapping/>
+  </p:clrMapOvr>
+</p:sld>
+</file>
+
+<file path=ppt/slides/slide22.xml><?xml version="1.0" encoding="utf-8"?>
+<p:sld xmlns:a="http://schemas.openxmlformats.org/drawingml/2006/main" xmlns:r="http://schemas.openxmlformats.org/officeDocument/2006/relationships" xmlns:p="http://schemas.openxmlformats.org/presentationml/2006/main">
+  <p:cSld>
+    <p:spTree>
+      <p:nvGrpSpPr>
+        <p:cNvPr id="1" name=""/>
+        <p:cNvGrpSpPr/>
+        <p:nvPr/>
+      </p:nvGrpSpPr>
+      <p:grpSpPr>
+        <a:xfrm>
+          <a:off x="0" y="0"/>
+          <a:ext cx="0" cy="0"/>
+          <a:chOff x="0" y="0"/>
+          <a:chExt cx="0" cy="0"/>
+        </a:xfrm>
+      </p:grpSpPr>
+      <p:sp>
+        <p:nvSpPr>
+          <p:cNvPr id="2" name="제목 1">
+            <a:extLst>
+              <a:ext uri="{FF2B5EF4-FFF2-40B4-BE49-F238E27FC236}">
+                <a16:creationId xmlns:a16="http://schemas.microsoft.com/office/drawing/2014/main" id="{9FE2EF00-CA7E-A961-BDB7-82F0AB5789CB}"/>
+              </a:ext>
+            </a:extLst>
+          </p:cNvPr>
+          <p:cNvSpPr>
+            <a:spLocks noGrp="1"/>
+          </p:cNvSpPr>
+          <p:nvPr>
+            <p:ph type="title"/>
+          </p:nvPr>
+        </p:nvSpPr>
+        <p:spPr/>
+        <p:txBody>
+          <a:bodyPr/>
+          <a:lstStyle/>
+          <a:p>
+            <a:r>
+              <a:rPr lang="ko-KR" altLang="en-US"/>
+              <a:t>장애 전파 방지 대안</a:t>
+            </a:r>
+            <a:r>
+              <a:rPr lang="en-US" altLang="ko-KR"/>
+              <a:t>1 </a:t>
+            </a:r>
+            <a:r>
+              <a:rPr lang="ko-KR" altLang="en-US"/>
+              <a:t>코드 작성</a:t>
+            </a:r>
+            <a:r>
+              <a:rPr lang="en-US" altLang="ko-KR"/>
+              <a:t>(1)</a:t>
+            </a:r>
+            <a:endParaRPr lang="ko-KR" altLang="en-US"/>
+          </a:p>
+        </p:txBody>
+      </p:sp>
+      <p:sp>
+        <p:nvSpPr>
+          <p:cNvPr id="6" name="TextBox 5">
+            <a:extLst>
+              <a:ext uri="{FF2B5EF4-FFF2-40B4-BE49-F238E27FC236}">
+                <a16:creationId xmlns:a16="http://schemas.microsoft.com/office/drawing/2014/main" id="{0D942522-35E4-E880-1FF4-7EDEF5E9EA1D}"/>
+              </a:ext>
+            </a:extLst>
+          </p:cNvPr>
+          <p:cNvSpPr txBox="1"/>
+          <p:nvPr/>
+        </p:nvSpPr>
+        <p:spPr>
+          <a:xfrm>
+            <a:off x="3440430" y="1926437"/>
+            <a:ext cx="6094476" cy="2785378"/>
+          </a:xfrm>
+          <a:prstGeom prst="rect">
+            <a:avLst/>
+          </a:prstGeom>
+          <a:solidFill>
+            <a:schemeClr val="tx1"/>
+          </a:solidFill>
+        </p:spPr>
+        <p:txBody>
+          <a:bodyPr wrap="square">
+            <a:spAutoFit/>
+          </a:bodyPr>
+          <a:lstStyle/>
+          <a:p>
+            <a:pPr>
+              <a:lnSpc>
+                <a:spcPts val="1425"/>
+              </a:lnSpc>
+              <a:buNone/>
+            </a:pPr>
+            <a:r>
+              <a:rPr lang="en-US" altLang="ko-KR" sz="1200" b="0">
+                <a:solidFill>
+                  <a:srgbClr val="BBBEBF"/>
+                </a:solidFill>
+                <a:effectLst/>
+                <a:latin typeface="Consolas" panose="020B0609020204030204" pitchFamily="49" charset="0"/>
+              </a:rPr>
+              <a:t>    </a:t>
+            </a:r>
+            <a:r>
+              <a:rPr lang="en-US" altLang="ko-KR" sz="1200" b="0">
+                <a:solidFill>
+                  <a:srgbClr val="569CD6"/>
+                </a:solidFill>
+                <a:effectLst/>
+                <a:latin typeface="Consolas" panose="020B0609020204030204" pitchFamily="49" charset="0"/>
+              </a:rPr>
+              <a:t>public</a:t>
+            </a:r>
+            <a:r>
+              <a:rPr lang="en-US" altLang="ko-KR" sz="1200" b="0">
+                <a:solidFill>
+                  <a:srgbClr val="BBBEBF"/>
+                </a:solidFill>
+                <a:effectLst/>
+                <a:latin typeface="Consolas" panose="020B0609020204030204" pitchFamily="49" charset="0"/>
+              </a:rPr>
+              <a:t> </a:t>
+            </a:r>
+            <a:r>
+              <a:rPr lang="en-US" altLang="ko-KR" sz="1200" b="0">
+                <a:solidFill>
+                  <a:srgbClr val="4EC9B0"/>
+                </a:solidFill>
+                <a:effectLst/>
+                <a:latin typeface="Consolas" panose="020B0609020204030204" pitchFamily="49" charset="0"/>
+              </a:rPr>
+              <a:t>Optional</a:t>
+            </a:r>
+            <a:r>
+              <a:rPr lang="en-US" altLang="ko-KR" sz="1200" b="0">
+                <a:solidFill>
+                  <a:srgbClr val="BBBEBF"/>
+                </a:solidFill>
+                <a:effectLst/>
+                <a:latin typeface="Consolas" panose="020B0609020204030204" pitchFamily="49" charset="0"/>
+              </a:rPr>
+              <a:t>&lt;</a:t>
+            </a:r>
+            <a:r>
+              <a:rPr lang="en-US" altLang="ko-KR" sz="1200" b="0">
+                <a:solidFill>
+                  <a:srgbClr val="4EC9B0"/>
+                </a:solidFill>
+                <a:effectLst/>
+                <a:latin typeface="Consolas" panose="020B0609020204030204" pitchFamily="49" charset="0"/>
+              </a:rPr>
+              <a:t>UserResponseDto</a:t>
+            </a:r>
+            <a:r>
+              <a:rPr lang="en-US" altLang="ko-KR" sz="1200" b="0">
+                <a:solidFill>
+                  <a:srgbClr val="BBBEBF"/>
+                </a:solidFill>
+                <a:effectLst/>
+                <a:latin typeface="Consolas" panose="020B0609020204030204" pitchFamily="49" charset="0"/>
+              </a:rPr>
+              <a:t>&gt; </a:t>
+            </a:r>
+            <a:r>
+              <a:rPr lang="en-US" altLang="ko-KR" sz="1200" b="0">
+                <a:solidFill>
+                  <a:srgbClr val="D2A8FF"/>
+                </a:solidFill>
+                <a:effectLst/>
+                <a:latin typeface="Consolas" panose="020B0609020204030204" pitchFamily="49" charset="0"/>
+              </a:rPr>
+              <a:t>findById</a:t>
+            </a:r>
+            <a:r>
+              <a:rPr lang="en-US" altLang="ko-KR" sz="1200" b="0">
+                <a:solidFill>
+                  <a:srgbClr val="BBBEBF"/>
+                </a:solidFill>
+                <a:effectLst/>
+                <a:latin typeface="Consolas" panose="020B0609020204030204" pitchFamily="49" charset="0"/>
+              </a:rPr>
+              <a:t>(</a:t>
+            </a:r>
+            <a:r>
+              <a:rPr lang="en-US" altLang="ko-KR" sz="1200" b="0">
+                <a:solidFill>
+                  <a:srgbClr val="4EC9B0"/>
+                </a:solidFill>
+                <a:effectLst/>
+                <a:latin typeface="Consolas" panose="020B0609020204030204" pitchFamily="49" charset="0"/>
+              </a:rPr>
+              <a:t>Long</a:t>
+            </a:r>
+            <a:r>
+              <a:rPr lang="en-US" altLang="ko-KR" sz="1200" b="0">
+                <a:solidFill>
+                  <a:srgbClr val="BBBEBF"/>
+                </a:solidFill>
+                <a:effectLst/>
+                <a:latin typeface="Consolas" panose="020B0609020204030204" pitchFamily="49" charset="0"/>
+              </a:rPr>
+              <a:t> </a:t>
+            </a:r>
+            <a:r>
+              <a:rPr lang="en-US" altLang="ko-KR" sz="1200" b="0">
+                <a:solidFill>
+                  <a:srgbClr val="FFA657"/>
+                </a:solidFill>
+                <a:effectLst/>
+                <a:latin typeface="Consolas" panose="020B0609020204030204" pitchFamily="49" charset="0"/>
+              </a:rPr>
+              <a:t>userId</a:t>
+            </a:r>
+            <a:r>
+              <a:rPr lang="en-US" altLang="ko-KR" sz="1200" b="0">
+                <a:solidFill>
+                  <a:srgbClr val="BBBEBF"/>
+                </a:solidFill>
+                <a:effectLst/>
+                <a:latin typeface="Consolas" panose="020B0609020204030204" pitchFamily="49" charset="0"/>
+              </a:rPr>
+              <a:t>) {</a:t>
+            </a:r>
+          </a:p>
+          <a:p>
+            <a:pPr>
+              <a:lnSpc>
+                <a:spcPts val="1425"/>
+              </a:lnSpc>
+              <a:buNone/>
+            </a:pPr>
+            <a:r>
+              <a:rPr lang="en-US" altLang="ko-KR" sz="1200" b="0">
+                <a:solidFill>
+                  <a:srgbClr val="BBBEBF"/>
+                </a:solidFill>
+                <a:effectLst/>
+                <a:latin typeface="Consolas" panose="020B0609020204030204" pitchFamily="49" charset="0"/>
+              </a:rPr>
+              <a:t>        </a:t>
+            </a:r>
+            <a:r>
+              <a:rPr lang="en-US" altLang="ko-KR" sz="1200" b="0">
+                <a:solidFill>
+                  <a:srgbClr val="C586C0"/>
+                </a:solidFill>
+                <a:effectLst/>
+                <a:latin typeface="Consolas" panose="020B0609020204030204" pitchFamily="49" charset="0"/>
+              </a:rPr>
+              <a:t>try</a:t>
+            </a:r>
+            <a:r>
+              <a:rPr lang="en-US" altLang="ko-KR" sz="1200" b="0">
+                <a:solidFill>
+                  <a:srgbClr val="BBBEBF"/>
+                </a:solidFill>
+                <a:effectLst/>
+                <a:latin typeface="Consolas" panose="020B0609020204030204" pitchFamily="49" charset="0"/>
+              </a:rPr>
+              <a:t>{</a:t>
+            </a:r>
+          </a:p>
+          <a:p>
+            <a:pPr>
+              <a:lnSpc>
+                <a:spcPts val="1425"/>
+              </a:lnSpc>
+              <a:buNone/>
+            </a:pPr>
+            <a:r>
+              <a:rPr lang="en-US" altLang="ko-KR" sz="1200" b="0">
+                <a:solidFill>
+                  <a:srgbClr val="BBBEBF"/>
+                </a:solidFill>
+                <a:effectLst/>
+                <a:latin typeface="Consolas" panose="020B0609020204030204" pitchFamily="49" charset="0"/>
+              </a:rPr>
+              <a:t>            </a:t>
+            </a:r>
+            <a:r>
+              <a:rPr lang="en-US" altLang="ko-KR" sz="1200" b="0">
+                <a:solidFill>
+                  <a:srgbClr val="4EC9B0"/>
+                </a:solidFill>
+                <a:effectLst/>
+                <a:latin typeface="Consolas" panose="020B0609020204030204" pitchFamily="49" charset="0"/>
+              </a:rPr>
+              <a:t>UserResponseDto</a:t>
+            </a:r>
+            <a:r>
+              <a:rPr lang="en-US" altLang="ko-KR" sz="1200" b="0">
+                <a:solidFill>
+                  <a:srgbClr val="FFA657"/>
+                </a:solidFill>
+                <a:effectLst/>
+                <a:latin typeface="Consolas" panose="020B0609020204030204" pitchFamily="49" charset="0"/>
+              </a:rPr>
+              <a:t> </a:t>
+            </a:r>
+            <a:r>
+              <a:rPr lang="en-US" altLang="ko-KR" sz="1200" b="0">
+                <a:solidFill>
+                  <a:srgbClr val="C9D1D9"/>
+                </a:solidFill>
+                <a:effectLst/>
+                <a:latin typeface="Consolas" panose="020B0609020204030204" pitchFamily="49" charset="0"/>
+              </a:rPr>
+              <a:t>userResponseDto</a:t>
+            </a:r>
+            <a:r>
+              <a:rPr lang="en-US" altLang="ko-KR" sz="1200" b="0">
+                <a:solidFill>
+                  <a:srgbClr val="FFA657"/>
+                </a:solidFill>
+                <a:effectLst/>
+                <a:latin typeface="Consolas" panose="020B0609020204030204" pitchFamily="49" charset="0"/>
+              </a:rPr>
+              <a:t> </a:t>
+            </a:r>
+            <a:r>
+              <a:rPr lang="en-US" altLang="ko-KR" sz="1200" b="0">
+                <a:solidFill>
+                  <a:srgbClr val="D4D4D4"/>
+                </a:solidFill>
+                <a:effectLst/>
+                <a:latin typeface="Consolas" panose="020B0609020204030204" pitchFamily="49" charset="0"/>
+              </a:rPr>
+              <a:t>=</a:t>
+            </a:r>
+            <a:r>
+              <a:rPr lang="en-US" altLang="ko-KR" sz="1200" b="0">
+                <a:solidFill>
+                  <a:srgbClr val="BBBEBF"/>
+                </a:solidFill>
+                <a:effectLst/>
+                <a:latin typeface="Consolas" panose="020B0609020204030204" pitchFamily="49" charset="0"/>
+              </a:rPr>
+              <a:t> </a:t>
+            </a:r>
+            <a:r>
+              <a:rPr lang="en-US" altLang="ko-KR" sz="1200" b="0">
+                <a:solidFill>
+                  <a:srgbClr val="79C0FF"/>
+                </a:solidFill>
+                <a:effectLst/>
+                <a:latin typeface="Consolas" panose="020B0609020204030204" pitchFamily="49" charset="0"/>
+              </a:rPr>
+              <a:t>this</a:t>
+            </a:r>
+            <a:r>
+              <a:rPr lang="en-US" altLang="ko-KR" sz="1200" b="0">
+                <a:solidFill>
+                  <a:srgbClr val="BBBEBF"/>
+                </a:solidFill>
+                <a:effectLst/>
+                <a:latin typeface="Consolas" panose="020B0609020204030204" pitchFamily="49" charset="0"/>
+              </a:rPr>
+              <a:t>.</a:t>
+            </a:r>
+            <a:r>
+              <a:rPr lang="en-US" altLang="ko-KR" sz="1200" b="0">
+                <a:solidFill>
+                  <a:srgbClr val="79C0FF"/>
+                </a:solidFill>
+                <a:effectLst/>
+                <a:latin typeface="Consolas" panose="020B0609020204030204" pitchFamily="49" charset="0"/>
+              </a:rPr>
+              <a:t>restClient</a:t>
+            </a:r>
+            <a:r>
+              <a:rPr lang="en-US" altLang="ko-KR" sz="1200" b="0">
+                <a:solidFill>
+                  <a:srgbClr val="BBBEBF"/>
+                </a:solidFill>
+                <a:effectLst/>
+                <a:latin typeface="Consolas" panose="020B0609020204030204" pitchFamily="49" charset="0"/>
+              </a:rPr>
+              <a:t>.</a:t>
+            </a:r>
+            <a:r>
+              <a:rPr lang="en-US" altLang="ko-KR" sz="1200" b="0">
+                <a:solidFill>
+                  <a:srgbClr val="D2A8FF"/>
+                </a:solidFill>
+                <a:effectLst/>
+                <a:latin typeface="Consolas" panose="020B0609020204030204" pitchFamily="49" charset="0"/>
+              </a:rPr>
+              <a:t>get</a:t>
+            </a:r>
+            <a:r>
+              <a:rPr lang="en-US" altLang="ko-KR" sz="1200" b="0">
+                <a:solidFill>
+                  <a:srgbClr val="BBBEBF"/>
+                </a:solidFill>
+                <a:effectLst/>
+                <a:latin typeface="Consolas" panose="020B0609020204030204" pitchFamily="49" charset="0"/>
+              </a:rPr>
+              <a:t>()</a:t>
+            </a:r>
+          </a:p>
+          <a:p>
+            <a:pPr>
+              <a:lnSpc>
+                <a:spcPts val="1425"/>
+              </a:lnSpc>
+              <a:buNone/>
+            </a:pPr>
+            <a:r>
+              <a:rPr lang="en-US" altLang="ko-KR" sz="1200" b="0">
+                <a:solidFill>
+                  <a:srgbClr val="BBBEBF"/>
+                </a:solidFill>
+                <a:effectLst/>
+                <a:latin typeface="Consolas" panose="020B0609020204030204" pitchFamily="49" charset="0"/>
+              </a:rPr>
+              <a:t>                .</a:t>
+            </a:r>
+            <a:r>
+              <a:rPr lang="en-US" altLang="ko-KR" sz="1200" b="0">
+                <a:solidFill>
+                  <a:srgbClr val="D2A8FF"/>
+                </a:solidFill>
+                <a:effectLst/>
+                <a:latin typeface="Consolas" panose="020B0609020204030204" pitchFamily="49" charset="0"/>
+              </a:rPr>
+              <a:t>uri</a:t>
+            </a:r>
+            <a:r>
+              <a:rPr lang="en-US" altLang="ko-KR" sz="1200" b="0">
+                <a:solidFill>
+                  <a:srgbClr val="BBBEBF"/>
+                </a:solidFill>
+                <a:effectLst/>
+                <a:latin typeface="Consolas" panose="020B0609020204030204" pitchFamily="49" charset="0"/>
+              </a:rPr>
+              <a:t>(</a:t>
+            </a:r>
+            <a:r>
+              <a:rPr lang="en-US" altLang="ko-KR" sz="1200" b="0">
+                <a:solidFill>
+                  <a:srgbClr val="A5D6FF"/>
+                </a:solidFill>
+                <a:effectLst/>
+                <a:latin typeface="Consolas" panose="020B0609020204030204" pitchFamily="49" charset="0"/>
+              </a:rPr>
+              <a:t>"/users/{userId}"</a:t>
+            </a:r>
+            <a:r>
+              <a:rPr lang="en-US" altLang="ko-KR" sz="1200" b="0">
+                <a:solidFill>
+                  <a:srgbClr val="BBBEBF"/>
+                </a:solidFill>
+                <a:effectLst/>
+                <a:latin typeface="Consolas" panose="020B0609020204030204" pitchFamily="49" charset="0"/>
+              </a:rPr>
+              <a:t>, </a:t>
+            </a:r>
+            <a:r>
+              <a:rPr lang="en-US" altLang="ko-KR" sz="1200" b="0">
+                <a:solidFill>
+                  <a:srgbClr val="FFA657"/>
+                </a:solidFill>
+                <a:effectLst/>
+                <a:latin typeface="Consolas" panose="020B0609020204030204" pitchFamily="49" charset="0"/>
+              </a:rPr>
+              <a:t>userId</a:t>
+            </a:r>
+            <a:r>
+              <a:rPr lang="en-US" altLang="ko-KR" sz="1200" b="0">
+                <a:solidFill>
+                  <a:srgbClr val="BBBEBF"/>
+                </a:solidFill>
+                <a:effectLst/>
+                <a:latin typeface="Consolas" panose="020B0609020204030204" pitchFamily="49" charset="0"/>
+              </a:rPr>
+              <a:t>)</a:t>
+            </a:r>
+          </a:p>
+          <a:p>
+            <a:pPr>
+              <a:lnSpc>
+                <a:spcPts val="1425"/>
+              </a:lnSpc>
+              <a:buNone/>
+            </a:pPr>
+            <a:r>
+              <a:rPr lang="en-US" altLang="ko-KR" sz="1200" b="0">
+                <a:solidFill>
+                  <a:srgbClr val="BBBEBF"/>
+                </a:solidFill>
+                <a:effectLst/>
+                <a:latin typeface="Consolas" panose="020B0609020204030204" pitchFamily="49" charset="0"/>
+              </a:rPr>
+              <a:t>                .</a:t>
+            </a:r>
+            <a:r>
+              <a:rPr lang="en-US" altLang="ko-KR" sz="1200" b="0">
+                <a:solidFill>
+                  <a:srgbClr val="D2A8FF"/>
+                </a:solidFill>
+                <a:effectLst/>
+                <a:latin typeface="Consolas" panose="020B0609020204030204" pitchFamily="49" charset="0"/>
+              </a:rPr>
+              <a:t>retrieve</a:t>
+            </a:r>
+            <a:r>
+              <a:rPr lang="en-US" altLang="ko-KR" sz="1200" b="0">
+                <a:solidFill>
+                  <a:srgbClr val="BBBEBF"/>
+                </a:solidFill>
+                <a:effectLst/>
+                <a:latin typeface="Consolas" panose="020B0609020204030204" pitchFamily="49" charset="0"/>
+              </a:rPr>
+              <a:t>()</a:t>
+            </a:r>
+          </a:p>
+          <a:p>
+            <a:pPr>
+              <a:lnSpc>
+                <a:spcPts val="1425"/>
+              </a:lnSpc>
+              <a:buNone/>
+            </a:pPr>
+            <a:r>
+              <a:rPr lang="en-US" altLang="ko-KR" sz="1200" b="0">
+                <a:solidFill>
+                  <a:srgbClr val="BBBEBF"/>
+                </a:solidFill>
+                <a:effectLst/>
+                <a:latin typeface="Consolas" panose="020B0609020204030204" pitchFamily="49" charset="0"/>
+              </a:rPr>
+              <a:t>                .</a:t>
+            </a:r>
+            <a:r>
+              <a:rPr lang="en-US" altLang="ko-KR" sz="1200" b="0">
+                <a:solidFill>
+                  <a:srgbClr val="D2A8FF"/>
+                </a:solidFill>
+                <a:effectLst/>
+                <a:latin typeface="Consolas" panose="020B0609020204030204" pitchFamily="49" charset="0"/>
+              </a:rPr>
+              <a:t>body</a:t>
+            </a:r>
+            <a:r>
+              <a:rPr lang="en-US" altLang="ko-KR" sz="1200" b="0">
+                <a:solidFill>
+                  <a:srgbClr val="BBBEBF"/>
+                </a:solidFill>
+                <a:effectLst/>
+                <a:latin typeface="Consolas" panose="020B0609020204030204" pitchFamily="49" charset="0"/>
+              </a:rPr>
+              <a:t>(</a:t>
+            </a:r>
+            <a:r>
+              <a:rPr lang="en-US" altLang="ko-KR" sz="1200" b="0">
+                <a:solidFill>
+                  <a:srgbClr val="4EC9B0"/>
+                </a:solidFill>
+                <a:effectLst/>
+                <a:latin typeface="Consolas" panose="020B0609020204030204" pitchFamily="49" charset="0"/>
+              </a:rPr>
+              <a:t>UserResponseDto</a:t>
+            </a:r>
+            <a:r>
+              <a:rPr lang="en-US" altLang="ko-KR" sz="1200" b="0">
+                <a:solidFill>
+                  <a:srgbClr val="BBBEBF"/>
+                </a:solidFill>
+                <a:effectLst/>
+                <a:latin typeface="Consolas" panose="020B0609020204030204" pitchFamily="49" charset="0"/>
+              </a:rPr>
+              <a:t>.</a:t>
+            </a:r>
+            <a:r>
+              <a:rPr lang="en-US" altLang="ko-KR" sz="1200" b="0">
+                <a:solidFill>
+                  <a:srgbClr val="C586C0"/>
+                </a:solidFill>
+                <a:effectLst/>
+                <a:latin typeface="Consolas" panose="020B0609020204030204" pitchFamily="49" charset="0"/>
+              </a:rPr>
+              <a:t>class</a:t>
+            </a:r>
+            <a:r>
+              <a:rPr lang="en-US" altLang="ko-KR" sz="1200" b="0">
+                <a:solidFill>
+                  <a:srgbClr val="BBBEBF"/>
+                </a:solidFill>
+                <a:effectLst/>
+                <a:latin typeface="Consolas" panose="020B0609020204030204" pitchFamily="49" charset="0"/>
+              </a:rPr>
+              <a:t>);</a:t>
+            </a:r>
+          </a:p>
+          <a:p>
+            <a:pPr>
+              <a:lnSpc>
+                <a:spcPts val="1425"/>
+              </a:lnSpc>
+              <a:buNone/>
+            </a:pPr>
+            <a:r>
+              <a:rPr lang="en-US" altLang="ko-KR" sz="1200" b="0">
+                <a:solidFill>
+                  <a:srgbClr val="BBBEBF"/>
+                </a:solidFill>
+                <a:effectLst/>
+                <a:latin typeface="Consolas" panose="020B0609020204030204" pitchFamily="49" charset="0"/>
+              </a:rPr>
+              <a:t>            </a:t>
+            </a:r>
+            <a:r>
+              <a:rPr lang="en-US" altLang="ko-KR" sz="1200" b="0">
+                <a:solidFill>
+                  <a:srgbClr val="C586C0"/>
+                </a:solidFill>
+                <a:effectLst/>
+                <a:latin typeface="Consolas" panose="020B0609020204030204" pitchFamily="49" charset="0"/>
+              </a:rPr>
+              <a:t>return</a:t>
+            </a:r>
+            <a:r>
+              <a:rPr lang="en-US" altLang="ko-KR" sz="1200" b="0">
+                <a:solidFill>
+                  <a:srgbClr val="BBBEBF"/>
+                </a:solidFill>
+                <a:effectLst/>
+                <a:latin typeface="Consolas" panose="020B0609020204030204" pitchFamily="49" charset="0"/>
+              </a:rPr>
+              <a:t> </a:t>
+            </a:r>
+            <a:r>
+              <a:rPr lang="en-US" altLang="ko-KR" sz="1200" b="0">
+                <a:solidFill>
+                  <a:srgbClr val="4EC9B0"/>
+                </a:solidFill>
+                <a:effectLst/>
+                <a:latin typeface="Consolas" panose="020B0609020204030204" pitchFamily="49" charset="0"/>
+              </a:rPr>
+              <a:t>Optional</a:t>
+            </a:r>
+            <a:r>
+              <a:rPr lang="en-US" altLang="ko-KR" sz="1200" b="0">
+                <a:solidFill>
+                  <a:srgbClr val="BBBEBF"/>
+                </a:solidFill>
+                <a:effectLst/>
+                <a:latin typeface="Consolas" panose="020B0609020204030204" pitchFamily="49" charset="0"/>
+              </a:rPr>
+              <a:t>.</a:t>
+            </a:r>
+            <a:r>
+              <a:rPr lang="en-US" altLang="ko-KR" sz="1200" b="0">
+                <a:solidFill>
+                  <a:srgbClr val="D2A8FF"/>
+                </a:solidFill>
+                <a:effectLst/>
+                <a:latin typeface="Consolas" panose="020B0609020204030204" pitchFamily="49" charset="0"/>
+              </a:rPr>
+              <a:t>ofNullable</a:t>
+            </a:r>
+            <a:r>
+              <a:rPr lang="en-US" altLang="ko-KR" sz="1200" b="0">
+                <a:solidFill>
+                  <a:srgbClr val="BBBEBF"/>
+                </a:solidFill>
+                <a:effectLst/>
+                <a:latin typeface="Consolas" panose="020B0609020204030204" pitchFamily="49" charset="0"/>
+              </a:rPr>
+              <a:t>(</a:t>
+            </a:r>
+            <a:r>
+              <a:rPr lang="en-US" altLang="ko-KR" sz="1200" b="0">
+                <a:solidFill>
+                  <a:srgbClr val="C9D1D9"/>
+                </a:solidFill>
+                <a:effectLst/>
+                <a:latin typeface="Consolas" panose="020B0609020204030204" pitchFamily="49" charset="0"/>
+              </a:rPr>
+              <a:t>userResponseDto</a:t>
+            </a:r>
+            <a:r>
+              <a:rPr lang="en-US" altLang="ko-KR" sz="1200" b="0">
+                <a:solidFill>
+                  <a:srgbClr val="BBBEBF"/>
+                </a:solidFill>
+                <a:effectLst/>
+                <a:latin typeface="Consolas" panose="020B0609020204030204" pitchFamily="49" charset="0"/>
+              </a:rPr>
+              <a:t>);</a:t>
+            </a:r>
+          </a:p>
+          <a:p>
+            <a:pPr>
+              <a:lnSpc>
+                <a:spcPts val="1425"/>
+              </a:lnSpc>
+              <a:buNone/>
+            </a:pPr>
+            <a:br>
+              <a:rPr lang="en-US" altLang="ko-KR" sz="1200" b="0">
+                <a:solidFill>
+                  <a:srgbClr val="BBBEBF"/>
+                </a:solidFill>
+                <a:effectLst/>
+                <a:latin typeface="Consolas" panose="020B0609020204030204" pitchFamily="49" charset="0"/>
+              </a:rPr>
+            </a:br>
+            <a:endParaRPr lang="en-US" altLang="ko-KR" sz="1200" b="0">
+              <a:solidFill>
+                <a:srgbClr val="BBBEBF"/>
+              </a:solidFill>
+              <a:effectLst/>
+              <a:latin typeface="Consolas" panose="020B0609020204030204" pitchFamily="49" charset="0"/>
+            </a:endParaRPr>
+          </a:p>
+          <a:p>
+            <a:pPr>
+              <a:lnSpc>
+                <a:spcPts val="1425"/>
+              </a:lnSpc>
+              <a:buNone/>
+            </a:pPr>
+            <a:r>
+              <a:rPr lang="en-US" altLang="ko-KR" sz="1200" b="0">
+                <a:solidFill>
+                  <a:srgbClr val="BBBEBF"/>
+                </a:solidFill>
+                <a:effectLst/>
+                <a:latin typeface="Consolas" panose="020B0609020204030204" pitchFamily="49" charset="0"/>
+              </a:rPr>
+              <a:t>        } </a:t>
+            </a:r>
+            <a:r>
+              <a:rPr lang="en-US" altLang="ko-KR" sz="1200" b="0">
+                <a:solidFill>
+                  <a:srgbClr val="C586C0"/>
+                </a:solidFill>
+                <a:effectLst/>
+                <a:latin typeface="Consolas" panose="020B0609020204030204" pitchFamily="49" charset="0"/>
+              </a:rPr>
+              <a:t>catch</a:t>
+            </a:r>
+            <a:r>
+              <a:rPr lang="en-US" altLang="ko-KR" sz="1200" b="0">
+                <a:solidFill>
+                  <a:srgbClr val="BBBEBF"/>
+                </a:solidFill>
+                <a:effectLst/>
+                <a:latin typeface="Consolas" panose="020B0609020204030204" pitchFamily="49" charset="0"/>
+              </a:rPr>
+              <a:t> (</a:t>
+            </a:r>
+            <a:r>
+              <a:rPr lang="en-US" altLang="ko-KR" sz="1200" b="0">
+                <a:solidFill>
+                  <a:srgbClr val="4EC9B0"/>
+                </a:solidFill>
+                <a:effectLst/>
+                <a:latin typeface="Consolas" panose="020B0609020204030204" pitchFamily="49" charset="0"/>
+              </a:rPr>
+              <a:t>RestClientException</a:t>
+            </a:r>
+            <a:r>
+              <a:rPr lang="en-US" altLang="ko-KR" sz="1200" b="0">
+                <a:solidFill>
+                  <a:srgbClr val="BBBEBF"/>
+                </a:solidFill>
+                <a:effectLst/>
+                <a:latin typeface="Consolas" panose="020B0609020204030204" pitchFamily="49" charset="0"/>
+              </a:rPr>
+              <a:t> </a:t>
+            </a:r>
+            <a:r>
+              <a:rPr lang="en-US" altLang="ko-KR" sz="1200" b="0">
+                <a:solidFill>
+                  <a:srgbClr val="C9D1D9"/>
+                </a:solidFill>
+                <a:effectLst/>
+                <a:latin typeface="Consolas" panose="020B0609020204030204" pitchFamily="49" charset="0"/>
+              </a:rPr>
+              <a:t>e</a:t>
+            </a:r>
+            <a:r>
+              <a:rPr lang="en-US" altLang="ko-KR" sz="1200" b="0">
+                <a:solidFill>
+                  <a:srgbClr val="BBBEBF"/>
+                </a:solidFill>
+                <a:effectLst/>
+                <a:latin typeface="Consolas" panose="020B0609020204030204" pitchFamily="49" charset="0"/>
+              </a:rPr>
+              <a:t>) {</a:t>
+            </a:r>
+          </a:p>
+          <a:p>
+            <a:pPr>
+              <a:lnSpc>
+                <a:spcPts val="1425"/>
+              </a:lnSpc>
+              <a:buNone/>
+            </a:pPr>
+            <a:r>
+              <a:rPr lang="en-US" altLang="ko-KR" sz="1200" b="0">
+                <a:solidFill>
+                  <a:srgbClr val="BBBEBF"/>
+                </a:solidFill>
+                <a:effectLst/>
+                <a:latin typeface="Consolas" panose="020B0609020204030204" pitchFamily="49" charset="0"/>
+              </a:rPr>
+              <a:t>            </a:t>
+            </a:r>
+            <a:r>
+              <a:rPr lang="en-US" altLang="ko-KR" sz="1200" b="0">
+                <a:solidFill>
+                  <a:srgbClr val="8B949E"/>
+                </a:solidFill>
+                <a:effectLst/>
+                <a:latin typeface="Consolas" panose="020B0609020204030204" pitchFamily="49" charset="0"/>
+              </a:rPr>
+              <a:t>// </a:t>
+            </a:r>
+            <a:r>
+              <a:rPr lang="ko-KR" altLang="en-US" sz="1200" b="0">
+                <a:solidFill>
+                  <a:srgbClr val="8B949E"/>
+                </a:solidFill>
+                <a:effectLst/>
+                <a:latin typeface="Consolas" panose="020B0609020204030204" pitchFamily="49" charset="0"/>
+              </a:rPr>
+              <a:t>로깅 </a:t>
+            </a:r>
+            <a:r>
+              <a:rPr lang="en-US" altLang="ko-KR" sz="1200" b="0">
+                <a:solidFill>
+                  <a:srgbClr val="8B949E"/>
+                </a:solidFill>
+                <a:effectLst/>
+                <a:latin typeface="Consolas" panose="020B0609020204030204" pitchFamily="49" charset="0"/>
+              </a:rPr>
+              <a:t>: </a:t>
+            </a:r>
+            <a:r>
+              <a:rPr lang="ko-KR" altLang="en-US" sz="1200" b="0">
+                <a:solidFill>
+                  <a:srgbClr val="8B949E"/>
+                </a:solidFill>
+                <a:effectLst/>
+                <a:latin typeface="Consolas" panose="020B0609020204030204" pitchFamily="49" charset="0"/>
+              </a:rPr>
+              <a:t>예외 발생시 로그를 남겨 문제를 파악할 수 있게 해야함</a:t>
+            </a:r>
+            <a:endParaRPr lang="ko-KR" altLang="en-US" sz="1200" b="0">
+              <a:solidFill>
+                <a:srgbClr val="BBBEBF"/>
+              </a:solidFill>
+              <a:effectLst/>
+              <a:latin typeface="Consolas" panose="020B0609020204030204" pitchFamily="49" charset="0"/>
+            </a:endParaRPr>
+          </a:p>
+          <a:p>
+            <a:pPr>
+              <a:lnSpc>
+                <a:spcPts val="1425"/>
+              </a:lnSpc>
+              <a:buNone/>
+            </a:pPr>
+            <a:r>
+              <a:rPr lang="ko-KR" altLang="en-US" sz="1200" b="0">
+                <a:solidFill>
+                  <a:srgbClr val="BBBEBF"/>
+                </a:solidFill>
+                <a:effectLst/>
+                <a:latin typeface="Consolas" panose="020B0609020204030204" pitchFamily="49" charset="0"/>
+              </a:rPr>
+              <a:t>            </a:t>
+            </a:r>
+            <a:r>
+              <a:rPr lang="en-US" altLang="ko-KR" sz="1200" b="0">
+                <a:solidFill>
+                  <a:srgbClr val="8B949E"/>
+                </a:solidFill>
+                <a:effectLst/>
+                <a:latin typeface="Consolas" panose="020B0609020204030204" pitchFamily="49" charset="0"/>
+              </a:rPr>
+              <a:t>// log.error("</a:t>
+            </a:r>
+            <a:r>
+              <a:rPr lang="ko-KR" altLang="en-US" sz="1200" b="0">
+                <a:solidFill>
+                  <a:srgbClr val="8B949E"/>
+                </a:solidFill>
+                <a:effectLst/>
+                <a:latin typeface="Consolas" panose="020B0609020204030204" pitchFamily="49" charset="0"/>
+              </a:rPr>
+              <a:t>사용자 정보 조회 실패</a:t>
+            </a:r>
+            <a:r>
+              <a:rPr lang="en-US" altLang="ko-KR" sz="1200" b="0">
+                <a:solidFill>
+                  <a:srgbClr val="8B949E"/>
+                </a:solidFill>
+                <a:effectLst/>
+                <a:latin typeface="Consolas" panose="020B0609020204030204" pitchFamily="49" charset="0"/>
+              </a:rPr>
+              <a:t>");</a:t>
+            </a:r>
+            <a:endParaRPr lang="ko-KR" altLang="en-US" sz="1200" b="0">
+              <a:solidFill>
+                <a:srgbClr val="BBBEBF"/>
+              </a:solidFill>
+              <a:effectLst/>
+              <a:latin typeface="Consolas" panose="020B0609020204030204" pitchFamily="49" charset="0"/>
+            </a:endParaRPr>
+          </a:p>
+          <a:p>
+            <a:pPr>
+              <a:lnSpc>
+                <a:spcPts val="1425"/>
+              </a:lnSpc>
+              <a:buNone/>
+            </a:pPr>
+            <a:r>
+              <a:rPr lang="ko-KR" altLang="en-US" sz="1200" b="0">
+                <a:solidFill>
+                  <a:srgbClr val="BBBEBF"/>
+                </a:solidFill>
+                <a:effectLst/>
+                <a:latin typeface="Consolas" panose="020B0609020204030204" pitchFamily="49" charset="0"/>
+              </a:rPr>
+              <a:t>            </a:t>
+            </a:r>
+            <a:r>
+              <a:rPr lang="en-US" altLang="ko-KR" sz="1200" b="0">
+                <a:solidFill>
+                  <a:srgbClr val="C586C0"/>
+                </a:solidFill>
+                <a:effectLst/>
+                <a:latin typeface="Consolas" panose="020B0609020204030204" pitchFamily="49" charset="0"/>
+              </a:rPr>
+              <a:t>return</a:t>
+            </a:r>
+            <a:r>
+              <a:rPr lang="en-US" altLang="ko-KR" sz="1200" b="0">
+                <a:solidFill>
+                  <a:srgbClr val="BBBEBF"/>
+                </a:solidFill>
+                <a:effectLst/>
+                <a:latin typeface="Consolas" panose="020B0609020204030204" pitchFamily="49" charset="0"/>
+              </a:rPr>
+              <a:t> </a:t>
+            </a:r>
+            <a:r>
+              <a:rPr lang="en-US" altLang="ko-KR" sz="1200" b="0">
+                <a:solidFill>
+                  <a:srgbClr val="4EC9B0"/>
+                </a:solidFill>
+                <a:effectLst/>
+                <a:latin typeface="Consolas" panose="020B0609020204030204" pitchFamily="49" charset="0"/>
+              </a:rPr>
+              <a:t>Optional</a:t>
+            </a:r>
+            <a:r>
+              <a:rPr lang="en-US" altLang="ko-KR" sz="1200" b="0">
+                <a:solidFill>
+                  <a:srgbClr val="BBBEBF"/>
+                </a:solidFill>
+                <a:effectLst/>
+                <a:latin typeface="Consolas" panose="020B0609020204030204" pitchFamily="49" charset="0"/>
+              </a:rPr>
+              <a:t>.</a:t>
+            </a:r>
+            <a:r>
+              <a:rPr lang="en-US" altLang="ko-KR" sz="1200" b="0">
+                <a:solidFill>
+                  <a:srgbClr val="D2A8FF"/>
+                </a:solidFill>
+                <a:effectLst/>
+                <a:latin typeface="Consolas" panose="020B0609020204030204" pitchFamily="49" charset="0"/>
+              </a:rPr>
+              <a:t>empty</a:t>
+            </a:r>
+            <a:r>
+              <a:rPr lang="en-US" altLang="ko-KR" sz="1200" b="0">
+                <a:solidFill>
+                  <a:srgbClr val="BBBEBF"/>
+                </a:solidFill>
+                <a:effectLst/>
+                <a:latin typeface="Consolas" panose="020B0609020204030204" pitchFamily="49" charset="0"/>
+              </a:rPr>
+              <a:t>();</a:t>
+            </a:r>
+          </a:p>
+          <a:p>
+            <a:pPr>
+              <a:lnSpc>
+                <a:spcPts val="1425"/>
+              </a:lnSpc>
+              <a:buNone/>
+            </a:pPr>
+            <a:r>
+              <a:rPr lang="en-US" altLang="ko-KR" sz="1200" b="0">
+                <a:solidFill>
+                  <a:srgbClr val="BBBEBF"/>
+                </a:solidFill>
+                <a:effectLst/>
+                <a:latin typeface="Consolas" panose="020B0609020204030204" pitchFamily="49" charset="0"/>
+              </a:rPr>
+              <a:t>        }</a:t>
+            </a:r>
+          </a:p>
+          <a:p>
+            <a:pPr>
+              <a:lnSpc>
+                <a:spcPts val="1425"/>
+              </a:lnSpc>
+              <a:buNone/>
+            </a:pPr>
+            <a:r>
+              <a:rPr lang="en-US" altLang="ko-KR" sz="1200" b="0">
+                <a:solidFill>
+                  <a:srgbClr val="BBBEBF"/>
+                </a:solidFill>
+                <a:effectLst/>
+                <a:latin typeface="Consolas" panose="020B0609020204030204" pitchFamily="49" charset="0"/>
+              </a:rPr>
+              <a:t>    }</a:t>
+            </a:r>
+          </a:p>
+        </p:txBody>
+      </p:sp>
+      <p:grpSp>
+        <p:nvGrpSpPr>
+          <p:cNvPr id="8" name="그룹 7">
+            <a:extLst>
+              <a:ext uri="{FF2B5EF4-FFF2-40B4-BE49-F238E27FC236}">
+                <a16:creationId xmlns:a16="http://schemas.microsoft.com/office/drawing/2014/main" id="{B476C6CB-8313-D423-FD6E-8A7A18984C30}"/>
+              </a:ext>
+            </a:extLst>
+          </p:cNvPr>
+          <p:cNvGrpSpPr/>
+          <p:nvPr/>
+        </p:nvGrpSpPr>
+        <p:grpSpPr>
+          <a:xfrm>
+            <a:off x="388041" y="1926437"/>
+            <a:ext cx="2838846" cy="1286054"/>
+            <a:chOff x="388041" y="1926437"/>
+            <a:chExt cx="2838846" cy="1286054"/>
+          </a:xfrm>
+        </p:grpSpPr>
+        <p:pic>
+          <p:nvPicPr>
+            <p:cNvPr id="4" name="그림 3">
+              <a:extLst>
+                <a:ext uri="{FF2B5EF4-FFF2-40B4-BE49-F238E27FC236}">
+                  <a16:creationId xmlns:a16="http://schemas.microsoft.com/office/drawing/2014/main" id="{9F5165F8-15F1-146B-1CF8-3C2F18EBEE69}"/>
+                </a:ext>
+              </a:extLst>
+            </p:cNvPr>
+            <p:cNvPicPr>
+              <a:picLocks noChangeAspect="1"/>
+            </p:cNvPicPr>
+            <p:nvPr/>
+          </p:nvPicPr>
+          <p:blipFill>
+            <a:blip r:embed="rId2"/>
+            <a:stretch>
+              <a:fillRect/>
+            </a:stretch>
+          </p:blipFill>
+          <p:spPr>
+            <a:xfrm>
+              <a:off x="388041" y="1926437"/>
+              <a:ext cx="2838846" cy="1286054"/>
+            </a:xfrm>
+            <a:prstGeom prst="rect">
+              <a:avLst/>
+            </a:prstGeom>
+          </p:spPr>
+        </p:pic>
+        <p:sp>
+          <p:nvSpPr>
+            <p:cNvPr id="7" name="직사각형 6">
+              <a:extLst>
+                <a:ext uri="{FF2B5EF4-FFF2-40B4-BE49-F238E27FC236}">
+                  <a16:creationId xmlns:a16="http://schemas.microsoft.com/office/drawing/2014/main" id="{6175332D-8B59-7449-8BB1-267840DA546F}"/>
+                </a:ext>
+              </a:extLst>
+            </p:cNvPr>
+            <p:cNvSpPr/>
+            <p:nvPr/>
+          </p:nvSpPr>
+          <p:spPr>
+            <a:xfrm>
+              <a:off x="704088" y="2752344"/>
+              <a:ext cx="1225296" cy="228600"/>
+            </a:xfrm>
+            <a:prstGeom prst="rect">
+              <a:avLst/>
+            </a:prstGeom>
+            <a:noFill/>
+            <a:ln>
+              <a:solidFill>
+                <a:srgbClr val="FF0000"/>
+              </a:solidFill>
+            </a:ln>
+          </p:spPr>
+          <p:style>
+            <a:lnRef idx="2">
+              <a:schemeClr val="accent1">
+                <a:shade val="15000"/>
+              </a:schemeClr>
+            </a:lnRef>
+            <a:fillRef idx="1">
+              <a:schemeClr val="accent1"/>
+            </a:fillRef>
+            <a:effectRef idx="0">
+              <a:schemeClr val="accent1"/>
+            </a:effectRef>
+            <a:fontRef idx="minor">
+              <a:schemeClr val="lt1"/>
+            </a:fontRef>
+          </p:style>
+          <p:txBody>
+            <a:bodyPr rtlCol="0" anchor="ctr"/>
+            <a:lstStyle/>
+            <a:p>
+              <a:pPr algn="ctr"/>
+              <a:endParaRPr lang="ko-KR" altLang="en-US"/>
+            </a:p>
+          </p:txBody>
+        </p:sp>
+      </p:grpSp>
+      <p:sp>
+        <p:nvSpPr>
+          <p:cNvPr id="9" name="TextBox 8">
+            <a:extLst>
+              <a:ext uri="{FF2B5EF4-FFF2-40B4-BE49-F238E27FC236}">
+                <a16:creationId xmlns:a16="http://schemas.microsoft.com/office/drawing/2014/main" id="{C7B72B78-2EB5-BDFF-F34A-009BF4FE5637}"/>
+              </a:ext>
+            </a:extLst>
+          </p:cNvPr>
+          <p:cNvSpPr txBox="1"/>
+          <p:nvPr/>
+        </p:nvSpPr>
+        <p:spPr>
+          <a:xfrm>
+            <a:off x="3440430" y="4828032"/>
+            <a:ext cx="7084314" cy="523220"/>
+          </a:xfrm>
+          <a:prstGeom prst="rect">
+            <a:avLst/>
+          </a:prstGeom>
+          <a:noFill/>
+        </p:spPr>
+        <p:txBody>
+          <a:bodyPr wrap="square" rtlCol="0">
+            <a:spAutoFit/>
+          </a:bodyPr>
+          <a:lstStyle/>
+          <a:p>
+            <a:pPr marL="342900" indent="-342900">
+              <a:buAutoNum type="arabicPeriod"/>
+            </a:pPr>
+            <a:r>
+              <a:rPr lang="en-US" altLang="ko-KR" sz="1400"/>
+              <a:t>API</a:t>
+            </a:r>
+            <a:r>
+              <a:rPr lang="ko-KR" altLang="en-US" sz="1400"/>
+              <a:t> 요청에 대한 에러는 예외처리를 하며</a:t>
+            </a:r>
+            <a:r>
+              <a:rPr lang="en-US" altLang="ko-KR" sz="1400"/>
+              <a:t>, </a:t>
+            </a:r>
+            <a:r>
+              <a:rPr lang="ko-KR" altLang="en-US" sz="1400"/>
+              <a:t>로그로 남겨야한다</a:t>
+            </a:r>
+            <a:r>
+              <a:rPr lang="en-US" altLang="ko-KR" sz="1400"/>
+              <a:t>.</a:t>
+            </a:r>
+          </a:p>
+          <a:p>
+            <a:pPr marL="342900" indent="-342900">
+              <a:buAutoNum type="arabicPeriod"/>
+            </a:pPr>
+            <a:r>
+              <a:rPr lang="ko-KR" altLang="en-US" sz="1400"/>
+              <a:t>응답이 </a:t>
+            </a:r>
+            <a:r>
+              <a:rPr lang="en-US" altLang="ko-KR" sz="1400"/>
+              <a:t>null</a:t>
+            </a:r>
+            <a:r>
+              <a:rPr lang="ko-KR" altLang="en-US" sz="1400"/>
+              <a:t>일 경우의 처리를 위하여 메소드의 반환타입을 </a:t>
+            </a:r>
+            <a:r>
+              <a:rPr lang="en-US" altLang="ko-KR" sz="1400"/>
+              <a:t>Optional</a:t>
+            </a:r>
+            <a:r>
+              <a:rPr lang="ko-KR" altLang="en-US" sz="1400"/>
+              <a:t>로 변경한다</a:t>
+            </a:r>
+            <a:r>
+              <a:rPr lang="en-US" altLang="ko-KR" sz="1400"/>
+              <a:t>.</a:t>
+            </a:r>
+            <a:endParaRPr lang="ko-KR" altLang="en-US" sz="1400"/>
+          </a:p>
+        </p:txBody>
+      </p:sp>
+    </p:spTree>
+    <p:extLst>
+      <p:ext uri="{BB962C8B-B14F-4D97-AF65-F5344CB8AC3E}">
+        <p14:creationId xmlns:p14="http://schemas.microsoft.com/office/powerpoint/2010/main" val="2086724511"/>
+      </p:ext>
+    </p:extLst>
+  </p:cSld>
+  <p:clrMapOvr>
+    <a:masterClrMapping/>
+  </p:clrMapOvr>
+</p:sld>
+</file>
+
+<file path=ppt/slides/slide23.xml><?xml version="1.0" encoding="utf-8"?>
+<p:sld xmlns:a="http://schemas.openxmlformats.org/drawingml/2006/main" xmlns:r="http://schemas.openxmlformats.org/officeDocument/2006/relationships" xmlns:p="http://schemas.openxmlformats.org/presentationml/2006/main">
+  <p:cSld>
+    <p:spTree>
+      <p:nvGrpSpPr>
+        <p:cNvPr id="1" name="">
+          <a:extLst>
+            <a:ext uri="{FF2B5EF4-FFF2-40B4-BE49-F238E27FC236}">
+              <a16:creationId xmlns:a16="http://schemas.microsoft.com/office/drawing/2014/main" id="{3717AB76-491D-CDE6-3619-D3D608C3FE22}"/>
+            </a:ext>
+          </a:extLst>
+        </p:cNvPr>
+        <p:cNvGrpSpPr/>
+        <p:nvPr/>
+      </p:nvGrpSpPr>
+      <p:grpSpPr>
+        <a:xfrm>
+          <a:off x="0" y="0"/>
+          <a:ext cx="0" cy="0"/>
+          <a:chOff x="0" y="0"/>
+          <a:chExt cx="0" cy="0"/>
+        </a:xfrm>
+      </p:grpSpPr>
+      <p:sp>
+        <p:nvSpPr>
+          <p:cNvPr id="2" name="제목 1">
+            <a:extLst>
+              <a:ext uri="{FF2B5EF4-FFF2-40B4-BE49-F238E27FC236}">
+                <a16:creationId xmlns:a16="http://schemas.microsoft.com/office/drawing/2014/main" id="{37970246-246C-3A57-77FE-9823AEFD06BE}"/>
+              </a:ext>
+            </a:extLst>
+          </p:cNvPr>
+          <p:cNvSpPr>
+            <a:spLocks noGrp="1"/>
+          </p:cNvSpPr>
+          <p:nvPr>
+            <p:ph type="title"/>
+          </p:nvPr>
+        </p:nvSpPr>
+        <p:spPr/>
+        <p:txBody>
+          <a:bodyPr/>
+          <a:lstStyle/>
+          <a:p>
+            <a:r>
+              <a:rPr lang="ko-KR" altLang="en-US"/>
+              <a:t>장애 전파 방지 대안</a:t>
+            </a:r>
+            <a:r>
+              <a:rPr lang="en-US" altLang="ko-KR"/>
+              <a:t>1 </a:t>
+            </a:r>
+            <a:r>
+              <a:rPr lang="ko-KR" altLang="en-US"/>
+              <a:t>코드 작성</a:t>
+            </a:r>
+            <a:r>
+              <a:rPr lang="en-US" altLang="ko-KR"/>
+              <a:t>(2)</a:t>
+            </a:r>
+            <a:endParaRPr lang="ko-KR" altLang="en-US"/>
+          </a:p>
+        </p:txBody>
+      </p:sp>
+      <p:grpSp>
+        <p:nvGrpSpPr>
+          <p:cNvPr id="8" name="그룹 7">
+            <a:extLst>
+              <a:ext uri="{FF2B5EF4-FFF2-40B4-BE49-F238E27FC236}">
+                <a16:creationId xmlns:a16="http://schemas.microsoft.com/office/drawing/2014/main" id="{72DD26C2-779B-140C-3C4F-A0CCAC669584}"/>
+              </a:ext>
+            </a:extLst>
+          </p:cNvPr>
+          <p:cNvGrpSpPr/>
+          <p:nvPr/>
+        </p:nvGrpSpPr>
+        <p:grpSpPr>
+          <a:xfrm>
+            <a:off x="388041" y="1926437"/>
+            <a:ext cx="2838846" cy="1286054"/>
+            <a:chOff x="388041" y="1926437"/>
+            <a:chExt cx="2838846" cy="1286054"/>
+          </a:xfrm>
+        </p:grpSpPr>
+        <p:pic>
+          <p:nvPicPr>
+            <p:cNvPr id="4" name="그림 3">
+              <a:extLst>
+                <a:ext uri="{FF2B5EF4-FFF2-40B4-BE49-F238E27FC236}">
+                  <a16:creationId xmlns:a16="http://schemas.microsoft.com/office/drawing/2014/main" id="{EA95477F-42C2-4791-6809-263A5C92606B}"/>
+                </a:ext>
+              </a:extLst>
+            </p:cNvPr>
+            <p:cNvPicPr>
+              <a:picLocks noChangeAspect="1"/>
+            </p:cNvPicPr>
+            <p:nvPr/>
+          </p:nvPicPr>
+          <p:blipFill>
+            <a:blip r:embed="rId2"/>
+            <a:stretch>
+              <a:fillRect/>
+            </a:stretch>
+          </p:blipFill>
+          <p:spPr>
+            <a:xfrm>
+              <a:off x="388041" y="1926437"/>
+              <a:ext cx="2838846" cy="1286054"/>
+            </a:xfrm>
+            <a:prstGeom prst="rect">
+              <a:avLst/>
+            </a:prstGeom>
+          </p:spPr>
+        </p:pic>
+        <p:sp>
+          <p:nvSpPr>
+            <p:cNvPr id="7" name="직사각형 6">
+              <a:extLst>
+                <a:ext uri="{FF2B5EF4-FFF2-40B4-BE49-F238E27FC236}">
+                  <a16:creationId xmlns:a16="http://schemas.microsoft.com/office/drawing/2014/main" id="{8703A3AE-C890-F73D-959A-DA7C5389B243}"/>
+                </a:ext>
+              </a:extLst>
+            </p:cNvPr>
+            <p:cNvSpPr/>
+            <p:nvPr/>
+          </p:nvSpPr>
+          <p:spPr>
+            <a:xfrm>
+              <a:off x="704088" y="2752344"/>
+              <a:ext cx="1225296" cy="228600"/>
+            </a:xfrm>
+            <a:prstGeom prst="rect">
+              <a:avLst/>
+            </a:prstGeom>
+            <a:noFill/>
+            <a:ln>
+              <a:solidFill>
+                <a:srgbClr val="FF0000"/>
+              </a:solidFill>
+            </a:ln>
+          </p:spPr>
+          <p:style>
+            <a:lnRef idx="2">
+              <a:schemeClr val="accent1">
+                <a:shade val="15000"/>
+              </a:schemeClr>
+            </a:lnRef>
+            <a:fillRef idx="1">
+              <a:schemeClr val="accent1"/>
+            </a:fillRef>
+            <a:effectRef idx="0">
+              <a:schemeClr val="accent1"/>
+            </a:effectRef>
+            <a:fontRef idx="minor">
+              <a:schemeClr val="lt1"/>
+            </a:fontRef>
+          </p:style>
+          <p:txBody>
+            <a:bodyPr rtlCol="0" anchor="ctr"/>
+            <a:lstStyle/>
+            <a:p>
+              <a:pPr algn="ctr"/>
+              <a:endParaRPr lang="ko-KR" altLang="en-US"/>
+            </a:p>
+          </p:txBody>
+        </p:sp>
+      </p:grpSp>
+      <p:sp>
+        <p:nvSpPr>
+          <p:cNvPr id="5" name="TextBox 4">
+            <a:extLst>
+              <a:ext uri="{FF2B5EF4-FFF2-40B4-BE49-F238E27FC236}">
+                <a16:creationId xmlns:a16="http://schemas.microsoft.com/office/drawing/2014/main" id="{1BF6B94F-4AC6-2250-2D29-D927663DAC10}"/>
+              </a:ext>
+            </a:extLst>
+          </p:cNvPr>
+          <p:cNvSpPr txBox="1"/>
+          <p:nvPr/>
+        </p:nvSpPr>
+        <p:spPr>
+          <a:xfrm>
+            <a:off x="3334542" y="1926437"/>
+            <a:ext cx="6094476" cy="4750018"/>
+          </a:xfrm>
+          <a:prstGeom prst="rect">
+            <a:avLst/>
+          </a:prstGeom>
+          <a:solidFill>
+            <a:schemeClr val="tx1"/>
+          </a:solidFill>
+        </p:spPr>
+        <p:txBody>
+          <a:bodyPr wrap="square">
+            <a:spAutoFit/>
+          </a:bodyPr>
+          <a:lstStyle/>
+          <a:p>
+            <a:pPr>
+              <a:lnSpc>
+                <a:spcPts val="1425"/>
+              </a:lnSpc>
+              <a:buNone/>
+            </a:pPr>
+            <a:r>
+              <a:rPr lang="en-US" altLang="ko-KR" sz="1050" b="0">
+                <a:solidFill>
+                  <a:srgbClr val="BBBEBF"/>
+                </a:solidFill>
+                <a:effectLst/>
+                <a:latin typeface="Consolas" panose="020B0609020204030204" pitchFamily="49" charset="0"/>
+              </a:rPr>
+              <a:t>    </a:t>
+            </a:r>
+            <a:r>
+              <a:rPr lang="en-US" altLang="ko-KR" sz="1050" b="0">
+                <a:solidFill>
+                  <a:srgbClr val="569CD6"/>
+                </a:solidFill>
+                <a:effectLst/>
+                <a:latin typeface="Consolas" panose="020B0609020204030204" pitchFamily="49" charset="0"/>
+              </a:rPr>
+              <a:t>public</a:t>
+            </a:r>
+            <a:r>
+              <a:rPr lang="en-US" altLang="ko-KR" sz="1050" b="0">
+                <a:solidFill>
+                  <a:srgbClr val="BBBEBF"/>
+                </a:solidFill>
+                <a:effectLst/>
+                <a:latin typeface="Consolas" panose="020B0609020204030204" pitchFamily="49" charset="0"/>
+              </a:rPr>
+              <a:t> </a:t>
+            </a:r>
+            <a:r>
+              <a:rPr lang="en-US" altLang="ko-KR" sz="1050" b="0">
+                <a:solidFill>
+                  <a:srgbClr val="4EC9B0"/>
+                </a:solidFill>
+                <a:effectLst/>
+                <a:latin typeface="Consolas" panose="020B0609020204030204" pitchFamily="49" charset="0"/>
+              </a:rPr>
+              <a:t>BoardResponseDto</a:t>
+            </a:r>
+            <a:r>
+              <a:rPr lang="en-US" altLang="ko-KR" sz="1050" b="0">
+                <a:solidFill>
+                  <a:srgbClr val="BBBEBF"/>
+                </a:solidFill>
+                <a:effectLst/>
+                <a:latin typeface="Consolas" panose="020B0609020204030204" pitchFamily="49" charset="0"/>
+              </a:rPr>
+              <a:t> </a:t>
+            </a:r>
+            <a:r>
+              <a:rPr lang="en-US" altLang="ko-KR" sz="1050" b="0">
+                <a:solidFill>
+                  <a:srgbClr val="D2A8FF"/>
+                </a:solidFill>
+                <a:effectLst/>
+                <a:latin typeface="Consolas" panose="020B0609020204030204" pitchFamily="49" charset="0"/>
+              </a:rPr>
+              <a:t>getBoard</a:t>
+            </a:r>
+            <a:r>
+              <a:rPr lang="en-US" altLang="ko-KR" sz="1050" b="0">
+                <a:solidFill>
+                  <a:srgbClr val="BBBEBF"/>
+                </a:solidFill>
+                <a:effectLst/>
+                <a:latin typeface="Consolas" panose="020B0609020204030204" pitchFamily="49" charset="0"/>
+              </a:rPr>
+              <a:t>(</a:t>
+            </a:r>
+            <a:r>
+              <a:rPr lang="en-US" altLang="ko-KR" sz="1050" b="0">
+                <a:solidFill>
+                  <a:srgbClr val="4EC9B0"/>
+                </a:solidFill>
+                <a:effectLst/>
+                <a:latin typeface="Consolas" panose="020B0609020204030204" pitchFamily="49" charset="0"/>
+              </a:rPr>
+              <a:t>Long</a:t>
+            </a:r>
+            <a:r>
+              <a:rPr lang="en-US" altLang="ko-KR" sz="1050" b="0">
+                <a:solidFill>
+                  <a:srgbClr val="BBBEBF"/>
+                </a:solidFill>
+                <a:effectLst/>
+                <a:latin typeface="Consolas" panose="020B0609020204030204" pitchFamily="49" charset="0"/>
+              </a:rPr>
+              <a:t> </a:t>
+            </a:r>
+            <a:r>
+              <a:rPr lang="en-US" altLang="ko-KR" sz="1050" b="0">
+                <a:solidFill>
+                  <a:srgbClr val="FFA657"/>
+                </a:solidFill>
+                <a:effectLst/>
+                <a:latin typeface="Consolas" panose="020B0609020204030204" pitchFamily="49" charset="0"/>
+              </a:rPr>
+              <a:t>boardId</a:t>
+            </a:r>
+            <a:r>
+              <a:rPr lang="en-US" altLang="ko-KR" sz="1050" b="0">
+                <a:solidFill>
+                  <a:srgbClr val="BBBEBF"/>
+                </a:solidFill>
+                <a:effectLst/>
+                <a:latin typeface="Consolas" panose="020B0609020204030204" pitchFamily="49" charset="0"/>
+              </a:rPr>
+              <a:t>) {</a:t>
+            </a:r>
+          </a:p>
+          <a:p>
+            <a:pPr>
+              <a:lnSpc>
+                <a:spcPts val="1425"/>
+              </a:lnSpc>
+              <a:buNone/>
+            </a:pPr>
+            <a:r>
+              <a:rPr lang="en-US" altLang="ko-KR" sz="1050" b="0">
+                <a:solidFill>
+                  <a:srgbClr val="BBBEBF"/>
+                </a:solidFill>
+                <a:effectLst/>
+                <a:latin typeface="Consolas" panose="020B0609020204030204" pitchFamily="49" charset="0"/>
+              </a:rPr>
+              <a:t>        </a:t>
+            </a:r>
+            <a:r>
+              <a:rPr lang="en-US" altLang="ko-KR" sz="1050" b="0">
+                <a:solidFill>
+                  <a:srgbClr val="4EC9B0"/>
+                </a:solidFill>
+                <a:effectLst/>
+                <a:latin typeface="Consolas" panose="020B0609020204030204" pitchFamily="49" charset="0"/>
+              </a:rPr>
+              <a:t>Board</a:t>
+            </a:r>
+            <a:r>
+              <a:rPr lang="en-US" altLang="ko-KR" sz="1050" b="0">
+                <a:solidFill>
+                  <a:srgbClr val="FFA657"/>
+                </a:solidFill>
+                <a:effectLst/>
+                <a:latin typeface="Consolas" panose="020B0609020204030204" pitchFamily="49" charset="0"/>
+              </a:rPr>
+              <a:t> </a:t>
+            </a:r>
+            <a:r>
+              <a:rPr lang="en-US" altLang="ko-KR" sz="1050" b="0">
+                <a:solidFill>
+                  <a:srgbClr val="C9D1D9"/>
+                </a:solidFill>
+                <a:effectLst/>
+                <a:latin typeface="Consolas" panose="020B0609020204030204" pitchFamily="49" charset="0"/>
+              </a:rPr>
+              <a:t>board</a:t>
+            </a:r>
+            <a:r>
+              <a:rPr lang="en-US" altLang="ko-KR" sz="1050" b="0">
+                <a:solidFill>
+                  <a:srgbClr val="FFA657"/>
+                </a:solidFill>
+                <a:effectLst/>
+                <a:latin typeface="Consolas" panose="020B0609020204030204" pitchFamily="49" charset="0"/>
+              </a:rPr>
+              <a:t> </a:t>
+            </a:r>
+            <a:r>
+              <a:rPr lang="en-US" altLang="ko-KR" sz="1050" b="0">
+                <a:solidFill>
+                  <a:srgbClr val="D4D4D4"/>
+                </a:solidFill>
+                <a:effectLst/>
+                <a:latin typeface="Consolas" panose="020B0609020204030204" pitchFamily="49" charset="0"/>
+              </a:rPr>
+              <a:t>=</a:t>
+            </a:r>
+            <a:r>
+              <a:rPr lang="en-US" altLang="ko-KR" sz="1050" b="0">
+                <a:solidFill>
+                  <a:srgbClr val="BBBEBF"/>
+                </a:solidFill>
+                <a:effectLst/>
+                <a:latin typeface="Consolas" panose="020B0609020204030204" pitchFamily="49" charset="0"/>
+              </a:rPr>
+              <a:t> </a:t>
+            </a:r>
+            <a:r>
+              <a:rPr lang="en-US" altLang="ko-KR" sz="1050" b="0">
+                <a:solidFill>
+                  <a:srgbClr val="79C0FF"/>
+                </a:solidFill>
+                <a:effectLst/>
+                <a:latin typeface="Consolas" panose="020B0609020204030204" pitchFamily="49" charset="0"/>
+              </a:rPr>
+              <a:t>boardRepository</a:t>
+            </a:r>
+            <a:r>
+              <a:rPr lang="en-US" altLang="ko-KR" sz="1050" b="0">
+                <a:solidFill>
+                  <a:srgbClr val="BBBEBF"/>
+                </a:solidFill>
+                <a:effectLst/>
+                <a:latin typeface="Consolas" panose="020B0609020204030204" pitchFamily="49" charset="0"/>
+              </a:rPr>
+              <a:t>.</a:t>
+            </a:r>
+            <a:r>
+              <a:rPr lang="en-US" altLang="ko-KR" sz="1050" b="0">
+                <a:solidFill>
+                  <a:srgbClr val="D2A8FF"/>
+                </a:solidFill>
+                <a:effectLst/>
+                <a:latin typeface="Consolas" panose="020B0609020204030204" pitchFamily="49" charset="0"/>
+              </a:rPr>
+              <a:t>findById</a:t>
+            </a:r>
+            <a:r>
+              <a:rPr lang="en-US" altLang="ko-KR" sz="1050" b="0">
+                <a:solidFill>
+                  <a:srgbClr val="BBBEBF"/>
+                </a:solidFill>
+                <a:effectLst/>
+                <a:latin typeface="Consolas" panose="020B0609020204030204" pitchFamily="49" charset="0"/>
+              </a:rPr>
+              <a:t>(</a:t>
+            </a:r>
+            <a:r>
+              <a:rPr lang="en-US" altLang="ko-KR" sz="1050" b="0">
+                <a:solidFill>
+                  <a:srgbClr val="FFA657"/>
+                </a:solidFill>
+                <a:effectLst/>
+                <a:latin typeface="Consolas" panose="020B0609020204030204" pitchFamily="49" charset="0"/>
+              </a:rPr>
+              <a:t>boardId</a:t>
+            </a:r>
+            <a:r>
+              <a:rPr lang="en-US" altLang="ko-KR" sz="1050" b="0">
+                <a:solidFill>
+                  <a:srgbClr val="BBBEBF"/>
+                </a:solidFill>
+                <a:effectLst/>
+                <a:latin typeface="Consolas" panose="020B0609020204030204" pitchFamily="49" charset="0"/>
+              </a:rPr>
+              <a:t>)</a:t>
+            </a:r>
+          </a:p>
+          <a:p>
+            <a:pPr>
+              <a:lnSpc>
+                <a:spcPts val="1425"/>
+              </a:lnSpc>
+              <a:buNone/>
+            </a:pPr>
+            <a:r>
+              <a:rPr lang="en-US" altLang="ko-KR" sz="1050" b="0">
+                <a:solidFill>
+                  <a:srgbClr val="BBBEBF"/>
+                </a:solidFill>
+                <a:effectLst/>
+                <a:latin typeface="Consolas" panose="020B0609020204030204" pitchFamily="49" charset="0"/>
+              </a:rPr>
+              <a:t>            .</a:t>
+            </a:r>
+            <a:r>
+              <a:rPr lang="en-US" altLang="ko-KR" sz="1050" b="0">
+                <a:solidFill>
+                  <a:srgbClr val="D2A8FF"/>
+                </a:solidFill>
+                <a:effectLst/>
+                <a:latin typeface="Consolas" panose="020B0609020204030204" pitchFamily="49" charset="0"/>
+              </a:rPr>
+              <a:t>orElseThrow</a:t>
+            </a:r>
+            <a:r>
+              <a:rPr lang="en-US" altLang="ko-KR" sz="1050" b="0">
+                <a:solidFill>
+                  <a:srgbClr val="BBBEBF"/>
+                </a:solidFill>
+                <a:effectLst/>
+                <a:latin typeface="Consolas" panose="020B0609020204030204" pitchFamily="49" charset="0"/>
+              </a:rPr>
+              <a:t>(() </a:t>
+            </a:r>
+            <a:r>
+              <a:rPr lang="en-US" altLang="ko-KR" sz="1050" b="0">
+                <a:solidFill>
+                  <a:srgbClr val="FF7B72"/>
+                </a:solidFill>
+                <a:effectLst/>
+                <a:latin typeface="Consolas" panose="020B0609020204030204" pitchFamily="49" charset="0"/>
+              </a:rPr>
+              <a:t>-&gt;</a:t>
+            </a:r>
+            <a:r>
+              <a:rPr lang="en-US" altLang="ko-KR" sz="1050" b="0">
+                <a:solidFill>
+                  <a:srgbClr val="BBBEBF"/>
+                </a:solidFill>
+                <a:effectLst/>
+                <a:latin typeface="Consolas" panose="020B0609020204030204" pitchFamily="49" charset="0"/>
+              </a:rPr>
+              <a:t> </a:t>
+            </a:r>
+            <a:r>
+              <a:rPr lang="en-US" altLang="ko-KR" sz="1050" b="0">
+                <a:solidFill>
+                  <a:srgbClr val="C586C0"/>
+                </a:solidFill>
+                <a:effectLst/>
+                <a:latin typeface="Consolas" panose="020B0609020204030204" pitchFamily="49" charset="0"/>
+              </a:rPr>
+              <a:t>new</a:t>
+            </a:r>
+            <a:r>
+              <a:rPr lang="en-US" altLang="ko-KR" sz="1050" b="0">
+                <a:solidFill>
+                  <a:srgbClr val="BBBEBF"/>
+                </a:solidFill>
+                <a:effectLst/>
+                <a:latin typeface="Consolas" panose="020B0609020204030204" pitchFamily="49" charset="0"/>
+              </a:rPr>
+              <a:t> </a:t>
+            </a:r>
+            <a:r>
+              <a:rPr lang="en-US" altLang="ko-KR" sz="1050" b="0">
+                <a:solidFill>
+                  <a:srgbClr val="D2A8FF"/>
+                </a:solidFill>
+                <a:effectLst/>
+                <a:latin typeface="Consolas" panose="020B0609020204030204" pitchFamily="49" charset="0"/>
+              </a:rPr>
+              <a:t>IllegalArgumentException</a:t>
+            </a:r>
+            <a:r>
+              <a:rPr lang="en-US" altLang="ko-KR" sz="1050" b="0">
+                <a:solidFill>
+                  <a:srgbClr val="BBBEBF"/>
+                </a:solidFill>
+                <a:effectLst/>
+                <a:latin typeface="Consolas" panose="020B0609020204030204" pitchFamily="49" charset="0"/>
+              </a:rPr>
+              <a:t>(</a:t>
+            </a:r>
+            <a:r>
+              <a:rPr lang="en-US" altLang="ko-KR" sz="1050" b="0">
+                <a:solidFill>
+                  <a:srgbClr val="A5D6FF"/>
+                </a:solidFill>
+                <a:effectLst/>
+                <a:latin typeface="Consolas" panose="020B0609020204030204" pitchFamily="49" charset="0"/>
+              </a:rPr>
+              <a:t>"</a:t>
+            </a:r>
+            <a:r>
+              <a:rPr lang="ko-KR" altLang="en-US" sz="1050" b="0">
+                <a:solidFill>
+                  <a:srgbClr val="A5D6FF"/>
+                </a:solidFill>
+                <a:effectLst/>
+                <a:latin typeface="Consolas" panose="020B0609020204030204" pitchFamily="49" charset="0"/>
+              </a:rPr>
+              <a:t>게시글을 찾을수 없습니다</a:t>
+            </a:r>
+            <a:r>
+              <a:rPr lang="en-US" altLang="ko-KR" sz="1050" b="0">
+                <a:solidFill>
+                  <a:srgbClr val="A5D6FF"/>
+                </a:solidFill>
+                <a:effectLst/>
+                <a:latin typeface="Consolas" panose="020B0609020204030204" pitchFamily="49" charset="0"/>
+              </a:rPr>
+              <a:t>."</a:t>
+            </a:r>
+            <a:r>
+              <a:rPr lang="en-US" altLang="ko-KR" sz="1050" b="0">
+                <a:solidFill>
+                  <a:srgbClr val="BBBEBF"/>
+                </a:solidFill>
+                <a:effectLst/>
+                <a:latin typeface="Consolas" panose="020B0609020204030204" pitchFamily="49" charset="0"/>
+              </a:rPr>
+              <a:t>));</a:t>
+            </a:r>
+          </a:p>
+          <a:p>
+            <a:pPr>
+              <a:lnSpc>
+                <a:spcPts val="1425"/>
+              </a:lnSpc>
+              <a:buNone/>
+            </a:pPr>
+            <a:r>
+              <a:rPr lang="en-US" altLang="ko-KR" sz="1050" b="0">
+                <a:solidFill>
+                  <a:srgbClr val="BBBEBF"/>
+                </a:solidFill>
+                <a:effectLst/>
+                <a:latin typeface="Consolas" panose="020B0609020204030204" pitchFamily="49" charset="0"/>
+              </a:rPr>
+              <a:t>        </a:t>
+            </a:r>
+          </a:p>
+          <a:p>
+            <a:pPr>
+              <a:lnSpc>
+                <a:spcPts val="1425"/>
+              </a:lnSpc>
+              <a:buNone/>
+            </a:pPr>
+            <a:r>
+              <a:rPr lang="en-US" altLang="ko-KR" sz="1050" b="0">
+                <a:solidFill>
+                  <a:srgbClr val="BBBEBF"/>
+                </a:solidFill>
+                <a:effectLst/>
+                <a:latin typeface="Consolas" panose="020B0609020204030204" pitchFamily="49" charset="0"/>
+              </a:rPr>
+              <a:t>        </a:t>
+            </a:r>
+            <a:r>
+              <a:rPr lang="en-US" altLang="ko-KR" sz="1050" b="0">
+                <a:solidFill>
+                  <a:srgbClr val="8B949E"/>
+                </a:solidFill>
+                <a:effectLst/>
+                <a:latin typeface="Consolas" panose="020B0609020204030204" pitchFamily="49" charset="0"/>
+              </a:rPr>
+              <a:t>// user-service</a:t>
+            </a:r>
+            <a:r>
+              <a:rPr lang="ko-KR" altLang="en-US" sz="1050" b="0">
+                <a:solidFill>
+                  <a:srgbClr val="8B949E"/>
+                </a:solidFill>
+                <a:effectLst/>
+                <a:latin typeface="Consolas" panose="020B0609020204030204" pitchFamily="49" charset="0"/>
+              </a:rPr>
+              <a:t>로 부터 사용자 정보 불러오기</a:t>
+            </a:r>
+            <a:endParaRPr lang="ko-KR" altLang="en-US" sz="1050" b="0">
+              <a:solidFill>
+                <a:srgbClr val="BBBEBF"/>
+              </a:solidFill>
+              <a:effectLst/>
+              <a:latin typeface="Consolas" panose="020B0609020204030204" pitchFamily="49" charset="0"/>
+            </a:endParaRPr>
+          </a:p>
+          <a:p>
+            <a:pPr>
+              <a:lnSpc>
+                <a:spcPts val="1425"/>
+              </a:lnSpc>
+              <a:buNone/>
+            </a:pPr>
+            <a:r>
+              <a:rPr lang="ko-KR" altLang="en-US" sz="1050" b="0">
+                <a:solidFill>
+                  <a:srgbClr val="BBBEBF"/>
+                </a:solidFill>
+                <a:effectLst/>
+                <a:latin typeface="Consolas" panose="020B0609020204030204" pitchFamily="49" charset="0"/>
+              </a:rPr>
+              <a:t>        </a:t>
+            </a:r>
+            <a:r>
+              <a:rPr lang="en-US" altLang="ko-KR" sz="1050" b="0">
+                <a:solidFill>
+                  <a:srgbClr val="4EC9B0"/>
+                </a:solidFill>
+                <a:effectLst/>
+                <a:latin typeface="Consolas" panose="020B0609020204030204" pitchFamily="49" charset="0"/>
+              </a:rPr>
+              <a:t>Optional</a:t>
+            </a:r>
+            <a:r>
+              <a:rPr lang="en-US" altLang="ko-KR" sz="1050" b="0">
+                <a:solidFill>
+                  <a:srgbClr val="FFA657"/>
+                </a:solidFill>
+                <a:effectLst/>
+                <a:latin typeface="Consolas" panose="020B0609020204030204" pitchFamily="49" charset="0"/>
+              </a:rPr>
+              <a:t>&lt;</a:t>
+            </a:r>
+            <a:r>
+              <a:rPr lang="en-US" altLang="ko-KR" sz="1050" b="0">
+                <a:solidFill>
+                  <a:srgbClr val="4EC9B0"/>
+                </a:solidFill>
+                <a:effectLst/>
+                <a:latin typeface="Consolas" panose="020B0609020204030204" pitchFamily="49" charset="0"/>
+              </a:rPr>
+              <a:t>UserResponseDto</a:t>
+            </a:r>
+            <a:r>
+              <a:rPr lang="en-US" altLang="ko-KR" sz="1050" b="0">
+                <a:solidFill>
+                  <a:srgbClr val="FFA657"/>
+                </a:solidFill>
+                <a:effectLst/>
+                <a:latin typeface="Consolas" panose="020B0609020204030204" pitchFamily="49" charset="0"/>
+              </a:rPr>
+              <a:t>&gt; </a:t>
+            </a:r>
+            <a:r>
+              <a:rPr lang="en-US" altLang="ko-KR" sz="1050" b="0">
+                <a:solidFill>
+                  <a:srgbClr val="C9D1D9"/>
+                </a:solidFill>
+                <a:effectLst/>
+                <a:latin typeface="Consolas" panose="020B0609020204030204" pitchFamily="49" charset="0"/>
+              </a:rPr>
+              <a:t>optionalUserResponseDto</a:t>
+            </a:r>
+            <a:r>
+              <a:rPr lang="en-US" altLang="ko-KR" sz="1050" b="0">
+                <a:solidFill>
+                  <a:srgbClr val="FFA657"/>
+                </a:solidFill>
+                <a:effectLst/>
+                <a:latin typeface="Consolas" panose="020B0609020204030204" pitchFamily="49" charset="0"/>
+              </a:rPr>
+              <a:t> </a:t>
+            </a:r>
+            <a:r>
+              <a:rPr lang="en-US" altLang="ko-KR" sz="1050" b="0">
+                <a:solidFill>
+                  <a:srgbClr val="D4D4D4"/>
+                </a:solidFill>
+                <a:effectLst/>
+                <a:latin typeface="Consolas" panose="020B0609020204030204" pitchFamily="49" charset="0"/>
+              </a:rPr>
+              <a:t>=</a:t>
+            </a:r>
+            <a:r>
+              <a:rPr lang="en-US" altLang="ko-KR" sz="1050" b="0">
+                <a:solidFill>
+                  <a:srgbClr val="BBBEBF"/>
+                </a:solidFill>
+                <a:effectLst/>
+                <a:latin typeface="Consolas" panose="020B0609020204030204" pitchFamily="49" charset="0"/>
+              </a:rPr>
+              <a:t> </a:t>
+            </a:r>
+            <a:r>
+              <a:rPr lang="en-US" altLang="ko-KR" sz="1050" b="0">
+                <a:solidFill>
+                  <a:srgbClr val="79C0FF"/>
+                </a:solidFill>
+                <a:effectLst/>
+                <a:latin typeface="Consolas" panose="020B0609020204030204" pitchFamily="49" charset="0"/>
+              </a:rPr>
+              <a:t>userClient</a:t>
+            </a:r>
+            <a:r>
+              <a:rPr lang="en-US" altLang="ko-KR" sz="1050" b="0">
+                <a:solidFill>
+                  <a:srgbClr val="BBBEBF"/>
+                </a:solidFill>
+                <a:effectLst/>
+                <a:latin typeface="Consolas" panose="020B0609020204030204" pitchFamily="49" charset="0"/>
+              </a:rPr>
+              <a:t>.</a:t>
+            </a:r>
+            <a:r>
+              <a:rPr lang="en-US" altLang="ko-KR" sz="1050" b="0">
+                <a:solidFill>
+                  <a:srgbClr val="D2A8FF"/>
+                </a:solidFill>
+                <a:effectLst/>
+                <a:latin typeface="Consolas" panose="020B0609020204030204" pitchFamily="49" charset="0"/>
+              </a:rPr>
+              <a:t>findById</a:t>
+            </a:r>
+            <a:r>
+              <a:rPr lang="en-US" altLang="ko-KR" sz="1050" b="0">
+                <a:solidFill>
+                  <a:srgbClr val="BBBEBF"/>
+                </a:solidFill>
+                <a:effectLst/>
+                <a:latin typeface="Consolas" panose="020B0609020204030204" pitchFamily="49" charset="0"/>
+              </a:rPr>
+              <a:t>(</a:t>
+            </a:r>
+            <a:r>
+              <a:rPr lang="en-US" altLang="ko-KR" sz="1050" b="0">
+                <a:solidFill>
+                  <a:srgbClr val="C9D1D9"/>
+                </a:solidFill>
+                <a:effectLst/>
+                <a:latin typeface="Consolas" panose="020B0609020204030204" pitchFamily="49" charset="0"/>
+              </a:rPr>
+              <a:t>board</a:t>
+            </a:r>
+            <a:r>
+              <a:rPr lang="en-US" altLang="ko-KR" sz="1050" b="0">
+                <a:solidFill>
+                  <a:srgbClr val="BBBEBF"/>
+                </a:solidFill>
+                <a:effectLst/>
+                <a:latin typeface="Consolas" panose="020B0609020204030204" pitchFamily="49" charset="0"/>
+              </a:rPr>
+              <a:t>.</a:t>
+            </a:r>
+            <a:r>
+              <a:rPr lang="en-US" altLang="ko-KR" sz="1050" b="0">
+                <a:solidFill>
+                  <a:srgbClr val="D2A8FF"/>
+                </a:solidFill>
+                <a:effectLst/>
+                <a:latin typeface="Consolas" panose="020B0609020204030204" pitchFamily="49" charset="0"/>
+              </a:rPr>
+              <a:t>getUserId</a:t>
+            </a:r>
+            <a:r>
+              <a:rPr lang="en-US" altLang="ko-KR" sz="1050" b="0">
+                <a:solidFill>
+                  <a:srgbClr val="BBBEBF"/>
+                </a:solidFill>
+                <a:effectLst/>
+                <a:latin typeface="Consolas" panose="020B0609020204030204" pitchFamily="49" charset="0"/>
+              </a:rPr>
+              <a:t>());</a:t>
+            </a:r>
+          </a:p>
+          <a:p>
+            <a:pPr>
+              <a:lnSpc>
+                <a:spcPts val="1425"/>
+              </a:lnSpc>
+              <a:buNone/>
+            </a:pPr>
+            <a:r>
+              <a:rPr lang="en-US" altLang="ko-KR" sz="1050" b="0">
+                <a:solidFill>
+                  <a:srgbClr val="BBBEBF"/>
+                </a:solidFill>
+                <a:effectLst/>
+                <a:latin typeface="Consolas" panose="020B0609020204030204" pitchFamily="49" charset="0"/>
+              </a:rPr>
+              <a:t>        </a:t>
+            </a:r>
+          </a:p>
+          <a:p>
+            <a:pPr>
+              <a:lnSpc>
+                <a:spcPts val="1425"/>
+              </a:lnSpc>
+              <a:buNone/>
+            </a:pPr>
+            <a:r>
+              <a:rPr lang="en-US" altLang="ko-KR" sz="1050" b="0">
+                <a:solidFill>
+                  <a:srgbClr val="BBBEBF"/>
+                </a:solidFill>
+                <a:effectLst/>
+                <a:latin typeface="Consolas" panose="020B0609020204030204" pitchFamily="49" charset="0"/>
+              </a:rPr>
+              <a:t>        </a:t>
+            </a:r>
+            <a:r>
+              <a:rPr lang="en-US" altLang="ko-KR" sz="1050" b="0">
+                <a:solidFill>
+                  <a:srgbClr val="4EC9B0"/>
+                </a:solidFill>
+                <a:effectLst/>
+                <a:latin typeface="Consolas" panose="020B0609020204030204" pitchFamily="49" charset="0"/>
+              </a:rPr>
+              <a:t>UserDto</a:t>
+            </a:r>
+            <a:r>
+              <a:rPr lang="en-US" altLang="ko-KR" sz="1050" b="0">
+                <a:solidFill>
+                  <a:srgbClr val="FFA657"/>
+                </a:solidFill>
+                <a:effectLst/>
+                <a:latin typeface="Consolas" panose="020B0609020204030204" pitchFamily="49" charset="0"/>
+              </a:rPr>
+              <a:t> </a:t>
+            </a:r>
+            <a:r>
+              <a:rPr lang="en-US" altLang="ko-KR" sz="1050" b="0">
+                <a:solidFill>
+                  <a:srgbClr val="C9D1D9"/>
+                </a:solidFill>
+                <a:effectLst/>
+                <a:latin typeface="Consolas" panose="020B0609020204030204" pitchFamily="49" charset="0"/>
+              </a:rPr>
+              <a:t>userDto</a:t>
+            </a:r>
+            <a:r>
+              <a:rPr lang="en-US" altLang="ko-KR" sz="1050" b="0">
+                <a:solidFill>
+                  <a:srgbClr val="FFA657"/>
+                </a:solidFill>
+                <a:effectLst/>
+                <a:latin typeface="Consolas" panose="020B0609020204030204" pitchFamily="49" charset="0"/>
+              </a:rPr>
+              <a:t> </a:t>
+            </a:r>
+            <a:r>
+              <a:rPr lang="en-US" altLang="ko-KR" sz="1050" b="0">
+                <a:solidFill>
+                  <a:srgbClr val="D4D4D4"/>
+                </a:solidFill>
+                <a:effectLst/>
+                <a:latin typeface="Consolas" panose="020B0609020204030204" pitchFamily="49" charset="0"/>
+              </a:rPr>
+              <a:t>=</a:t>
+            </a:r>
+            <a:r>
+              <a:rPr lang="en-US" altLang="ko-KR" sz="1050" b="0">
+                <a:solidFill>
+                  <a:srgbClr val="BBBEBF"/>
+                </a:solidFill>
+                <a:effectLst/>
+                <a:latin typeface="Consolas" panose="020B0609020204030204" pitchFamily="49" charset="0"/>
+              </a:rPr>
+              <a:t> </a:t>
+            </a:r>
+            <a:r>
+              <a:rPr lang="en-US" altLang="ko-KR" sz="1050" b="0">
+                <a:solidFill>
+                  <a:srgbClr val="569CD6"/>
+                </a:solidFill>
+                <a:effectLst/>
+                <a:latin typeface="Consolas" panose="020B0609020204030204" pitchFamily="49" charset="0"/>
+              </a:rPr>
+              <a:t>null</a:t>
+            </a:r>
+            <a:r>
+              <a:rPr lang="en-US" altLang="ko-KR" sz="1050" b="0">
+                <a:solidFill>
+                  <a:srgbClr val="BBBEBF"/>
+                </a:solidFill>
+                <a:effectLst/>
+                <a:latin typeface="Consolas" panose="020B0609020204030204" pitchFamily="49" charset="0"/>
+              </a:rPr>
+              <a:t>;</a:t>
+            </a:r>
+          </a:p>
+          <a:p>
+            <a:pPr>
+              <a:lnSpc>
+                <a:spcPts val="1425"/>
+              </a:lnSpc>
+              <a:buNone/>
+            </a:pPr>
+            <a:r>
+              <a:rPr lang="en-US" altLang="ko-KR" sz="1050" b="0">
+                <a:solidFill>
+                  <a:srgbClr val="BBBEBF"/>
+                </a:solidFill>
+                <a:effectLst/>
+                <a:latin typeface="Consolas" panose="020B0609020204030204" pitchFamily="49" charset="0"/>
+              </a:rPr>
+              <a:t>        </a:t>
+            </a:r>
+            <a:r>
+              <a:rPr lang="en-US" altLang="ko-KR" sz="1050" b="0">
+                <a:solidFill>
+                  <a:srgbClr val="C586C0"/>
+                </a:solidFill>
+                <a:effectLst/>
+                <a:latin typeface="Consolas" panose="020B0609020204030204" pitchFamily="49" charset="0"/>
+              </a:rPr>
+              <a:t>if</a:t>
+            </a:r>
+            <a:r>
+              <a:rPr lang="en-US" altLang="ko-KR" sz="1050" b="0">
+                <a:solidFill>
+                  <a:srgbClr val="BBBEBF"/>
+                </a:solidFill>
+                <a:effectLst/>
+                <a:latin typeface="Consolas" panose="020B0609020204030204" pitchFamily="49" charset="0"/>
+              </a:rPr>
+              <a:t> (</a:t>
+            </a:r>
+            <a:r>
+              <a:rPr lang="en-US" altLang="ko-KR" sz="1050" b="0">
+                <a:solidFill>
+                  <a:srgbClr val="C9D1D9"/>
+                </a:solidFill>
+                <a:effectLst/>
+                <a:latin typeface="Consolas" panose="020B0609020204030204" pitchFamily="49" charset="0"/>
+              </a:rPr>
+              <a:t>optionalUserResponseDto</a:t>
+            </a:r>
+            <a:r>
+              <a:rPr lang="en-US" altLang="ko-KR" sz="1050" b="0">
+                <a:solidFill>
+                  <a:srgbClr val="BBBEBF"/>
+                </a:solidFill>
+                <a:effectLst/>
+                <a:latin typeface="Consolas" panose="020B0609020204030204" pitchFamily="49" charset="0"/>
+              </a:rPr>
+              <a:t>.</a:t>
+            </a:r>
+            <a:r>
+              <a:rPr lang="en-US" altLang="ko-KR" sz="1050" b="0">
+                <a:solidFill>
+                  <a:srgbClr val="D2A8FF"/>
+                </a:solidFill>
+                <a:effectLst/>
+                <a:latin typeface="Consolas" panose="020B0609020204030204" pitchFamily="49" charset="0"/>
+              </a:rPr>
+              <a:t>isPresent</a:t>
+            </a:r>
+            <a:r>
+              <a:rPr lang="en-US" altLang="ko-KR" sz="1050" b="0">
+                <a:solidFill>
+                  <a:srgbClr val="BBBEBF"/>
+                </a:solidFill>
+                <a:effectLst/>
+                <a:latin typeface="Consolas" panose="020B0609020204030204" pitchFamily="49" charset="0"/>
+              </a:rPr>
+              <a:t>()) {</a:t>
+            </a:r>
+          </a:p>
+          <a:p>
+            <a:pPr>
+              <a:lnSpc>
+                <a:spcPts val="1425"/>
+              </a:lnSpc>
+              <a:buNone/>
+            </a:pPr>
+            <a:r>
+              <a:rPr lang="en-US" altLang="ko-KR" sz="1050" b="0">
+                <a:solidFill>
+                  <a:srgbClr val="BBBEBF"/>
+                </a:solidFill>
+                <a:effectLst/>
+                <a:latin typeface="Consolas" panose="020B0609020204030204" pitchFamily="49" charset="0"/>
+              </a:rPr>
+              <a:t>            </a:t>
+            </a:r>
+            <a:r>
+              <a:rPr lang="en-US" altLang="ko-KR" sz="1050" b="0">
+                <a:solidFill>
+                  <a:srgbClr val="4EC9B0"/>
+                </a:solidFill>
+                <a:effectLst/>
+                <a:latin typeface="Consolas" panose="020B0609020204030204" pitchFamily="49" charset="0"/>
+              </a:rPr>
+              <a:t>UserResponseDto</a:t>
+            </a:r>
+            <a:r>
+              <a:rPr lang="en-US" altLang="ko-KR" sz="1050" b="0">
+                <a:solidFill>
+                  <a:srgbClr val="FFA657"/>
+                </a:solidFill>
+                <a:effectLst/>
+                <a:latin typeface="Consolas" panose="020B0609020204030204" pitchFamily="49" charset="0"/>
+              </a:rPr>
+              <a:t> </a:t>
+            </a:r>
+            <a:r>
+              <a:rPr lang="en-US" altLang="ko-KR" sz="1050" b="0">
+                <a:solidFill>
+                  <a:srgbClr val="C9D1D9"/>
+                </a:solidFill>
+                <a:effectLst/>
+                <a:latin typeface="Consolas" panose="020B0609020204030204" pitchFamily="49" charset="0"/>
+              </a:rPr>
+              <a:t>userResponseDto</a:t>
+            </a:r>
+            <a:r>
+              <a:rPr lang="en-US" altLang="ko-KR" sz="1050" b="0">
+                <a:solidFill>
+                  <a:srgbClr val="FFA657"/>
+                </a:solidFill>
+                <a:effectLst/>
+                <a:latin typeface="Consolas" panose="020B0609020204030204" pitchFamily="49" charset="0"/>
+              </a:rPr>
+              <a:t> </a:t>
+            </a:r>
+            <a:r>
+              <a:rPr lang="en-US" altLang="ko-KR" sz="1050" b="0">
+                <a:solidFill>
+                  <a:srgbClr val="D4D4D4"/>
+                </a:solidFill>
+                <a:effectLst/>
+                <a:latin typeface="Consolas" panose="020B0609020204030204" pitchFamily="49" charset="0"/>
+              </a:rPr>
+              <a:t>=</a:t>
+            </a:r>
+            <a:r>
+              <a:rPr lang="en-US" altLang="ko-KR" sz="1050" b="0">
+                <a:solidFill>
+                  <a:srgbClr val="BBBEBF"/>
+                </a:solidFill>
+                <a:effectLst/>
+                <a:latin typeface="Consolas" panose="020B0609020204030204" pitchFamily="49" charset="0"/>
+              </a:rPr>
+              <a:t> </a:t>
+            </a:r>
+            <a:r>
+              <a:rPr lang="en-US" altLang="ko-KR" sz="1050" b="0">
+                <a:solidFill>
+                  <a:srgbClr val="C9D1D9"/>
+                </a:solidFill>
+                <a:effectLst/>
+                <a:latin typeface="Consolas" panose="020B0609020204030204" pitchFamily="49" charset="0"/>
+              </a:rPr>
+              <a:t>optionalUserResponseDto</a:t>
+            </a:r>
+            <a:r>
+              <a:rPr lang="en-US" altLang="ko-KR" sz="1050" b="0">
+                <a:solidFill>
+                  <a:srgbClr val="BBBEBF"/>
+                </a:solidFill>
+                <a:effectLst/>
+                <a:latin typeface="Consolas" panose="020B0609020204030204" pitchFamily="49" charset="0"/>
+              </a:rPr>
+              <a:t>.</a:t>
+            </a:r>
+            <a:r>
+              <a:rPr lang="en-US" altLang="ko-KR" sz="1050" b="0">
+                <a:solidFill>
+                  <a:srgbClr val="D2A8FF"/>
+                </a:solidFill>
+                <a:effectLst/>
+                <a:latin typeface="Consolas" panose="020B0609020204030204" pitchFamily="49" charset="0"/>
+              </a:rPr>
+              <a:t>get</a:t>
+            </a:r>
+            <a:r>
+              <a:rPr lang="en-US" altLang="ko-KR" sz="1050" b="0">
+                <a:solidFill>
+                  <a:srgbClr val="BBBEBF"/>
+                </a:solidFill>
+                <a:effectLst/>
+                <a:latin typeface="Consolas" panose="020B0609020204030204" pitchFamily="49" charset="0"/>
+              </a:rPr>
+              <a:t>();</a:t>
+            </a:r>
+          </a:p>
+          <a:p>
+            <a:pPr>
+              <a:lnSpc>
+                <a:spcPts val="1425"/>
+              </a:lnSpc>
+              <a:buNone/>
+            </a:pPr>
+            <a:r>
+              <a:rPr lang="en-US" altLang="ko-KR" sz="1050" b="0">
+                <a:solidFill>
+                  <a:srgbClr val="BBBEBF"/>
+                </a:solidFill>
+                <a:effectLst/>
+                <a:latin typeface="Consolas" panose="020B0609020204030204" pitchFamily="49" charset="0"/>
+              </a:rPr>
+              <a:t>            </a:t>
+            </a:r>
+            <a:r>
+              <a:rPr lang="en-US" altLang="ko-KR" sz="1050" b="0">
+                <a:solidFill>
+                  <a:srgbClr val="8B949E"/>
+                </a:solidFill>
+                <a:effectLst/>
+                <a:latin typeface="Consolas" panose="020B0609020204030204" pitchFamily="49" charset="0"/>
+              </a:rPr>
+              <a:t>// </a:t>
+            </a:r>
+            <a:r>
+              <a:rPr lang="ko-KR" altLang="en-US" sz="1050" b="0">
+                <a:solidFill>
+                  <a:srgbClr val="8B949E"/>
+                </a:solidFill>
+                <a:effectLst/>
+                <a:latin typeface="Consolas" panose="020B0609020204030204" pitchFamily="49" charset="0"/>
+              </a:rPr>
+              <a:t>응답값 조합하기</a:t>
+            </a:r>
+            <a:endParaRPr lang="ko-KR" altLang="en-US" sz="1050" b="0">
+              <a:solidFill>
+                <a:srgbClr val="BBBEBF"/>
+              </a:solidFill>
+              <a:effectLst/>
+              <a:latin typeface="Consolas" panose="020B0609020204030204" pitchFamily="49" charset="0"/>
+            </a:endParaRPr>
+          </a:p>
+          <a:p>
+            <a:pPr>
+              <a:lnSpc>
+                <a:spcPts val="1425"/>
+              </a:lnSpc>
+              <a:buNone/>
+            </a:pPr>
+            <a:r>
+              <a:rPr lang="ko-KR" altLang="en-US" sz="1050" b="0">
+                <a:solidFill>
+                  <a:srgbClr val="BBBEBF"/>
+                </a:solidFill>
+                <a:effectLst/>
+                <a:latin typeface="Consolas" panose="020B0609020204030204" pitchFamily="49" charset="0"/>
+              </a:rPr>
+              <a:t>            </a:t>
+            </a:r>
+            <a:r>
+              <a:rPr lang="en-US" altLang="ko-KR" sz="1050" b="0">
+                <a:solidFill>
+                  <a:srgbClr val="C9D1D9"/>
+                </a:solidFill>
+                <a:effectLst/>
+                <a:latin typeface="Consolas" panose="020B0609020204030204" pitchFamily="49" charset="0"/>
+              </a:rPr>
+              <a:t>userDto</a:t>
+            </a:r>
+            <a:r>
+              <a:rPr lang="en-US" altLang="ko-KR" sz="1050" b="0">
+                <a:solidFill>
+                  <a:srgbClr val="BBBEBF"/>
+                </a:solidFill>
+                <a:effectLst/>
+                <a:latin typeface="Consolas" panose="020B0609020204030204" pitchFamily="49" charset="0"/>
+              </a:rPr>
+              <a:t> </a:t>
+            </a:r>
+            <a:r>
+              <a:rPr lang="en-US" altLang="ko-KR" sz="1050" b="0">
+                <a:solidFill>
+                  <a:srgbClr val="D4D4D4"/>
+                </a:solidFill>
+                <a:effectLst/>
+                <a:latin typeface="Consolas" panose="020B0609020204030204" pitchFamily="49" charset="0"/>
+              </a:rPr>
+              <a:t>=</a:t>
+            </a:r>
+            <a:r>
+              <a:rPr lang="en-US" altLang="ko-KR" sz="1050" b="0">
+                <a:solidFill>
+                  <a:srgbClr val="BBBEBF"/>
+                </a:solidFill>
+                <a:effectLst/>
+                <a:latin typeface="Consolas" panose="020B0609020204030204" pitchFamily="49" charset="0"/>
+              </a:rPr>
+              <a:t> </a:t>
+            </a:r>
+            <a:r>
+              <a:rPr lang="en-US" altLang="ko-KR" sz="1050" b="0">
+                <a:solidFill>
+                  <a:srgbClr val="C586C0"/>
+                </a:solidFill>
+                <a:effectLst/>
+                <a:latin typeface="Consolas" panose="020B0609020204030204" pitchFamily="49" charset="0"/>
+              </a:rPr>
+              <a:t>new</a:t>
+            </a:r>
+            <a:r>
+              <a:rPr lang="en-US" altLang="ko-KR" sz="1050" b="0">
+                <a:solidFill>
+                  <a:srgbClr val="BBBEBF"/>
+                </a:solidFill>
+                <a:effectLst/>
+                <a:latin typeface="Consolas" panose="020B0609020204030204" pitchFamily="49" charset="0"/>
+              </a:rPr>
+              <a:t> </a:t>
+            </a:r>
+            <a:r>
+              <a:rPr lang="en-US" altLang="ko-KR" sz="1050" b="0">
+                <a:solidFill>
+                  <a:srgbClr val="D2A8FF"/>
+                </a:solidFill>
+                <a:effectLst/>
+                <a:latin typeface="Consolas" panose="020B0609020204030204" pitchFamily="49" charset="0"/>
+              </a:rPr>
+              <a:t>UserDto</a:t>
+            </a:r>
+            <a:r>
+              <a:rPr lang="en-US" altLang="ko-KR" sz="1050" b="0">
+                <a:solidFill>
+                  <a:srgbClr val="BBBEBF"/>
+                </a:solidFill>
+                <a:effectLst/>
+                <a:latin typeface="Consolas" panose="020B0609020204030204" pitchFamily="49" charset="0"/>
+              </a:rPr>
+              <a:t>(</a:t>
+            </a:r>
+          </a:p>
+          <a:p>
+            <a:pPr>
+              <a:lnSpc>
+                <a:spcPts val="1425"/>
+              </a:lnSpc>
+              <a:buNone/>
+            </a:pPr>
+            <a:r>
+              <a:rPr lang="en-US" altLang="ko-KR" sz="1050" b="0">
+                <a:solidFill>
+                  <a:srgbClr val="BBBEBF"/>
+                </a:solidFill>
+                <a:effectLst/>
+                <a:latin typeface="Consolas" panose="020B0609020204030204" pitchFamily="49" charset="0"/>
+              </a:rPr>
+              <a:t>                </a:t>
+            </a:r>
+            <a:r>
+              <a:rPr lang="en-US" altLang="ko-KR" sz="1050" b="0">
+                <a:solidFill>
+                  <a:srgbClr val="C9D1D9"/>
+                </a:solidFill>
+                <a:effectLst/>
+                <a:latin typeface="Consolas" panose="020B0609020204030204" pitchFamily="49" charset="0"/>
+              </a:rPr>
+              <a:t>userResponseDto</a:t>
+            </a:r>
+            <a:r>
+              <a:rPr lang="en-US" altLang="ko-KR" sz="1050" b="0">
+                <a:solidFill>
+                  <a:srgbClr val="BBBEBF"/>
+                </a:solidFill>
+                <a:effectLst/>
+                <a:latin typeface="Consolas" panose="020B0609020204030204" pitchFamily="49" charset="0"/>
+              </a:rPr>
+              <a:t>.</a:t>
+            </a:r>
+            <a:r>
+              <a:rPr lang="en-US" altLang="ko-KR" sz="1050" b="0">
+                <a:solidFill>
+                  <a:srgbClr val="D2A8FF"/>
+                </a:solidFill>
+                <a:effectLst/>
+                <a:latin typeface="Consolas" panose="020B0609020204030204" pitchFamily="49" charset="0"/>
+              </a:rPr>
+              <a:t>getUserId</a:t>
+            </a:r>
+            <a:r>
+              <a:rPr lang="en-US" altLang="ko-KR" sz="1050" b="0">
+                <a:solidFill>
+                  <a:srgbClr val="BBBEBF"/>
+                </a:solidFill>
+                <a:effectLst/>
+                <a:latin typeface="Consolas" panose="020B0609020204030204" pitchFamily="49" charset="0"/>
+              </a:rPr>
+              <a:t>(),</a:t>
+            </a:r>
+          </a:p>
+          <a:p>
+            <a:pPr>
+              <a:lnSpc>
+                <a:spcPts val="1425"/>
+              </a:lnSpc>
+              <a:buNone/>
+            </a:pPr>
+            <a:r>
+              <a:rPr lang="en-US" altLang="ko-KR" sz="1050" b="0">
+                <a:solidFill>
+                  <a:srgbClr val="BBBEBF"/>
+                </a:solidFill>
+                <a:effectLst/>
+                <a:latin typeface="Consolas" panose="020B0609020204030204" pitchFamily="49" charset="0"/>
+              </a:rPr>
+              <a:t>                </a:t>
+            </a:r>
+            <a:r>
+              <a:rPr lang="en-US" altLang="ko-KR" sz="1050" b="0">
+                <a:solidFill>
+                  <a:srgbClr val="C9D1D9"/>
+                </a:solidFill>
+                <a:effectLst/>
+                <a:latin typeface="Consolas" panose="020B0609020204030204" pitchFamily="49" charset="0"/>
+              </a:rPr>
+              <a:t>userResponseDto</a:t>
+            </a:r>
+            <a:r>
+              <a:rPr lang="en-US" altLang="ko-KR" sz="1050" b="0">
+                <a:solidFill>
+                  <a:srgbClr val="BBBEBF"/>
+                </a:solidFill>
+                <a:effectLst/>
+                <a:latin typeface="Consolas" panose="020B0609020204030204" pitchFamily="49" charset="0"/>
+              </a:rPr>
+              <a:t>.</a:t>
+            </a:r>
+            <a:r>
+              <a:rPr lang="en-US" altLang="ko-KR" sz="1050" b="0">
+                <a:solidFill>
+                  <a:srgbClr val="D2A8FF"/>
+                </a:solidFill>
+                <a:effectLst/>
+                <a:latin typeface="Consolas" panose="020B0609020204030204" pitchFamily="49" charset="0"/>
+              </a:rPr>
+              <a:t>getName</a:t>
+            </a:r>
+            <a:r>
+              <a:rPr lang="en-US" altLang="ko-KR" sz="1050" b="0">
+                <a:solidFill>
+                  <a:srgbClr val="BBBEBF"/>
+                </a:solidFill>
+                <a:effectLst/>
+                <a:latin typeface="Consolas" panose="020B0609020204030204" pitchFamily="49" charset="0"/>
+              </a:rPr>
+              <a:t>()</a:t>
+            </a:r>
+          </a:p>
+          <a:p>
+            <a:pPr>
+              <a:lnSpc>
+                <a:spcPts val="1425"/>
+              </a:lnSpc>
+              <a:buNone/>
+            </a:pPr>
+            <a:r>
+              <a:rPr lang="en-US" altLang="ko-KR" sz="1050" b="0">
+                <a:solidFill>
+                  <a:srgbClr val="BBBEBF"/>
+                </a:solidFill>
+                <a:effectLst/>
+                <a:latin typeface="Consolas" panose="020B0609020204030204" pitchFamily="49" charset="0"/>
+              </a:rPr>
+              <a:t>            );</a:t>
+            </a:r>
+          </a:p>
+          <a:p>
+            <a:pPr>
+              <a:lnSpc>
+                <a:spcPts val="1425"/>
+              </a:lnSpc>
+              <a:buNone/>
+            </a:pPr>
+            <a:r>
+              <a:rPr lang="en-US" altLang="ko-KR" sz="1050" b="0">
+                <a:solidFill>
+                  <a:srgbClr val="BBBEBF"/>
+                </a:solidFill>
+                <a:effectLst/>
+                <a:latin typeface="Consolas" panose="020B0609020204030204" pitchFamily="49" charset="0"/>
+              </a:rPr>
+              <a:t>        }</a:t>
+            </a:r>
+          </a:p>
+          <a:p>
+            <a:pPr>
+              <a:lnSpc>
+                <a:spcPts val="1425"/>
+              </a:lnSpc>
+              <a:buNone/>
+            </a:pPr>
+            <a:endParaRPr lang="en-US" altLang="ko-KR" sz="1050" b="0">
+              <a:solidFill>
+                <a:srgbClr val="BBBEBF"/>
+              </a:solidFill>
+              <a:effectLst/>
+              <a:latin typeface="Consolas" panose="020B0609020204030204" pitchFamily="49" charset="0"/>
+            </a:endParaRPr>
+          </a:p>
+          <a:p>
+            <a:pPr>
+              <a:lnSpc>
+                <a:spcPts val="1425"/>
+              </a:lnSpc>
+              <a:buNone/>
+            </a:pPr>
+            <a:r>
+              <a:rPr lang="en-US" altLang="ko-KR" sz="1050" b="0">
+                <a:solidFill>
+                  <a:srgbClr val="BBBEBF"/>
+                </a:solidFill>
+                <a:effectLst/>
+                <a:latin typeface="Consolas" panose="020B0609020204030204" pitchFamily="49" charset="0"/>
+              </a:rPr>
+              <a:t>        </a:t>
+            </a:r>
+            <a:r>
+              <a:rPr lang="en-US" altLang="ko-KR" sz="1050" b="0">
+                <a:solidFill>
+                  <a:srgbClr val="C586C0"/>
+                </a:solidFill>
+                <a:effectLst/>
+                <a:latin typeface="Consolas" panose="020B0609020204030204" pitchFamily="49" charset="0"/>
+              </a:rPr>
+              <a:t>return</a:t>
+            </a:r>
+            <a:r>
+              <a:rPr lang="en-US" altLang="ko-KR" sz="1050" b="0">
+                <a:solidFill>
+                  <a:srgbClr val="BBBEBF"/>
+                </a:solidFill>
+                <a:effectLst/>
+                <a:latin typeface="Consolas" panose="020B0609020204030204" pitchFamily="49" charset="0"/>
+              </a:rPr>
+              <a:t> </a:t>
+            </a:r>
+            <a:r>
+              <a:rPr lang="en-US" altLang="ko-KR" sz="1050" b="0">
+                <a:solidFill>
+                  <a:srgbClr val="C586C0"/>
+                </a:solidFill>
+                <a:effectLst/>
+                <a:latin typeface="Consolas" panose="020B0609020204030204" pitchFamily="49" charset="0"/>
+              </a:rPr>
+              <a:t>new</a:t>
+            </a:r>
+            <a:r>
+              <a:rPr lang="en-US" altLang="ko-KR" sz="1050" b="0">
+                <a:solidFill>
+                  <a:srgbClr val="BBBEBF"/>
+                </a:solidFill>
+                <a:effectLst/>
+                <a:latin typeface="Consolas" panose="020B0609020204030204" pitchFamily="49" charset="0"/>
+              </a:rPr>
+              <a:t> </a:t>
+            </a:r>
+            <a:r>
+              <a:rPr lang="en-US" altLang="ko-KR" sz="1050" b="0">
+                <a:solidFill>
+                  <a:srgbClr val="D2A8FF"/>
+                </a:solidFill>
+                <a:effectLst/>
+                <a:latin typeface="Consolas" panose="020B0609020204030204" pitchFamily="49" charset="0"/>
+              </a:rPr>
+              <a:t>BoardResponseDto</a:t>
+            </a:r>
+            <a:r>
+              <a:rPr lang="en-US" altLang="ko-KR" sz="1050" b="0">
+                <a:solidFill>
+                  <a:srgbClr val="BBBEBF"/>
+                </a:solidFill>
+                <a:effectLst/>
+                <a:latin typeface="Consolas" panose="020B0609020204030204" pitchFamily="49" charset="0"/>
+              </a:rPr>
+              <a:t>(</a:t>
+            </a:r>
+          </a:p>
+          <a:p>
+            <a:pPr>
+              <a:lnSpc>
+                <a:spcPts val="1425"/>
+              </a:lnSpc>
+              <a:buNone/>
+            </a:pPr>
+            <a:r>
+              <a:rPr lang="en-US" altLang="ko-KR" sz="1050" b="0">
+                <a:solidFill>
+                  <a:srgbClr val="BBBEBF"/>
+                </a:solidFill>
+                <a:effectLst/>
+                <a:latin typeface="Consolas" panose="020B0609020204030204" pitchFamily="49" charset="0"/>
+              </a:rPr>
+              <a:t>            </a:t>
+            </a:r>
+            <a:r>
+              <a:rPr lang="en-US" altLang="ko-KR" sz="1050" b="0">
+                <a:solidFill>
+                  <a:srgbClr val="C9D1D9"/>
+                </a:solidFill>
+                <a:effectLst/>
+                <a:latin typeface="Consolas" panose="020B0609020204030204" pitchFamily="49" charset="0"/>
+              </a:rPr>
+              <a:t>board</a:t>
+            </a:r>
+            <a:r>
+              <a:rPr lang="en-US" altLang="ko-KR" sz="1050" b="0">
+                <a:solidFill>
+                  <a:srgbClr val="BBBEBF"/>
+                </a:solidFill>
+                <a:effectLst/>
+                <a:latin typeface="Consolas" panose="020B0609020204030204" pitchFamily="49" charset="0"/>
+              </a:rPr>
+              <a:t>.</a:t>
+            </a:r>
+            <a:r>
+              <a:rPr lang="en-US" altLang="ko-KR" sz="1050" b="0">
+                <a:solidFill>
+                  <a:srgbClr val="D2A8FF"/>
+                </a:solidFill>
+                <a:effectLst/>
+                <a:latin typeface="Consolas" panose="020B0609020204030204" pitchFamily="49" charset="0"/>
+              </a:rPr>
+              <a:t>getBoardId</a:t>
+            </a:r>
+            <a:r>
+              <a:rPr lang="en-US" altLang="ko-KR" sz="1050" b="0">
+                <a:solidFill>
+                  <a:srgbClr val="BBBEBF"/>
+                </a:solidFill>
+                <a:effectLst/>
+                <a:latin typeface="Consolas" panose="020B0609020204030204" pitchFamily="49" charset="0"/>
+              </a:rPr>
+              <a:t>(),</a:t>
+            </a:r>
+          </a:p>
+          <a:p>
+            <a:pPr>
+              <a:lnSpc>
+                <a:spcPts val="1425"/>
+              </a:lnSpc>
+              <a:buNone/>
+            </a:pPr>
+            <a:r>
+              <a:rPr lang="en-US" altLang="ko-KR" sz="1050" b="0">
+                <a:solidFill>
+                  <a:srgbClr val="BBBEBF"/>
+                </a:solidFill>
+                <a:effectLst/>
+                <a:latin typeface="Consolas" panose="020B0609020204030204" pitchFamily="49" charset="0"/>
+              </a:rPr>
+              <a:t>            </a:t>
+            </a:r>
+            <a:r>
+              <a:rPr lang="en-US" altLang="ko-KR" sz="1050" b="0">
+                <a:solidFill>
+                  <a:srgbClr val="C9D1D9"/>
+                </a:solidFill>
+                <a:effectLst/>
+                <a:latin typeface="Consolas" panose="020B0609020204030204" pitchFamily="49" charset="0"/>
+              </a:rPr>
+              <a:t>board</a:t>
+            </a:r>
+            <a:r>
+              <a:rPr lang="en-US" altLang="ko-KR" sz="1050" b="0">
+                <a:solidFill>
+                  <a:srgbClr val="BBBEBF"/>
+                </a:solidFill>
+                <a:effectLst/>
+                <a:latin typeface="Consolas" panose="020B0609020204030204" pitchFamily="49" charset="0"/>
+              </a:rPr>
+              <a:t>.</a:t>
+            </a:r>
+            <a:r>
+              <a:rPr lang="en-US" altLang="ko-KR" sz="1050" b="0">
+                <a:solidFill>
+                  <a:srgbClr val="D2A8FF"/>
+                </a:solidFill>
+                <a:effectLst/>
+                <a:latin typeface="Consolas" panose="020B0609020204030204" pitchFamily="49" charset="0"/>
+              </a:rPr>
+              <a:t>getTitle</a:t>
+            </a:r>
+            <a:r>
+              <a:rPr lang="en-US" altLang="ko-KR" sz="1050" b="0">
+                <a:solidFill>
+                  <a:srgbClr val="BBBEBF"/>
+                </a:solidFill>
+                <a:effectLst/>
+                <a:latin typeface="Consolas" panose="020B0609020204030204" pitchFamily="49" charset="0"/>
+              </a:rPr>
+              <a:t>(),</a:t>
+            </a:r>
+          </a:p>
+          <a:p>
+            <a:pPr>
+              <a:lnSpc>
+                <a:spcPts val="1425"/>
+              </a:lnSpc>
+              <a:buNone/>
+            </a:pPr>
+            <a:r>
+              <a:rPr lang="en-US" altLang="ko-KR" sz="1050" b="0">
+                <a:solidFill>
+                  <a:srgbClr val="BBBEBF"/>
+                </a:solidFill>
+                <a:effectLst/>
+                <a:latin typeface="Consolas" panose="020B0609020204030204" pitchFamily="49" charset="0"/>
+              </a:rPr>
+              <a:t>            </a:t>
+            </a:r>
+            <a:r>
+              <a:rPr lang="en-US" altLang="ko-KR" sz="1050" b="0">
+                <a:solidFill>
+                  <a:srgbClr val="C9D1D9"/>
+                </a:solidFill>
+                <a:effectLst/>
+                <a:latin typeface="Consolas" panose="020B0609020204030204" pitchFamily="49" charset="0"/>
+              </a:rPr>
+              <a:t>board</a:t>
+            </a:r>
+            <a:r>
+              <a:rPr lang="en-US" altLang="ko-KR" sz="1050" b="0">
+                <a:solidFill>
+                  <a:srgbClr val="BBBEBF"/>
+                </a:solidFill>
+                <a:effectLst/>
+                <a:latin typeface="Consolas" panose="020B0609020204030204" pitchFamily="49" charset="0"/>
+              </a:rPr>
+              <a:t>.</a:t>
+            </a:r>
+            <a:r>
+              <a:rPr lang="en-US" altLang="ko-KR" sz="1050" b="0">
+                <a:solidFill>
+                  <a:srgbClr val="D2A8FF"/>
+                </a:solidFill>
+                <a:effectLst/>
+                <a:latin typeface="Consolas" panose="020B0609020204030204" pitchFamily="49" charset="0"/>
+              </a:rPr>
+              <a:t>getContent</a:t>
+            </a:r>
+            <a:r>
+              <a:rPr lang="en-US" altLang="ko-KR" sz="1050" b="0">
+                <a:solidFill>
+                  <a:srgbClr val="BBBEBF"/>
+                </a:solidFill>
+                <a:effectLst/>
+                <a:latin typeface="Consolas" panose="020B0609020204030204" pitchFamily="49" charset="0"/>
+              </a:rPr>
+              <a:t>(),</a:t>
+            </a:r>
+          </a:p>
+          <a:p>
+            <a:pPr>
+              <a:lnSpc>
+                <a:spcPts val="1425"/>
+              </a:lnSpc>
+              <a:buNone/>
+            </a:pPr>
+            <a:r>
+              <a:rPr lang="en-US" altLang="ko-KR" sz="1050" b="0">
+                <a:solidFill>
+                  <a:srgbClr val="BBBEBF"/>
+                </a:solidFill>
+                <a:effectLst/>
+                <a:latin typeface="Consolas" panose="020B0609020204030204" pitchFamily="49" charset="0"/>
+              </a:rPr>
+              <a:t>            </a:t>
+            </a:r>
+            <a:r>
+              <a:rPr lang="en-US" altLang="ko-KR" sz="1050" b="0">
+                <a:solidFill>
+                  <a:srgbClr val="C9D1D9"/>
+                </a:solidFill>
+                <a:effectLst/>
+                <a:latin typeface="Consolas" panose="020B0609020204030204" pitchFamily="49" charset="0"/>
+              </a:rPr>
+              <a:t>userDto</a:t>
+            </a:r>
+            <a:endParaRPr lang="en-US" altLang="ko-KR" sz="1050" b="0">
+              <a:solidFill>
+                <a:srgbClr val="BBBEBF"/>
+              </a:solidFill>
+              <a:effectLst/>
+              <a:latin typeface="Consolas" panose="020B0609020204030204" pitchFamily="49" charset="0"/>
+            </a:endParaRPr>
+          </a:p>
+          <a:p>
+            <a:pPr>
+              <a:lnSpc>
+                <a:spcPts val="1425"/>
+              </a:lnSpc>
+              <a:buNone/>
+            </a:pPr>
+            <a:r>
+              <a:rPr lang="en-US" altLang="ko-KR" sz="1050" b="0">
+                <a:solidFill>
+                  <a:srgbClr val="BBBEBF"/>
+                </a:solidFill>
+                <a:effectLst/>
+                <a:latin typeface="Consolas" panose="020B0609020204030204" pitchFamily="49" charset="0"/>
+              </a:rPr>
+              <a:t>        );</a:t>
+            </a:r>
+          </a:p>
+          <a:p>
+            <a:pPr>
+              <a:lnSpc>
+                <a:spcPts val="1425"/>
+              </a:lnSpc>
+              <a:buNone/>
+            </a:pPr>
+            <a:r>
+              <a:rPr lang="en-US" altLang="ko-KR" sz="1050" b="0">
+                <a:solidFill>
+                  <a:srgbClr val="BBBEBF"/>
+                </a:solidFill>
+                <a:effectLst/>
+                <a:latin typeface="Consolas" panose="020B0609020204030204" pitchFamily="49" charset="0"/>
+              </a:rPr>
+              <a:t>    }</a:t>
+            </a:r>
+          </a:p>
+        </p:txBody>
+      </p:sp>
+      <p:sp>
+        <p:nvSpPr>
+          <p:cNvPr id="10" name="TextBox 9">
+            <a:extLst>
+              <a:ext uri="{FF2B5EF4-FFF2-40B4-BE49-F238E27FC236}">
+                <a16:creationId xmlns:a16="http://schemas.microsoft.com/office/drawing/2014/main" id="{E90C1810-502E-E2B9-13E0-038286E6E24A}"/>
+              </a:ext>
+            </a:extLst>
+          </p:cNvPr>
+          <p:cNvSpPr txBox="1"/>
+          <p:nvPr/>
+        </p:nvSpPr>
+        <p:spPr>
+          <a:xfrm>
+            <a:off x="388041" y="3429000"/>
+            <a:ext cx="2838846" cy="1200329"/>
+          </a:xfrm>
+          <a:prstGeom prst="rect">
+            <a:avLst/>
+          </a:prstGeom>
+          <a:noFill/>
+        </p:spPr>
+        <p:txBody>
+          <a:bodyPr wrap="square" rtlCol="0">
+            <a:spAutoFit/>
+          </a:bodyPr>
+          <a:lstStyle/>
+          <a:p>
+            <a:r>
+              <a:rPr lang="en-US" altLang="ko-KR" sz="1200"/>
+              <a:t>optional&lt;UserResponseDto&gt; </a:t>
+            </a:r>
+            <a:r>
+              <a:rPr lang="ko-KR" altLang="en-US" sz="1200"/>
+              <a:t>객체를 통해</a:t>
+            </a:r>
+            <a:endParaRPr lang="en-US" altLang="ko-KR" sz="1200"/>
+          </a:p>
+          <a:p>
+            <a:r>
+              <a:rPr lang="ko-KR" altLang="en-US" sz="1200"/>
+              <a:t>응답 정보가 존재하는지 확인하여</a:t>
+            </a:r>
+            <a:r>
+              <a:rPr lang="en-US" altLang="ko-KR" sz="1200"/>
+              <a:t>,</a:t>
+            </a:r>
+            <a:br>
+              <a:rPr lang="en-US" altLang="ko-KR" sz="1200"/>
+            </a:br>
+            <a:r>
+              <a:rPr lang="ko-KR" altLang="en-US" sz="1200"/>
+              <a:t>존재할 경우 </a:t>
+            </a:r>
+            <a:r>
+              <a:rPr lang="en-US" altLang="ko-KR" sz="1200"/>
+              <a:t>UserDto</a:t>
+            </a:r>
+            <a:r>
+              <a:rPr lang="ko-KR" altLang="en-US" sz="1200"/>
+              <a:t>를 셋팅하게 한다</a:t>
+            </a:r>
+            <a:r>
+              <a:rPr lang="en-US" altLang="ko-KR" sz="1200"/>
+              <a:t>.</a:t>
+            </a:r>
+          </a:p>
+          <a:p>
+            <a:endParaRPr lang="en-US" altLang="ko-KR" sz="1200"/>
+          </a:p>
+          <a:p>
+            <a:r>
+              <a:rPr lang="ko-KR" altLang="en-US" sz="1200"/>
+              <a:t>존재하지 않는 경우 </a:t>
+            </a:r>
+            <a:r>
+              <a:rPr lang="en-US" altLang="ko-KR" sz="1200"/>
+              <a:t>userDto</a:t>
+            </a:r>
+            <a:r>
+              <a:rPr lang="ko-KR" altLang="en-US" sz="1200"/>
+              <a:t>의 정보는 </a:t>
+            </a:r>
+            <a:r>
+              <a:rPr lang="en-US" altLang="ko-KR" sz="1200"/>
+              <a:t>BoardResponseDto</a:t>
+            </a:r>
+            <a:r>
+              <a:rPr lang="ko-KR" altLang="en-US" sz="1200"/>
+              <a:t>에 셋팅하지 않는다</a:t>
+            </a:r>
+            <a:r>
+              <a:rPr lang="en-US" altLang="ko-KR" sz="1200"/>
+              <a:t>.</a:t>
+            </a:r>
+            <a:endParaRPr lang="ko-KR" altLang="en-US" sz="1200"/>
+          </a:p>
+        </p:txBody>
+      </p:sp>
+    </p:spTree>
+    <p:extLst>
+      <p:ext uri="{BB962C8B-B14F-4D97-AF65-F5344CB8AC3E}">
+        <p14:creationId xmlns:p14="http://schemas.microsoft.com/office/powerpoint/2010/main" val="947394776"/>
+      </p:ext>
+    </p:extLst>
+  </p:cSld>
+  <p:clrMapOvr>
+    <a:masterClrMapping/>
+  </p:clrMapOvr>
+</p:sld>
+</file>
+
+<file path=ppt/slides/slide24.xml><?xml version="1.0" encoding="utf-8"?>
+<p:sld xmlns:a="http://schemas.openxmlformats.org/drawingml/2006/main" xmlns:r="http://schemas.openxmlformats.org/officeDocument/2006/relationships" xmlns:p="http://schemas.openxmlformats.org/presentationml/2006/main">
+  <p:cSld>
+    <p:spTree>
+      <p:nvGrpSpPr>
+        <p:cNvPr id="1" name=""/>
+        <p:cNvGrpSpPr/>
+        <p:nvPr/>
+      </p:nvGrpSpPr>
+      <p:grpSpPr>
+        <a:xfrm>
+          <a:off x="0" y="0"/>
+          <a:ext cx="0" cy="0"/>
+          <a:chOff x="0" y="0"/>
+          <a:chExt cx="0" cy="0"/>
+        </a:xfrm>
+      </p:grpSpPr>
+      <p:sp>
+        <p:nvSpPr>
+          <p:cNvPr id="2" name="제목 1">
+            <a:extLst>
+              <a:ext uri="{FF2B5EF4-FFF2-40B4-BE49-F238E27FC236}">
+                <a16:creationId xmlns:a16="http://schemas.microsoft.com/office/drawing/2014/main" id="{CFF0BD19-CF4F-A285-0770-B68D321E3E1A}"/>
+              </a:ext>
+            </a:extLst>
+          </p:cNvPr>
+          <p:cNvSpPr>
+            <a:spLocks noGrp="1"/>
+          </p:cNvSpPr>
+          <p:nvPr>
+            <p:ph type="title"/>
+          </p:nvPr>
+        </p:nvSpPr>
+        <p:spPr/>
+        <p:txBody>
+          <a:bodyPr/>
+          <a:lstStyle/>
+          <a:p>
+            <a:r>
+              <a:rPr lang="ko-KR" altLang="en-US"/>
+              <a:t>장애 전파 방지 확인</a:t>
+            </a:r>
+          </a:p>
+        </p:txBody>
+      </p:sp>
+      <p:grpSp>
+        <p:nvGrpSpPr>
+          <p:cNvPr id="6" name="그룹 5">
+            <a:extLst>
+              <a:ext uri="{FF2B5EF4-FFF2-40B4-BE49-F238E27FC236}">
+                <a16:creationId xmlns:a16="http://schemas.microsoft.com/office/drawing/2014/main" id="{D4679E9C-F1AF-89F6-D91E-02FC29D5AE63}"/>
+              </a:ext>
+            </a:extLst>
+          </p:cNvPr>
+          <p:cNvGrpSpPr/>
+          <p:nvPr/>
+        </p:nvGrpSpPr>
+        <p:grpSpPr>
+          <a:xfrm>
+            <a:off x="1097280" y="1985108"/>
+            <a:ext cx="5372850" cy="4058216"/>
+            <a:chOff x="1097280" y="1985108"/>
+            <a:chExt cx="5372850" cy="4058216"/>
+          </a:xfrm>
+        </p:grpSpPr>
+        <p:pic>
+          <p:nvPicPr>
+            <p:cNvPr id="4" name="그림 3">
+              <a:extLst>
+                <a:ext uri="{FF2B5EF4-FFF2-40B4-BE49-F238E27FC236}">
+                  <a16:creationId xmlns:a16="http://schemas.microsoft.com/office/drawing/2014/main" id="{800CF7DA-67D1-2FCA-3CE8-192D36B52DB7}"/>
+                </a:ext>
+              </a:extLst>
+            </p:cNvPr>
+            <p:cNvPicPr>
+              <a:picLocks noChangeAspect="1"/>
+            </p:cNvPicPr>
+            <p:nvPr/>
+          </p:nvPicPr>
+          <p:blipFill>
+            <a:blip r:embed="rId2"/>
+            <a:stretch>
+              <a:fillRect/>
+            </a:stretch>
+          </p:blipFill>
+          <p:spPr>
+            <a:xfrm>
+              <a:off x="1097280" y="1985108"/>
+              <a:ext cx="5372850" cy="4058216"/>
+            </a:xfrm>
+            <a:prstGeom prst="rect">
+              <a:avLst/>
+            </a:prstGeom>
+          </p:spPr>
+        </p:pic>
+        <p:sp>
+          <p:nvSpPr>
+            <p:cNvPr id="5" name="직사각형 4">
+              <a:extLst>
+                <a:ext uri="{FF2B5EF4-FFF2-40B4-BE49-F238E27FC236}">
+                  <a16:creationId xmlns:a16="http://schemas.microsoft.com/office/drawing/2014/main" id="{0ACC73C2-6D04-2044-F4A7-DC1A56338CE1}"/>
+                </a:ext>
+              </a:extLst>
+            </p:cNvPr>
+            <p:cNvSpPr/>
+            <p:nvPr/>
+          </p:nvSpPr>
+          <p:spPr>
+            <a:xfrm>
+              <a:off x="4901184" y="5431536"/>
+              <a:ext cx="950976" cy="310896"/>
+            </a:xfrm>
+            <a:prstGeom prst="rect">
+              <a:avLst/>
+            </a:prstGeom>
+            <a:noFill/>
+            <a:ln>
+              <a:solidFill>
+                <a:srgbClr val="FF0000"/>
+              </a:solidFill>
+            </a:ln>
+          </p:spPr>
+          <p:style>
+            <a:lnRef idx="2">
+              <a:schemeClr val="accent1">
+                <a:shade val="15000"/>
+              </a:schemeClr>
+            </a:lnRef>
+            <a:fillRef idx="1">
+              <a:schemeClr val="accent1"/>
+            </a:fillRef>
+            <a:effectRef idx="0">
+              <a:schemeClr val="accent1"/>
+            </a:effectRef>
+            <a:fontRef idx="minor">
+              <a:schemeClr val="lt1"/>
+            </a:fontRef>
+          </p:style>
+          <p:txBody>
+            <a:bodyPr rtlCol="0" anchor="ctr"/>
+            <a:lstStyle/>
+            <a:p>
+              <a:pPr algn="ctr"/>
+              <a:endParaRPr lang="ko-KR" altLang="en-US"/>
+            </a:p>
+          </p:txBody>
+        </p:sp>
+      </p:grpSp>
+    </p:spTree>
+    <p:extLst>
+      <p:ext uri="{BB962C8B-B14F-4D97-AF65-F5344CB8AC3E}">
+        <p14:creationId xmlns:p14="http://schemas.microsoft.com/office/powerpoint/2010/main" val="2555995908"/>
       </p:ext>
     </p:extLst>
   </p:cSld>

--- a/msa-ppt/3.데이터 조회 API 구현.pptx
+++ b/msa-ppt/3.데이터 조회 API 구현.pptx
@@ -29,6 +29,9 @@
     <p:sldId id="278" r:id="rId23"/>
     <p:sldId id="279" r:id="rId24"/>
     <p:sldId id="280" r:id="rId25"/>
+    <p:sldId id="281" r:id="rId26"/>
+    <p:sldId id="282" r:id="rId27"/>
+    <p:sldId id="283" r:id="rId28"/>
   </p:sldIdLst>
   <p:sldSz cx="12192000" cy="6858000"/>
   <p:notesSz cx="6858000" cy="9144000"/>
@@ -176,6 +179,13 @@
             <p14:sldId id="278"/>
             <p14:sldId id="279"/>
             <p14:sldId id="280"/>
+          </p14:sldIdLst>
+        </p14:section>
+        <p14:section name="회원 정보 리스트 조회 API" id="{2299C0B9-43B4-4183-B696-6A18A34DE164}">
+          <p14:sldIdLst>
+            <p14:sldId id="281"/>
+            <p14:sldId id="282"/>
+            <p14:sldId id="283"/>
           </p14:sldIdLst>
         </p14:section>
       </p14:sectionLst>
@@ -18788,6 +18798,1888 @@
 </p:sld>
 </file>
 
+<file path=ppt/slides/slide25.xml><?xml version="1.0" encoding="utf-8"?>
+<p:sld xmlns:a="http://schemas.openxmlformats.org/drawingml/2006/main" xmlns:r="http://schemas.openxmlformats.org/officeDocument/2006/relationships" xmlns:p="http://schemas.openxmlformats.org/presentationml/2006/main">
+  <p:cSld>
+    <p:spTree>
+      <p:nvGrpSpPr>
+        <p:cNvPr id="1" name=""/>
+        <p:cNvGrpSpPr/>
+        <p:nvPr/>
+      </p:nvGrpSpPr>
+      <p:grpSpPr>
+        <a:xfrm>
+          <a:off x="0" y="0"/>
+          <a:ext cx="0" cy="0"/>
+          <a:chOff x="0" y="0"/>
+          <a:chExt cx="0" cy="0"/>
+        </a:xfrm>
+      </p:grpSpPr>
+      <p:sp>
+        <p:nvSpPr>
+          <p:cNvPr id="2" name="제목 1">
+            <a:extLst>
+              <a:ext uri="{FF2B5EF4-FFF2-40B4-BE49-F238E27FC236}">
+                <a16:creationId xmlns:a16="http://schemas.microsoft.com/office/drawing/2014/main" id="{BAA3F9CC-8AE9-2BED-2BC7-B263E520A5EC}"/>
+              </a:ext>
+            </a:extLst>
+          </p:cNvPr>
+          <p:cNvSpPr>
+            <a:spLocks noGrp="1"/>
+          </p:cNvSpPr>
+          <p:nvPr>
+            <p:ph type="title"/>
+          </p:nvPr>
+        </p:nvSpPr>
+        <p:spPr/>
+        <p:txBody>
+          <a:bodyPr>
+            <a:normAutofit/>
+          </a:bodyPr>
+          <a:lstStyle/>
+          <a:p>
+            <a:r>
+              <a:rPr lang="ko-KR" altLang="en-US" sz="4000"/>
+              <a:t>회원 </a:t>
+            </a:r>
+            <a:r>
+              <a:rPr lang="en-US" altLang="ko-KR" sz="4000"/>
+              <a:t>ID </a:t>
+            </a:r>
+            <a:r>
+              <a:rPr lang="ko-KR" altLang="en-US" sz="4000"/>
+              <a:t>리스트를 통한 정보조회 </a:t>
+            </a:r>
+            <a:r>
+              <a:rPr lang="en-US" altLang="ko-KR" sz="4000"/>
+              <a:t>- UserService</a:t>
+            </a:r>
+            <a:endParaRPr lang="ko-KR" altLang="en-US" sz="4000"/>
+          </a:p>
+        </p:txBody>
+      </p:sp>
+      <p:sp>
+        <p:nvSpPr>
+          <p:cNvPr id="4" name="TextBox 3">
+            <a:extLst>
+              <a:ext uri="{FF2B5EF4-FFF2-40B4-BE49-F238E27FC236}">
+                <a16:creationId xmlns:a16="http://schemas.microsoft.com/office/drawing/2014/main" id="{E95CE448-FDA4-8E06-5EF4-D0DCB00C56B1}"/>
+              </a:ext>
+            </a:extLst>
+          </p:cNvPr>
+          <p:cNvSpPr txBox="1"/>
+          <p:nvPr/>
+        </p:nvSpPr>
+        <p:spPr>
+          <a:xfrm>
+            <a:off x="4016502" y="1940082"/>
+            <a:ext cx="6094476" cy="1708160"/>
+          </a:xfrm>
+          <a:prstGeom prst="rect">
+            <a:avLst/>
+          </a:prstGeom>
+          <a:solidFill>
+            <a:schemeClr val="tx1"/>
+          </a:solidFill>
+        </p:spPr>
+        <p:txBody>
+          <a:bodyPr wrap="square">
+            <a:spAutoFit/>
+          </a:bodyPr>
+          <a:lstStyle/>
+          <a:p>
+            <a:pPr>
+              <a:lnSpc>
+                <a:spcPts val="1425"/>
+              </a:lnSpc>
+              <a:buNone/>
+            </a:pPr>
+            <a:r>
+              <a:rPr lang="en-US" altLang="ko-KR" sz="1200" b="0">
+                <a:solidFill>
+                  <a:srgbClr val="BBBEBF"/>
+                </a:solidFill>
+                <a:effectLst/>
+                <a:latin typeface="Consolas" panose="020B0609020204030204" pitchFamily="49" charset="0"/>
+              </a:rPr>
+              <a:t>    </a:t>
+            </a:r>
+            <a:r>
+              <a:rPr lang="en-US" altLang="ko-KR" sz="1200" b="0">
+                <a:solidFill>
+                  <a:srgbClr val="569CD6"/>
+                </a:solidFill>
+                <a:effectLst/>
+                <a:latin typeface="Consolas" panose="020B0609020204030204" pitchFamily="49" charset="0"/>
+              </a:rPr>
+              <a:t>public</a:t>
+            </a:r>
+            <a:r>
+              <a:rPr lang="en-US" altLang="ko-KR" sz="1200" b="0">
+                <a:solidFill>
+                  <a:srgbClr val="BBBEBF"/>
+                </a:solidFill>
+                <a:effectLst/>
+                <a:latin typeface="Consolas" panose="020B0609020204030204" pitchFamily="49" charset="0"/>
+              </a:rPr>
+              <a:t> </a:t>
+            </a:r>
+            <a:r>
+              <a:rPr lang="en-US" altLang="ko-KR" sz="1200" b="0">
+                <a:solidFill>
+                  <a:srgbClr val="4EC9B0"/>
+                </a:solidFill>
+                <a:effectLst/>
+                <a:latin typeface="Consolas" panose="020B0609020204030204" pitchFamily="49" charset="0"/>
+              </a:rPr>
+              <a:t>List</a:t>
+            </a:r>
+            <a:r>
+              <a:rPr lang="en-US" altLang="ko-KR" sz="1200" b="0">
+                <a:solidFill>
+                  <a:srgbClr val="BBBEBF"/>
+                </a:solidFill>
+                <a:effectLst/>
+                <a:latin typeface="Consolas" panose="020B0609020204030204" pitchFamily="49" charset="0"/>
+              </a:rPr>
+              <a:t>&lt;</a:t>
+            </a:r>
+            <a:r>
+              <a:rPr lang="en-US" altLang="ko-KR" sz="1200" b="0">
+                <a:solidFill>
+                  <a:srgbClr val="4EC9B0"/>
+                </a:solidFill>
+                <a:effectLst/>
+                <a:latin typeface="Consolas" panose="020B0609020204030204" pitchFamily="49" charset="0"/>
+              </a:rPr>
+              <a:t>UserResponseDto</a:t>
+            </a:r>
+            <a:r>
+              <a:rPr lang="en-US" altLang="ko-KR" sz="1200" b="0">
+                <a:solidFill>
+                  <a:srgbClr val="BBBEBF"/>
+                </a:solidFill>
+                <a:effectLst/>
+                <a:latin typeface="Consolas" panose="020B0609020204030204" pitchFamily="49" charset="0"/>
+              </a:rPr>
+              <a:t>&gt; </a:t>
+            </a:r>
+            <a:r>
+              <a:rPr lang="en-US" altLang="ko-KR" sz="1200" b="0">
+                <a:solidFill>
+                  <a:srgbClr val="D2A8FF"/>
+                </a:solidFill>
+                <a:effectLst/>
+                <a:latin typeface="Consolas" panose="020B0609020204030204" pitchFamily="49" charset="0"/>
+              </a:rPr>
+              <a:t>getUsersByIds</a:t>
+            </a:r>
+            <a:r>
+              <a:rPr lang="en-US" altLang="ko-KR" sz="1200" b="0">
+                <a:solidFill>
+                  <a:srgbClr val="BBBEBF"/>
+                </a:solidFill>
+                <a:effectLst/>
+                <a:latin typeface="Consolas" panose="020B0609020204030204" pitchFamily="49" charset="0"/>
+              </a:rPr>
+              <a:t>(</a:t>
+            </a:r>
+            <a:r>
+              <a:rPr lang="en-US" altLang="ko-KR" sz="1200" b="0">
+                <a:solidFill>
+                  <a:srgbClr val="4EC9B0"/>
+                </a:solidFill>
+                <a:effectLst/>
+                <a:latin typeface="Consolas" panose="020B0609020204030204" pitchFamily="49" charset="0"/>
+              </a:rPr>
+              <a:t>List</a:t>
+            </a:r>
+            <a:r>
+              <a:rPr lang="en-US" altLang="ko-KR" sz="1200" b="0">
+                <a:solidFill>
+                  <a:srgbClr val="BBBEBF"/>
+                </a:solidFill>
+                <a:effectLst/>
+                <a:latin typeface="Consolas" panose="020B0609020204030204" pitchFamily="49" charset="0"/>
+              </a:rPr>
+              <a:t>&lt;</a:t>
+            </a:r>
+            <a:r>
+              <a:rPr lang="en-US" altLang="ko-KR" sz="1200" b="0">
+                <a:solidFill>
+                  <a:srgbClr val="4EC9B0"/>
+                </a:solidFill>
+                <a:effectLst/>
+                <a:latin typeface="Consolas" panose="020B0609020204030204" pitchFamily="49" charset="0"/>
+              </a:rPr>
+              <a:t>Long</a:t>
+            </a:r>
+            <a:r>
+              <a:rPr lang="en-US" altLang="ko-KR" sz="1200" b="0">
+                <a:solidFill>
+                  <a:srgbClr val="BBBEBF"/>
+                </a:solidFill>
+                <a:effectLst/>
+                <a:latin typeface="Consolas" panose="020B0609020204030204" pitchFamily="49" charset="0"/>
+              </a:rPr>
+              <a:t>&gt; </a:t>
+            </a:r>
+            <a:r>
+              <a:rPr lang="en-US" altLang="ko-KR" sz="1200" b="0">
+                <a:solidFill>
+                  <a:srgbClr val="FFA657"/>
+                </a:solidFill>
+                <a:effectLst/>
+                <a:latin typeface="Consolas" panose="020B0609020204030204" pitchFamily="49" charset="0"/>
+              </a:rPr>
+              <a:t>ids</a:t>
+            </a:r>
+            <a:r>
+              <a:rPr lang="en-US" altLang="ko-KR" sz="1200" b="0">
+                <a:solidFill>
+                  <a:srgbClr val="BBBEBF"/>
+                </a:solidFill>
+                <a:effectLst/>
+                <a:latin typeface="Consolas" panose="020B0609020204030204" pitchFamily="49" charset="0"/>
+              </a:rPr>
+              <a:t>) {</a:t>
+            </a:r>
+          </a:p>
+          <a:p>
+            <a:pPr>
+              <a:lnSpc>
+                <a:spcPts val="1425"/>
+              </a:lnSpc>
+              <a:buNone/>
+            </a:pPr>
+            <a:r>
+              <a:rPr lang="en-US" altLang="ko-KR" sz="1200" b="0">
+                <a:solidFill>
+                  <a:srgbClr val="BBBEBF"/>
+                </a:solidFill>
+                <a:effectLst/>
+                <a:latin typeface="Consolas" panose="020B0609020204030204" pitchFamily="49" charset="0"/>
+              </a:rPr>
+              <a:t>        </a:t>
+            </a:r>
+            <a:r>
+              <a:rPr lang="en-US" altLang="ko-KR" sz="1200" b="0">
+                <a:solidFill>
+                  <a:srgbClr val="4EC9B0"/>
+                </a:solidFill>
+                <a:effectLst/>
+                <a:latin typeface="Consolas" panose="020B0609020204030204" pitchFamily="49" charset="0"/>
+              </a:rPr>
+              <a:t>List</a:t>
+            </a:r>
+            <a:r>
+              <a:rPr lang="en-US" altLang="ko-KR" sz="1200" b="0">
+                <a:solidFill>
+                  <a:srgbClr val="FFA657"/>
+                </a:solidFill>
+                <a:effectLst/>
+                <a:latin typeface="Consolas" panose="020B0609020204030204" pitchFamily="49" charset="0"/>
+              </a:rPr>
+              <a:t>&lt;</a:t>
+            </a:r>
+            <a:r>
+              <a:rPr lang="en-US" altLang="ko-KR" sz="1200" b="0">
+                <a:solidFill>
+                  <a:srgbClr val="4EC9B0"/>
+                </a:solidFill>
+                <a:effectLst/>
+                <a:latin typeface="Consolas" panose="020B0609020204030204" pitchFamily="49" charset="0"/>
+              </a:rPr>
+              <a:t>User</a:t>
+            </a:r>
+            <a:r>
+              <a:rPr lang="en-US" altLang="ko-KR" sz="1200" b="0">
+                <a:solidFill>
+                  <a:srgbClr val="FFA657"/>
+                </a:solidFill>
+                <a:effectLst/>
+                <a:latin typeface="Consolas" panose="020B0609020204030204" pitchFamily="49" charset="0"/>
+              </a:rPr>
+              <a:t>&gt; </a:t>
+            </a:r>
+            <a:r>
+              <a:rPr lang="en-US" altLang="ko-KR" sz="1200" b="0">
+                <a:solidFill>
+                  <a:srgbClr val="C9D1D9"/>
+                </a:solidFill>
+                <a:effectLst/>
+                <a:latin typeface="Consolas" panose="020B0609020204030204" pitchFamily="49" charset="0"/>
+              </a:rPr>
+              <a:t>users</a:t>
+            </a:r>
+            <a:r>
+              <a:rPr lang="en-US" altLang="ko-KR" sz="1200" b="0">
+                <a:solidFill>
+                  <a:srgbClr val="FFA657"/>
+                </a:solidFill>
+                <a:effectLst/>
+                <a:latin typeface="Consolas" panose="020B0609020204030204" pitchFamily="49" charset="0"/>
+              </a:rPr>
+              <a:t> </a:t>
+            </a:r>
+            <a:r>
+              <a:rPr lang="en-US" altLang="ko-KR" sz="1200" b="0">
+                <a:solidFill>
+                  <a:srgbClr val="D4D4D4"/>
+                </a:solidFill>
+                <a:effectLst/>
+                <a:latin typeface="Consolas" panose="020B0609020204030204" pitchFamily="49" charset="0"/>
+              </a:rPr>
+              <a:t>=</a:t>
+            </a:r>
+            <a:r>
+              <a:rPr lang="en-US" altLang="ko-KR" sz="1200" b="0">
+                <a:solidFill>
+                  <a:srgbClr val="BBBEBF"/>
+                </a:solidFill>
+                <a:effectLst/>
+                <a:latin typeface="Consolas" panose="020B0609020204030204" pitchFamily="49" charset="0"/>
+              </a:rPr>
+              <a:t> </a:t>
+            </a:r>
+            <a:r>
+              <a:rPr lang="en-US" altLang="ko-KR" sz="1200" b="0">
+                <a:solidFill>
+                  <a:srgbClr val="79C0FF"/>
+                </a:solidFill>
+                <a:effectLst/>
+                <a:latin typeface="Consolas" panose="020B0609020204030204" pitchFamily="49" charset="0"/>
+              </a:rPr>
+              <a:t>this</a:t>
+            </a:r>
+            <a:r>
+              <a:rPr lang="en-US" altLang="ko-KR" sz="1200" b="0">
+                <a:solidFill>
+                  <a:srgbClr val="BBBEBF"/>
+                </a:solidFill>
+                <a:effectLst/>
+                <a:latin typeface="Consolas" panose="020B0609020204030204" pitchFamily="49" charset="0"/>
+              </a:rPr>
+              <a:t>.</a:t>
+            </a:r>
+            <a:r>
+              <a:rPr lang="en-US" altLang="ko-KR" sz="1200" b="0">
+                <a:solidFill>
+                  <a:srgbClr val="79C0FF"/>
+                </a:solidFill>
+                <a:effectLst/>
+                <a:latin typeface="Consolas" panose="020B0609020204030204" pitchFamily="49" charset="0"/>
+              </a:rPr>
+              <a:t>userRepository</a:t>
+            </a:r>
+            <a:r>
+              <a:rPr lang="en-US" altLang="ko-KR" sz="1200" b="0">
+                <a:solidFill>
+                  <a:srgbClr val="BBBEBF"/>
+                </a:solidFill>
+                <a:effectLst/>
+                <a:latin typeface="Consolas" panose="020B0609020204030204" pitchFamily="49" charset="0"/>
+              </a:rPr>
+              <a:t>.</a:t>
+            </a:r>
+            <a:r>
+              <a:rPr lang="en-US" altLang="ko-KR" sz="1200" b="0">
+                <a:solidFill>
+                  <a:srgbClr val="D2A8FF"/>
+                </a:solidFill>
+                <a:effectLst/>
+                <a:latin typeface="Consolas" panose="020B0609020204030204" pitchFamily="49" charset="0"/>
+              </a:rPr>
+              <a:t>findAllById</a:t>
+            </a:r>
+            <a:r>
+              <a:rPr lang="en-US" altLang="ko-KR" sz="1200" b="0">
+                <a:solidFill>
+                  <a:srgbClr val="BBBEBF"/>
+                </a:solidFill>
+                <a:effectLst/>
+                <a:latin typeface="Consolas" panose="020B0609020204030204" pitchFamily="49" charset="0"/>
+              </a:rPr>
+              <a:t>(</a:t>
+            </a:r>
+            <a:r>
+              <a:rPr lang="en-US" altLang="ko-KR" sz="1200" b="0">
+                <a:solidFill>
+                  <a:srgbClr val="FFA657"/>
+                </a:solidFill>
+                <a:effectLst/>
+                <a:latin typeface="Consolas" panose="020B0609020204030204" pitchFamily="49" charset="0"/>
+              </a:rPr>
+              <a:t>ids</a:t>
+            </a:r>
+            <a:r>
+              <a:rPr lang="en-US" altLang="ko-KR" sz="1200" b="0">
+                <a:solidFill>
+                  <a:srgbClr val="BBBEBF"/>
+                </a:solidFill>
+                <a:effectLst/>
+                <a:latin typeface="Consolas" panose="020B0609020204030204" pitchFamily="49" charset="0"/>
+              </a:rPr>
+              <a:t>);</a:t>
+            </a:r>
+          </a:p>
+          <a:p>
+            <a:pPr>
+              <a:lnSpc>
+                <a:spcPts val="1425"/>
+              </a:lnSpc>
+              <a:buNone/>
+            </a:pPr>
+            <a:r>
+              <a:rPr lang="en-US" altLang="ko-KR" sz="1200" b="0">
+                <a:solidFill>
+                  <a:srgbClr val="BBBEBF"/>
+                </a:solidFill>
+                <a:effectLst/>
+                <a:latin typeface="Consolas" panose="020B0609020204030204" pitchFamily="49" charset="0"/>
+              </a:rPr>
+              <a:t>        </a:t>
+            </a:r>
+            <a:r>
+              <a:rPr lang="en-US" altLang="ko-KR" sz="1200" b="0">
+                <a:solidFill>
+                  <a:srgbClr val="C586C0"/>
+                </a:solidFill>
+                <a:effectLst/>
+                <a:latin typeface="Consolas" panose="020B0609020204030204" pitchFamily="49" charset="0"/>
+              </a:rPr>
+              <a:t>return</a:t>
+            </a:r>
+            <a:r>
+              <a:rPr lang="en-US" altLang="ko-KR" sz="1200" b="0">
+                <a:solidFill>
+                  <a:srgbClr val="BBBEBF"/>
+                </a:solidFill>
+                <a:effectLst/>
+                <a:latin typeface="Consolas" panose="020B0609020204030204" pitchFamily="49" charset="0"/>
+              </a:rPr>
+              <a:t> </a:t>
+            </a:r>
+            <a:r>
+              <a:rPr lang="en-US" altLang="ko-KR" sz="1200" b="0">
+                <a:solidFill>
+                  <a:srgbClr val="C9D1D9"/>
+                </a:solidFill>
+                <a:effectLst/>
+                <a:latin typeface="Consolas" panose="020B0609020204030204" pitchFamily="49" charset="0"/>
+              </a:rPr>
+              <a:t>users</a:t>
+            </a:r>
+            <a:r>
+              <a:rPr lang="en-US" altLang="ko-KR" sz="1200" b="0">
+                <a:solidFill>
+                  <a:srgbClr val="BBBEBF"/>
+                </a:solidFill>
+                <a:effectLst/>
+                <a:latin typeface="Consolas" panose="020B0609020204030204" pitchFamily="49" charset="0"/>
+              </a:rPr>
+              <a:t>.</a:t>
+            </a:r>
+            <a:r>
+              <a:rPr lang="en-US" altLang="ko-KR" sz="1200" b="0">
+                <a:solidFill>
+                  <a:srgbClr val="D2A8FF"/>
+                </a:solidFill>
+                <a:effectLst/>
+                <a:latin typeface="Consolas" panose="020B0609020204030204" pitchFamily="49" charset="0"/>
+              </a:rPr>
+              <a:t>stream</a:t>
+            </a:r>
+            <a:r>
+              <a:rPr lang="en-US" altLang="ko-KR" sz="1200" b="0">
+                <a:solidFill>
+                  <a:srgbClr val="BBBEBF"/>
+                </a:solidFill>
+                <a:effectLst/>
+                <a:latin typeface="Consolas" panose="020B0609020204030204" pitchFamily="49" charset="0"/>
+              </a:rPr>
+              <a:t>()</a:t>
+            </a:r>
+          </a:p>
+          <a:p>
+            <a:pPr>
+              <a:lnSpc>
+                <a:spcPts val="1425"/>
+              </a:lnSpc>
+              <a:buNone/>
+            </a:pPr>
+            <a:r>
+              <a:rPr lang="en-US" altLang="ko-KR" sz="1200" b="0">
+                <a:solidFill>
+                  <a:srgbClr val="BBBEBF"/>
+                </a:solidFill>
+                <a:effectLst/>
+                <a:latin typeface="Consolas" panose="020B0609020204030204" pitchFamily="49" charset="0"/>
+              </a:rPr>
+              <a:t>            .</a:t>
+            </a:r>
+            <a:r>
+              <a:rPr lang="en-US" altLang="ko-KR" sz="1200" b="0">
+                <a:solidFill>
+                  <a:srgbClr val="D2A8FF"/>
+                </a:solidFill>
+                <a:effectLst/>
+                <a:latin typeface="Consolas" panose="020B0609020204030204" pitchFamily="49" charset="0"/>
+              </a:rPr>
+              <a:t>map</a:t>
+            </a:r>
+            <a:r>
+              <a:rPr lang="en-US" altLang="ko-KR" sz="1200" b="0">
+                <a:solidFill>
+                  <a:srgbClr val="BBBEBF"/>
+                </a:solidFill>
+                <a:effectLst/>
+                <a:latin typeface="Consolas" panose="020B0609020204030204" pitchFamily="49" charset="0"/>
+              </a:rPr>
+              <a:t>(</a:t>
+            </a:r>
+            <a:r>
+              <a:rPr lang="en-US" altLang="ko-KR" sz="1200" b="0">
+                <a:solidFill>
+                  <a:srgbClr val="FFA657"/>
+                </a:solidFill>
+                <a:effectLst/>
+                <a:latin typeface="Consolas" panose="020B0609020204030204" pitchFamily="49" charset="0"/>
+              </a:rPr>
+              <a:t>user</a:t>
+            </a:r>
+            <a:r>
+              <a:rPr lang="en-US" altLang="ko-KR" sz="1200" b="0">
+                <a:solidFill>
+                  <a:srgbClr val="BBBEBF"/>
+                </a:solidFill>
+                <a:effectLst/>
+                <a:latin typeface="Consolas" panose="020B0609020204030204" pitchFamily="49" charset="0"/>
+              </a:rPr>
+              <a:t> </a:t>
+            </a:r>
+            <a:r>
+              <a:rPr lang="en-US" altLang="ko-KR" sz="1200" b="0">
+                <a:solidFill>
+                  <a:srgbClr val="FF7B72"/>
+                </a:solidFill>
+                <a:effectLst/>
+                <a:latin typeface="Consolas" panose="020B0609020204030204" pitchFamily="49" charset="0"/>
+              </a:rPr>
+              <a:t>-&gt;</a:t>
+            </a:r>
+            <a:r>
+              <a:rPr lang="en-US" altLang="ko-KR" sz="1200" b="0">
+                <a:solidFill>
+                  <a:srgbClr val="BBBEBF"/>
+                </a:solidFill>
+                <a:effectLst/>
+                <a:latin typeface="Consolas" panose="020B0609020204030204" pitchFamily="49" charset="0"/>
+              </a:rPr>
+              <a:t> </a:t>
+            </a:r>
+            <a:r>
+              <a:rPr lang="en-US" altLang="ko-KR" sz="1200" b="0">
+                <a:solidFill>
+                  <a:srgbClr val="C586C0"/>
+                </a:solidFill>
+                <a:effectLst/>
+                <a:latin typeface="Consolas" panose="020B0609020204030204" pitchFamily="49" charset="0"/>
+              </a:rPr>
+              <a:t>new</a:t>
+            </a:r>
+            <a:r>
+              <a:rPr lang="en-US" altLang="ko-KR" sz="1200" b="0">
+                <a:solidFill>
+                  <a:srgbClr val="BBBEBF"/>
+                </a:solidFill>
+                <a:effectLst/>
+                <a:latin typeface="Consolas" panose="020B0609020204030204" pitchFamily="49" charset="0"/>
+              </a:rPr>
+              <a:t> </a:t>
+            </a:r>
+            <a:r>
+              <a:rPr lang="en-US" altLang="ko-KR" sz="1200" b="0">
+                <a:solidFill>
+                  <a:srgbClr val="D2A8FF"/>
+                </a:solidFill>
+                <a:effectLst/>
+                <a:latin typeface="Consolas" panose="020B0609020204030204" pitchFamily="49" charset="0"/>
+              </a:rPr>
+              <a:t>UserResponseDto</a:t>
+            </a:r>
+            <a:r>
+              <a:rPr lang="en-US" altLang="ko-KR" sz="1200" b="0">
+                <a:solidFill>
+                  <a:srgbClr val="BBBEBF"/>
+                </a:solidFill>
+                <a:effectLst/>
+                <a:latin typeface="Consolas" panose="020B0609020204030204" pitchFamily="49" charset="0"/>
+              </a:rPr>
+              <a:t>(</a:t>
+            </a:r>
+          </a:p>
+          <a:p>
+            <a:pPr>
+              <a:lnSpc>
+                <a:spcPts val="1425"/>
+              </a:lnSpc>
+              <a:buNone/>
+            </a:pPr>
+            <a:r>
+              <a:rPr lang="en-US" altLang="ko-KR" sz="1200" b="0">
+                <a:solidFill>
+                  <a:srgbClr val="BBBEBF"/>
+                </a:solidFill>
+                <a:effectLst/>
+                <a:latin typeface="Consolas" panose="020B0609020204030204" pitchFamily="49" charset="0"/>
+              </a:rPr>
+              <a:t>                </a:t>
+            </a:r>
+            <a:r>
+              <a:rPr lang="en-US" altLang="ko-KR" sz="1200" b="0">
+                <a:solidFill>
+                  <a:srgbClr val="FFA657"/>
+                </a:solidFill>
+                <a:effectLst/>
+                <a:latin typeface="Consolas" panose="020B0609020204030204" pitchFamily="49" charset="0"/>
+              </a:rPr>
+              <a:t>user</a:t>
+            </a:r>
+            <a:r>
+              <a:rPr lang="en-US" altLang="ko-KR" sz="1200" b="0">
+                <a:solidFill>
+                  <a:srgbClr val="BBBEBF"/>
+                </a:solidFill>
+                <a:effectLst/>
+                <a:latin typeface="Consolas" panose="020B0609020204030204" pitchFamily="49" charset="0"/>
+              </a:rPr>
+              <a:t>.</a:t>
+            </a:r>
+            <a:r>
+              <a:rPr lang="en-US" altLang="ko-KR" sz="1200" b="0">
+                <a:solidFill>
+                  <a:srgbClr val="D2A8FF"/>
+                </a:solidFill>
+                <a:effectLst/>
+                <a:latin typeface="Consolas" panose="020B0609020204030204" pitchFamily="49" charset="0"/>
+              </a:rPr>
+              <a:t>getUserId</a:t>
+            </a:r>
+            <a:r>
+              <a:rPr lang="en-US" altLang="ko-KR" sz="1200" b="0">
+                <a:solidFill>
+                  <a:srgbClr val="BBBEBF"/>
+                </a:solidFill>
+                <a:effectLst/>
+                <a:latin typeface="Consolas" panose="020B0609020204030204" pitchFamily="49" charset="0"/>
+              </a:rPr>
+              <a:t>(),</a:t>
+            </a:r>
+          </a:p>
+          <a:p>
+            <a:pPr>
+              <a:lnSpc>
+                <a:spcPts val="1425"/>
+              </a:lnSpc>
+              <a:buNone/>
+            </a:pPr>
+            <a:r>
+              <a:rPr lang="en-US" altLang="ko-KR" sz="1200" b="0">
+                <a:solidFill>
+                  <a:srgbClr val="BBBEBF"/>
+                </a:solidFill>
+                <a:effectLst/>
+                <a:latin typeface="Consolas" panose="020B0609020204030204" pitchFamily="49" charset="0"/>
+              </a:rPr>
+              <a:t>                </a:t>
+            </a:r>
+            <a:r>
+              <a:rPr lang="en-US" altLang="ko-KR" sz="1200" b="0">
+                <a:solidFill>
+                  <a:srgbClr val="FFA657"/>
+                </a:solidFill>
+                <a:effectLst/>
+                <a:latin typeface="Consolas" panose="020B0609020204030204" pitchFamily="49" charset="0"/>
+              </a:rPr>
+              <a:t>user</a:t>
+            </a:r>
+            <a:r>
+              <a:rPr lang="en-US" altLang="ko-KR" sz="1200" b="0">
+                <a:solidFill>
+                  <a:srgbClr val="BBBEBF"/>
+                </a:solidFill>
+                <a:effectLst/>
+                <a:latin typeface="Consolas" panose="020B0609020204030204" pitchFamily="49" charset="0"/>
+              </a:rPr>
+              <a:t>.</a:t>
+            </a:r>
+            <a:r>
+              <a:rPr lang="en-US" altLang="ko-KR" sz="1200" b="0">
+                <a:solidFill>
+                  <a:srgbClr val="D2A8FF"/>
+                </a:solidFill>
+                <a:effectLst/>
+                <a:latin typeface="Consolas" panose="020B0609020204030204" pitchFamily="49" charset="0"/>
+              </a:rPr>
+              <a:t>getEmail</a:t>
+            </a:r>
+            <a:r>
+              <a:rPr lang="en-US" altLang="ko-KR" sz="1200" b="0">
+                <a:solidFill>
+                  <a:srgbClr val="BBBEBF"/>
+                </a:solidFill>
+                <a:effectLst/>
+                <a:latin typeface="Consolas" panose="020B0609020204030204" pitchFamily="49" charset="0"/>
+              </a:rPr>
+              <a:t>(),</a:t>
+            </a:r>
+          </a:p>
+          <a:p>
+            <a:pPr>
+              <a:lnSpc>
+                <a:spcPts val="1425"/>
+              </a:lnSpc>
+              <a:buNone/>
+            </a:pPr>
+            <a:r>
+              <a:rPr lang="en-US" altLang="ko-KR" sz="1200" b="0">
+                <a:solidFill>
+                  <a:srgbClr val="BBBEBF"/>
+                </a:solidFill>
+                <a:effectLst/>
+                <a:latin typeface="Consolas" panose="020B0609020204030204" pitchFamily="49" charset="0"/>
+              </a:rPr>
+              <a:t>                </a:t>
+            </a:r>
+            <a:r>
+              <a:rPr lang="en-US" altLang="ko-KR" sz="1200" b="0">
+                <a:solidFill>
+                  <a:srgbClr val="FFA657"/>
+                </a:solidFill>
+                <a:effectLst/>
+                <a:latin typeface="Consolas" panose="020B0609020204030204" pitchFamily="49" charset="0"/>
+              </a:rPr>
+              <a:t>user</a:t>
+            </a:r>
+            <a:r>
+              <a:rPr lang="en-US" altLang="ko-KR" sz="1200" b="0">
+                <a:solidFill>
+                  <a:srgbClr val="BBBEBF"/>
+                </a:solidFill>
+                <a:effectLst/>
+                <a:latin typeface="Consolas" panose="020B0609020204030204" pitchFamily="49" charset="0"/>
+              </a:rPr>
+              <a:t>.</a:t>
+            </a:r>
+            <a:r>
+              <a:rPr lang="en-US" altLang="ko-KR" sz="1200" b="0">
+                <a:solidFill>
+                  <a:srgbClr val="D2A8FF"/>
+                </a:solidFill>
+                <a:effectLst/>
+                <a:latin typeface="Consolas" panose="020B0609020204030204" pitchFamily="49" charset="0"/>
+              </a:rPr>
+              <a:t>getName</a:t>
+            </a:r>
+            <a:r>
+              <a:rPr lang="en-US" altLang="ko-KR" sz="1200" b="0">
+                <a:solidFill>
+                  <a:srgbClr val="BBBEBF"/>
+                </a:solidFill>
+                <a:effectLst/>
+                <a:latin typeface="Consolas" panose="020B0609020204030204" pitchFamily="49" charset="0"/>
+              </a:rPr>
+              <a:t>()</a:t>
+            </a:r>
+          </a:p>
+          <a:p>
+            <a:pPr>
+              <a:lnSpc>
+                <a:spcPts val="1425"/>
+              </a:lnSpc>
+              <a:buNone/>
+            </a:pPr>
+            <a:r>
+              <a:rPr lang="en-US" altLang="ko-KR" sz="1200" b="0">
+                <a:solidFill>
+                  <a:srgbClr val="BBBEBF"/>
+                </a:solidFill>
+                <a:effectLst/>
+                <a:latin typeface="Consolas" panose="020B0609020204030204" pitchFamily="49" charset="0"/>
+              </a:rPr>
+              <a:t>            )).</a:t>
+            </a:r>
+            <a:r>
+              <a:rPr lang="en-US" altLang="ko-KR" sz="1200" b="0">
+                <a:solidFill>
+                  <a:srgbClr val="D2A8FF"/>
+                </a:solidFill>
+                <a:effectLst/>
+                <a:latin typeface="Consolas" panose="020B0609020204030204" pitchFamily="49" charset="0"/>
+              </a:rPr>
+              <a:t>toList</a:t>
+            </a:r>
+            <a:r>
+              <a:rPr lang="en-US" altLang="ko-KR" sz="1200" b="0">
+                <a:solidFill>
+                  <a:srgbClr val="BBBEBF"/>
+                </a:solidFill>
+                <a:effectLst/>
+                <a:latin typeface="Consolas" panose="020B0609020204030204" pitchFamily="49" charset="0"/>
+              </a:rPr>
+              <a:t>();</a:t>
+            </a:r>
+          </a:p>
+          <a:p>
+            <a:pPr>
+              <a:lnSpc>
+                <a:spcPts val="1425"/>
+              </a:lnSpc>
+              <a:buNone/>
+            </a:pPr>
+            <a:r>
+              <a:rPr lang="en-US" altLang="ko-KR" sz="1200" b="0">
+                <a:solidFill>
+                  <a:srgbClr val="BBBEBF"/>
+                </a:solidFill>
+                <a:effectLst/>
+                <a:latin typeface="Consolas" panose="020B0609020204030204" pitchFamily="49" charset="0"/>
+              </a:rPr>
+              <a:t>    }</a:t>
+            </a:r>
+          </a:p>
+        </p:txBody>
+      </p:sp>
+      <p:grpSp>
+        <p:nvGrpSpPr>
+          <p:cNvPr id="8" name="그룹 7">
+            <a:extLst>
+              <a:ext uri="{FF2B5EF4-FFF2-40B4-BE49-F238E27FC236}">
+                <a16:creationId xmlns:a16="http://schemas.microsoft.com/office/drawing/2014/main" id="{D09C8D62-2497-9329-4D7F-C2ED820A4F59}"/>
+              </a:ext>
+            </a:extLst>
+          </p:cNvPr>
+          <p:cNvGrpSpPr/>
+          <p:nvPr/>
+        </p:nvGrpSpPr>
+        <p:grpSpPr>
+          <a:xfrm>
+            <a:off x="982783" y="1940082"/>
+            <a:ext cx="2819794" cy="3296110"/>
+            <a:chOff x="982783" y="1940082"/>
+            <a:chExt cx="2819794" cy="3296110"/>
+          </a:xfrm>
+        </p:grpSpPr>
+        <p:pic>
+          <p:nvPicPr>
+            <p:cNvPr id="6" name="그림 5">
+              <a:extLst>
+                <a:ext uri="{FF2B5EF4-FFF2-40B4-BE49-F238E27FC236}">
+                  <a16:creationId xmlns:a16="http://schemas.microsoft.com/office/drawing/2014/main" id="{1AA5E39A-0325-D435-E0C6-1E4E07EFAEB2}"/>
+                </a:ext>
+              </a:extLst>
+            </p:cNvPr>
+            <p:cNvPicPr>
+              <a:picLocks noChangeAspect="1"/>
+            </p:cNvPicPr>
+            <p:nvPr/>
+          </p:nvPicPr>
+          <p:blipFill>
+            <a:blip r:embed="rId2"/>
+            <a:stretch>
+              <a:fillRect/>
+            </a:stretch>
+          </p:blipFill>
+          <p:spPr>
+            <a:xfrm>
+              <a:off x="982783" y="1940082"/>
+              <a:ext cx="2819794" cy="3296110"/>
+            </a:xfrm>
+            <a:prstGeom prst="rect">
+              <a:avLst/>
+            </a:prstGeom>
+          </p:spPr>
+        </p:pic>
+        <p:sp>
+          <p:nvSpPr>
+            <p:cNvPr id="7" name="직사각형 6">
+              <a:extLst>
+                <a:ext uri="{FF2B5EF4-FFF2-40B4-BE49-F238E27FC236}">
+                  <a16:creationId xmlns:a16="http://schemas.microsoft.com/office/drawing/2014/main" id="{102CD480-4B9F-7B8F-C67F-FD97E96C1D4C}"/>
+                </a:ext>
+              </a:extLst>
+            </p:cNvPr>
+            <p:cNvSpPr/>
+            <p:nvPr/>
+          </p:nvSpPr>
+          <p:spPr>
+            <a:xfrm>
+              <a:off x="1325880" y="4727448"/>
+              <a:ext cx="1234440" cy="256032"/>
+            </a:xfrm>
+            <a:prstGeom prst="rect">
+              <a:avLst/>
+            </a:prstGeom>
+            <a:noFill/>
+            <a:ln>
+              <a:solidFill>
+                <a:srgbClr val="FF0000"/>
+              </a:solidFill>
+            </a:ln>
+          </p:spPr>
+          <p:style>
+            <a:lnRef idx="2">
+              <a:schemeClr val="accent1">
+                <a:shade val="15000"/>
+              </a:schemeClr>
+            </a:lnRef>
+            <a:fillRef idx="1">
+              <a:schemeClr val="accent1"/>
+            </a:fillRef>
+            <a:effectRef idx="0">
+              <a:schemeClr val="accent1"/>
+            </a:effectRef>
+            <a:fontRef idx="minor">
+              <a:schemeClr val="lt1"/>
+            </a:fontRef>
+          </p:style>
+          <p:txBody>
+            <a:bodyPr rtlCol="0" anchor="ctr"/>
+            <a:lstStyle/>
+            <a:p>
+              <a:pPr algn="ctr"/>
+              <a:endParaRPr lang="ko-KR" altLang="en-US"/>
+            </a:p>
+          </p:txBody>
+        </p:sp>
+      </p:grpSp>
+    </p:spTree>
+    <p:extLst>
+      <p:ext uri="{BB962C8B-B14F-4D97-AF65-F5344CB8AC3E}">
+        <p14:creationId xmlns:p14="http://schemas.microsoft.com/office/powerpoint/2010/main" val="4209423547"/>
+      </p:ext>
+    </p:extLst>
+  </p:cSld>
+  <p:clrMapOvr>
+    <a:masterClrMapping/>
+  </p:clrMapOvr>
+</p:sld>
+</file>
+
+<file path=ppt/slides/slide26.xml><?xml version="1.0" encoding="utf-8"?>
+<p:sld xmlns:a="http://schemas.openxmlformats.org/drawingml/2006/main" xmlns:r="http://schemas.openxmlformats.org/officeDocument/2006/relationships" xmlns:p="http://schemas.openxmlformats.org/presentationml/2006/main">
+  <p:cSld>
+    <p:spTree>
+      <p:nvGrpSpPr>
+        <p:cNvPr id="1" name=""/>
+        <p:cNvGrpSpPr/>
+        <p:nvPr/>
+      </p:nvGrpSpPr>
+      <p:grpSpPr>
+        <a:xfrm>
+          <a:off x="0" y="0"/>
+          <a:ext cx="0" cy="0"/>
+          <a:chOff x="0" y="0"/>
+          <a:chExt cx="0" cy="0"/>
+        </a:xfrm>
+      </p:grpSpPr>
+      <p:sp>
+        <p:nvSpPr>
+          <p:cNvPr id="2" name="제목 1">
+            <a:extLst>
+              <a:ext uri="{FF2B5EF4-FFF2-40B4-BE49-F238E27FC236}">
+                <a16:creationId xmlns:a16="http://schemas.microsoft.com/office/drawing/2014/main" id="{41A1BF73-22DC-3212-EFC7-C82C4C6CF57E}"/>
+              </a:ext>
+            </a:extLst>
+          </p:cNvPr>
+          <p:cNvSpPr>
+            <a:spLocks noGrp="1"/>
+          </p:cNvSpPr>
+          <p:nvPr>
+            <p:ph type="title"/>
+          </p:nvPr>
+        </p:nvSpPr>
+        <p:spPr/>
+        <p:txBody>
+          <a:bodyPr>
+            <a:normAutofit/>
+          </a:bodyPr>
+          <a:lstStyle/>
+          <a:p>
+            <a:r>
+              <a:rPr lang="ko-KR" altLang="en-US" sz="4400"/>
+              <a:t>회원</a:t>
+            </a:r>
+            <a:r>
+              <a:rPr lang="en-US" altLang="ko-KR" sz="4400"/>
+              <a:t>ID</a:t>
+            </a:r>
+            <a:r>
+              <a:rPr lang="ko-KR" altLang="en-US" sz="4400"/>
+              <a:t>리스트를 통한 정보조회</a:t>
+            </a:r>
+            <a:r>
+              <a:rPr lang="en-US" altLang="ko-KR" sz="4400"/>
+              <a:t>-Controller</a:t>
+            </a:r>
+            <a:endParaRPr lang="ko-KR" altLang="en-US" sz="4400"/>
+          </a:p>
+        </p:txBody>
+      </p:sp>
+      <p:grpSp>
+        <p:nvGrpSpPr>
+          <p:cNvPr id="3" name="그룹 2">
+            <a:extLst>
+              <a:ext uri="{FF2B5EF4-FFF2-40B4-BE49-F238E27FC236}">
+                <a16:creationId xmlns:a16="http://schemas.microsoft.com/office/drawing/2014/main" id="{F0EAA9F4-4BC7-4971-C42D-A98EA51947BA}"/>
+              </a:ext>
+            </a:extLst>
+          </p:cNvPr>
+          <p:cNvGrpSpPr/>
+          <p:nvPr/>
+        </p:nvGrpSpPr>
+        <p:grpSpPr>
+          <a:xfrm>
+            <a:off x="982783" y="1940082"/>
+            <a:ext cx="2819794" cy="3296110"/>
+            <a:chOff x="982783" y="1940082"/>
+            <a:chExt cx="2819794" cy="3296110"/>
+          </a:xfrm>
+        </p:grpSpPr>
+        <p:pic>
+          <p:nvPicPr>
+            <p:cNvPr id="4" name="그림 3">
+              <a:extLst>
+                <a:ext uri="{FF2B5EF4-FFF2-40B4-BE49-F238E27FC236}">
+                  <a16:creationId xmlns:a16="http://schemas.microsoft.com/office/drawing/2014/main" id="{EBD5D312-1CAB-6289-53B2-9C0EF88796A0}"/>
+                </a:ext>
+              </a:extLst>
+            </p:cNvPr>
+            <p:cNvPicPr>
+              <a:picLocks noChangeAspect="1"/>
+            </p:cNvPicPr>
+            <p:nvPr/>
+          </p:nvPicPr>
+          <p:blipFill>
+            <a:blip r:embed="rId2"/>
+            <a:stretch>
+              <a:fillRect/>
+            </a:stretch>
+          </p:blipFill>
+          <p:spPr>
+            <a:xfrm>
+              <a:off x="982783" y="1940082"/>
+              <a:ext cx="2819794" cy="3296110"/>
+            </a:xfrm>
+            <a:prstGeom prst="rect">
+              <a:avLst/>
+            </a:prstGeom>
+          </p:spPr>
+        </p:pic>
+        <p:sp>
+          <p:nvSpPr>
+            <p:cNvPr id="5" name="직사각형 4">
+              <a:extLst>
+                <a:ext uri="{FF2B5EF4-FFF2-40B4-BE49-F238E27FC236}">
+                  <a16:creationId xmlns:a16="http://schemas.microsoft.com/office/drawing/2014/main" id="{744FE1F7-D67B-0B87-E2B6-1C618900F19D}"/>
+                </a:ext>
+              </a:extLst>
+            </p:cNvPr>
+            <p:cNvSpPr/>
+            <p:nvPr/>
+          </p:nvSpPr>
+          <p:spPr>
+            <a:xfrm>
+              <a:off x="1353312" y="2852928"/>
+              <a:ext cx="1307592" cy="228600"/>
+            </a:xfrm>
+            <a:prstGeom prst="rect">
+              <a:avLst/>
+            </a:prstGeom>
+            <a:noFill/>
+            <a:ln>
+              <a:solidFill>
+                <a:srgbClr val="FF0000"/>
+              </a:solidFill>
+            </a:ln>
+          </p:spPr>
+          <p:style>
+            <a:lnRef idx="2">
+              <a:schemeClr val="accent1">
+                <a:shade val="15000"/>
+              </a:schemeClr>
+            </a:lnRef>
+            <a:fillRef idx="1">
+              <a:schemeClr val="accent1"/>
+            </a:fillRef>
+            <a:effectRef idx="0">
+              <a:schemeClr val="accent1"/>
+            </a:effectRef>
+            <a:fontRef idx="minor">
+              <a:schemeClr val="lt1"/>
+            </a:fontRef>
+          </p:style>
+          <p:txBody>
+            <a:bodyPr rtlCol="0" anchor="ctr"/>
+            <a:lstStyle/>
+            <a:p>
+              <a:pPr algn="ctr"/>
+              <a:endParaRPr lang="ko-KR" altLang="en-US"/>
+            </a:p>
+          </p:txBody>
+        </p:sp>
+      </p:grpSp>
+      <p:sp>
+        <p:nvSpPr>
+          <p:cNvPr id="9" name="TextBox 8">
+            <a:extLst>
+              <a:ext uri="{FF2B5EF4-FFF2-40B4-BE49-F238E27FC236}">
+                <a16:creationId xmlns:a16="http://schemas.microsoft.com/office/drawing/2014/main" id="{8F9EAED6-F1BF-3237-7342-58DAD03C6270}"/>
+              </a:ext>
+            </a:extLst>
+          </p:cNvPr>
+          <p:cNvSpPr txBox="1"/>
+          <p:nvPr/>
+        </p:nvSpPr>
+        <p:spPr>
+          <a:xfrm>
+            <a:off x="3998214" y="1940082"/>
+            <a:ext cx="6094476" cy="1338828"/>
+          </a:xfrm>
+          <a:prstGeom prst="rect">
+            <a:avLst/>
+          </a:prstGeom>
+          <a:solidFill>
+            <a:schemeClr val="tx1"/>
+          </a:solidFill>
+        </p:spPr>
+        <p:txBody>
+          <a:bodyPr wrap="square">
+            <a:spAutoFit/>
+          </a:bodyPr>
+          <a:lstStyle/>
+          <a:p>
+            <a:pPr>
+              <a:lnSpc>
+                <a:spcPts val="1425"/>
+              </a:lnSpc>
+              <a:buNone/>
+            </a:pPr>
+            <a:r>
+              <a:rPr lang="en-US" altLang="ko-KR" sz="1050" b="0">
+                <a:solidFill>
+                  <a:srgbClr val="BBBEBF"/>
+                </a:solidFill>
+                <a:effectLst/>
+                <a:latin typeface="Consolas" panose="020B0609020204030204" pitchFamily="49" charset="0"/>
+              </a:rPr>
+              <a:t>    @</a:t>
+            </a:r>
+            <a:r>
+              <a:rPr lang="en-US" altLang="ko-KR" sz="1050" b="0">
+                <a:solidFill>
+                  <a:srgbClr val="4EC9B0"/>
+                </a:solidFill>
+                <a:effectLst/>
+                <a:latin typeface="Consolas" panose="020B0609020204030204" pitchFamily="49" charset="0"/>
+              </a:rPr>
+              <a:t>GetMapping</a:t>
+            </a:r>
+            <a:endParaRPr lang="en-US" altLang="ko-KR" sz="1050" b="0">
+              <a:solidFill>
+                <a:srgbClr val="BBBEBF"/>
+              </a:solidFill>
+              <a:effectLst/>
+              <a:latin typeface="Consolas" panose="020B0609020204030204" pitchFamily="49" charset="0"/>
+            </a:endParaRPr>
+          </a:p>
+          <a:p>
+            <a:pPr>
+              <a:lnSpc>
+                <a:spcPts val="1425"/>
+              </a:lnSpc>
+              <a:buNone/>
+            </a:pPr>
+            <a:r>
+              <a:rPr lang="en-US" altLang="ko-KR" sz="1050" b="0">
+                <a:solidFill>
+                  <a:srgbClr val="BBBEBF"/>
+                </a:solidFill>
+                <a:effectLst/>
+                <a:latin typeface="Consolas" panose="020B0609020204030204" pitchFamily="49" charset="0"/>
+              </a:rPr>
+              <a:t>    </a:t>
+            </a:r>
+            <a:r>
+              <a:rPr lang="en-US" altLang="ko-KR" sz="1050" b="0">
+                <a:solidFill>
+                  <a:srgbClr val="569CD6"/>
+                </a:solidFill>
+                <a:effectLst/>
+                <a:latin typeface="Consolas" panose="020B0609020204030204" pitchFamily="49" charset="0"/>
+              </a:rPr>
+              <a:t>public</a:t>
+            </a:r>
+            <a:r>
+              <a:rPr lang="en-US" altLang="ko-KR" sz="1050" b="0">
+                <a:solidFill>
+                  <a:srgbClr val="BBBEBF"/>
+                </a:solidFill>
+                <a:effectLst/>
+                <a:latin typeface="Consolas" panose="020B0609020204030204" pitchFamily="49" charset="0"/>
+              </a:rPr>
+              <a:t> </a:t>
+            </a:r>
+            <a:r>
+              <a:rPr lang="en-US" altLang="ko-KR" sz="1050" b="0">
+                <a:solidFill>
+                  <a:srgbClr val="4EC9B0"/>
+                </a:solidFill>
+                <a:effectLst/>
+                <a:latin typeface="Consolas" panose="020B0609020204030204" pitchFamily="49" charset="0"/>
+              </a:rPr>
+              <a:t>ResponseEntity</a:t>
+            </a:r>
+            <a:r>
+              <a:rPr lang="en-US" altLang="ko-KR" sz="1050" b="0">
+                <a:solidFill>
+                  <a:srgbClr val="BBBEBF"/>
+                </a:solidFill>
+                <a:effectLst/>
+                <a:latin typeface="Consolas" panose="020B0609020204030204" pitchFamily="49" charset="0"/>
+              </a:rPr>
+              <a:t>&lt;</a:t>
+            </a:r>
+            <a:r>
+              <a:rPr lang="en-US" altLang="ko-KR" sz="1050" b="0">
+                <a:solidFill>
+                  <a:srgbClr val="4EC9B0"/>
+                </a:solidFill>
+                <a:effectLst/>
+                <a:latin typeface="Consolas" panose="020B0609020204030204" pitchFamily="49" charset="0"/>
+              </a:rPr>
+              <a:t>List</a:t>
+            </a:r>
+            <a:r>
+              <a:rPr lang="en-US" altLang="ko-KR" sz="1050" b="0">
+                <a:solidFill>
+                  <a:srgbClr val="BBBEBF"/>
+                </a:solidFill>
+                <a:effectLst/>
+                <a:latin typeface="Consolas" panose="020B0609020204030204" pitchFamily="49" charset="0"/>
+              </a:rPr>
+              <a:t>&lt;</a:t>
+            </a:r>
+            <a:r>
+              <a:rPr lang="en-US" altLang="ko-KR" sz="1050" b="0">
+                <a:solidFill>
+                  <a:srgbClr val="4EC9B0"/>
+                </a:solidFill>
+                <a:effectLst/>
+                <a:latin typeface="Consolas" panose="020B0609020204030204" pitchFamily="49" charset="0"/>
+              </a:rPr>
+              <a:t>UserResponseDto</a:t>
+            </a:r>
+            <a:r>
+              <a:rPr lang="en-US" altLang="ko-KR" sz="1050" b="0">
+                <a:solidFill>
+                  <a:srgbClr val="BBBEBF"/>
+                </a:solidFill>
+                <a:effectLst/>
+                <a:latin typeface="Consolas" panose="020B0609020204030204" pitchFamily="49" charset="0"/>
+              </a:rPr>
+              <a:t>&gt;&gt; </a:t>
+            </a:r>
+            <a:r>
+              <a:rPr lang="en-US" altLang="ko-KR" sz="1050" b="0">
+                <a:solidFill>
+                  <a:srgbClr val="D2A8FF"/>
+                </a:solidFill>
+                <a:effectLst/>
+                <a:latin typeface="Consolas" panose="020B0609020204030204" pitchFamily="49" charset="0"/>
+              </a:rPr>
+              <a:t>getUsersByIds</a:t>
+            </a:r>
+            <a:r>
+              <a:rPr lang="en-US" altLang="ko-KR" sz="1050" b="0">
+                <a:solidFill>
+                  <a:srgbClr val="BBBEBF"/>
+                </a:solidFill>
+                <a:effectLst/>
+                <a:latin typeface="Consolas" panose="020B0609020204030204" pitchFamily="49" charset="0"/>
+              </a:rPr>
+              <a:t>(</a:t>
+            </a:r>
+          </a:p>
+          <a:p>
+            <a:pPr>
+              <a:lnSpc>
+                <a:spcPts val="1425"/>
+              </a:lnSpc>
+              <a:buNone/>
+            </a:pPr>
+            <a:r>
+              <a:rPr lang="en-US" altLang="ko-KR" sz="1050" b="0">
+                <a:solidFill>
+                  <a:srgbClr val="BBBEBF"/>
+                </a:solidFill>
+                <a:effectLst/>
+                <a:latin typeface="Consolas" panose="020B0609020204030204" pitchFamily="49" charset="0"/>
+              </a:rPr>
+              <a:t>        @</a:t>
+            </a:r>
+            <a:r>
+              <a:rPr lang="en-US" altLang="ko-KR" sz="1050" b="0">
+                <a:solidFill>
+                  <a:srgbClr val="4EC9B0"/>
+                </a:solidFill>
+                <a:effectLst/>
+                <a:latin typeface="Consolas" panose="020B0609020204030204" pitchFamily="49" charset="0"/>
+              </a:rPr>
+              <a:t>RequestParam</a:t>
+            </a:r>
+            <a:r>
+              <a:rPr lang="en-US" altLang="ko-KR" sz="1050" b="0">
+                <a:solidFill>
+                  <a:srgbClr val="BBBEBF"/>
+                </a:solidFill>
+                <a:effectLst/>
+                <a:latin typeface="Consolas" panose="020B0609020204030204" pitchFamily="49" charset="0"/>
+              </a:rPr>
+              <a:t>(</a:t>
+            </a:r>
+            <a:r>
+              <a:rPr lang="en-US" altLang="ko-KR" sz="1050" b="0">
+                <a:solidFill>
+                  <a:srgbClr val="FFA657"/>
+                </a:solidFill>
+                <a:effectLst/>
+                <a:latin typeface="Consolas" panose="020B0609020204030204" pitchFamily="49" charset="0"/>
+              </a:rPr>
+              <a:t>name</a:t>
+            </a:r>
+            <a:r>
+              <a:rPr lang="en-US" altLang="ko-KR" sz="1050" b="0">
+                <a:solidFill>
+                  <a:srgbClr val="D4D4D4"/>
+                </a:solidFill>
+                <a:effectLst/>
+                <a:latin typeface="Consolas" panose="020B0609020204030204" pitchFamily="49" charset="0"/>
+              </a:rPr>
+              <a:t>=</a:t>
+            </a:r>
+            <a:r>
+              <a:rPr lang="en-US" altLang="ko-KR" sz="1050" b="0">
+                <a:solidFill>
+                  <a:srgbClr val="A5D6FF"/>
+                </a:solidFill>
+                <a:effectLst/>
+                <a:latin typeface="Consolas" panose="020B0609020204030204" pitchFamily="49" charset="0"/>
+              </a:rPr>
+              <a:t>"ids"</a:t>
+            </a:r>
+            <a:r>
+              <a:rPr lang="en-US" altLang="ko-KR" sz="1050" b="0">
+                <a:solidFill>
+                  <a:srgbClr val="BBBEBF"/>
+                </a:solidFill>
+                <a:effectLst/>
+                <a:latin typeface="Consolas" panose="020B0609020204030204" pitchFamily="49" charset="0"/>
+              </a:rPr>
+              <a:t>) </a:t>
+            </a:r>
+            <a:r>
+              <a:rPr lang="en-US" altLang="ko-KR" sz="1050" b="0">
+                <a:solidFill>
+                  <a:srgbClr val="4EC9B0"/>
+                </a:solidFill>
+                <a:effectLst/>
+                <a:latin typeface="Consolas" panose="020B0609020204030204" pitchFamily="49" charset="0"/>
+              </a:rPr>
+              <a:t>List</a:t>
+            </a:r>
+            <a:r>
+              <a:rPr lang="en-US" altLang="ko-KR" sz="1050" b="0">
+                <a:solidFill>
+                  <a:srgbClr val="BBBEBF"/>
+                </a:solidFill>
+                <a:effectLst/>
+                <a:latin typeface="Consolas" panose="020B0609020204030204" pitchFamily="49" charset="0"/>
+              </a:rPr>
+              <a:t>&lt;</a:t>
+            </a:r>
+            <a:r>
+              <a:rPr lang="en-US" altLang="ko-KR" sz="1050" b="0">
+                <a:solidFill>
+                  <a:srgbClr val="4EC9B0"/>
+                </a:solidFill>
+                <a:effectLst/>
+                <a:latin typeface="Consolas" panose="020B0609020204030204" pitchFamily="49" charset="0"/>
+              </a:rPr>
+              <a:t>Long</a:t>
+            </a:r>
+            <a:r>
+              <a:rPr lang="en-US" altLang="ko-KR" sz="1050" b="0">
+                <a:solidFill>
+                  <a:srgbClr val="BBBEBF"/>
+                </a:solidFill>
+                <a:effectLst/>
+                <a:latin typeface="Consolas" panose="020B0609020204030204" pitchFamily="49" charset="0"/>
+              </a:rPr>
+              <a:t>&gt; </a:t>
+            </a:r>
+            <a:r>
+              <a:rPr lang="en-US" altLang="ko-KR" sz="1050" b="0">
+                <a:solidFill>
+                  <a:srgbClr val="FFA657"/>
+                </a:solidFill>
+                <a:effectLst/>
+                <a:latin typeface="Consolas" panose="020B0609020204030204" pitchFamily="49" charset="0"/>
+              </a:rPr>
+              <a:t>ids</a:t>
+            </a:r>
+            <a:endParaRPr lang="en-US" altLang="ko-KR" sz="1050" b="0">
+              <a:solidFill>
+                <a:srgbClr val="BBBEBF"/>
+              </a:solidFill>
+              <a:effectLst/>
+              <a:latin typeface="Consolas" panose="020B0609020204030204" pitchFamily="49" charset="0"/>
+            </a:endParaRPr>
+          </a:p>
+          <a:p>
+            <a:pPr>
+              <a:lnSpc>
+                <a:spcPts val="1425"/>
+              </a:lnSpc>
+              <a:buNone/>
+            </a:pPr>
+            <a:r>
+              <a:rPr lang="en-US" altLang="ko-KR" sz="1050" b="0">
+                <a:solidFill>
+                  <a:srgbClr val="BBBEBF"/>
+                </a:solidFill>
+                <a:effectLst/>
+                <a:latin typeface="Consolas" panose="020B0609020204030204" pitchFamily="49" charset="0"/>
+              </a:rPr>
+              <a:t>    ) {</a:t>
+            </a:r>
+          </a:p>
+          <a:p>
+            <a:pPr>
+              <a:lnSpc>
+                <a:spcPts val="1425"/>
+              </a:lnSpc>
+              <a:buNone/>
+            </a:pPr>
+            <a:r>
+              <a:rPr lang="en-US" altLang="ko-KR" sz="1050" b="0">
+                <a:solidFill>
+                  <a:srgbClr val="BBBEBF"/>
+                </a:solidFill>
+                <a:effectLst/>
+                <a:latin typeface="Consolas" panose="020B0609020204030204" pitchFamily="49" charset="0"/>
+              </a:rPr>
+              <a:t>        </a:t>
+            </a:r>
+            <a:r>
+              <a:rPr lang="en-US" altLang="ko-KR" sz="1050" b="0">
+                <a:solidFill>
+                  <a:srgbClr val="4EC9B0"/>
+                </a:solidFill>
+                <a:effectLst/>
+                <a:latin typeface="Consolas" panose="020B0609020204030204" pitchFamily="49" charset="0"/>
+              </a:rPr>
+              <a:t>List</a:t>
+            </a:r>
+            <a:r>
+              <a:rPr lang="en-US" altLang="ko-KR" sz="1050" b="0">
+                <a:solidFill>
+                  <a:srgbClr val="FFA657"/>
+                </a:solidFill>
+                <a:effectLst/>
+                <a:latin typeface="Consolas" panose="020B0609020204030204" pitchFamily="49" charset="0"/>
+              </a:rPr>
+              <a:t>&lt;</a:t>
+            </a:r>
+            <a:r>
+              <a:rPr lang="en-US" altLang="ko-KR" sz="1050" b="0">
+                <a:solidFill>
+                  <a:srgbClr val="4EC9B0"/>
+                </a:solidFill>
+                <a:effectLst/>
+                <a:latin typeface="Consolas" panose="020B0609020204030204" pitchFamily="49" charset="0"/>
+              </a:rPr>
+              <a:t>UserResponseDto</a:t>
+            </a:r>
+            <a:r>
+              <a:rPr lang="en-US" altLang="ko-KR" sz="1050" b="0">
+                <a:solidFill>
+                  <a:srgbClr val="FFA657"/>
+                </a:solidFill>
+                <a:effectLst/>
+                <a:latin typeface="Consolas" panose="020B0609020204030204" pitchFamily="49" charset="0"/>
+              </a:rPr>
+              <a:t>&gt; </a:t>
+            </a:r>
+            <a:r>
+              <a:rPr lang="en-US" altLang="ko-KR" sz="1050" b="0">
+                <a:solidFill>
+                  <a:srgbClr val="C9D1D9"/>
+                </a:solidFill>
+                <a:effectLst/>
+                <a:latin typeface="Consolas" panose="020B0609020204030204" pitchFamily="49" charset="0"/>
+              </a:rPr>
+              <a:t>userResponseDtos</a:t>
+            </a:r>
+            <a:r>
+              <a:rPr lang="en-US" altLang="ko-KR" sz="1050" b="0">
+                <a:solidFill>
+                  <a:srgbClr val="FFA657"/>
+                </a:solidFill>
+                <a:effectLst/>
+                <a:latin typeface="Consolas" panose="020B0609020204030204" pitchFamily="49" charset="0"/>
+              </a:rPr>
+              <a:t> </a:t>
+            </a:r>
+            <a:r>
+              <a:rPr lang="en-US" altLang="ko-KR" sz="1050" b="0">
+                <a:solidFill>
+                  <a:srgbClr val="D4D4D4"/>
+                </a:solidFill>
+                <a:effectLst/>
+                <a:latin typeface="Consolas" panose="020B0609020204030204" pitchFamily="49" charset="0"/>
+              </a:rPr>
+              <a:t>=</a:t>
+            </a:r>
+            <a:r>
+              <a:rPr lang="en-US" altLang="ko-KR" sz="1050" b="0">
+                <a:solidFill>
+                  <a:srgbClr val="BBBEBF"/>
+                </a:solidFill>
+                <a:effectLst/>
+                <a:latin typeface="Consolas" panose="020B0609020204030204" pitchFamily="49" charset="0"/>
+              </a:rPr>
+              <a:t> </a:t>
+            </a:r>
+            <a:r>
+              <a:rPr lang="en-US" altLang="ko-KR" sz="1050" b="0">
+                <a:solidFill>
+                  <a:srgbClr val="79C0FF"/>
+                </a:solidFill>
+                <a:effectLst/>
+                <a:latin typeface="Consolas" panose="020B0609020204030204" pitchFamily="49" charset="0"/>
+              </a:rPr>
+              <a:t>userService</a:t>
+            </a:r>
+            <a:r>
+              <a:rPr lang="en-US" altLang="ko-KR" sz="1050" b="0">
+                <a:solidFill>
+                  <a:srgbClr val="BBBEBF"/>
+                </a:solidFill>
+                <a:effectLst/>
+                <a:latin typeface="Consolas" panose="020B0609020204030204" pitchFamily="49" charset="0"/>
+              </a:rPr>
+              <a:t>.</a:t>
+            </a:r>
+            <a:r>
+              <a:rPr lang="en-US" altLang="ko-KR" sz="1050" b="0">
+                <a:solidFill>
+                  <a:srgbClr val="D2A8FF"/>
+                </a:solidFill>
+                <a:effectLst/>
+                <a:latin typeface="Consolas" panose="020B0609020204030204" pitchFamily="49" charset="0"/>
+              </a:rPr>
+              <a:t>getUsersByIds</a:t>
+            </a:r>
+            <a:r>
+              <a:rPr lang="en-US" altLang="ko-KR" sz="1050" b="0">
+                <a:solidFill>
+                  <a:srgbClr val="BBBEBF"/>
+                </a:solidFill>
+                <a:effectLst/>
+                <a:latin typeface="Consolas" panose="020B0609020204030204" pitchFamily="49" charset="0"/>
+              </a:rPr>
+              <a:t>(</a:t>
+            </a:r>
+            <a:r>
+              <a:rPr lang="en-US" altLang="ko-KR" sz="1050" b="0">
+                <a:solidFill>
+                  <a:srgbClr val="FFA657"/>
+                </a:solidFill>
+                <a:effectLst/>
+                <a:latin typeface="Consolas" panose="020B0609020204030204" pitchFamily="49" charset="0"/>
+              </a:rPr>
+              <a:t>ids</a:t>
+            </a:r>
+            <a:r>
+              <a:rPr lang="en-US" altLang="ko-KR" sz="1050" b="0">
+                <a:solidFill>
+                  <a:srgbClr val="BBBEBF"/>
+                </a:solidFill>
+                <a:effectLst/>
+                <a:latin typeface="Consolas" panose="020B0609020204030204" pitchFamily="49" charset="0"/>
+              </a:rPr>
+              <a:t>);</a:t>
+            </a:r>
+          </a:p>
+          <a:p>
+            <a:pPr>
+              <a:lnSpc>
+                <a:spcPts val="1425"/>
+              </a:lnSpc>
+              <a:buNone/>
+            </a:pPr>
+            <a:r>
+              <a:rPr lang="en-US" altLang="ko-KR" sz="1050" b="0">
+                <a:solidFill>
+                  <a:srgbClr val="BBBEBF"/>
+                </a:solidFill>
+                <a:effectLst/>
+                <a:latin typeface="Consolas" panose="020B0609020204030204" pitchFamily="49" charset="0"/>
+              </a:rPr>
+              <a:t>        </a:t>
+            </a:r>
+            <a:r>
+              <a:rPr lang="en-US" altLang="ko-KR" sz="1050" b="0">
+                <a:solidFill>
+                  <a:srgbClr val="C586C0"/>
+                </a:solidFill>
+                <a:effectLst/>
+                <a:latin typeface="Consolas" panose="020B0609020204030204" pitchFamily="49" charset="0"/>
+              </a:rPr>
+              <a:t>return</a:t>
+            </a:r>
+            <a:r>
+              <a:rPr lang="en-US" altLang="ko-KR" sz="1050" b="0">
+                <a:solidFill>
+                  <a:srgbClr val="BBBEBF"/>
+                </a:solidFill>
+                <a:effectLst/>
+                <a:latin typeface="Consolas" panose="020B0609020204030204" pitchFamily="49" charset="0"/>
+              </a:rPr>
+              <a:t> </a:t>
+            </a:r>
+            <a:r>
+              <a:rPr lang="en-US" altLang="ko-KR" sz="1050" b="0">
+                <a:solidFill>
+                  <a:srgbClr val="4EC9B0"/>
+                </a:solidFill>
+                <a:effectLst/>
+                <a:latin typeface="Consolas" panose="020B0609020204030204" pitchFamily="49" charset="0"/>
+              </a:rPr>
+              <a:t>ResponseEntity</a:t>
+            </a:r>
+            <a:r>
+              <a:rPr lang="en-US" altLang="ko-KR" sz="1050" b="0">
+                <a:solidFill>
+                  <a:srgbClr val="BBBEBF"/>
+                </a:solidFill>
+                <a:effectLst/>
+                <a:latin typeface="Consolas" panose="020B0609020204030204" pitchFamily="49" charset="0"/>
+              </a:rPr>
+              <a:t>.</a:t>
+            </a:r>
+            <a:r>
+              <a:rPr lang="en-US" altLang="ko-KR" sz="1050" b="0">
+                <a:solidFill>
+                  <a:srgbClr val="D2A8FF"/>
+                </a:solidFill>
+                <a:effectLst/>
+                <a:latin typeface="Consolas" panose="020B0609020204030204" pitchFamily="49" charset="0"/>
+              </a:rPr>
+              <a:t>ok</a:t>
+            </a:r>
+            <a:r>
+              <a:rPr lang="en-US" altLang="ko-KR" sz="1050" b="0">
+                <a:solidFill>
+                  <a:srgbClr val="BBBEBF"/>
+                </a:solidFill>
+                <a:effectLst/>
+                <a:latin typeface="Consolas" panose="020B0609020204030204" pitchFamily="49" charset="0"/>
+              </a:rPr>
+              <a:t>(</a:t>
+            </a:r>
+            <a:r>
+              <a:rPr lang="en-US" altLang="ko-KR" sz="1050" b="0">
+                <a:solidFill>
+                  <a:srgbClr val="C9D1D9"/>
+                </a:solidFill>
+                <a:effectLst/>
+                <a:latin typeface="Consolas" panose="020B0609020204030204" pitchFamily="49" charset="0"/>
+              </a:rPr>
+              <a:t>userResponseDtos</a:t>
+            </a:r>
+            <a:r>
+              <a:rPr lang="en-US" altLang="ko-KR" sz="1050" b="0">
+                <a:solidFill>
+                  <a:srgbClr val="BBBEBF"/>
+                </a:solidFill>
+                <a:effectLst/>
+                <a:latin typeface="Consolas" panose="020B0609020204030204" pitchFamily="49" charset="0"/>
+              </a:rPr>
+              <a:t>);</a:t>
+            </a:r>
+          </a:p>
+          <a:p>
+            <a:pPr>
+              <a:lnSpc>
+                <a:spcPts val="1425"/>
+              </a:lnSpc>
+              <a:buNone/>
+            </a:pPr>
+            <a:r>
+              <a:rPr lang="en-US" altLang="ko-KR" sz="1050" b="0">
+                <a:solidFill>
+                  <a:srgbClr val="BBBEBF"/>
+                </a:solidFill>
+                <a:effectLst/>
+                <a:latin typeface="Consolas" panose="020B0609020204030204" pitchFamily="49" charset="0"/>
+              </a:rPr>
+              <a:t>    }</a:t>
+            </a:r>
+          </a:p>
+        </p:txBody>
+      </p:sp>
+    </p:spTree>
+    <p:extLst>
+      <p:ext uri="{BB962C8B-B14F-4D97-AF65-F5344CB8AC3E}">
+        <p14:creationId xmlns:p14="http://schemas.microsoft.com/office/powerpoint/2010/main" val="2266387346"/>
+      </p:ext>
+    </p:extLst>
+  </p:cSld>
+  <p:clrMapOvr>
+    <a:masterClrMapping/>
+  </p:clrMapOvr>
+</p:sld>
+</file>
+
+<file path=ppt/slides/slide27.xml><?xml version="1.0" encoding="utf-8"?>
+<p:sld xmlns:a="http://schemas.openxmlformats.org/drawingml/2006/main" xmlns:r="http://schemas.openxmlformats.org/officeDocument/2006/relationships" xmlns:p="http://schemas.openxmlformats.org/presentationml/2006/main">
+  <p:cSld>
+    <p:spTree>
+      <p:nvGrpSpPr>
+        <p:cNvPr id="1" name=""/>
+        <p:cNvGrpSpPr/>
+        <p:nvPr/>
+      </p:nvGrpSpPr>
+      <p:grpSpPr>
+        <a:xfrm>
+          <a:off x="0" y="0"/>
+          <a:ext cx="0" cy="0"/>
+          <a:chOff x="0" y="0"/>
+          <a:chExt cx="0" cy="0"/>
+        </a:xfrm>
+      </p:grpSpPr>
+      <p:sp>
+        <p:nvSpPr>
+          <p:cNvPr id="2" name="제목 1">
+            <a:extLst>
+              <a:ext uri="{FF2B5EF4-FFF2-40B4-BE49-F238E27FC236}">
+                <a16:creationId xmlns:a16="http://schemas.microsoft.com/office/drawing/2014/main" id="{A13FDF1A-4B7D-6E25-F755-B75CDE149666}"/>
+              </a:ext>
+            </a:extLst>
+          </p:cNvPr>
+          <p:cNvSpPr>
+            <a:spLocks noGrp="1"/>
+          </p:cNvSpPr>
+          <p:nvPr>
+            <p:ph type="title"/>
+          </p:nvPr>
+        </p:nvSpPr>
+        <p:spPr/>
+        <p:txBody>
+          <a:bodyPr/>
+          <a:lstStyle/>
+          <a:p>
+            <a:r>
+              <a:rPr lang="ko-KR" altLang="en-US"/>
+              <a:t>회원</a:t>
+            </a:r>
+            <a:r>
+              <a:rPr lang="en-US" altLang="ko-KR"/>
+              <a:t>Ids </a:t>
+            </a:r>
+            <a:r>
+              <a:rPr lang="ko-KR" altLang="en-US"/>
+              <a:t>조회 테스트</a:t>
+            </a:r>
+          </a:p>
+        </p:txBody>
+      </p:sp>
+      <p:pic>
+        <p:nvPicPr>
+          <p:cNvPr id="4" name="그림 3">
+            <a:extLst>
+              <a:ext uri="{FF2B5EF4-FFF2-40B4-BE49-F238E27FC236}">
+                <a16:creationId xmlns:a16="http://schemas.microsoft.com/office/drawing/2014/main" id="{167DD790-E2F3-C4AC-B26E-3301DC1B33B1}"/>
+              </a:ext>
+            </a:extLst>
+          </p:cNvPr>
+          <p:cNvPicPr>
+            <a:picLocks noChangeAspect="1"/>
+          </p:cNvPicPr>
+          <p:nvPr/>
+        </p:nvPicPr>
+        <p:blipFill>
+          <a:blip r:embed="rId2"/>
+          <a:stretch>
+            <a:fillRect/>
+          </a:stretch>
+        </p:blipFill>
+        <p:spPr>
+          <a:xfrm>
+            <a:off x="1097280" y="1910936"/>
+            <a:ext cx="7297168" cy="2286319"/>
+          </a:xfrm>
+          <a:prstGeom prst="rect">
+            <a:avLst/>
+          </a:prstGeom>
+        </p:spPr>
+      </p:pic>
+      <p:pic>
+        <p:nvPicPr>
+          <p:cNvPr id="6" name="그림 5">
+            <a:extLst>
+              <a:ext uri="{FF2B5EF4-FFF2-40B4-BE49-F238E27FC236}">
+                <a16:creationId xmlns:a16="http://schemas.microsoft.com/office/drawing/2014/main" id="{1947B4D4-95FF-3ABC-D615-59C2E8C162B8}"/>
+              </a:ext>
+            </a:extLst>
+          </p:cNvPr>
+          <p:cNvPicPr>
+            <a:picLocks noChangeAspect="1"/>
+          </p:cNvPicPr>
+          <p:nvPr/>
+        </p:nvPicPr>
+        <p:blipFill>
+          <a:blip r:embed="rId3"/>
+          <a:stretch>
+            <a:fillRect/>
+          </a:stretch>
+        </p:blipFill>
+        <p:spPr>
+          <a:xfrm>
+            <a:off x="1097280" y="4370831"/>
+            <a:ext cx="8840434" cy="1257475"/>
+          </a:xfrm>
+          <a:prstGeom prst="rect">
+            <a:avLst/>
+          </a:prstGeom>
+        </p:spPr>
+      </p:pic>
+    </p:spTree>
+    <p:extLst>
+      <p:ext uri="{BB962C8B-B14F-4D97-AF65-F5344CB8AC3E}">
+        <p14:creationId xmlns:p14="http://schemas.microsoft.com/office/powerpoint/2010/main" val="2626242844"/>
+      </p:ext>
+    </p:extLst>
+  </p:cSld>
+  <p:clrMapOvr>
+    <a:masterClrMapping/>
+  </p:clrMapOvr>
+</p:sld>
+</file>
+
 <file path=ppt/slides/slide3.xml><?xml version="1.0" encoding="utf-8"?>
 <p:sld xmlns:a="http://schemas.openxmlformats.org/drawingml/2006/main" xmlns:r="http://schemas.openxmlformats.org/officeDocument/2006/relationships" xmlns:p="http://schemas.openxmlformats.org/presentationml/2006/main">
   <p:cSld>

--- a/msa-ppt/3.데이터 조회 API 구현.pptx
+++ b/msa-ppt/3.데이터 조회 API 구현.pptx
@@ -32,6 +32,11 @@
     <p:sldId id="281" r:id="rId26"/>
     <p:sldId id="282" r:id="rId27"/>
     <p:sldId id="283" r:id="rId28"/>
+    <p:sldId id="284" r:id="rId29"/>
+    <p:sldId id="288" r:id="rId30"/>
+    <p:sldId id="286" r:id="rId31"/>
+    <p:sldId id="285" r:id="rId32"/>
+    <p:sldId id="289" r:id="rId33"/>
   </p:sldIdLst>
   <p:sldSz cx="12192000" cy="6858000"/>
   <p:notesSz cx="6858000" cy="9144000"/>
@@ -186,6 +191,15 @@
             <p14:sldId id="281"/>
             <p14:sldId id="282"/>
             <p14:sldId id="283"/>
+          </p14:sldIdLst>
+        </p14:section>
+        <p14:section name="게시판 정보 리스트 조회API" id="{747E335F-B98B-4DCF-ADE9-2BAF2D20B324}">
+          <p14:sldIdLst>
+            <p14:sldId id="284"/>
+            <p14:sldId id="288"/>
+            <p14:sldId id="286"/>
+            <p14:sldId id="285"/>
+            <p14:sldId id="289"/>
           </p14:sldIdLst>
         </p14:section>
       </p14:sectionLst>
@@ -20680,6 +20694,1516 @@
 </p:sld>
 </file>
 
+<file path=ppt/slides/slide28.xml><?xml version="1.0" encoding="utf-8"?>
+<p:sld xmlns:a="http://schemas.openxmlformats.org/drawingml/2006/main" xmlns:r="http://schemas.openxmlformats.org/officeDocument/2006/relationships" xmlns:p="http://schemas.openxmlformats.org/presentationml/2006/main">
+  <p:cSld>
+    <p:spTree>
+      <p:nvGrpSpPr>
+        <p:cNvPr id="1" name=""/>
+        <p:cNvGrpSpPr/>
+        <p:nvPr/>
+      </p:nvGrpSpPr>
+      <p:grpSpPr>
+        <a:xfrm>
+          <a:off x="0" y="0"/>
+          <a:ext cx="0" cy="0"/>
+          <a:chOff x="0" y="0"/>
+          <a:chExt cx="0" cy="0"/>
+        </a:xfrm>
+      </p:grpSpPr>
+      <p:sp>
+        <p:nvSpPr>
+          <p:cNvPr id="2" name="제목 1">
+            <a:extLst>
+              <a:ext uri="{FF2B5EF4-FFF2-40B4-BE49-F238E27FC236}">
+                <a16:creationId xmlns:a16="http://schemas.microsoft.com/office/drawing/2014/main" id="{8AA9479F-C12D-2C8C-9FA7-F289234D9922}"/>
+              </a:ext>
+            </a:extLst>
+          </p:cNvPr>
+          <p:cNvSpPr>
+            <a:spLocks noGrp="1"/>
+          </p:cNvSpPr>
+          <p:nvPr>
+            <p:ph type="title"/>
+          </p:nvPr>
+        </p:nvSpPr>
+        <p:spPr/>
+        <p:txBody>
+          <a:bodyPr>
+            <a:normAutofit/>
+          </a:bodyPr>
+          <a:lstStyle/>
+          <a:p>
+            <a:r>
+              <a:rPr lang="ko-KR" altLang="en-US" sz="4000"/>
+              <a:t>사용자 서비스 리스트 조회 요청 코드작성</a:t>
+            </a:r>
+          </a:p>
+        </p:txBody>
+      </p:sp>
+      <p:grpSp>
+        <p:nvGrpSpPr>
+          <p:cNvPr id="6" name="그룹 5">
+            <a:extLst>
+              <a:ext uri="{FF2B5EF4-FFF2-40B4-BE49-F238E27FC236}">
+                <a16:creationId xmlns:a16="http://schemas.microsoft.com/office/drawing/2014/main" id="{CD0A09B7-C022-949A-E9C3-0333946F2620}"/>
+              </a:ext>
+            </a:extLst>
+          </p:cNvPr>
+          <p:cNvGrpSpPr/>
+          <p:nvPr/>
+        </p:nvGrpSpPr>
+        <p:grpSpPr>
+          <a:xfrm>
+            <a:off x="258878" y="1929272"/>
+            <a:ext cx="2896004" cy="4334480"/>
+            <a:chOff x="460046" y="1929272"/>
+            <a:chExt cx="2896004" cy="4334480"/>
+          </a:xfrm>
+        </p:grpSpPr>
+        <p:pic>
+          <p:nvPicPr>
+            <p:cNvPr id="4" name="그림 3">
+              <a:extLst>
+                <a:ext uri="{FF2B5EF4-FFF2-40B4-BE49-F238E27FC236}">
+                  <a16:creationId xmlns:a16="http://schemas.microsoft.com/office/drawing/2014/main" id="{CD518522-7165-C80A-2BD9-4E9E8498DA8B}"/>
+                </a:ext>
+              </a:extLst>
+            </p:cNvPr>
+            <p:cNvPicPr>
+              <a:picLocks noChangeAspect="1"/>
+            </p:cNvPicPr>
+            <p:nvPr/>
+          </p:nvPicPr>
+          <p:blipFill>
+            <a:blip r:embed="rId2"/>
+            <a:stretch>
+              <a:fillRect/>
+            </a:stretch>
+          </p:blipFill>
+          <p:spPr>
+            <a:xfrm>
+              <a:off x="460046" y="1929272"/>
+              <a:ext cx="2896004" cy="4334480"/>
+            </a:xfrm>
+            <a:prstGeom prst="rect">
+              <a:avLst/>
+            </a:prstGeom>
+          </p:spPr>
+        </p:pic>
+        <p:sp>
+          <p:nvSpPr>
+            <p:cNvPr id="5" name="직사각형 4">
+              <a:extLst>
+                <a:ext uri="{FF2B5EF4-FFF2-40B4-BE49-F238E27FC236}">
+                  <a16:creationId xmlns:a16="http://schemas.microsoft.com/office/drawing/2014/main" id="{57C4E88B-CE3D-8269-EFA8-088525167C31}"/>
+                </a:ext>
+              </a:extLst>
+            </p:cNvPr>
+            <p:cNvSpPr/>
+            <p:nvPr/>
+          </p:nvSpPr>
+          <p:spPr>
+            <a:xfrm>
+              <a:off x="859536" y="2816352"/>
+              <a:ext cx="1069848" cy="228600"/>
+            </a:xfrm>
+            <a:prstGeom prst="rect">
+              <a:avLst/>
+            </a:prstGeom>
+            <a:noFill/>
+            <a:ln>
+              <a:solidFill>
+                <a:srgbClr val="FF0000"/>
+              </a:solidFill>
+            </a:ln>
+          </p:spPr>
+          <p:style>
+            <a:lnRef idx="2">
+              <a:schemeClr val="accent1">
+                <a:shade val="15000"/>
+              </a:schemeClr>
+            </a:lnRef>
+            <a:fillRef idx="1">
+              <a:schemeClr val="accent1"/>
+            </a:fillRef>
+            <a:effectRef idx="0">
+              <a:schemeClr val="accent1"/>
+            </a:effectRef>
+            <a:fontRef idx="minor">
+              <a:schemeClr val="lt1"/>
+            </a:fontRef>
+          </p:style>
+          <p:txBody>
+            <a:bodyPr rtlCol="0" anchor="ctr"/>
+            <a:lstStyle/>
+            <a:p>
+              <a:pPr algn="ctr"/>
+              <a:endParaRPr lang="ko-KR" altLang="en-US"/>
+            </a:p>
+          </p:txBody>
+        </p:sp>
+      </p:grpSp>
+      <p:sp>
+        <p:nvSpPr>
+          <p:cNvPr id="8" name="TextBox 7">
+            <a:extLst>
+              <a:ext uri="{FF2B5EF4-FFF2-40B4-BE49-F238E27FC236}">
+                <a16:creationId xmlns:a16="http://schemas.microsoft.com/office/drawing/2014/main" id="{133E1629-023E-5956-073C-6BD0044F95E0}"/>
+              </a:ext>
+            </a:extLst>
+          </p:cNvPr>
+          <p:cNvSpPr txBox="1"/>
+          <p:nvPr/>
+        </p:nvSpPr>
+        <p:spPr>
+          <a:xfrm>
+            <a:off x="3269542" y="1929272"/>
+            <a:ext cx="5767578" cy="3301096"/>
+          </a:xfrm>
+          <a:prstGeom prst="rect">
+            <a:avLst/>
+          </a:prstGeom>
+          <a:solidFill>
+            <a:schemeClr val="tx1"/>
+          </a:solidFill>
+        </p:spPr>
+        <p:txBody>
+          <a:bodyPr wrap="square">
+            <a:spAutoFit/>
+          </a:bodyPr>
+          <a:lstStyle/>
+          <a:p>
+            <a:pPr>
+              <a:lnSpc>
+                <a:spcPts val="1425"/>
+              </a:lnSpc>
+              <a:buNone/>
+            </a:pPr>
+            <a:r>
+              <a:rPr lang="en-US" altLang="ko-KR" sz="1100" b="0">
+                <a:solidFill>
+                  <a:srgbClr val="BBBEBF"/>
+                </a:solidFill>
+                <a:effectLst/>
+                <a:latin typeface="Consolas" panose="020B0609020204030204" pitchFamily="49" charset="0"/>
+              </a:rPr>
+              <a:t>    </a:t>
+            </a:r>
+            <a:r>
+              <a:rPr lang="en-US" altLang="ko-KR" sz="1100" b="0">
+                <a:solidFill>
+                  <a:srgbClr val="569CD6"/>
+                </a:solidFill>
+                <a:effectLst/>
+                <a:latin typeface="Consolas" panose="020B0609020204030204" pitchFamily="49" charset="0"/>
+              </a:rPr>
+              <a:t>public</a:t>
+            </a:r>
+            <a:r>
+              <a:rPr lang="en-US" altLang="ko-KR" sz="1100" b="0">
+                <a:solidFill>
+                  <a:srgbClr val="BBBEBF"/>
+                </a:solidFill>
+                <a:effectLst/>
+                <a:latin typeface="Consolas" panose="020B0609020204030204" pitchFamily="49" charset="0"/>
+              </a:rPr>
+              <a:t> </a:t>
+            </a:r>
+            <a:r>
+              <a:rPr lang="en-US" altLang="ko-KR" sz="1100" b="0">
+                <a:solidFill>
+                  <a:srgbClr val="4EC9B0"/>
+                </a:solidFill>
+                <a:effectLst/>
+                <a:latin typeface="Consolas" panose="020B0609020204030204" pitchFamily="49" charset="0"/>
+              </a:rPr>
+              <a:t>List</a:t>
+            </a:r>
+            <a:r>
+              <a:rPr lang="en-US" altLang="ko-KR" sz="1100" b="0">
+                <a:solidFill>
+                  <a:srgbClr val="BBBEBF"/>
+                </a:solidFill>
+                <a:effectLst/>
+                <a:latin typeface="Consolas" panose="020B0609020204030204" pitchFamily="49" charset="0"/>
+              </a:rPr>
+              <a:t>&lt;</a:t>
+            </a:r>
+            <a:r>
+              <a:rPr lang="en-US" altLang="ko-KR" sz="1100" b="0">
+                <a:solidFill>
+                  <a:srgbClr val="4EC9B0"/>
+                </a:solidFill>
+                <a:effectLst/>
+                <a:latin typeface="Consolas" panose="020B0609020204030204" pitchFamily="49" charset="0"/>
+              </a:rPr>
+              <a:t>UserResponseDto</a:t>
+            </a:r>
+            <a:r>
+              <a:rPr lang="en-US" altLang="ko-KR" sz="1100" b="0">
+                <a:solidFill>
+                  <a:srgbClr val="BBBEBF"/>
+                </a:solidFill>
+                <a:effectLst/>
+                <a:latin typeface="Consolas" panose="020B0609020204030204" pitchFamily="49" charset="0"/>
+              </a:rPr>
+              <a:t>&gt; </a:t>
+            </a:r>
+            <a:r>
+              <a:rPr lang="en-US" altLang="ko-KR" sz="1100" b="0">
+                <a:solidFill>
+                  <a:srgbClr val="D2A8FF"/>
+                </a:solidFill>
+                <a:effectLst/>
+                <a:latin typeface="Consolas" panose="020B0609020204030204" pitchFamily="49" charset="0"/>
+              </a:rPr>
+              <a:t>fetchUsersByIds</a:t>
+            </a:r>
+            <a:r>
+              <a:rPr lang="en-US" altLang="ko-KR" sz="1100" b="0">
+                <a:solidFill>
+                  <a:srgbClr val="BBBEBF"/>
+                </a:solidFill>
+                <a:effectLst/>
+                <a:latin typeface="Consolas" panose="020B0609020204030204" pitchFamily="49" charset="0"/>
+              </a:rPr>
+              <a:t>(</a:t>
+            </a:r>
+            <a:r>
+              <a:rPr lang="en-US" altLang="ko-KR" sz="1100" b="0">
+                <a:solidFill>
+                  <a:srgbClr val="4EC9B0"/>
+                </a:solidFill>
+                <a:effectLst/>
+                <a:latin typeface="Consolas" panose="020B0609020204030204" pitchFamily="49" charset="0"/>
+              </a:rPr>
+              <a:t>List</a:t>
+            </a:r>
+            <a:r>
+              <a:rPr lang="en-US" altLang="ko-KR" sz="1100" b="0">
+                <a:solidFill>
+                  <a:srgbClr val="BBBEBF"/>
+                </a:solidFill>
+                <a:effectLst/>
+                <a:latin typeface="Consolas" panose="020B0609020204030204" pitchFamily="49" charset="0"/>
+              </a:rPr>
+              <a:t>&lt;</a:t>
+            </a:r>
+            <a:r>
+              <a:rPr lang="en-US" altLang="ko-KR" sz="1100" b="0">
+                <a:solidFill>
+                  <a:srgbClr val="4EC9B0"/>
+                </a:solidFill>
+                <a:effectLst/>
+                <a:latin typeface="Consolas" panose="020B0609020204030204" pitchFamily="49" charset="0"/>
+              </a:rPr>
+              <a:t>Long</a:t>
+            </a:r>
+            <a:r>
+              <a:rPr lang="en-US" altLang="ko-KR" sz="1100" b="0">
+                <a:solidFill>
+                  <a:srgbClr val="BBBEBF"/>
+                </a:solidFill>
+                <a:effectLst/>
+                <a:latin typeface="Consolas" panose="020B0609020204030204" pitchFamily="49" charset="0"/>
+              </a:rPr>
+              <a:t>&gt; </a:t>
+            </a:r>
+            <a:r>
+              <a:rPr lang="en-US" altLang="ko-KR" sz="1100" b="0">
+                <a:solidFill>
+                  <a:srgbClr val="FFA657"/>
+                </a:solidFill>
+                <a:effectLst/>
+                <a:latin typeface="Consolas" panose="020B0609020204030204" pitchFamily="49" charset="0"/>
+              </a:rPr>
+              <a:t>ids</a:t>
+            </a:r>
+            <a:r>
+              <a:rPr lang="en-US" altLang="ko-KR" sz="1100" b="0">
+                <a:solidFill>
+                  <a:srgbClr val="BBBEBF"/>
+                </a:solidFill>
+                <a:effectLst/>
+                <a:latin typeface="Consolas" panose="020B0609020204030204" pitchFamily="49" charset="0"/>
+              </a:rPr>
+              <a:t>) {</a:t>
+            </a:r>
+          </a:p>
+          <a:p>
+            <a:pPr>
+              <a:lnSpc>
+                <a:spcPts val="1425"/>
+              </a:lnSpc>
+              <a:buNone/>
+            </a:pPr>
+            <a:r>
+              <a:rPr lang="en-US" altLang="ko-KR" sz="1100" b="0">
+                <a:solidFill>
+                  <a:srgbClr val="BBBEBF"/>
+                </a:solidFill>
+                <a:effectLst/>
+                <a:latin typeface="Consolas" panose="020B0609020204030204" pitchFamily="49" charset="0"/>
+              </a:rPr>
+              <a:t>        </a:t>
+            </a:r>
+            <a:r>
+              <a:rPr lang="en-US" altLang="ko-KR" sz="1100" b="0">
+                <a:solidFill>
+                  <a:srgbClr val="C586C0"/>
+                </a:solidFill>
+                <a:effectLst/>
+                <a:latin typeface="Consolas" panose="020B0609020204030204" pitchFamily="49" charset="0"/>
+              </a:rPr>
+              <a:t>try</a:t>
+            </a:r>
+            <a:r>
+              <a:rPr lang="en-US" altLang="ko-KR" sz="1100" b="0">
+                <a:solidFill>
+                  <a:srgbClr val="BBBEBF"/>
+                </a:solidFill>
+                <a:effectLst/>
+                <a:latin typeface="Consolas" panose="020B0609020204030204" pitchFamily="49" charset="0"/>
+              </a:rPr>
+              <a:t>{</a:t>
+            </a:r>
+          </a:p>
+          <a:p>
+            <a:pPr>
+              <a:lnSpc>
+                <a:spcPts val="1425"/>
+              </a:lnSpc>
+              <a:buNone/>
+            </a:pPr>
+            <a:r>
+              <a:rPr lang="en-US" altLang="ko-KR" sz="1100" b="0">
+                <a:solidFill>
+                  <a:srgbClr val="BBBEBF"/>
+                </a:solidFill>
+                <a:effectLst/>
+                <a:latin typeface="Consolas" panose="020B0609020204030204" pitchFamily="49" charset="0"/>
+              </a:rPr>
+              <a:t>            </a:t>
+            </a:r>
+            <a:r>
+              <a:rPr lang="en-US" altLang="ko-KR" sz="1100" b="0">
+                <a:solidFill>
+                  <a:srgbClr val="C586C0"/>
+                </a:solidFill>
+                <a:effectLst/>
+                <a:latin typeface="Consolas" panose="020B0609020204030204" pitchFamily="49" charset="0"/>
+              </a:rPr>
+              <a:t>return</a:t>
+            </a:r>
+            <a:r>
+              <a:rPr lang="en-US" altLang="ko-KR" sz="1100" b="0">
+                <a:solidFill>
+                  <a:srgbClr val="BBBEBF"/>
+                </a:solidFill>
+                <a:effectLst/>
+                <a:latin typeface="Consolas" panose="020B0609020204030204" pitchFamily="49" charset="0"/>
+              </a:rPr>
+              <a:t> </a:t>
+            </a:r>
+            <a:r>
+              <a:rPr lang="en-US" altLang="ko-KR" sz="1100" b="0">
+                <a:solidFill>
+                  <a:srgbClr val="79C0FF"/>
+                </a:solidFill>
+                <a:effectLst/>
+                <a:latin typeface="Consolas" panose="020B0609020204030204" pitchFamily="49" charset="0"/>
+              </a:rPr>
+              <a:t>this</a:t>
+            </a:r>
+            <a:r>
+              <a:rPr lang="en-US" altLang="ko-KR" sz="1100" b="0">
+                <a:solidFill>
+                  <a:srgbClr val="BBBEBF"/>
+                </a:solidFill>
+                <a:effectLst/>
+                <a:latin typeface="Consolas" panose="020B0609020204030204" pitchFamily="49" charset="0"/>
+              </a:rPr>
+              <a:t>.</a:t>
+            </a:r>
+            <a:r>
+              <a:rPr lang="en-US" altLang="ko-KR" sz="1100" b="0">
+                <a:solidFill>
+                  <a:srgbClr val="79C0FF"/>
+                </a:solidFill>
+                <a:effectLst/>
+                <a:latin typeface="Consolas" panose="020B0609020204030204" pitchFamily="49" charset="0"/>
+              </a:rPr>
+              <a:t>restClient</a:t>
+            </a:r>
+            <a:r>
+              <a:rPr lang="en-US" altLang="ko-KR" sz="1100" b="0">
+                <a:solidFill>
+                  <a:srgbClr val="BBBEBF"/>
+                </a:solidFill>
+                <a:effectLst/>
+                <a:latin typeface="Consolas" panose="020B0609020204030204" pitchFamily="49" charset="0"/>
+              </a:rPr>
+              <a:t>.</a:t>
+            </a:r>
+            <a:r>
+              <a:rPr lang="en-US" altLang="ko-KR" sz="1100" b="0">
+                <a:solidFill>
+                  <a:srgbClr val="D2A8FF"/>
+                </a:solidFill>
+                <a:effectLst/>
+                <a:latin typeface="Consolas" panose="020B0609020204030204" pitchFamily="49" charset="0"/>
+              </a:rPr>
+              <a:t>get</a:t>
+            </a:r>
+            <a:r>
+              <a:rPr lang="en-US" altLang="ko-KR" sz="1100" b="0">
+                <a:solidFill>
+                  <a:srgbClr val="BBBEBF"/>
+                </a:solidFill>
+                <a:effectLst/>
+                <a:latin typeface="Consolas" panose="020B0609020204030204" pitchFamily="49" charset="0"/>
+              </a:rPr>
+              <a:t>()</a:t>
+            </a:r>
+          </a:p>
+          <a:p>
+            <a:pPr>
+              <a:lnSpc>
+                <a:spcPts val="1425"/>
+              </a:lnSpc>
+              <a:buNone/>
+            </a:pPr>
+            <a:r>
+              <a:rPr lang="en-US" altLang="ko-KR" sz="1100" b="0">
+                <a:solidFill>
+                  <a:srgbClr val="BBBEBF"/>
+                </a:solidFill>
+                <a:effectLst/>
+                <a:latin typeface="Consolas" panose="020B0609020204030204" pitchFamily="49" charset="0"/>
+              </a:rPr>
+              <a:t>                .</a:t>
+            </a:r>
+            <a:r>
+              <a:rPr lang="en-US" altLang="ko-KR" sz="1100" b="0">
+                <a:solidFill>
+                  <a:srgbClr val="D2A8FF"/>
+                </a:solidFill>
+                <a:effectLst/>
+                <a:latin typeface="Consolas" panose="020B0609020204030204" pitchFamily="49" charset="0"/>
+              </a:rPr>
+              <a:t>uri</a:t>
+            </a:r>
+            <a:r>
+              <a:rPr lang="en-US" altLang="ko-KR" sz="1100" b="0">
+                <a:solidFill>
+                  <a:srgbClr val="BBBEBF"/>
+                </a:solidFill>
+                <a:effectLst/>
+                <a:latin typeface="Consolas" panose="020B0609020204030204" pitchFamily="49" charset="0"/>
+              </a:rPr>
+              <a:t>( </a:t>
+            </a:r>
+            <a:r>
+              <a:rPr lang="en-US" altLang="ko-KR" sz="1100" b="0">
+                <a:solidFill>
+                  <a:srgbClr val="FFA657"/>
+                </a:solidFill>
+                <a:effectLst/>
+                <a:latin typeface="Consolas" panose="020B0609020204030204" pitchFamily="49" charset="0"/>
+              </a:rPr>
+              <a:t>uriBuilder</a:t>
+            </a:r>
+            <a:r>
+              <a:rPr lang="en-US" altLang="ko-KR" sz="1100" b="0">
+                <a:solidFill>
+                  <a:srgbClr val="BBBEBF"/>
+                </a:solidFill>
+                <a:effectLst/>
+                <a:latin typeface="Consolas" panose="020B0609020204030204" pitchFamily="49" charset="0"/>
+              </a:rPr>
+              <a:t> </a:t>
+            </a:r>
+            <a:r>
+              <a:rPr lang="en-US" altLang="ko-KR" sz="1100" b="0">
+                <a:solidFill>
+                  <a:srgbClr val="FF7B72"/>
+                </a:solidFill>
+                <a:effectLst/>
+                <a:latin typeface="Consolas" panose="020B0609020204030204" pitchFamily="49" charset="0"/>
+              </a:rPr>
+              <a:t>-&gt;</a:t>
+            </a:r>
+            <a:r>
+              <a:rPr lang="en-US" altLang="ko-KR" sz="1100" b="0">
+                <a:solidFill>
+                  <a:srgbClr val="BBBEBF"/>
+                </a:solidFill>
+                <a:effectLst/>
+                <a:latin typeface="Consolas" panose="020B0609020204030204" pitchFamily="49" charset="0"/>
+              </a:rPr>
+              <a:t> </a:t>
+            </a:r>
+            <a:r>
+              <a:rPr lang="en-US" altLang="ko-KR" sz="1100" b="0">
+                <a:solidFill>
+                  <a:srgbClr val="FFA657"/>
+                </a:solidFill>
+                <a:effectLst/>
+                <a:latin typeface="Consolas" panose="020B0609020204030204" pitchFamily="49" charset="0"/>
+              </a:rPr>
+              <a:t>uriBuilder</a:t>
+            </a:r>
+            <a:endParaRPr lang="en-US" altLang="ko-KR" sz="1100" b="0">
+              <a:solidFill>
+                <a:srgbClr val="BBBEBF"/>
+              </a:solidFill>
+              <a:effectLst/>
+              <a:latin typeface="Consolas" panose="020B0609020204030204" pitchFamily="49" charset="0"/>
+            </a:endParaRPr>
+          </a:p>
+          <a:p>
+            <a:pPr>
+              <a:lnSpc>
+                <a:spcPts val="1425"/>
+              </a:lnSpc>
+              <a:buNone/>
+            </a:pPr>
+            <a:r>
+              <a:rPr lang="en-US" altLang="ko-KR" sz="1100" b="0">
+                <a:solidFill>
+                  <a:srgbClr val="BBBEBF"/>
+                </a:solidFill>
+                <a:effectLst/>
+                <a:latin typeface="Consolas" panose="020B0609020204030204" pitchFamily="49" charset="0"/>
+              </a:rPr>
+              <a:t>                    .</a:t>
+            </a:r>
+            <a:r>
+              <a:rPr lang="en-US" altLang="ko-KR" sz="1100" b="0">
+                <a:solidFill>
+                  <a:srgbClr val="D2A8FF"/>
+                </a:solidFill>
+                <a:effectLst/>
+                <a:latin typeface="Consolas" panose="020B0609020204030204" pitchFamily="49" charset="0"/>
+              </a:rPr>
+              <a:t>path</a:t>
+            </a:r>
+            <a:r>
+              <a:rPr lang="en-US" altLang="ko-KR" sz="1100" b="0">
+                <a:solidFill>
+                  <a:srgbClr val="BBBEBF"/>
+                </a:solidFill>
+                <a:effectLst/>
+                <a:latin typeface="Consolas" panose="020B0609020204030204" pitchFamily="49" charset="0"/>
+              </a:rPr>
+              <a:t>(</a:t>
+            </a:r>
+            <a:r>
+              <a:rPr lang="en-US" altLang="ko-KR" sz="1100" b="0">
+                <a:solidFill>
+                  <a:srgbClr val="A5D6FF"/>
+                </a:solidFill>
+                <a:effectLst/>
+                <a:latin typeface="Consolas" panose="020B0609020204030204" pitchFamily="49" charset="0"/>
+              </a:rPr>
+              <a:t>"/users"</a:t>
+            </a:r>
+            <a:r>
+              <a:rPr lang="en-US" altLang="ko-KR" sz="1100" b="0">
+                <a:solidFill>
+                  <a:srgbClr val="BBBEBF"/>
+                </a:solidFill>
+                <a:effectLst/>
+                <a:latin typeface="Consolas" panose="020B0609020204030204" pitchFamily="49" charset="0"/>
+              </a:rPr>
+              <a:t>)</a:t>
+            </a:r>
+          </a:p>
+          <a:p>
+            <a:pPr>
+              <a:lnSpc>
+                <a:spcPts val="1425"/>
+              </a:lnSpc>
+              <a:buNone/>
+            </a:pPr>
+            <a:r>
+              <a:rPr lang="en-US" altLang="ko-KR" sz="1100" b="0">
+                <a:solidFill>
+                  <a:srgbClr val="BBBEBF"/>
+                </a:solidFill>
+                <a:effectLst/>
+                <a:latin typeface="Consolas" panose="020B0609020204030204" pitchFamily="49" charset="0"/>
+              </a:rPr>
+              <a:t>                    .</a:t>
+            </a:r>
+            <a:r>
+              <a:rPr lang="en-US" altLang="ko-KR" sz="1100" b="0">
+                <a:solidFill>
+                  <a:srgbClr val="D2A8FF"/>
+                </a:solidFill>
+                <a:effectLst/>
+                <a:latin typeface="Consolas" panose="020B0609020204030204" pitchFamily="49" charset="0"/>
+              </a:rPr>
+              <a:t>queryParam</a:t>
+            </a:r>
+            <a:r>
+              <a:rPr lang="en-US" altLang="ko-KR" sz="1100" b="0">
+                <a:solidFill>
+                  <a:srgbClr val="BBBEBF"/>
+                </a:solidFill>
+                <a:effectLst/>
+                <a:latin typeface="Consolas" panose="020B0609020204030204" pitchFamily="49" charset="0"/>
+              </a:rPr>
+              <a:t>(</a:t>
+            </a:r>
+            <a:r>
+              <a:rPr lang="en-US" altLang="ko-KR" sz="1100" b="0">
+                <a:solidFill>
+                  <a:srgbClr val="A5D6FF"/>
+                </a:solidFill>
+                <a:effectLst/>
+                <a:latin typeface="Consolas" panose="020B0609020204030204" pitchFamily="49" charset="0"/>
+              </a:rPr>
+              <a:t>"ids"</a:t>
+            </a:r>
+            <a:r>
+              <a:rPr lang="en-US" altLang="ko-KR" sz="1100" b="0">
+                <a:solidFill>
+                  <a:srgbClr val="BBBEBF"/>
+                </a:solidFill>
+                <a:effectLst/>
+                <a:latin typeface="Consolas" panose="020B0609020204030204" pitchFamily="49" charset="0"/>
+              </a:rPr>
+              <a:t>, </a:t>
+            </a:r>
+            <a:r>
+              <a:rPr lang="en-US" altLang="ko-KR" sz="1100" b="0">
+                <a:solidFill>
+                  <a:srgbClr val="FFA657"/>
+                </a:solidFill>
+                <a:effectLst/>
+                <a:latin typeface="Consolas" panose="020B0609020204030204" pitchFamily="49" charset="0"/>
+              </a:rPr>
+              <a:t>ids</a:t>
+            </a:r>
+            <a:r>
+              <a:rPr lang="en-US" altLang="ko-KR" sz="1100" b="0">
+                <a:solidFill>
+                  <a:srgbClr val="BBBEBF"/>
+                </a:solidFill>
+                <a:effectLst/>
+                <a:latin typeface="Consolas" panose="020B0609020204030204" pitchFamily="49" charset="0"/>
+              </a:rPr>
+              <a:t>)</a:t>
+            </a:r>
+          </a:p>
+          <a:p>
+            <a:pPr>
+              <a:lnSpc>
+                <a:spcPts val="1425"/>
+              </a:lnSpc>
+              <a:buNone/>
+            </a:pPr>
+            <a:r>
+              <a:rPr lang="en-US" altLang="ko-KR" sz="1100" b="0">
+                <a:solidFill>
+                  <a:srgbClr val="BBBEBF"/>
+                </a:solidFill>
+                <a:effectLst/>
+                <a:latin typeface="Consolas" panose="020B0609020204030204" pitchFamily="49" charset="0"/>
+              </a:rPr>
+              <a:t>                    .</a:t>
+            </a:r>
+            <a:r>
+              <a:rPr lang="en-US" altLang="ko-KR" sz="1100" b="0">
+                <a:solidFill>
+                  <a:srgbClr val="D2A8FF"/>
+                </a:solidFill>
+                <a:effectLst/>
+                <a:latin typeface="Consolas" panose="020B0609020204030204" pitchFamily="49" charset="0"/>
+              </a:rPr>
+              <a:t>build</a:t>
+            </a:r>
+            <a:r>
+              <a:rPr lang="en-US" altLang="ko-KR" sz="1100" b="0">
+                <a:solidFill>
+                  <a:srgbClr val="BBBEBF"/>
+                </a:solidFill>
+                <a:effectLst/>
+                <a:latin typeface="Consolas" panose="020B0609020204030204" pitchFamily="49" charset="0"/>
+              </a:rPr>
+              <a:t>()</a:t>
+            </a:r>
+          </a:p>
+          <a:p>
+            <a:pPr>
+              <a:lnSpc>
+                <a:spcPts val="1425"/>
+              </a:lnSpc>
+              <a:buNone/>
+            </a:pPr>
+            <a:r>
+              <a:rPr lang="en-US" altLang="ko-KR" sz="1100" b="0">
+                <a:solidFill>
+                  <a:srgbClr val="BBBEBF"/>
+                </a:solidFill>
+                <a:effectLst/>
+                <a:latin typeface="Consolas" panose="020B0609020204030204" pitchFamily="49" charset="0"/>
+              </a:rPr>
+              <a:t>                )</a:t>
+            </a:r>
+          </a:p>
+          <a:p>
+            <a:pPr>
+              <a:lnSpc>
+                <a:spcPts val="1425"/>
+              </a:lnSpc>
+              <a:buNone/>
+            </a:pPr>
+            <a:r>
+              <a:rPr lang="en-US" altLang="ko-KR" sz="1100" b="0">
+                <a:solidFill>
+                  <a:srgbClr val="BBBEBF"/>
+                </a:solidFill>
+                <a:effectLst/>
+                <a:latin typeface="Consolas" panose="020B0609020204030204" pitchFamily="49" charset="0"/>
+              </a:rPr>
+              <a:t>                .</a:t>
+            </a:r>
+            <a:r>
+              <a:rPr lang="en-US" altLang="ko-KR" sz="1100" b="0">
+                <a:solidFill>
+                  <a:srgbClr val="D2A8FF"/>
+                </a:solidFill>
+                <a:effectLst/>
+                <a:latin typeface="Consolas" panose="020B0609020204030204" pitchFamily="49" charset="0"/>
+              </a:rPr>
+              <a:t>retrieve</a:t>
+            </a:r>
+            <a:r>
+              <a:rPr lang="en-US" altLang="ko-KR" sz="1100" b="0">
+                <a:solidFill>
+                  <a:srgbClr val="BBBEBF"/>
+                </a:solidFill>
+                <a:effectLst/>
+                <a:latin typeface="Consolas" panose="020B0609020204030204" pitchFamily="49" charset="0"/>
+              </a:rPr>
+              <a:t>()</a:t>
+            </a:r>
+          </a:p>
+          <a:p>
+            <a:pPr>
+              <a:lnSpc>
+                <a:spcPts val="1425"/>
+              </a:lnSpc>
+              <a:buNone/>
+            </a:pPr>
+            <a:r>
+              <a:rPr lang="en-US" altLang="ko-KR" sz="1100" b="0">
+                <a:solidFill>
+                  <a:srgbClr val="BBBEBF"/>
+                </a:solidFill>
+                <a:effectLst/>
+                <a:latin typeface="Consolas" panose="020B0609020204030204" pitchFamily="49" charset="0"/>
+              </a:rPr>
+              <a:t>                .</a:t>
+            </a:r>
+            <a:r>
+              <a:rPr lang="en-US" altLang="ko-KR" sz="1100" b="0">
+                <a:solidFill>
+                  <a:srgbClr val="D2A8FF"/>
+                </a:solidFill>
+                <a:effectLst/>
+                <a:latin typeface="Consolas" panose="020B0609020204030204" pitchFamily="49" charset="0"/>
+              </a:rPr>
+              <a:t>body</a:t>
+            </a:r>
+            <a:r>
+              <a:rPr lang="en-US" altLang="ko-KR" sz="1100" b="0">
+                <a:solidFill>
+                  <a:srgbClr val="BBBEBF"/>
+                </a:solidFill>
+                <a:effectLst/>
+                <a:latin typeface="Consolas" panose="020B0609020204030204" pitchFamily="49" charset="0"/>
+              </a:rPr>
+              <a:t>(</a:t>
+            </a:r>
+            <a:r>
+              <a:rPr lang="en-US" altLang="ko-KR" sz="1100" b="0">
+                <a:solidFill>
+                  <a:srgbClr val="C586C0"/>
+                </a:solidFill>
+                <a:effectLst/>
+                <a:latin typeface="Consolas" panose="020B0609020204030204" pitchFamily="49" charset="0"/>
+              </a:rPr>
+              <a:t>new</a:t>
+            </a:r>
+            <a:r>
+              <a:rPr lang="en-US" altLang="ko-KR" sz="1100" b="0">
+                <a:solidFill>
+                  <a:srgbClr val="BBBEBF"/>
+                </a:solidFill>
+                <a:effectLst/>
+                <a:latin typeface="Consolas" panose="020B0609020204030204" pitchFamily="49" charset="0"/>
+              </a:rPr>
+              <a:t> </a:t>
+            </a:r>
+            <a:r>
+              <a:rPr lang="en-US" altLang="ko-KR" sz="1100" b="0">
+                <a:solidFill>
+                  <a:srgbClr val="D2A8FF"/>
+                </a:solidFill>
+                <a:effectLst/>
+                <a:latin typeface="Consolas" panose="020B0609020204030204" pitchFamily="49" charset="0"/>
+              </a:rPr>
+              <a:t>ParameterizedTypeReference</a:t>
+            </a:r>
+            <a:r>
+              <a:rPr lang="en-US" altLang="ko-KR" sz="1100" b="0">
+                <a:solidFill>
+                  <a:srgbClr val="BBBEBF"/>
+                </a:solidFill>
+                <a:effectLst/>
+                <a:latin typeface="Consolas" panose="020B0609020204030204" pitchFamily="49" charset="0"/>
+              </a:rPr>
+              <a:t>&lt;&gt;(){});</a:t>
+            </a:r>
+          </a:p>
+          <a:p>
+            <a:pPr>
+              <a:lnSpc>
+                <a:spcPts val="1425"/>
+              </a:lnSpc>
+              <a:buNone/>
+            </a:pPr>
+            <a:br>
+              <a:rPr lang="en-US" altLang="ko-KR" sz="1100" b="0">
+                <a:solidFill>
+                  <a:srgbClr val="BBBEBF"/>
+                </a:solidFill>
+                <a:effectLst/>
+                <a:latin typeface="Consolas" panose="020B0609020204030204" pitchFamily="49" charset="0"/>
+              </a:rPr>
+            </a:br>
+            <a:endParaRPr lang="en-US" altLang="ko-KR" sz="1100" b="0">
+              <a:solidFill>
+                <a:srgbClr val="BBBEBF"/>
+              </a:solidFill>
+              <a:effectLst/>
+              <a:latin typeface="Consolas" panose="020B0609020204030204" pitchFamily="49" charset="0"/>
+            </a:endParaRPr>
+          </a:p>
+          <a:p>
+            <a:pPr>
+              <a:lnSpc>
+                <a:spcPts val="1425"/>
+              </a:lnSpc>
+              <a:buNone/>
+            </a:pPr>
+            <a:r>
+              <a:rPr lang="en-US" altLang="ko-KR" sz="1100" b="0">
+                <a:solidFill>
+                  <a:srgbClr val="BBBEBF"/>
+                </a:solidFill>
+                <a:effectLst/>
+                <a:latin typeface="Consolas" panose="020B0609020204030204" pitchFamily="49" charset="0"/>
+              </a:rPr>
+              <a:t>        } </a:t>
+            </a:r>
+            <a:r>
+              <a:rPr lang="en-US" altLang="ko-KR" sz="1100" b="0">
+                <a:solidFill>
+                  <a:srgbClr val="C586C0"/>
+                </a:solidFill>
+                <a:effectLst/>
+                <a:latin typeface="Consolas" panose="020B0609020204030204" pitchFamily="49" charset="0"/>
+              </a:rPr>
+              <a:t>catch</a:t>
+            </a:r>
+            <a:r>
+              <a:rPr lang="en-US" altLang="ko-KR" sz="1100" b="0">
+                <a:solidFill>
+                  <a:srgbClr val="BBBEBF"/>
+                </a:solidFill>
+                <a:effectLst/>
+                <a:latin typeface="Consolas" panose="020B0609020204030204" pitchFamily="49" charset="0"/>
+              </a:rPr>
+              <a:t> (</a:t>
+            </a:r>
+            <a:r>
+              <a:rPr lang="en-US" altLang="ko-KR" sz="1100" b="0">
+                <a:solidFill>
+                  <a:srgbClr val="4EC9B0"/>
+                </a:solidFill>
+                <a:effectLst/>
+                <a:latin typeface="Consolas" panose="020B0609020204030204" pitchFamily="49" charset="0"/>
+              </a:rPr>
+              <a:t>RestClientException</a:t>
+            </a:r>
+            <a:r>
+              <a:rPr lang="en-US" altLang="ko-KR" sz="1100" b="0">
+                <a:solidFill>
+                  <a:srgbClr val="BBBEBF"/>
+                </a:solidFill>
+                <a:effectLst/>
+                <a:latin typeface="Consolas" panose="020B0609020204030204" pitchFamily="49" charset="0"/>
+              </a:rPr>
+              <a:t> </a:t>
+            </a:r>
+            <a:r>
+              <a:rPr lang="en-US" altLang="ko-KR" sz="1100" b="0">
+                <a:solidFill>
+                  <a:srgbClr val="C9D1D9"/>
+                </a:solidFill>
+                <a:effectLst/>
+                <a:latin typeface="Consolas" panose="020B0609020204030204" pitchFamily="49" charset="0"/>
+              </a:rPr>
+              <a:t>e</a:t>
+            </a:r>
+            <a:r>
+              <a:rPr lang="en-US" altLang="ko-KR" sz="1100" b="0">
+                <a:solidFill>
+                  <a:srgbClr val="BBBEBF"/>
+                </a:solidFill>
+                <a:effectLst/>
+                <a:latin typeface="Consolas" panose="020B0609020204030204" pitchFamily="49" charset="0"/>
+              </a:rPr>
+              <a:t>) {</a:t>
+            </a:r>
+          </a:p>
+          <a:p>
+            <a:pPr>
+              <a:lnSpc>
+                <a:spcPts val="1425"/>
+              </a:lnSpc>
+              <a:buNone/>
+            </a:pPr>
+            <a:r>
+              <a:rPr lang="en-US" altLang="ko-KR" sz="1100" b="0">
+                <a:solidFill>
+                  <a:srgbClr val="BBBEBF"/>
+                </a:solidFill>
+                <a:effectLst/>
+                <a:latin typeface="Consolas" panose="020B0609020204030204" pitchFamily="49" charset="0"/>
+              </a:rPr>
+              <a:t>            </a:t>
+            </a:r>
+            <a:r>
+              <a:rPr lang="en-US" altLang="ko-KR" sz="1100" b="0">
+                <a:solidFill>
+                  <a:srgbClr val="8B949E"/>
+                </a:solidFill>
+                <a:effectLst/>
+                <a:latin typeface="Consolas" panose="020B0609020204030204" pitchFamily="49" charset="0"/>
+              </a:rPr>
+              <a:t>// </a:t>
+            </a:r>
+            <a:r>
+              <a:rPr lang="ko-KR" altLang="en-US" sz="1100" b="0">
+                <a:solidFill>
+                  <a:srgbClr val="8B949E"/>
+                </a:solidFill>
+                <a:effectLst/>
+                <a:latin typeface="Consolas" panose="020B0609020204030204" pitchFamily="49" charset="0"/>
+              </a:rPr>
+              <a:t>로깅 </a:t>
+            </a:r>
+            <a:r>
+              <a:rPr lang="en-US" altLang="ko-KR" sz="1100" b="0">
+                <a:solidFill>
+                  <a:srgbClr val="8B949E"/>
+                </a:solidFill>
+                <a:effectLst/>
+                <a:latin typeface="Consolas" panose="020B0609020204030204" pitchFamily="49" charset="0"/>
+              </a:rPr>
+              <a:t>: </a:t>
+            </a:r>
+            <a:r>
+              <a:rPr lang="ko-KR" altLang="en-US" sz="1100" b="0">
+                <a:solidFill>
+                  <a:srgbClr val="8B949E"/>
+                </a:solidFill>
+                <a:effectLst/>
+                <a:latin typeface="Consolas" panose="020B0609020204030204" pitchFamily="49" charset="0"/>
+              </a:rPr>
+              <a:t>예외 발생시 로그를 남겨 문제를 파악할 수 있게 해야함</a:t>
+            </a:r>
+            <a:endParaRPr lang="ko-KR" altLang="en-US" sz="1100" b="0">
+              <a:solidFill>
+                <a:srgbClr val="BBBEBF"/>
+              </a:solidFill>
+              <a:effectLst/>
+              <a:latin typeface="Consolas" panose="020B0609020204030204" pitchFamily="49" charset="0"/>
+            </a:endParaRPr>
+          </a:p>
+          <a:p>
+            <a:pPr>
+              <a:lnSpc>
+                <a:spcPts val="1425"/>
+              </a:lnSpc>
+              <a:buNone/>
+            </a:pPr>
+            <a:r>
+              <a:rPr lang="ko-KR" altLang="en-US" sz="1100" b="0">
+                <a:solidFill>
+                  <a:srgbClr val="BBBEBF"/>
+                </a:solidFill>
+                <a:effectLst/>
+                <a:latin typeface="Consolas" panose="020B0609020204030204" pitchFamily="49" charset="0"/>
+              </a:rPr>
+              <a:t>            </a:t>
+            </a:r>
+            <a:r>
+              <a:rPr lang="en-US" altLang="ko-KR" sz="1100" b="0">
+                <a:solidFill>
+                  <a:srgbClr val="8B949E"/>
+                </a:solidFill>
+                <a:effectLst/>
+                <a:latin typeface="Consolas" panose="020B0609020204030204" pitchFamily="49" charset="0"/>
+              </a:rPr>
+              <a:t>// log.error("</a:t>
+            </a:r>
+            <a:r>
+              <a:rPr lang="ko-KR" altLang="en-US" sz="1100" b="0">
+                <a:solidFill>
+                  <a:srgbClr val="8B949E"/>
+                </a:solidFill>
+                <a:effectLst/>
+                <a:latin typeface="Consolas" panose="020B0609020204030204" pitchFamily="49" charset="0"/>
+              </a:rPr>
+              <a:t>사용자 정보 조회 실패</a:t>
+            </a:r>
+            <a:r>
+              <a:rPr lang="en-US" altLang="ko-KR" sz="1100" b="0">
+                <a:solidFill>
+                  <a:srgbClr val="8B949E"/>
+                </a:solidFill>
+                <a:effectLst/>
+                <a:latin typeface="Consolas" panose="020B0609020204030204" pitchFamily="49" charset="0"/>
+              </a:rPr>
+              <a:t>");</a:t>
+            </a:r>
+            <a:endParaRPr lang="ko-KR" altLang="en-US" sz="1100" b="0">
+              <a:solidFill>
+                <a:srgbClr val="BBBEBF"/>
+              </a:solidFill>
+              <a:effectLst/>
+              <a:latin typeface="Consolas" panose="020B0609020204030204" pitchFamily="49" charset="0"/>
+            </a:endParaRPr>
+          </a:p>
+          <a:p>
+            <a:pPr>
+              <a:lnSpc>
+                <a:spcPts val="1425"/>
+              </a:lnSpc>
+              <a:buNone/>
+            </a:pPr>
+            <a:r>
+              <a:rPr lang="ko-KR" altLang="en-US" sz="1100" b="0">
+                <a:solidFill>
+                  <a:srgbClr val="BBBEBF"/>
+                </a:solidFill>
+                <a:effectLst/>
+                <a:latin typeface="Consolas" panose="020B0609020204030204" pitchFamily="49" charset="0"/>
+              </a:rPr>
+              <a:t>            </a:t>
+            </a:r>
+            <a:r>
+              <a:rPr lang="en-US" altLang="ko-KR" sz="1100" b="0">
+                <a:solidFill>
+                  <a:srgbClr val="C586C0"/>
+                </a:solidFill>
+                <a:effectLst/>
+                <a:latin typeface="Consolas" panose="020B0609020204030204" pitchFamily="49" charset="0"/>
+              </a:rPr>
+              <a:t>return</a:t>
+            </a:r>
+            <a:r>
+              <a:rPr lang="en-US" altLang="ko-KR" sz="1100" b="0">
+                <a:solidFill>
+                  <a:srgbClr val="BBBEBF"/>
+                </a:solidFill>
+                <a:effectLst/>
+                <a:latin typeface="Consolas" panose="020B0609020204030204" pitchFamily="49" charset="0"/>
+              </a:rPr>
+              <a:t> </a:t>
+            </a:r>
+            <a:r>
+              <a:rPr lang="en-US" altLang="ko-KR" sz="1100" b="0">
+                <a:solidFill>
+                  <a:srgbClr val="4EC9B0"/>
+                </a:solidFill>
+                <a:effectLst/>
+                <a:latin typeface="Consolas" panose="020B0609020204030204" pitchFamily="49" charset="0"/>
+              </a:rPr>
+              <a:t>Collections</a:t>
+            </a:r>
+            <a:r>
+              <a:rPr lang="en-US" altLang="ko-KR" sz="1100" b="0">
+                <a:solidFill>
+                  <a:srgbClr val="BBBEBF"/>
+                </a:solidFill>
+                <a:effectLst/>
+                <a:latin typeface="Consolas" panose="020B0609020204030204" pitchFamily="49" charset="0"/>
+              </a:rPr>
+              <a:t>.</a:t>
+            </a:r>
+            <a:r>
+              <a:rPr lang="en-US" altLang="ko-KR" sz="1100" b="0">
+                <a:solidFill>
+                  <a:srgbClr val="D2A8FF"/>
+                </a:solidFill>
+                <a:effectLst/>
+                <a:latin typeface="Consolas" panose="020B0609020204030204" pitchFamily="49" charset="0"/>
+              </a:rPr>
+              <a:t>emptyList</a:t>
+            </a:r>
+            <a:r>
+              <a:rPr lang="en-US" altLang="ko-KR" sz="1100" b="0">
+                <a:solidFill>
+                  <a:srgbClr val="BBBEBF"/>
+                </a:solidFill>
+                <a:effectLst/>
+                <a:latin typeface="Consolas" panose="020B0609020204030204" pitchFamily="49" charset="0"/>
+              </a:rPr>
+              <a:t>();</a:t>
+            </a:r>
+          </a:p>
+          <a:p>
+            <a:pPr>
+              <a:lnSpc>
+                <a:spcPts val="1425"/>
+              </a:lnSpc>
+              <a:buNone/>
+            </a:pPr>
+            <a:r>
+              <a:rPr lang="en-US" altLang="ko-KR" sz="1100" b="0">
+                <a:solidFill>
+                  <a:srgbClr val="BBBEBF"/>
+                </a:solidFill>
+                <a:effectLst/>
+                <a:latin typeface="Consolas" panose="020B0609020204030204" pitchFamily="49" charset="0"/>
+              </a:rPr>
+              <a:t>        }</a:t>
+            </a:r>
+          </a:p>
+          <a:p>
+            <a:pPr>
+              <a:lnSpc>
+                <a:spcPts val="1425"/>
+              </a:lnSpc>
+              <a:buNone/>
+            </a:pPr>
+            <a:r>
+              <a:rPr lang="en-US" altLang="ko-KR" sz="1100" b="0">
+                <a:solidFill>
+                  <a:srgbClr val="BBBEBF"/>
+                </a:solidFill>
+                <a:effectLst/>
+                <a:latin typeface="Consolas" panose="020B0609020204030204" pitchFamily="49" charset="0"/>
+              </a:rPr>
+              <a:t>    }</a:t>
+            </a:r>
+          </a:p>
+        </p:txBody>
+      </p:sp>
+      <p:sp>
+        <p:nvSpPr>
+          <p:cNvPr id="11" name="TextBox 10">
+            <a:extLst>
+              <a:ext uri="{FF2B5EF4-FFF2-40B4-BE49-F238E27FC236}">
+                <a16:creationId xmlns:a16="http://schemas.microsoft.com/office/drawing/2014/main" id="{2A84FEF0-AD8D-DFEA-0777-6B2839AE4959}"/>
+              </a:ext>
+            </a:extLst>
+          </p:cNvPr>
+          <p:cNvSpPr txBox="1"/>
+          <p:nvPr/>
+        </p:nvSpPr>
+        <p:spPr>
+          <a:xfrm>
+            <a:off x="3269542" y="5321808"/>
+            <a:ext cx="8434778" cy="923330"/>
+          </a:xfrm>
+          <a:prstGeom prst="rect">
+            <a:avLst/>
+          </a:prstGeom>
+          <a:noFill/>
+        </p:spPr>
+        <p:txBody>
+          <a:bodyPr wrap="square" rtlCol="0">
+            <a:spAutoFit/>
+          </a:bodyPr>
+          <a:lstStyle/>
+          <a:p>
+            <a:r>
+              <a:rPr lang="en-US" altLang="ko-KR"/>
+              <a:t>ParameterizedTypeReference&lt;&gt;(){} – </a:t>
+            </a:r>
+            <a:r>
+              <a:rPr lang="ko-KR" altLang="en-US"/>
+              <a:t>공식문서에서 권장하는 사양</a:t>
+            </a:r>
+            <a:br>
+              <a:rPr lang="en-US" altLang="ko-KR"/>
+            </a:br>
+            <a:r>
+              <a:rPr lang="en-US" altLang="ko-KR"/>
+              <a:t>                                                                  </a:t>
+            </a:r>
+            <a:r>
+              <a:rPr lang="ko-KR" altLang="en-US"/>
+              <a:t>반환하려는 데이터 정보를 감지하여</a:t>
+            </a:r>
+            <a:r>
+              <a:rPr lang="en-US" altLang="ko-KR"/>
+              <a:t>,</a:t>
+            </a:r>
+            <a:br>
+              <a:rPr lang="en-US" altLang="ko-KR"/>
+            </a:br>
+            <a:r>
+              <a:rPr lang="en-US" altLang="ko-KR"/>
+              <a:t>                                                                  </a:t>
+            </a:r>
+            <a:r>
+              <a:rPr lang="ko-KR" altLang="en-US"/>
+              <a:t>응답데이터를 맵핑해 줌 </a:t>
+            </a:r>
+          </a:p>
+        </p:txBody>
+      </p:sp>
+    </p:spTree>
+    <p:extLst>
+      <p:ext uri="{BB962C8B-B14F-4D97-AF65-F5344CB8AC3E}">
+        <p14:creationId xmlns:p14="http://schemas.microsoft.com/office/powerpoint/2010/main" val="3299258874"/>
+      </p:ext>
+    </p:extLst>
+  </p:cSld>
+  <p:clrMapOvr>
+    <a:masterClrMapping/>
+  </p:clrMapOvr>
+</p:sld>
+</file>
+
+<file path=ppt/slides/slide29.xml><?xml version="1.0" encoding="utf-8"?>
+<p:sld xmlns:a="http://schemas.openxmlformats.org/drawingml/2006/main" xmlns:r="http://schemas.openxmlformats.org/officeDocument/2006/relationships" xmlns:p="http://schemas.openxmlformats.org/presentationml/2006/main">
+  <p:cSld>
+    <p:spTree>
+      <p:nvGrpSpPr>
+        <p:cNvPr id="1" name="">
+          <a:extLst>
+            <a:ext uri="{FF2B5EF4-FFF2-40B4-BE49-F238E27FC236}">
+              <a16:creationId xmlns:a16="http://schemas.microsoft.com/office/drawing/2014/main" id="{9090979D-0E31-2986-3B30-F8D65578FAA9}"/>
+            </a:ext>
+          </a:extLst>
+        </p:cNvPr>
+        <p:cNvGrpSpPr/>
+        <p:nvPr/>
+      </p:nvGrpSpPr>
+      <p:grpSpPr>
+        <a:xfrm>
+          <a:off x="0" y="0"/>
+          <a:ext cx="0" cy="0"/>
+          <a:chOff x="0" y="0"/>
+          <a:chExt cx="0" cy="0"/>
+        </a:xfrm>
+      </p:grpSpPr>
+      <p:sp>
+        <p:nvSpPr>
+          <p:cNvPr id="2" name="제목 1">
+            <a:extLst>
+              <a:ext uri="{FF2B5EF4-FFF2-40B4-BE49-F238E27FC236}">
+                <a16:creationId xmlns:a16="http://schemas.microsoft.com/office/drawing/2014/main" id="{5D3FB2B0-CA48-C65C-EAE3-8048DBB58793}"/>
+              </a:ext>
+            </a:extLst>
+          </p:cNvPr>
+          <p:cNvSpPr>
+            <a:spLocks noGrp="1"/>
+          </p:cNvSpPr>
+          <p:nvPr>
+            <p:ph type="title"/>
+          </p:nvPr>
+        </p:nvSpPr>
+        <p:spPr/>
+        <p:txBody>
+          <a:bodyPr>
+            <a:normAutofit/>
+          </a:bodyPr>
+          <a:lstStyle/>
+          <a:p>
+            <a:r>
+              <a:rPr lang="ko-KR" altLang="en-US" sz="4000"/>
+              <a:t>사용자 서비스 리스트 조회 요청 코드작성</a:t>
+            </a:r>
+            <a:r>
+              <a:rPr lang="en-US" altLang="ko-KR" sz="4000"/>
+              <a:t>(2)</a:t>
+            </a:r>
+            <a:endParaRPr lang="ko-KR" altLang="en-US" sz="4000"/>
+          </a:p>
+        </p:txBody>
+      </p:sp>
+      <p:pic>
+        <p:nvPicPr>
+          <p:cNvPr id="3" name="그림 2">
+            <a:extLst>
+              <a:ext uri="{FF2B5EF4-FFF2-40B4-BE49-F238E27FC236}">
+                <a16:creationId xmlns:a16="http://schemas.microsoft.com/office/drawing/2014/main" id="{4A0A697C-3462-7729-BC00-D8BA28D5935A}"/>
+              </a:ext>
+            </a:extLst>
+          </p:cNvPr>
+          <p:cNvPicPr>
+            <a:picLocks noChangeAspect="1"/>
+          </p:cNvPicPr>
+          <p:nvPr/>
+        </p:nvPicPr>
+        <p:blipFill>
+          <a:blip r:embed="rId2"/>
+          <a:stretch>
+            <a:fillRect/>
+          </a:stretch>
+        </p:blipFill>
+        <p:spPr>
+          <a:xfrm>
+            <a:off x="1273690" y="1803773"/>
+            <a:ext cx="5056057" cy="4767624"/>
+          </a:xfrm>
+          <a:prstGeom prst="rect">
+            <a:avLst/>
+          </a:prstGeom>
+        </p:spPr>
+      </p:pic>
+      <p:sp>
+        <p:nvSpPr>
+          <p:cNvPr id="7" name="TextBox 6">
+            <a:extLst>
+              <a:ext uri="{FF2B5EF4-FFF2-40B4-BE49-F238E27FC236}">
+                <a16:creationId xmlns:a16="http://schemas.microsoft.com/office/drawing/2014/main" id="{7592956F-B5AD-2746-520D-36F7209D1C70}"/>
+              </a:ext>
+            </a:extLst>
+          </p:cNvPr>
+          <p:cNvSpPr txBox="1"/>
+          <p:nvPr/>
+        </p:nvSpPr>
+        <p:spPr>
+          <a:xfrm>
+            <a:off x="6329747" y="1803773"/>
+            <a:ext cx="5584885" cy="1754326"/>
+          </a:xfrm>
+          <a:prstGeom prst="rect">
+            <a:avLst/>
+          </a:prstGeom>
+          <a:noFill/>
+        </p:spPr>
+        <p:txBody>
+          <a:bodyPr wrap="square" rtlCol="0">
+            <a:spAutoFit/>
+          </a:bodyPr>
+          <a:lstStyle/>
+          <a:p>
+            <a:r>
+              <a:rPr lang="en-US" altLang="ko-KR" sz="1200"/>
+              <a:t>RequestParam </a:t>
+            </a:r>
+            <a:r>
+              <a:rPr lang="ko-KR" altLang="en-US" sz="1200"/>
+              <a:t>을 </a:t>
+            </a:r>
+            <a:r>
+              <a:rPr lang="en-US" altLang="ko-KR" sz="1200"/>
+              <a:t>List&lt;Long&gt; ids </a:t>
+            </a:r>
+            <a:r>
+              <a:rPr lang="ko-KR" altLang="en-US" sz="1200"/>
+              <a:t>로 받을 때</a:t>
+            </a:r>
+            <a:r>
+              <a:rPr lang="en-US" altLang="ko-KR" sz="1200"/>
+              <a:t>,</a:t>
+            </a:r>
+          </a:p>
+          <a:p>
+            <a:endParaRPr lang="en-US" altLang="ko-KR" sz="1200"/>
+          </a:p>
+          <a:p>
+            <a:r>
+              <a:rPr lang="en-US" altLang="ko-KR" sz="1200"/>
+              <a:t>?ids=1&amp;ids=2&amp;ids=3 </a:t>
+            </a:r>
+            <a:r>
+              <a:rPr lang="ko-KR" altLang="en-US" sz="1200"/>
+              <a:t>형태로 리스트를 전송할지</a:t>
+            </a:r>
+            <a:br>
+              <a:rPr lang="en-US" altLang="ko-KR" sz="1200"/>
+            </a:br>
+            <a:r>
+              <a:rPr lang="en-US" altLang="ko-KR" sz="1200"/>
+              <a:t>?ids=1,2,3 </a:t>
+            </a:r>
+            <a:r>
+              <a:rPr lang="ko-KR" altLang="en-US" sz="1200"/>
+              <a:t>형태로 리스트를 전송할지 알 지 못함</a:t>
+            </a:r>
+            <a:r>
+              <a:rPr lang="en-US" altLang="ko-KR" sz="1200"/>
+              <a:t>.</a:t>
+            </a:r>
+          </a:p>
+          <a:p>
+            <a:endParaRPr lang="en-US" altLang="ko-KR" sz="1200"/>
+          </a:p>
+          <a:p>
+            <a:r>
+              <a:rPr lang="ko-KR" altLang="en-US" sz="1200"/>
+              <a:t>어떤 형태든 대응가능하도록 </a:t>
+            </a:r>
+            <a:r>
+              <a:rPr lang="en-US" altLang="ko-KR" sz="1200"/>
+              <a:t>.path().queryParam() </a:t>
+            </a:r>
+            <a:r>
+              <a:rPr lang="ko-KR" altLang="en-US" sz="1200"/>
+              <a:t>빌더 메소드를 사용하여</a:t>
+            </a:r>
+            <a:endParaRPr lang="en-US" altLang="ko-KR" sz="1200"/>
+          </a:p>
+          <a:p>
+            <a:r>
+              <a:rPr lang="en-US" altLang="ko-KR" sz="1200"/>
+              <a:t>URI</a:t>
+            </a:r>
+            <a:r>
+              <a:rPr lang="ko-KR" altLang="en-US" sz="1200"/>
+              <a:t>를 프로그래밍 방식으로 조립하여 사용</a:t>
+            </a:r>
+            <a:r>
+              <a:rPr lang="en-US" altLang="ko-KR" sz="1200"/>
+              <a:t>.</a:t>
+            </a:r>
+          </a:p>
+          <a:p>
+            <a:endParaRPr lang="en-US" altLang="ko-KR" sz="1200"/>
+          </a:p>
+          <a:p>
+            <a:endParaRPr lang="ko-KR" altLang="en-US" sz="1200"/>
+          </a:p>
+        </p:txBody>
+      </p:sp>
+    </p:spTree>
+    <p:extLst>
+      <p:ext uri="{BB962C8B-B14F-4D97-AF65-F5344CB8AC3E}">
+        <p14:creationId xmlns:p14="http://schemas.microsoft.com/office/powerpoint/2010/main" val="1046222013"/>
+      </p:ext>
+    </p:extLst>
+  </p:cSld>
+  <p:clrMapOvr>
+    <a:masterClrMapping/>
+  </p:clrMapOvr>
+</p:sld>
+</file>
+
 <file path=ppt/slides/slide3.xml><?xml version="1.0" encoding="utf-8"?>
 <p:sld xmlns:a="http://schemas.openxmlformats.org/drawingml/2006/main" xmlns:r="http://schemas.openxmlformats.org/officeDocument/2006/relationships" xmlns:p="http://schemas.openxmlformats.org/presentationml/2006/main">
   <p:cSld>
@@ -20769,6 +22293,3018 @@
     <p:extLst>
       <p:ext uri="{BB962C8B-B14F-4D97-AF65-F5344CB8AC3E}">
         <p14:creationId xmlns:p14="http://schemas.microsoft.com/office/powerpoint/2010/main" val="3715406823"/>
+      </p:ext>
+    </p:extLst>
+  </p:cSld>
+  <p:clrMapOvr>
+    <a:masterClrMapping/>
+  </p:clrMapOvr>
+</p:sld>
+</file>
+
+<file path=ppt/slides/slide30.xml><?xml version="1.0" encoding="utf-8"?>
+<p:sld xmlns:a="http://schemas.openxmlformats.org/drawingml/2006/main" xmlns:r="http://schemas.openxmlformats.org/officeDocument/2006/relationships" xmlns:p="http://schemas.openxmlformats.org/presentationml/2006/main">
+  <p:cSld>
+    <p:spTree>
+      <p:nvGrpSpPr>
+        <p:cNvPr id="1" name=""/>
+        <p:cNvGrpSpPr/>
+        <p:nvPr/>
+      </p:nvGrpSpPr>
+      <p:grpSpPr>
+        <a:xfrm>
+          <a:off x="0" y="0"/>
+          <a:ext cx="0" cy="0"/>
+          <a:chOff x="0" y="0"/>
+          <a:chExt cx="0" cy="0"/>
+        </a:xfrm>
+      </p:grpSpPr>
+      <p:sp>
+        <p:nvSpPr>
+          <p:cNvPr id="2" name="제목 1">
+            <a:extLst>
+              <a:ext uri="{FF2B5EF4-FFF2-40B4-BE49-F238E27FC236}">
+                <a16:creationId xmlns:a16="http://schemas.microsoft.com/office/drawing/2014/main" id="{01248327-8A2E-B8F8-EC75-3B3DD3213B65}"/>
+              </a:ext>
+            </a:extLst>
+          </p:cNvPr>
+          <p:cNvSpPr>
+            <a:spLocks noGrp="1"/>
+          </p:cNvSpPr>
+          <p:nvPr>
+            <p:ph type="title"/>
+          </p:nvPr>
+        </p:nvSpPr>
+        <p:spPr>
+          <a:xfrm>
+            <a:off x="1098804" y="286603"/>
+            <a:ext cx="10058400" cy="1450757"/>
+          </a:xfrm>
+        </p:spPr>
+        <p:txBody>
+          <a:bodyPr>
+            <a:normAutofit/>
+          </a:bodyPr>
+          <a:lstStyle/>
+          <a:p>
+            <a:r>
+              <a:rPr lang="ko-KR" altLang="en-US" sz="4000"/>
+              <a:t>게시판 서비스 </a:t>
+            </a:r>
+            <a:r>
+              <a:rPr lang="en-US" altLang="ko-KR" sz="4000"/>
+              <a:t>– </a:t>
+            </a:r>
+            <a:r>
+              <a:rPr lang="ko-KR" altLang="en-US" sz="4000"/>
+              <a:t>게시판 목록 조회 메서드</a:t>
+            </a:r>
+          </a:p>
+        </p:txBody>
+      </p:sp>
+      <p:sp>
+        <p:nvSpPr>
+          <p:cNvPr id="4" name="TextBox 3">
+            <a:extLst>
+              <a:ext uri="{FF2B5EF4-FFF2-40B4-BE49-F238E27FC236}">
+                <a16:creationId xmlns:a16="http://schemas.microsoft.com/office/drawing/2014/main" id="{7D472D81-A618-AEA9-30DA-0AAD282F4BB7}"/>
+              </a:ext>
+            </a:extLst>
+          </p:cNvPr>
+          <p:cNvSpPr txBox="1"/>
+          <p:nvPr/>
+        </p:nvSpPr>
+        <p:spPr>
+          <a:xfrm>
+            <a:off x="3871722" y="1737360"/>
+            <a:ext cx="6094476" cy="5119350"/>
+          </a:xfrm>
+          <a:prstGeom prst="rect">
+            <a:avLst/>
+          </a:prstGeom>
+          <a:solidFill>
+            <a:schemeClr val="tx1"/>
+          </a:solidFill>
+        </p:spPr>
+        <p:txBody>
+          <a:bodyPr wrap="square">
+            <a:spAutoFit/>
+          </a:bodyPr>
+          <a:lstStyle/>
+          <a:p>
+            <a:pPr>
+              <a:lnSpc>
+                <a:spcPts val="1425"/>
+              </a:lnSpc>
+              <a:buNone/>
+            </a:pPr>
+            <a:r>
+              <a:rPr lang="en-US" altLang="ko-KR" sz="1050" b="0">
+                <a:solidFill>
+                  <a:srgbClr val="BBBEBF"/>
+                </a:solidFill>
+                <a:effectLst/>
+                <a:latin typeface="Consolas" panose="020B0609020204030204" pitchFamily="49" charset="0"/>
+              </a:rPr>
+              <a:t>    </a:t>
+            </a:r>
+            <a:r>
+              <a:rPr lang="en-US" altLang="ko-KR" sz="1050" b="0">
+                <a:solidFill>
+                  <a:srgbClr val="569CD6"/>
+                </a:solidFill>
+                <a:effectLst/>
+                <a:latin typeface="Consolas" panose="020B0609020204030204" pitchFamily="49" charset="0"/>
+              </a:rPr>
+              <a:t>public</a:t>
+            </a:r>
+            <a:r>
+              <a:rPr lang="en-US" altLang="ko-KR" sz="1050" b="0">
+                <a:solidFill>
+                  <a:srgbClr val="BBBEBF"/>
+                </a:solidFill>
+                <a:effectLst/>
+                <a:latin typeface="Consolas" panose="020B0609020204030204" pitchFamily="49" charset="0"/>
+              </a:rPr>
+              <a:t> </a:t>
+            </a:r>
+            <a:r>
+              <a:rPr lang="en-US" altLang="ko-KR" sz="1050" b="0">
+                <a:solidFill>
+                  <a:srgbClr val="4EC9B0"/>
+                </a:solidFill>
+                <a:effectLst/>
+                <a:latin typeface="Consolas" panose="020B0609020204030204" pitchFamily="49" charset="0"/>
+              </a:rPr>
+              <a:t>List</a:t>
+            </a:r>
+            <a:r>
+              <a:rPr lang="en-US" altLang="ko-KR" sz="1050" b="0">
+                <a:solidFill>
+                  <a:srgbClr val="BBBEBF"/>
+                </a:solidFill>
+                <a:effectLst/>
+                <a:latin typeface="Consolas" panose="020B0609020204030204" pitchFamily="49" charset="0"/>
+              </a:rPr>
+              <a:t>&lt;</a:t>
+            </a:r>
+            <a:r>
+              <a:rPr lang="en-US" altLang="ko-KR" sz="1050" b="0">
+                <a:solidFill>
+                  <a:srgbClr val="4EC9B0"/>
+                </a:solidFill>
+                <a:effectLst/>
+                <a:latin typeface="Consolas" panose="020B0609020204030204" pitchFamily="49" charset="0"/>
+              </a:rPr>
+              <a:t>BoardResponseDto</a:t>
+            </a:r>
+            <a:r>
+              <a:rPr lang="en-US" altLang="ko-KR" sz="1050" b="0">
+                <a:solidFill>
+                  <a:srgbClr val="BBBEBF"/>
+                </a:solidFill>
+                <a:effectLst/>
+                <a:latin typeface="Consolas" panose="020B0609020204030204" pitchFamily="49" charset="0"/>
+              </a:rPr>
+              <a:t>&gt; </a:t>
+            </a:r>
+            <a:r>
+              <a:rPr lang="en-US" altLang="ko-KR" sz="1050" b="0">
+                <a:solidFill>
+                  <a:srgbClr val="D2A8FF"/>
+                </a:solidFill>
+                <a:effectLst/>
+                <a:latin typeface="Consolas" panose="020B0609020204030204" pitchFamily="49" charset="0"/>
+              </a:rPr>
+              <a:t>getBoards</a:t>
+            </a:r>
+            <a:r>
+              <a:rPr lang="en-US" altLang="ko-KR" sz="1050" b="0">
+                <a:solidFill>
+                  <a:srgbClr val="BBBEBF"/>
+                </a:solidFill>
+                <a:effectLst/>
+                <a:latin typeface="Consolas" panose="020B0609020204030204" pitchFamily="49" charset="0"/>
+              </a:rPr>
+              <a:t>() {</a:t>
+            </a:r>
+          </a:p>
+          <a:p>
+            <a:pPr>
+              <a:lnSpc>
+                <a:spcPts val="1425"/>
+              </a:lnSpc>
+              <a:buNone/>
+            </a:pPr>
+            <a:r>
+              <a:rPr lang="en-US" altLang="ko-KR" sz="1050" b="0">
+                <a:solidFill>
+                  <a:srgbClr val="BBBEBF"/>
+                </a:solidFill>
+                <a:effectLst/>
+                <a:latin typeface="Consolas" panose="020B0609020204030204" pitchFamily="49" charset="0"/>
+              </a:rPr>
+              <a:t>        </a:t>
+            </a:r>
+            <a:r>
+              <a:rPr lang="en-US" altLang="ko-KR" sz="1050" b="0">
+                <a:solidFill>
+                  <a:srgbClr val="4EC9B0"/>
+                </a:solidFill>
+                <a:effectLst/>
+                <a:latin typeface="Consolas" panose="020B0609020204030204" pitchFamily="49" charset="0"/>
+              </a:rPr>
+              <a:t>List</a:t>
+            </a:r>
+            <a:r>
+              <a:rPr lang="en-US" altLang="ko-KR" sz="1050" b="0">
+                <a:solidFill>
+                  <a:srgbClr val="FFA657"/>
+                </a:solidFill>
+                <a:effectLst/>
+                <a:latin typeface="Consolas" panose="020B0609020204030204" pitchFamily="49" charset="0"/>
+              </a:rPr>
+              <a:t>&lt;</a:t>
+            </a:r>
+            <a:r>
+              <a:rPr lang="en-US" altLang="ko-KR" sz="1050" b="0">
+                <a:solidFill>
+                  <a:srgbClr val="4EC9B0"/>
+                </a:solidFill>
+                <a:effectLst/>
+                <a:latin typeface="Consolas" panose="020B0609020204030204" pitchFamily="49" charset="0"/>
+              </a:rPr>
+              <a:t>Board</a:t>
+            </a:r>
+            <a:r>
+              <a:rPr lang="en-US" altLang="ko-KR" sz="1050" b="0">
+                <a:solidFill>
+                  <a:srgbClr val="FFA657"/>
+                </a:solidFill>
+                <a:effectLst/>
+                <a:latin typeface="Consolas" panose="020B0609020204030204" pitchFamily="49" charset="0"/>
+              </a:rPr>
+              <a:t>&gt; </a:t>
+            </a:r>
+            <a:r>
+              <a:rPr lang="en-US" altLang="ko-KR" sz="1050" b="0">
+                <a:solidFill>
+                  <a:srgbClr val="C9D1D9"/>
+                </a:solidFill>
+                <a:effectLst/>
+                <a:latin typeface="Consolas" panose="020B0609020204030204" pitchFamily="49" charset="0"/>
+              </a:rPr>
+              <a:t>boards</a:t>
+            </a:r>
+            <a:r>
+              <a:rPr lang="en-US" altLang="ko-KR" sz="1050" b="0">
+                <a:solidFill>
+                  <a:srgbClr val="FFA657"/>
+                </a:solidFill>
+                <a:effectLst/>
+                <a:latin typeface="Consolas" panose="020B0609020204030204" pitchFamily="49" charset="0"/>
+              </a:rPr>
+              <a:t> </a:t>
+            </a:r>
+            <a:r>
+              <a:rPr lang="en-US" altLang="ko-KR" sz="1050" b="0">
+                <a:solidFill>
+                  <a:srgbClr val="D4D4D4"/>
+                </a:solidFill>
+                <a:effectLst/>
+                <a:latin typeface="Consolas" panose="020B0609020204030204" pitchFamily="49" charset="0"/>
+              </a:rPr>
+              <a:t>=</a:t>
+            </a:r>
+            <a:r>
+              <a:rPr lang="en-US" altLang="ko-KR" sz="1050" b="0">
+                <a:solidFill>
+                  <a:srgbClr val="BBBEBF"/>
+                </a:solidFill>
+                <a:effectLst/>
+                <a:latin typeface="Consolas" panose="020B0609020204030204" pitchFamily="49" charset="0"/>
+              </a:rPr>
+              <a:t> </a:t>
+            </a:r>
+            <a:r>
+              <a:rPr lang="en-US" altLang="ko-KR" sz="1050" b="0">
+                <a:solidFill>
+                  <a:srgbClr val="79C0FF"/>
+                </a:solidFill>
+                <a:effectLst/>
+                <a:latin typeface="Consolas" panose="020B0609020204030204" pitchFamily="49" charset="0"/>
+              </a:rPr>
+              <a:t>boardRepository</a:t>
+            </a:r>
+            <a:r>
+              <a:rPr lang="en-US" altLang="ko-KR" sz="1050" b="0">
+                <a:solidFill>
+                  <a:srgbClr val="BBBEBF"/>
+                </a:solidFill>
+                <a:effectLst/>
+                <a:latin typeface="Consolas" panose="020B0609020204030204" pitchFamily="49" charset="0"/>
+              </a:rPr>
+              <a:t>.</a:t>
+            </a:r>
+            <a:r>
+              <a:rPr lang="en-US" altLang="ko-KR" sz="1050" b="0">
+                <a:solidFill>
+                  <a:srgbClr val="D2A8FF"/>
+                </a:solidFill>
+                <a:effectLst/>
+                <a:latin typeface="Consolas" panose="020B0609020204030204" pitchFamily="49" charset="0"/>
+              </a:rPr>
+              <a:t>findAll</a:t>
+            </a:r>
+            <a:r>
+              <a:rPr lang="en-US" altLang="ko-KR" sz="1050" b="0">
+                <a:solidFill>
+                  <a:srgbClr val="BBBEBF"/>
+                </a:solidFill>
+                <a:effectLst/>
+                <a:latin typeface="Consolas" panose="020B0609020204030204" pitchFamily="49" charset="0"/>
+              </a:rPr>
+              <a:t>();</a:t>
+            </a:r>
+          </a:p>
+          <a:p>
+            <a:pPr>
+              <a:lnSpc>
+                <a:spcPts val="1425"/>
+              </a:lnSpc>
+              <a:buNone/>
+            </a:pPr>
+            <a:r>
+              <a:rPr lang="en-US" altLang="ko-KR" sz="1050" b="0">
+                <a:solidFill>
+                  <a:srgbClr val="BBBEBF"/>
+                </a:solidFill>
+                <a:effectLst/>
+                <a:latin typeface="Consolas" panose="020B0609020204030204" pitchFamily="49" charset="0"/>
+              </a:rPr>
+              <a:t>        </a:t>
+            </a:r>
+            <a:r>
+              <a:rPr lang="en-US" altLang="ko-KR" sz="1050" b="0">
+                <a:solidFill>
+                  <a:srgbClr val="4EC9B0"/>
+                </a:solidFill>
+                <a:effectLst/>
+                <a:latin typeface="Consolas" panose="020B0609020204030204" pitchFamily="49" charset="0"/>
+              </a:rPr>
+              <a:t>List</a:t>
+            </a:r>
+            <a:r>
+              <a:rPr lang="en-US" altLang="ko-KR" sz="1050" b="0">
+                <a:solidFill>
+                  <a:srgbClr val="FFA657"/>
+                </a:solidFill>
+                <a:effectLst/>
+                <a:latin typeface="Consolas" panose="020B0609020204030204" pitchFamily="49" charset="0"/>
+              </a:rPr>
+              <a:t>&lt;</a:t>
+            </a:r>
+            <a:r>
+              <a:rPr lang="en-US" altLang="ko-KR" sz="1050" b="0">
+                <a:solidFill>
+                  <a:srgbClr val="4EC9B0"/>
+                </a:solidFill>
+                <a:effectLst/>
+                <a:latin typeface="Consolas" panose="020B0609020204030204" pitchFamily="49" charset="0"/>
+              </a:rPr>
+              <a:t>Long</a:t>
+            </a:r>
+            <a:r>
+              <a:rPr lang="en-US" altLang="ko-KR" sz="1050" b="0">
+                <a:solidFill>
+                  <a:srgbClr val="FFA657"/>
+                </a:solidFill>
+                <a:effectLst/>
+                <a:latin typeface="Consolas" panose="020B0609020204030204" pitchFamily="49" charset="0"/>
+              </a:rPr>
+              <a:t>&gt; </a:t>
+            </a:r>
+            <a:r>
+              <a:rPr lang="en-US" altLang="ko-KR" sz="1050" b="0">
+                <a:solidFill>
+                  <a:srgbClr val="C9D1D9"/>
+                </a:solidFill>
+                <a:effectLst/>
+                <a:latin typeface="Consolas" panose="020B0609020204030204" pitchFamily="49" charset="0"/>
+              </a:rPr>
+              <a:t>userIds</a:t>
+            </a:r>
+            <a:r>
+              <a:rPr lang="en-US" altLang="ko-KR" sz="1050" b="0">
+                <a:solidFill>
+                  <a:srgbClr val="FFA657"/>
+                </a:solidFill>
+                <a:effectLst/>
+                <a:latin typeface="Consolas" panose="020B0609020204030204" pitchFamily="49" charset="0"/>
+              </a:rPr>
+              <a:t> </a:t>
+            </a:r>
+            <a:r>
+              <a:rPr lang="en-US" altLang="ko-KR" sz="1050" b="0">
+                <a:solidFill>
+                  <a:srgbClr val="D4D4D4"/>
+                </a:solidFill>
+                <a:effectLst/>
+                <a:latin typeface="Consolas" panose="020B0609020204030204" pitchFamily="49" charset="0"/>
+              </a:rPr>
+              <a:t>=</a:t>
+            </a:r>
+            <a:r>
+              <a:rPr lang="en-US" altLang="ko-KR" sz="1050" b="0">
+                <a:solidFill>
+                  <a:srgbClr val="BBBEBF"/>
+                </a:solidFill>
+                <a:effectLst/>
+                <a:latin typeface="Consolas" panose="020B0609020204030204" pitchFamily="49" charset="0"/>
+              </a:rPr>
+              <a:t> </a:t>
+            </a:r>
+            <a:r>
+              <a:rPr lang="en-US" altLang="ko-KR" sz="1050" b="0">
+                <a:solidFill>
+                  <a:srgbClr val="C9D1D9"/>
+                </a:solidFill>
+                <a:effectLst/>
+                <a:latin typeface="Consolas" panose="020B0609020204030204" pitchFamily="49" charset="0"/>
+              </a:rPr>
+              <a:t>boards</a:t>
+            </a:r>
+            <a:r>
+              <a:rPr lang="en-US" altLang="ko-KR" sz="1050" b="0">
+                <a:solidFill>
+                  <a:srgbClr val="BBBEBF"/>
+                </a:solidFill>
+                <a:effectLst/>
+                <a:latin typeface="Consolas" panose="020B0609020204030204" pitchFamily="49" charset="0"/>
+              </a:rPr>
+              <a:t>.</a:t>
+            </a:r>
+            <a:r>
+              <a:rPr lang="en-US" altLang="ko-KR" sz="1050" b="0">
+                <a:solidFill>
+                  <a:srgbClr val="D2A8FF"/>
+                </a:solidFill>
+                <a:effectLst/>
+                <a:latin typeface="Consolas" panose="020B0609020204030204" pitchFamily="49" charset="0"/>
+              </a:rPr>
+              <a:t>stream</a:t>
+            </a:r>
+            <a:r>
+              <a:rPr lang="en-US" altLang="ko-KR" sz="1050" b="0">
+                <a:solidFill>
+                  <a:srgbClr val="BBBEBF"/>
+                </a:solidFill>
+                <a:effectLst/>
+                <a:latin typeface="Consolas" panose="020B0609020204030204" pitchFamily="49" charset="0"/>
+              </a:rPr>
+              <a:t>()</a:t>
+            </a:r>
+          </a:p>
+          <a:p>
+            <a:pPr>
+              <a:lnSpc>
+                <a:spcPts val="1425"/>
+              </a:lnSpc>
+              <a:buNone/>
+            </a:pPr>
+            <a:r>
+              <a:rPr lang="en-US" altLang="ko-KR" sz="1050" b="0">
+                <a:solidFill>
+                  <a:srgbClr val="BBBEBF"/>
+                </a:solidFill>
+                <a:effectLst/>
+                <a:latin typeface="Consolas" panose="020B0609020204030204" pitchFamily="49" charset="0"/>
+              </a:rPr>
+              <a:t>            .</a:t>
+            </a:r>
+            <a:r>
+              <a:rPr lang="en-US" altLang="ko-KR" sz="1050" b="0">
+                <a:solidFill>
+                  <a:srgbClr val="D2A8FF"/>
+                </a:solidFill>
+                <a:effectLst/>
+                <a:latin typeface="Consolas" panose="020B0609020204030204" pitchFamily="49" charset="0"/>
+              </a:rPr>
+              <a:t>map</a:t>
+            </a:r>
+            <a:r>
+              <a:rPr lang="en-US" altLang="ko-KR" sz="1050" b="0">
+                <a:solidFill>
+                  <a:srgbClr val="BBBEBF"/>
+                </a:solidFill>
+                <a:effectLst/>
+                <a:latin typeface="Consolas" panose="020B0609020204030204" pitchFamily="49" charset="0"/>
+              </a:rPr>
+              <a:t>(</a:t>
+            </a:r>
+            <a:r>
+              <a:rPr lang="en-US" altLang="ko-KR" sz="1050" b="0">
+                <a:solidFill>
+                  <a:srgbClr val="4EC9B0"/>
+                </a:solidFill>
+                <a:effectLst/>
+                <a:latin typeface="Consolas" panose="020B0609020204030204" pitchFamily="49" charset="0"/>
+              </a:rPr>
+              <a:t>Board</a:t>
+            </a:r>
+            <a:r>
+              <a:rPr lang="en-US" altLang="ko-KR" sz="1050" b="0">
+                <a:solidFill>
+                  <a:srgbClr val="C586C0"/>
+                </a:solidFill>
+                <a:effectLst/>
+                <a:latin typeface="Consolas" panose="020B0609020204030204" pitchFamily="49" charset="0"/>
+              </a:rPr>
+              <a:t>::</a:t>
+            </a:r>
+            <a:r>
+              <a:rPr lang="en-US" altLang="ko-KR" sz="1050" b="0">
+                <a:solidFill>
+                  <a:srgbClr val="D2A8FF"/>
+                </a:solidFill>
+                <a:effectLst/>
+                <a:latin typeface="Consolas" panose="020B0609020204030204" pitchFamily="49" charset="0"/>
+              </a:rPr>
+              <a:t>getUserId</a:t>
+            </a:r>
+            <a:r>
+              <a:rPr lang="en-US" altLang="ko-KR" sz="1050" b="0">
+                <a:solidFill>
+                  <a:srgbClr val="BBBEBF"/>
+                </a:solidFill>
+                <a:effectLst/>
+                <a:latin typeface="Consolas" panose="020B0609020204030204" pitchFamily="49" charset="0"/>
+              </a:rPr>
+              <a:t>)</a:t>
+            </a:r>
+          </a:p>
+          <a:p>
+            <a:pPr>
+              <a:lnSpc>
+                <a:spcPts val="1425"/>
+              </a:lnSpc>
+              <a:buNone/>
+            </a:pPr>
+            <a:r>
+              <a:rPr lang="en-US" altLang="ko-KR" sz="1050" b="0">
+                <a:solidFill>
+                  <a:srgbClr val="BBBEBF"/>
+                </a:solidFill>
+                <a:effectLst/>
+                <a:latin typeface="Consolas" panose="020B0609020204030204" pitchFamily="49" charset="0"/>
+              </a:rPr>
+              <a:t>            .</a:t>
+            </a:r>
+            <a:r>
+              <a:rPr lang="en-US" altLang="ko-KR" sz="1050" b="0">
+                <a:solidFill>
+                  <a:srgbClr val="D2A8FF"/>
+                </a:solidFill>
+                <a:effectLst/>
+                <a:latin typeface="Consolas" panose="020B0609020204030204" pitchFamily="49" charset="0"/>
+              </a:rPr>
+              <a:t>distinct</a:t>
+            </a:r>
+            <a:r>
+              <a:rPr lang="en-US" altLang="ko-KR" sz="1050" b="0">
+                <a:solidFill>
+                  <a:srgbClr val="BBBEBF"/>
+                </a:solidFill>
+                <a:effectLst/>
+                <a:latin typeface="Consolas" panose="020B0609020204030204" pitchFamily="49" charset="0"/>
+              </a:rPr>
+              <a:t>()</a:t>
+            </a:r>
+          </a:p>
+          <a:p>
+            <a:pPr>
+              <a:lnSpc>
+                <a:spcPts val="1425"/>
+              </a:lnSpc>
+              <a:buNone/>
+            </a:pPr>
+            <a:r>
+              <a:rPr lang="en-US" altLang="ko-KR" sz="1050" b="0">
+                <a:solidFill>
+                  <a:srgbClr val="BBBEBF"/>
+                </a:solidFill>
+                <a:effectLst/>
+                <a:latin typeface="Consolas" panose="020B0609020204030204" pitchFamily="49" charset="0"/>
+              </a:rPr>
+              <a:t>            .</a:t>
+            </a:r>
+            <a:r>
+              <a:rPr lang="en-US" altLang="ko-KR" sz="1050" b="0">
+                <a:solidFill>
+                  <a:srgbClr val="D2A8FF"/>
+                </a:solidFill>
+                <a:effectLst/>
+                <a:latin typeface="Consolas" panose="020B0609020204030204" pitchFamily="49" charset="0"/>
+              </a:rPr>
+              <a:t>toList</a:t>
+            </a:r>
+            <a:r>
+              <a:rPr lang="en-US" altLang="ko-KR" sz="1050" b="0">
+                <a:solidFill>
+                  <a:srgbClr val="BBBEBF"/>
+                </a:solidFill>
+                <a:effectLst/>
+                <a:latin typeface="Consolas" panose="020B0609020204030204" pitchFamily="49" charset="0"/>
+              </a:rPr>
+              <a:t>();</a:t>
+            </a:r>
+          </a:p>
+          <a:p>
+            <a:pPr>
+              <a:lnSpc>
+                <a:spcPts val="1425"/>
+              </a:lnSpc>
+              <a:buNone/>
+            </a:pPr>
+            <a:r>
+              <a:rPr lang="en-US" altLang="ko-KR" sz="1050" b="0">
+                <a:solidFill>
+                  <a:srgbClr val="BBBEBF"/>
+                </a:solidFill>
+                <a:effectLst/>
+                <a:latin typeface="Consolas" panose="020B0609020204030204" pitchFamily="49" charset="0"/>
+              </a:rPr>
+              <a:t>        </a:t>
+            </a:r>
+            <a:r>
+              <a:rPr lang="en-US" altLang="ko-KR" sz="1050" b="0">
+                <a:solidFill>
+                  <a:srgbClr val="4EC9B0"/>
+                </a:solidFill>
+                <a:effectLst/>
+                <a:latin typeface="Consolas" panose="020B0609020204030204" pitchFamily="49" charset="0"/>
+              </a:rPr>
+              <a:t>List</a:t>
+            </a:r>
+            <a:r>
+              <a:rPr lang="en-US" altLang="ko-KR" sz="1050" b="0">
+                <a:solidFill>
+                  <a:srgbClr val="FFA657"/>
+                </a:solidFill>
+                <a:effectLst/>
+                <a:latin typeface="Consolas" panose="020B0609020204030204" pitchFamily="49" charset="0"/>
+              </a:rPr>
+              <a:t>&lt;</a:t>
+            </a:r>
+            <a:r>
+              <a:rPr lang="en-US" altLang="ko-KR" sz="1050" b="0">
+                <a:solidFill>
+                  <a:srgbClr val="4EC9B0"/>
+                </a:solidFill>
+                <a:effectLst/>
+                <a:latin typeface="Consolas" panose="020B0609020204030204" pitchFamily="49" charset="0"/>
+              </a:rPr>
+              <a:t>UserResponseDto</a:t>
+            </a:r>
+            <a:r>
+              <a:rPr lang="en-US" altLang="ko-KR" sz="1050" b="0">
+                <a:solidFill>
+                  <a:srgbClr val="FFA657"/>
+                </a:solidFill>
+                <a:effectLst/>
+                <a:latin typeface="Consolas" panose="020B0609020204030204" pitchFamily="49" charset="0"/>
+              </a:rPr>
+              <a:t>&gt; </a:t>
+            </a:r>
+            <a:r>
+              <a:rPr lang="en-US" altLang="ko-KR" sz="1050" b="0">
+                <a:solidFill>
+                  <a:srgbClr val="C9D1D9"/>
+                </a:solidFill>
+                <a:effectLst/>
+                <a:latin typeface="Consolas" panose="020B0609020204030204" pitchFamily="49" charset="0"/>
+              </a:rPr>
+              <a:t>userResponseDtos</a:t>
+            </a:r>
+            <a:r>
+              <a:rPr lang="en-US" altLang="ko-KR" sz="1050" b="0">
+                <a:solidFill>
+                  <a:srgbClr val="FFA657"/>
+                </a:solidFill>
+                <a:effectLst/>
+                <a:latin typeface="Consolas" panose="020B0609020204030204" pitchFamily="49" charset="0"/>
+              </a:rPr>
+              <a:t> </a:t>
+            </a:r>
+            <a:r>
+              <a:rPr lang="en-US" altLang="ko-KR" sz="1050" b="0">
+                <a:solidFill>
+                  <a:srgbClr val="D4D4D4"/>
+                </a:solidFill>
+                <a:effectLst/>
+                <a:latin typeface="Consolas" panose="020B0609020204030204" pitchFamily="49" charset="0"/>
+              </a:rPr>
+              <a:t>=</a:t>
+            </a:r>
+            <a:r>
+              <a:rPr lang="en-US" altLang="ko-KR" sz="1050" b="0">
+                <a:solidFill>
+                  <a:srgbClr val="BBBEBF"/>
+                </a:solidFill>
+                <a:effectLst/>
+                <a:latin typeface="Consolas" panose="020B0609020204030204" pitchFamily="49" charset="0"/>
+              </a:rPr>
+              <a:t>  </a:t>
+            </a:r>
+            <a:br>
+              <a:rPr lang="en-US" altLang="ko-KR" sz="1050" b="0">
+                <a:solidFill>
+                  <a:srgbClr val="BBBEBF"/>
+                </a:solidFill>
+                <a:effectLst/>
+                <a:latin typeface="Consolas" panose="020B0609020204030204" pitchFamily="49" charset="0"/>
+              </a:rPr>
+            </a:br>
+            <a:r>
+              <a:rPr lang="en-US" altLang="ko-KR" sz="1050" b="0">
+                <a:solidFill>
+                  <a:srgbClr val="BBBEBF"/>
+                </a:solidFill>
+                <a:effectLst/>
+                <a:latin typeface="Consolas" panose="020B0609020204030204" pitchFamily="49" charset="0"/>
+              </a:rPr>
+              <a:t>                      </a:t>
+            </a:r>
+            <a:r>
+              <a:rPr lang="en-US" altLang="ko-KR" sz="1050" b="0">
+                <a:solidFill>
+                  <a:srgbClr val="79C0FF"/>
+                </a:solidFill>
+                <a:effectLst/>
+                <a:latin typeface="Consolas" panose="020B0609020204030204" pitchFamily="49" charset="0"/>
+              </a:rPr>
+              <a:t>userClient</a:t>
+            </a:r>
+            <a:r>
+              <a:rPr lang="en-US" altLang="ko-KR" sz="1050" b="0">
+                <a:solidFill>
+                  <a:srgbClr val="BBBEBF"/>
+                </a:solidFill>
+                <a:effectLst/>
+                <a:latin typeface="Consolas" panose="020B0609020204030204" pitchFamily="49" charset="0"/>
+              </a:rPr>
+              <a:t>.</a:t>
+            </a:r>
+            <a:r>
+              <a:rPr lang="en-US" altLang="ko-KR" sz="1050" b="0">
+                <a:solidFill>
+                  <a:srgbClr val="D2A8FF"/>
+                </a:solidFill>
+                <a:effectLst/>
+                <a:latin typeface="Consolas" panose="020B0609020204030204" pitchFamily="49" charset="0"/>
+              </a:rPr>
+              <a:t>fetchUsersByIds</a:t>
+            </a:r>
+            <a:r>
+              <a:rPr lang="en-US" altLang="ko-KR" sz="1050" b="0">
+                <a:solidFill>
+                  <a:srgbClr val="BBBEBF"/>
+                </a:solidFill>
+                <a:effectLst/>
+                <a:latin typeface="Consolas" panose="020B0609020204030204" pitchFamily="49" charset="0"/>
+              </a:rPr>
+              <a:t>(</a:t>
+            </a:r>
+            <a:r>
+              <a:rPr lang="en-US" altLang="ko-KR" sz="1050" b="0">
+                <a:solidFill>
+                  <a:srgbClr val="C9D1D9"/>
+                </a:solidFill>
+                <a:effectLst/>
+                <a:latin typeface="Consolas" panose="020B0609020204030204" pitchFamily="49" charset="0"/>
+              </a:rPr>
+              <a:t>userIds</a:t>
+            </a:r>
+            <a:r>
+              <a:rPr lang="en-US" altLang="ko-KR" sz="1050" b="0">
+                <a:solidFill>
+                  <a:srgbClr val="BBBEBF"/>
+                </a:solidFill>
+                <a:effectLst/>
+                <a:latin typeface="Consolas" panose="020B0609020204030204" pitchFamily="49" charset="0"/>
+              </a:rPr>
+              <a:t>);</a:t>
+            </a:r>
+          </a:p>
+          <a:p>
+            <a:pPr>
+              <a:lnSpc>
+                <a:spcPts val="1425"/>
+              </a:lnSpc>
+              <a:buNone/>
+            </a:pPr>
+            <a:r>
+              <a:rPr lang="en-US" altLang="ko-KR" sz="1050" b="0">
+                <a:solidFill>
+                  <a:srgbClr val="BBBEBF"/>
+                </a:solidFill>
+                <a:effectLst/>
+                <a:latin typeface="Consolas" panose="020B0609020204030204" pitchFamily="49" charset="0"/>
+              </a:rPr>
+              <a:t>        </a:t>
+            </a:r>
+          </a:p>
+          <a:p>
+            <a:pPr>
+              <a:lnSpc>
+                <a:spcPts val="1425"/>
+              </a:lnSpc>
+              <a:buNone/>
+            </a:pPr>
+            <a:r>
+              <a:rPr lang="en-US" altLang="ko-KR" sz="1050" b="0">
+                <a:solidFill>
+                  <a:srgbClr val="BBBEBF"/>
+                </a:solidFill>
+                <a:effectLst/>
+                <a:latin typeface="Consolas" panose="020B0609020204030204" pitchFamily="49" charset="0"/>
+              </a:rPr>
+              <a:t>        </a:t>
+            </a:r>
+            <a:r>
+              <a:rPr lang="en-US" altLang="ko-KR" sz="1050" b="0">
+                <a:solidFill>
+                  <a:srgbClr val="8B949E"/>
+                </a:solidFill>
+                <a:effectLst/>
+                <a:latin typeface="Consolas" panose="020B0609020204030204" pitchFamily="49" charset="0"/>
+              </a:rPr>
+              <a:t>// userId</a:t>
+            </a:r>
+            <a:r>
+              <a:rPr lang="ko-KR" altLang="en-US" sz="1050" b="0">
+                <a:solidFill>
+                  <a:srgbClr val="8B949E"/>
+                </a:solidFill>
+                <a:effectLst/>
+                <a:latin typeface="Consolas" panose="020B0609020204030204" pitchFamily="49" charset="0"/>
+              </a:rPr>
+              <a:t>를 </a:t>
+            </a:r>
+            <a:r>
+              <a:rPr lang="en-US" altLang="ko-KR" sz="1050" b="0">
+                <a:solidFill>
+                  <a:srgbClr val="8B949E"/>
+                </a:solidFill>
+                <a:effectLst/>
+                <a:latin typeface="Consolas" panose="020B0609020204030204" pitchFamily="49" charset="0"/>
+              </a:rPr>
+              <a:t>Key</a:t>
+            </a:r>
+            <a:r>
+              <a:rPr lang="ko-KR" altLang="en-US" sz="1050" b="0">
+                <a:solidFill>
+                  <a:srgbClr val="8B949E"/>
+                </a:solidFill>
+                <a:effectLst/>
+                <a:latin typeface="Consolas" panose="020B0609020204030204" pitchFamily="49" charset="0"/>
+              </a:rPr>
+              <a:t>로 하는 </a:t>
+            </a:r>
+            <a:r>
+              <a:rPr lang="en-US" altLang="ko-KR" sz="1050" b="0">
+                <a:solidFill>
+                  <a:srgbClr val="8B949E"/>
+                </a:solidFill>
+                <a:effectLst/>
+                <a:latin typeface="Consolas" panose="020B0609020204030204" pitchFamily="49" charset="0"/>
+              </a:rPr>
+              <a:t>Map </a:t>
+            </a:r>
+            <a:r>
+              <a:rPr lang="ko-KR" altLang="en-US" sz="1050" b="0">
+                <a:solidFill>
+                  <a:srgbClr val="8B949E"/>
+                </a:solidFill>
+                <a:effectLst/>
+                <a:latin typeface="Consolas" panose="020B0609020204030204" pitchFamily="49" charset="0"/>
+              </a:rPr>
+              <a:t>생성</a:t>
+            </a:r>
+            <a:endParaRPr lang="ko-KR" altLang="en-US" sz="1050" b="0">
+              <a:solidFill>
+                <a:srgbClr val="BBBEBF"/>
+              </a:solidFill>
+              <a:effectLst/>
+              <a:latin typeface="Consolas" panose="020B0609020204030204" pitchFamily="49" charset="0"/>
+            </a:endParaRPr>
+          </a:p>
+          <a:p>
+            <a:pPr>
+              <a:lnSpc>
+                <a:spcPts val="1425"/>
+              </a:lnSpc>
+              <a:buNone/>
+            </a:pPr>
+            <a:r>
+              <a:rPr lang="ko-KR" altLang="en-US" sz="1050" b="0">
+                <a:solidFill>
+                  <a:srgbClr val="BBBEBF"/>
+                </a:solidFill>
+                <a:effectLst/>
+                <a:latin typeface="Consolas" panose="020B0609020204030204" pitchFamily="49" charset="0"/>
+              </a:rPr>
+              <a:t>        </a:t>
+            </a:r>
+            <a:r>
+              <a:rPr lang="en-US" altLang="ko-KR" sz="1050" b="0">
+                <a:solidFill>
+                  <a:srgbClr val="4EC9B0"/>
+                </a:solidFill>
+                <a:effectLst/>
+                <a:latin typeface="Consolas" panose="020B0609020204030204" pitchFamily="49" charset="0"/>
+              </a:rPr>
+              <a:t>Map</a:t>
+            </a:r>
+            <a:r>
+              <a:rPr lang="en-US" altLang="ko-KR" sz="1050" b="0">
+                <a:solidFill>
+                  <a:srgbClr val="FFA657"/>
+                </a:solidFill>
+                <a:effectLst/>
+                <a:latin typeface="Consolas" panose="020B0609020204030204" pitchFamily="49" charset="0"/>
+              </a:rPr>
+              <a:t>&lt;</a:t>
+            </a:r>
+            <a:r>
+              <a:rPr lang="en-US" altLang="ko-KR" sz="1050" b="0">
+                <a:solidFill>
+                  <a:srgbClr val="4EC9B0"/>
+                </a:solidFill>
+                <a:effectLst/>
+                <a:latin typeface="Consolas" panose="020B0609020204030204" pitchFamily="49" charset="0"/>
+              </a:rPr>
+              <a:t>Long</a:t>
+            </a:r>
+            <a:r>
+              <a:rPr lang="en-US" altLang="ko-KR" sz="1050" b="0">
+                <a:solidFill>
+                  <a:srgbClr val="FFA657"/>
+                </a:solidFill>
+                <a:effectLst/>
+                <a:latin typeface="Consolas" panose="020B0609020204030204" pitchFamily="49" charset="0"/>
+              </a:rPr>
+              <a:t>, </a:t>
+            </a:r>
+            <a:r>
+              <a:rPr lang="en-US" altLang="ko-KR" sz="1050" b="0">
+                <a:solidFill>
+                  <a:srgbClr val="4EC9B0"/>
+                </a:solidFill>
+                <a:effectLst/>
+                <a:latin typeface="Consolas" panose="020B0609020204030204" pitchFamily="49" charset="0"/>
+              </a:rPr>
+              <a:t>UserDto</a:t>
+            </a:r>
+            <a:r>
+              <a:rPr lang="en-US" altLang="ko-KR" sz="1050" b="0">
+                <a:solidFill>
+                  <a:srgbClr val="FFA657"/>
+                </a:solidFill>
+                <a:effectLst/>
+                <a:latin typeface="Consolas" panose="020B0609020204030204" pitchFamily="49" charset="0"/>
+              </a:rPr>
+              <a:t>&gt; </a:t>
+            </a:r>
+            <a:r>
+              <a:rPr lang="en-US" altLang="ko-KR" sz="1050" b="0">
+                <a:solidFill>
+                  <a:srgbClr val="C9D1D9"/>
+                </a:solidFill>
+                <a:effectLst/>
+                <a:latin typeface="Consolas" panose="020B0609020204030204" pitchFamily="49" charset="0"/>
+              </a:rPr>
+              <a:t>userMap</a:t>
+            </a:r>
+            <a:r>
+              <a:rPr lang="en-US" altLang="ko-KR" sz="1050" b="0">
+                <a:solidFill>
+                  <a:srgbClr val="FFA657"/>
+                </a:solidFill>
+                <a:effectLst/>
+                <a:latin typeface="Consolas" panose="020B0609020204030204" pitchFamily="49" charset="0"/>
+              </a:rPr>
+              <a:t> </a:t>
+            </a:r>
+            <a:r>
+              <a:rPr lang="en-US" altLang="ko-KR" sz="1050" b="0">
+                <a:solidFill>
+                  <a:srgbClr val="D4D4D4"/>
+                </a:solidFill>
+                <a:effectLst/>
+                <a:latin typeface="Consolas" panose="020B0609020204030204" pitchFamily="49" charset="0"/>
+              </a:rPr>
+              <a:t>=</a:t>
+            </a:r>
+            <a:r>
+              <a:rPr lang="en-US" altLang="ko-KR" sz="1050" b="0">
+                <a:solidFill>
+                  <a:srgbClr val="BBBEBF"/>
+                </a:solidFill>
+                <a:effectLst/>
+                <a:latin typeface="Consolas" panose="020B0609020204030204" pitchFamily="49" charset="0"/>
+              </a:rPr>
+              <a:t> </a:t>
+            </a:r>
+            <a:r>
+              <a:rPr lang="en-US" altLang="ko-KR" sz="1050" b="0">
+                <a:solidFill>
+                  <a:srgbClr val="C9D1D9"/>
+                </a:solidFill>
+                <a:effectLst/>
+                <a:latin typeface="Consolas" panose="020B0609020204030204" pitchFamily="49" charset="0"/>
+              </a:rPr>
+              <a:t>userResponseDtos</a:t>
+            </a:r>
+            <a:r>
+              <a:rPr lang="en-US" altLang="ko-KR" sz="1050" b="0">
+                <a:solidFill>
+                  <a:srgbClr val="BBBEBF"/>
+                </a:solidFill>
+                <a:effectLst/>
+                <a:latin typeface="Consolas" panose="020B0609020204030204" pitchFamily="49" charset="0"/>
+              </a:rPr>
+              <a:t>.</a:t>
+            </a:r>
+            <a:r>
+              <a:rPr lang="en-US" altLang="ko-KR" sz="1050" b="0">
+                <a:solidFill>
+                  <a:srgbClr val="D2A8FF"/>
+                </a:solidFill>
+                <a:effectLst/>
+                <a:latin typeface="Consolas" panose="020B0609020204030204" pitchFamily="49" charset="0"/>
+              </a:rPr>
+              <a:t>stream</a:t>
+            </a:r>
+            <a:r>
+              <a:rPr lang="en-US" altLang="ko-KR" sz="1050" b="0">
+                <a:solidFill>
+                  <a:srgbClr val="BBBEBF"/>
+                </a:solidFill>
+                <a:effectLst/>
+                <a:latin typeface="Consolas" panose="020B0609020204030204" pitchFamily="49" charset="0"/>
+              </a:rPr>
+              <a:t>()</a:t>
+            </a:r>
+          </a:p>
+          <a:p>
+            <a:pPr>
+              <a:lnSpc>
+                <a:spcPts val="1425"/>
+              </a:lnSpc>
+              <a:buNone/>
+            </a:pPr>
+            <a:r>
+              <a:rPr lang="en-US" altLang="ko-KR" sz="1050" b="0">
+                <a:solidFill>
+                  <a:srgbClr val="BBBEBF"/>
+                </a:solidFill>
+                <a:effectLst/>
+                <a:latin typeface="Consolas" panose="020B0609020204030204" pitchFamily="49" charset="0"/>
+              </a:rPr>
+              <a:t>            .</a:t>
+            </a:r>
+            <a:r>
+              <a:rPr lang="en-US" altLang="ko-KR" sz="1050" b="0">
+                <a:solidFill>
+                  <a:srgbClr val="D2A8FF"/>
+                </a:solidFill>
+                <a:effectLst/>
+                <a:latin typeface="Consolas" panose="020B0609020204030204" pitchFamily="49" charset="0"/>
+              </a:rPr>
+              <a:t>collect</a:t>
+            </a:r>
+            <a:r>
+              <a:rPr lang="en-US" altLang="ko-KR" sz="1050" b="0">
+                <a:solidFill>
+                  <a:srgbClr val="BBBEBF"/>
+                </a:solidFill>
+                <a:effectLst/>
+                <a:latin typeface="Consolas" panose="020B0609020204030204" pitchFamily="49" charset="0"/>
+              </a:rPr>
+              <a:t>(</a:t>
+            </a:r>
+            <a:r>
+              <a:rPr lang="en-US" altLang="ko-KR" sz="1050" b="0">
+                <a:solidFill>
+                  <a:srgbClr val="4EC9B0"/>
+                </a:solidFill>
+                <a:effectLst/>
+                <a:latin typeface="Consolas" panose="020B0609020204030204" pitchFamily="49" charset="0"/>
+              </a:rPr>
+              <a:t>Collectors</a:t>
+            </a:r>
+            <a:r>
+              <a:rPr lang="en-US" altLang="ko-KR" sz="1050" b="0">
+                <a:solidFill>
+                  <a:srgbClr val="BBBEBF"/>
+                </a:solidFill>
+                <a:effectLst/>
+                <a:latin typeface="Consolas" panose="020B0609020204030204" pitchFamily="49" charset="0"/>
+              </a:rPr>
+              <a:t>.</a:t>
+            </a:r>
+            <a:r>
+              <a:rPr lang="en-US" altLang="ko-KR" sz="1050" b="0">
+                <a:solidFill>
+                  <a:srgbClr val="D2A8FF"/>
+                </a:solidFill>
+                <a:effectLst/>
+                <a:latin typeface="Consolas" panose="020B0609020204030204" pitchFamily="49" charset="0"/>
+              </a:rPr>
+              <a:t>toMap</a:t>
+            </a:r>
+            <a:r>
+              <a:rPr lang="en-US" altLang="ko-KR" sz="1050" b="0">
+                <a:solidFill>
+                  <a:srgbClr val="BBBEBF"/>
+                </a:solidFill>
+                <a:effectLst/>
+                <a:latin typeface="Consolas" panose="020B0609020204030204" pitchFamily="49" charset="0"/>
+              </a:rPr>
+              <a:t>(</a:t>
+            </a:r>
+          </a:p>
+          <a:p>
+            <a:pPr>
+              <a:lnSpc>
+                <a:spcPts val="1425"/>
+              </a:lnSpc>
+              <a:buNone/>
+            </a:pPr>
+            <a:r>
+              <a:rPr lang="en-US" altLang="ko-KR" sz="1050" b="0">
+                <a:solidFill>
+                  <a:srgbClr val="BBBEBF"/>
+                </a:solidFill>
+                <a:effectLst/>
+                <a:latin typeface="Consolas" panose="020B0609020204030204" pitchFamily="49" charset="0"/>
+              </a:rPr>
+              <a:t>                </a:t>
+            </a:r>
+            <a:r>
+              <a:rPr lang="en-US" altLang="ko-KR" sz="1050" b="0">
+                <a:solidFill>
+                  <a:srgbClr val="4EC9B0"/>
+                </a:solidFill>
+                <a:effectLst/>
+                <a:latin typeface="Consolas" panose="020B0609020204030204" pitchFamily="49" charset="0"/>
+              </a:rPr>
+              <a:t>UserResponseDto</a:t>
+            </a:r>
+            <a:r>
+              <a:rPr lang="en-US" altLang="ko-KR" sz="1050" b="0">
+                <a:solidFill>
+                  <a:srgbClr val="C586C0"/>
+                </a:solidFill>
+                <a:effectLst/>
+                <a:latin typeface="Consolas" panose="020B0609020204030204" pitchFamily="49" charset="0"/>
+              </a:rPr>
+              <a:t>::</a:t>
+            </a:r>
+            <a:r>
+              <a:rPr lang="en-US" altLang="ko-KR" sz="1050" b="0">
+                <a:solidFill>
+                  <a:srgbClr val="D2A8FF"/>
+                </a:solidFill>
+                <a:effectLst/>
+                <a:latin typeface="Consolas" panose="020B0609020204030204" pitchFamily="49" charset="0"/>
+              </a:rPr>
+              <a:t>getUserId</a:t>
+            </a:r>
+            <a:r>
+              <a:rPr lang="en-US" altLang="ko-KR" sz="1050" b="0">
+                <a:solidFill>
+                  <a:srgbClr val="BBBEBF"/>
+                </a:solidFill>
+                <a:effectLst/>
+                <a:latin typeface="Consolas" panose="020B0609020204030204" pitchFamily="49" charset="0"/>
+              </a:rPr>
+              <a:t>,</a:t>
+            </a:r>
+          </a:p>
+          <a:p>
+            <a:pPr>
+              <a:lnSpc>
+                <a:spcPts val="1425"/>
+              </a:lnSpc>
+              <a:buNone/>
+            </a:pPr>
+            <a:r>
+              <a:rPr lang="en-US" altLang="ko-KR" sz="1050" b="0">
+                <a:solidFill>
+                  <a:srgbClr val="BBBEBF"/>
+                </a:solidFill>
+                <a:effectLst/>
+                <a:latin typeface="Consolas" panose="020B0609020204030204" pitchFamily="49" charset="0"/>
+              </a:rPr>
+              <a:t>                </a:t>
+            </a:r>
+            <a:r>
+              <a:rPr lang="en-US" altLang="ko-KR" sz="1050" b="0">
+                <a:solidFill>
+                  <a:srgbClr val="FFA657"/>
+                </a:solidFill>
+                <a:effectLst/>
+                <a:latin typeface="Consolas" panose="020B0609020204030204" pitchFamily="49" charset="0"/>
+              </a:rPr>
+              <a:t>userResponseDto</a:t>
+            </a:r>
+            <a:r>
+              <a:rPr lang="en-US" altLang="ko-KR" sz="1050" b="0">
+                <a:solidFill>
+                  <a:srgbClr val="BBBEBF"/>
+                </a:solidFill>
+                <a:effectLst/>
+                <a:latin typeface="Consolas" panose="020B0609020204030204" pitchFamily="49" charset="0"/>
+              </a:rPr>
+              <a:t> </a:t>
+            </a:r>
+            <a:r>
+              <a:rPr lang="en-US" altLang="ko-KR" sz="1050" b="0">
+                <a:solidFill>
+                  <a:srgbClr val="FF7B72"/>
+                </a:solidFill>
+                <a:effectLst/>
+                <a:latin typeface="Consolas" panose="020B0609020204030204" pitchFamily="49" charset="0"/>
+              </a:rPr>
+              <a:t>-&gt;</a:t>
+            </a:r>
+            <a:r>
+              <a:rPr lang="en-US" altLang="ko-KR" sz="1050" b="0">
+                <a:solidFill>
+                  <a:srgbClr val="BBBEBF"/>
+                </a:solidFill>
+                <a:effectLst/>
+                <a:latin typeface="Consolas" panose="020B0609020204030204" pitchFamily="49" charset="0"/>
+              </a:rPr>
+              <a:t> </a:t>
+            </a:r>
+            <a:r>
+              <a:rPr lang="en-US" altLang="ko-KR" sz="1050" b="0">
+                <a:solidFill>
+                  <a:srgbClr val="C586C0"/>
+                </a:solidFill>
+                <a:effectLst/>
+                <a:latin typeface="Consolas" panose="020B0609020204030204" pitchFamily="49" charset="0"/>
+              </a:rPr>
+              <a:t>new</a:t>
+            </a:r>
+            <a:r>
+              <a:rPr lang="en-US" altLang="ko-KR" sz="1050" b="0">
+                <a:solidFill>
+                  <a:srgbClr val="BBBEBF"/>
+                </a:solidFill>
+                <a:effectLst/>
+                <a:latin typeface="Consolas" panose="020B0609020204030204" pitchFamily="49" charset="0"/>
+              </a:rPr>
+              <a:t> </a:t>
+            </a:r>
+            <a:r>
+              <a:rPr lang="en-US" altLang="ko-KR" sz="1050" b="0">
+                <a:solidFill>
+                  <a:srgbClr val="D2A8FF"/>
+                </a:solidFill>
+                <a:effectLst/>
+                <a:latin typeface="Consolas" panose="020B0609020204030204" pitchFamily="49" charset="0"/>
+              </a:rPr>
+              <a:t>UserDto</a:t>
+            </a:r>
+            <a:r>
+              <a:rPr lang="en-US" altLang="ko-KR" sz="1050" b="0">
+                <a:solidFill>
+                  <a:srgbClr val="BBBEBF"/>
+                </a:solidFill>
+                <a:effectLst/>
+                <a:latin typeface="Consolas" panose="020B0609020204030204" pitchFamily="49" charset="0"/>
+              </a:rPr>
+              <a:t>(</a:t>
+            </a:r>
+          </a:p>
+          <a:p>
+            <a:pPr>
+              <a:lnSpc>
+                <a:spcPts val="1425"/>
+              </a:lnSpc>
+              <a:buNone/>
+            </a:pPr>
+            <a:r>
+              <a:rPr lang="en-US" altLang="ko-KR" sz="1050" b="0">
+                <a:solidFill>
+                  <a:srgbClr val="BBBEBF"/>
+                </a:solidFill>
+                <a:effectLst/>
+                <a:latin typeface="Consolas" panose="020B0609020204030204" pitchFamily="49" charset="0"/>
+              </a:rPr>
+              <a:t>                    </a:t>
+            </a:r>
+            <a:r>
+              <a:rPr lang="en-US" altLang="ko-KR" sz="1050" b="0">
+                <a:solidFill>
+                  <a:srgbClr val="FFA657"/>
+                </a:solidFill>
+                <a:effectLst/>
+                <a:latin typeface="Consolas" panose="020B0609020204030204" pitchFamily="49" charset="0"/>
+              </a:rPr>
+              <a:t>userResponseDto</a:t>
+            </a:r>
+            <a:r>
+              <a:rPr lang="en-US" altLang="ko-KR" sz="1050" b="0">
+                <a:solidFill>
+                  <a:srgbClr val="BBBEBF"/>
+                </a:solidFill>
+                <a:effectLst/>
+                <a:latin typeface="Consolas" panose="020B0609020204030204" pitchFamily="49" charset="0"/>
+              </a:rPr>
+              <a:t>.</a:t>
+            </a:r>
+            <a:r>
+              <a:rPr lang="en-US" altLang="ko-KR" sz="1050" b="0">
+                <a:solidFill>
+                  <a:srgbClr val="D2A8FF"/>
+                </a:solidFill>
+                <a:effectLst/>
+                <a:latin typeface="Consolas" panose="020B0609020204030204" pitchFamily="49" charset="0"/>
+              </a:rPr>
+              <a:t>getUserId</a:t>
+            </a:r>
+            <a:r>
+              <a:rPr lang="en-US" altLang="ko-KR" sz="1050" b="0">
+                <a:solidFill>
+                  <a:srgbClr val="BBBEBF"/>
+                </a:solidFill>
+                <a:effectLst/>
+                <a:latin typeface="Consolas" panose="020B0609020204030204" pitchFamily="49" charset="0"/>
+              </a:rPr>
+              <a:t>(),</a:t>
+            </a:r>
+          </a:p>
+          <a:p>
+            <a:pPr>
+              <a:lnSpc>
+                <a:spcPts val="1425"/>
+              </a:lnSpc>
+              <a:buNone/>
+            </a:pPr>
+            <a:r>
+              <a:rPr lang="en-US" altLang="ko-KR" sz="1050" b="0">
+                <a:solidFill>
+                  <a:srgbClr val="BBBEBF"/>
+                </a:solidFill>
+                <a:effectLst/>
+                <a:latin typeface="Consolas" panose="020B0609020204030204" pitchFamily="49" charset="0"/>
+              </a:rPr>
+              <a:t>                    </a:t>
+            </a:r>
+            <a:r>
+              <a:rPr lang="en-US" altLang="ko-KR" sz="1050" b="0">
+                <a:solidFill>
+                  <a:srgbClr val="FFA657"/>
+                </a:solidFill>
+                <a:effectLst/>
+                <a:latin typeface="Consolas" panose="020B0609020204030204" pitchFamily="49" charset="0"/>
+              </a:rPr>
+              <a:t>userResponseDto</a:t>
+            </a:r>
+            <a:r>
+              <a:rPr lang="en-US" altLang="ko-KR" sz="1050" b="0">
+                <a:solidFill>
+                  <a:srgbClr val="BBBEBF"/>
+                </a:solidFill>
+                <a:effectLst/>
+                <a:latin typeface="Consolas" panose="020B0609020204030204" pitchFamily="49" charset="0"/>
+              </a:rPr>
+              <a:t>.</a:t>
+            </a:r>
+            <a:r>
+              <a:rPr lang="en-US" altLang="ko-KR" sz="1050" b="0">
+                <a:solidFill>
+                  <a:srgbClr val="D2A8FF"/>
+                </a:solidFill>
+                <a:effectLst/>
+                <a:latin typeface="Consolas" panose="020B0609020204030204" pitchFamily="49" charset="0"/>
+              </a:rPr>
+              <a:t>getName</a:t>
+            </a:r>
+            <a:r>
+              <a:rPr lang="en-US" altLang="ko-KR" sz="1050" b="0">
+                <a:solidFill>
+                  <a:srgbClr val="BBBEBF"/>
+                </a:solidFill>
+                <a:effectLst/>
+                <a:latin typeface="Consolas" panose="020B0609020204030204" pitchFamily="49" charset="0"/>
+              </a:rPr>
+              <a:t>()</a:t>
+            </a:r>
+          </a:p>
+          <a:p>
+            <a:pPr>
+              <a:lnSpc>
+                <a:spcPts val="1425"/>
+              </a:lnSpc>
+              <a:buNone/>
+            </a:pPr>
+            <a:r>
+              <a:rPr lang="en-US" altLang="ko-KR" sz="1050" b="0">
+                <a:solidFill>
+                  <a:srgbClr val="BBBEBF"/>
+                </a:solidFill>
+                <a:effectLst/>
+                <a:latin typeface="Consolas" panose="020B0609020204030204" pitchFamily="49" charset="0"/>
+              </a:rPr>
+              <a:t>                )</a:t>
+            </a:r>
+          </a:p>
+          <a:p>
+            <a:pPr>
+              <a:lnSpc>
+                <a:spcPts val="1425"/>
+              </a:lnSpc>
+              <a:buNone/>
+            </a:pPr>
+            <a:r>
+              <a:rPr lang="en-US" altLang="ko-KR" sz="1050" b="0">
+                <a:solidFill>
+                  <a:srgbClr val="BBBEBF"/>
+                </a:solidFill>
+                <a:effectLst/>
+                <a:latin typeface="Consolas" panose="020B0609020204030204" pitchFamily="49" charset="0"/>
+              </a:rPr>
+              <a:t>            ));</a:t>
+            </a:r>
+          </a:p>
+          <a:p>
+            <a:pPr>
+              <a:lnSpc>
+                <a:spcPts val="1425"/>
+              </a:lnSpc>
+              <a:buNone/>
+            </a:pPr>
+            <a:r>
+              <a:rPr lang="en-US" altLang="ko-KR" sz="1050" b="0">
+                <a:solidFill>
+                  <a:srgbClr val="BBBEBF"/>
+                </a:solidFill>
+                <a:effectLst/>
+                <a:latin typeface="Consolas" panose="020B0609020204030204" pitchFamily="49" charset="0"/>
+              </a:rPr>
+              <a:t>        </a:t>
+            </a:r>
+          </a:p>
+          <a:p>
+            <a:pPr>
+              <a:lnSpc>
+                <a:spcPts val="1425"/>
+              </a:lnSpc>
+              <a:buNone/>
+            </a:pPr>
+            <a:r>
+              <a:rPr lang="en-US" altLang="ko-KR" sz="1050" b="0">
+                <a:solidFill>
+                  <a:srgbClr val="BBBEBF"/>
+                </a:solidFill>
+                <a:effectLst/>
+                <a:latin typeface="Consolas" panose="020B0609020204030204" pitchFamily="49" charset="0"/>
+              </a:rPr>
+              <a:t>        </a:t>
+            </a:r>
+            <a:r>
+              <a:rPr lang="en-US" altLang="ko-KR" sz="1050" b="0">
+                <a:solidFill>
+                  <a:srgbClr val="C586C0"/>
+                </a:solidFill>
+                <a:effectLst/>
+                <a:latin typeface="Consolas" panose="020B0609020204030204" pitchFamily="49" charset="0"/>
+              </a:rPr>
+              <a:t>return</a:t>
+            </a:r>
+            <a:r>
+              <a:rPr lang="en-US" altLang="ko-KR" sz="1050" b="0">
+                <a:solidFill>
+                  <a:srgbClr val="BBBEBF"/>
+                </a:solidFill>
+                <a:effectLst/>
+                <a:latin typeface="Consolas" panose="020B0609020204030204" pitchFamily="49" charset="0"/>
+              </a:rPr>
+              <a:t> </a:t>
+            </a:r>
+            <a:r>
+              <a:rPr lang="en-US" altLang="ko-KR" sz="1050" b="0">
+                <a:solidFill>
+                  <a:srgbClr val="C9D1D9"/>
+                </a:solidFill>
+                <a:effectLst/>
+                <a:latin typeface="Consolas" panose="020B0609020204030204" pitchFamily="49" charset="0"/>
+              </a:rPr>
+              <a:t>boards</a:t>
+            </a:r>
+            <a:r>
+              <a:rPr lang="en-US" altLang="ko-KR" sz="1050" b="0">
+                <a:solidFill>
+                  <a:srgbClr val="BBBEBF"/>
+                </a:solidFill>
+                <a:effectLst/>
+                <a:latin typeface="Consolas" panose="020B0609020204030204" pitchFamily="49" charset="0"/>
+              </a:rPr>
+              <a:t>.</a:t>
+            </a:r>
+            <a:r>
+              <a:rPr lang="en-US" altLang="ko-KR" sz="1050" b="0">
+                <a:solidFill>
+                  <a:srgbClr val="D2A8FF"/>
+                </a:solidFill>
+                <a:effectLst/>
+                <a:latin typeface="Consolas" panose="020B0609020204030204" pitchFamily="49" charset="0"/>
+              </a:rPr>
+              <a:t>stream</a:t>
+            </a:r>
+            <a:r>
+              <a:rPr lang="en-US" altLang="ko-KR" sz="1050" b="0">
+                <a:solidFill>
+                  <a:srgbClr val="BBBEBF"/>
+                </a:solidFill>
+                <a:effectLst/>
+                <a:latin typeface="Consolas" panose="020B0609020204030204" pitchFamily="49" charset="0"/>
+              </a:rPr>
+              <a:t>()</a:t>
+            </a:r>
+          </a:p>
+          <a:p>
+            <a:pPr>
+              <a:lnSpc>
+                <a:spcPts val="1425"/>
+              </a:lnSpc>
+              <a:buNone/>
+            </a:pPr>
+            <a:r>
+              <a:rPr lang="en-US" altLang="ko-KR" sz="1050" b="0">
+                <a:solidFill>
+                  <a:srgbClr val="BBBEBF"/>
+                </a:solidFill>
+                <a:effectLst/>
+                <a:latin typeface="Consolas" panose="020B0609020204030204" pitchFamily="49" charset="0"/>
+              </a:rPr>
+              <a:t>            .</a:t>
+            </a:r>
+            <a:r>
+              <a:rPr lang="en-US" altLang="ko-KR" sz="1050" b="0">
+                <a:solidFill>
+                  <a:srgbClr val="D2A8FF"/>
+                </a:solidFill>
+                <a:effectLst/>
+                <a:latin typeface="Consolas" panose="020B0609020204030204" pitchFamily="49" charset="0"/>
+              </a:rPr>
+              <a:t>map</a:t>
+            </a:r>
+            <a:r>
+              <a:rPr lang="en-US" altLang="ko-KR" sz="1050" b="0">
+                <a:solidFill>
+                  <a:srgbClr val="BBBEBF"/>
+                </a:solidFill>
+                <a:effectLst/>
+                <a:latin typeface="Consolas" panose="020B0609020204030204" pitchFamily="49" charset="0"/>
+              </a:rPr>
+              <a:t>(</a:t>
+            </a:r>
+            <a:r>
+              <a:rPr lang="en-US" altLang="ko-KR" sz="1050" b="0">
+                <a:solidFill>
+                  <a:srgbClr val="FFA657"/>
+                </a:solidFill>
+                <a:effectLst/>
+                <a:latin typeface="Consolas" panose="020B0609020204030204" pitchFamily="49" charset="0"/>
+              </a:rPr>
+              <a:t>board</a:t>
+            </a:r>
+            <a:r>
+              <a:rPr lang="en-US" altLang="ko-KR" sz="1050" b="0">
+                <a:solidFill>
+                  <a:srgbClr val="BBBEBF"/>
+                </a:solidFill>
+                <a:effectLst/>
+                <a:latin typeface="Consolas" panose="020B0609020204030204" pitchFamily="49" charset="0"/>
+              </a:rPr>
+              <a:t> </a:t>
+            </a:r>
+            <a:r>
+              <a:rPr lang="en-US" altLang="ko-KR" sz="1050" b="0">
+                <a:solidFill>
+                  <a:srgbClr val="FF7B72"/>
+                </a:solidFill>
+                <a:effectLst/>
+                <a:latin typeface="Consolas" panose="020B0609020204030204" pitchFamily="49" charset="0"/>
+              </a:rPr>
+              <a:t>-&gt;</a:t>
+            </a:r>
+            <a:r>
+              <a:rPr lang="en-US" altLang="ko-KR" sz="1050" b="0">
+                <a:solidFill>
+                  <a:srgbClr val="BBBEBF"/>
+                </a:solidFill>
+                <a:effectLst/>
+                <a:latin typeface="Consolas" panose="020B0609020204030204" pitchFamily="49" charset="0"/>
+              </a:rPr>
+              <a:t> </a:t>
+            </a:r>
+            <a:r>
+              <a:rPr lang="en-US" altLang="ko-KR" sz="1050" b="0">
+                <a:solidFill>
+                  <a:srgbClr val="C586C0"/>
+                </a:solidFill>
+                <a:effectLst/>
+                <a:latin typeface="Consolas" panose="020B0609020204030204" pitchFamily="49" charset="0"/>
+              </a:rPr>
+              <a:t>new</a:t>
+            </a:r>
+            <a:r>
+              <a:rPr lang="en-US" altLang="ko-KR" sz="1050" b="0">
+                <a:solidFill>
+                  <a:srgbClr val="BBBEBF"/>
+                </a:solidFill>
+                <a:effectLst/>
+                <a:latin typeface="Consolas" panose="020B0609020204030204" pitchFamily="49" charset="0"/>
+              </a:rPr>
+              <a:t> </a:t>
+            </a:r>
+            <a:r>
+              <a:rPr lang="en-US" altLang="ko-KR" sz="1050" b="0">
+                <a:solidFill>
+                  <a:srgbClr val="D2A8FF"/>
+                </a:solidFill>
+                <a:effectLst/>
+                <a:latin typeface="Consolas" panose="020B0609020204030204" pitchFamily="49" charset="0"/>
+              </a:rPr>
+              <a:t>BoardResponseDto</a:t>
+            </a:r>
+            <a:r>
+              <a:rPr lang="en-US" altLang="ko-KR" sz="1050" b="0">
+                <a:solidFill>
+                  <a:srgbClr val="BBBEBF"/>
+                </a:solidFill>
+                <a:effectLst/>
+                <a:latin typeface="Consolas" panose="020B0609020204030204" pitchFamily="49" charset="0"/>
+              </a:rPr>
+              <a:t>(</a:t>
+            </a:r>
+          </a:p>
+          <a:p>
+            <a:pPr>
+              <a:lnSpc>
+                <a:spcPts val="1425"/>
+              </a:lnSpc>
+              <a:buNone/>
+            </a:pPr>
+            <a:r>
+              <a:rPr lang="en-US" altLang="ko-KR" sz="1050" b="0">
+                <a:solidFill>
+                  <a:srgbClr val="BBBEBF"/>
+                </a:solidFill>
+                <a:effectLst/>
+                <a:latin typeface="Consolas" panose="020B0609020204030204" pitchFamily="49" charset="0"/>
+              </a:rPr>
+              <a:t>                </a:t>
+            </a:r>
+            <a:r>
+              <a:rPr lang="en-US" altLang="ko-KR" sz="1050" b="0">
+                <a:solidFill>
+                  <a:srgbClr val="FFA657"/>
+                </a:solidFill>
+                <a:effectLst/>
+                <a:latin typeface="Consolas" panose="020B0609020204030204" pitchFamily="49" charset="0"/>
+              </a:rPr>
+              <a:t>board</a:t>
+            </a:r>
+            <a:r>
+              <a:rPr lang="en-US" altLang="ko-KR" sz="1050" b="0">
+                <a:solidFill>
+                  <a:srgbClr val="BBBEBF"/>
+                </a:solidFill>
+                <a:effectLst/>
+                <a:latin typeface="Consolas" panose="020B0609020204030204" pitchFamily="49" charset="0"/>
+              </a:rPr>
+              <a:t>.</a:t>
+            </a:r>
+            <a:r>
+              <a:rPr lang="en-US" altLang="ko-KR" sz="1050" b="0">
+                <a:solidFill>
+                  <a:srgbClr val="D2A8FF"/>
+                </a:solidFill>
+                <a:effectLst/>
+                <a:latin typeface="Consolas" panose="020B0609020204030204" pitchFamily="49" charset="0"/>
+              </a:rPr>
+              <a:t>getBoardId</a:t>
+            </a:r>
+            <a:r>
+              <a:rPr lang="en-US" altLang="ko-KR" sz="1050" b="0">
+                <a:solidFill>
+                  <a:srgbClr val="BBBEBF"/>
+                </a:solidFill>
+                <a:effectLst/>
+                <a:latin typeface="Consolas" panose="020B0609020204030204" pitchFamily="49" charset="0"/>
+              </a:rPr>
+              <a:t>(),</a:t>
+            </a:r>
+          </a:p>
+          <a:p>
+            <a:pPr>
+              <a:lnSpc>
+                <a:spcPts val="1425"/>
+              </a:lnSpc>
+              <a:buNone/>
+            </a:pPr>
+            <a:r>
+              <a:rPr lang="en-US" altLang="ko-KR" sz="1050" b="0">
+                <a:solidFill>
+                  <a:srgbClr val="BBBEBF"/>
+                </a:solidFill>
+                <a:effectLst/>
+                <a:latin typeface="Consolas" panose="020B0609020204030204" pitchFamily="49" charset="0"/>
+              </a:rPr>
+              <a:t>                </a:t>
+            </a:r>
+            <a:r>
+              <a:rPr lang="en-US" altLang="ko-KR" sz="1050" b="0">
+                <a:solidFill>
+                  <a:srgbClr val="FFA657"/>
+                </a:solidFill>
+                <a:effectLst/>
+                <a:latin typeface="Consolas" panose="020B0609020204030204" pitchFamily="49" charset="0"/>
+              </a:rPr>
+              <a:t>board</a:t>
+            </a:r>
+            <a:r>
+              <a:rPr lang="en-US" altLang="ko-KR" sz="1050" b="0">
+                <a:solidFill>
+                  <a:srgbClr val="BBBEBF"/>
+                </a:solidFill>
+                <a:effectLst/>
+                <a:latin typeface="Consolas" panose="020B0609020204030204" pitchFamily="49" charset="0"/>
+              </a:rPr>
+              <a:t>.</a:t>
+            </a:r>
+            <a:r>
+              <a:rPr lang="en-US" altLang="ko-KR" sz="1050" b="0">
+                <a:solidFill>
+                  <a:srgbClr val="D2A8FF"/>
+                </a:solidFill>
+                <a:effectLst/>
+                <a:latin typeface="Consolas" panose="020B0609020204030204" pitchFamily="49" charset="0"/>
+              </a:rPr>
+              <a:t>getTitle</a:t>
+            </a:r>
+            <a:r>
+              <a:rPr lang="en-US" altLang="ko-KR" sz="1050" b="0">
+                <a:solidFill>
+                  <a:srgbClr val="BBBEBF"/>
+                </a:solidFill>
+                <a:effectLst/>
+                <a:latin typeface="Consolas" panose="020B0609020204030204" pitchFamily="49" charset="0"/>
+              </a:rPr>
+              <a:t>(),</a:t>
+            </a:r>
+          </a:p>
+          <a:p>
+            <a:pPr>
+              <a:lnSpc>
+                <a:spcPts val="1425"/>
+              </a:lnSpc>
+              <a:buNone/>
+            </a:pPr>
+            <a:r>
+              <a:rPr lang="en-US" altLang="ko-KR" sz="1050" b="0">
+                <a:solidFill>
+                  <a:srgbClr val="BBBEBF"/>
+                </a:solidFill>
+                <a:effectLst/>
+                <a:latin typeface="Consolas" panose="020B0609020204030204" pitchFamily="49" charset="0"/>
+              </a:rPr>
+              <a:t>                </a:t>
+            </a:r>
+            <a:r>
+              <a:rPr lang="en-US" altLang="ko-KR" sz="1050" b="0">
+                <a:solidFill>
+                  <a:srgbClr val="FFA657"/>
+                </a:solidFill>
+                <a:effectLst/>
+                <a:latin typeface="Consolas" panose="020B0609020204030204" pitchFamily="49" charset="0"/>
+              </a:rPr>
+              <a:t>board</a:t>
+            </a:r>
+            <a:r>
+              <a:rPr lang="en-US" altLang="ko-KR" sz="1050" b="0">
+                <a:solidFill>
+                  <a:srgbClr val="BBBEBF"/>
+                </a:solidFill>
+                <a:effectLst/>
+                <a:latin typeface="Consolas" panose="020B0609020204030204" pitchFamily="49" charset="0"/>
+              </a:rPr>
+              <a:t>.</a:t>
+            </a:r>
+            <a:r>
+              <a:rPr lang="en-US" altLang="ko-KR" sz="1050" b="0">
+                <a:solidFill>
+                  <a:srgbClr val="D2A8FF"/>
+                </a:solidFill>
+                <a:effectLst/>
+                <a:latin typeface="Consolas" panose="020B0609020204030204" pitchFamily="49" charset="0"/>
+              </a:rPr>
+              <a:t>getContent</a:t>
+            </a:r>
+            <a:r>
+              <a:rPr lang="en-US" altLang="ko-KR" sz="1050" b="0">
+                <a:solidFill>
+                  <a:srgbClr val="BBBEBF"/>
+                </a:solidFill>
+                <a:effectLst/>
+                <a:latin typeface="Consolas" panose="020B0609020204030204" pitchFamily="49" charset="0"/>
+              </a:rPr>
+              <a:t>(),</a:t>
+            </a:r>
+          </a:p>
+          <a:p>
+            <a:pPr>
+              <a:lnSpc>
+                <a:spcPts val="1425"/>
+              </a:lnSpc>
+              <a:buNone/>
+            </a:pPr>
+            <a:r>
+              <a:rPr lang="en-US" altLang="ko-KR" sz="1050" b="0">
+                <a:solidFill>
+                  <a:srgbClr val="BBBEBF"/>
+                </a:solidFill>
+                <a:effectLst/>
+                <a:latin typeface="Consolas" panose="020B0609020204030204" pitchFamily="49" charset="0"/>
+              </a:rPr>
+              <a:t>                </a:t>
+            </a:r>
+            <a:r>
+              <a:rPr lang="en-US" altLang="ko-KR" sz="1050" b="0">
+                <a:solidFill>
+                  <a:srgbClr val="C9D1D9"/>
+                </a:solidFill>
+                <a:effectLst/>
+                <a:latin typeface="Consolas" panose="020B0609020204030204" pitchFamily="49" charset="0"/>
+              </a:rPr>
+              <a:t>userMap</a:t>
+            </a:r>
+            <a:r>
+              <a:rPr lang="en-US" altLang="ko-KR" sz="1050" b="0">
+                <a:solidFill>
+                  <a:srgbClr val="BBBEBF"/>
+                </a:solidFill>
+                <a:effectLst/>
+                <a:latin typeface="Consolas" panose="020B0609020204030204" pitchFamily="49" charset="0"/>
+              </a:rPr>
+              <a:t>.</a:t>
+            </a:r>
+            <a:r>
+              <a:rPr lang="en-US" altLang="ko-KR" sz="1050" b="0">
+                <a:solidFill>
+                  <a:srgbClr val="D2A8FF"/>
+                </a:solidFill>
+                <a:effectLst/>
+                <a:latin typeface="Consolas" panose="020B0609020204030204" pitchFamily="49" charset="0"/>
+              </a:rPr>
+              <a:t>get</a:t>
+            </a:r>
+            <a:r>
+              <a:rPr lang="en-US" altLang="ko-KR" sz="1050" b="0">
+                <a:solidFill>
+                  <a:srgbClr val="BBBEBF"/>
+                </a:solidFill>
+                <a:effectLst/>
+                <a:latin typeface="Consolas" panose="020B0609020204030204" pitchFamily="49" charset="0"/>
+              </a:rPr>
+              <a:t>(</a:t>
+            </a:r>
+            <a:r>
+              <a:rPr lang="en-US" altLang="ko-KR" sz="1050" b="0">
+                <a:solidFill>
+                  <a:srgbClr val="FFA657"/>
+                </a:solidFill>
+                <a:effectLst/>
+                <a:latin typeface="Consolas" panose="020B0609020204030204" pitchFamily="49" charset="0"/>
+              </a:rPr>
+              <a:t>board</a:t>
+            </a:r>
+            <a:r>
+              <a:rPr lang="en-US" altLang="ko-KR" sz="1050" b="0">
+                <a:solidFill>
+                  <a:srgbClr val="BBBEBF"/>
+                </a:solidFill>
+                <a:effectLst/>
+                <a:latin typeface="Consolas" panose="020B0609020204030204" pitchFamily="49" charset="0"/>
+              </a:rPr>
+              <a:t>.</a:t>
+            </a:r>
+            <a:r>
+              <a:rPr lang="en-US" altLang="ko-KR" sz="1050" b="0">
+                <a:solidFill>
+                  <a:srgbClr val="D2A8FF"/>
+                </a:solidFill>
+                <a:effectLst/>
+                <a:latin typeface="Consolas" panose="020B0609020204030204" pitchFamily="49" charset="0"/>
+              </a:rPr>
+              <a:t>getUserId</a:t>
+            </a:r>
+            <a:r>
+              <a:rPr lang="en-US" altLang="ko-KR" sz="1050" b="0">
+                <a:solidFill>
+                  <a:srgbClr val="BBBEBF"/>
+                </a:solidFill>
+                <a:effectLst/>
+                <a:latin typeface="Consolas" panose="020B0609020204030204" pitchFamily="49" charset="0"/>
+              </a:rPr>
+              <a:t>())</a:t>
+            </a:r>
+          </a:p>
+          <a:p>
+            <a:pPr>
+              <a:lnSpc>
+                <a:spcPts val="1425"/>
+              </a:lnSpc>
+              <a:buNone/>
+            </a:pPr>
+            <a:r>
+              <a:rPr lang="en-US" altLang="ko-KR" sz="1050" b="0">
+                <a:solidFill>
+                  <a:srgbClr val="BBBEBF"/>
+                </a:solidFill>
+                <a:effectLst/>
+                <a:latin typeface="Consolas" panose="020B0609020204030204" pitchFamily="49" charset="0"/>
+              </a:rPr>
+              <a:t>            ))</a:t>
+            </a:r>
+          </a:p>
+          <a:p>
+            <a:pPr>
+              <a:lnSpc>
+                <a:spcPts val="1425"/>
+              </a:lnSpc>
+              <a:buNone/>
+            </a:pPr>
+            <a:r>
+              <a:rPr lang="en-US" altLang="ko-KR" sz="1050" b="0">
+                <a:solidFill>
+                  <a:srgbClr val="BBBEBF"/>
+                </a:solidFill>
+                <a:effectLst/>
+                <a:latin typeface="Consolas" panose="020B0609020204030204" pitchFamily="49" charset="0"/>
+              </a:rPr>
+              <a:t>            .</a:t>
+            </a:r>
+            <a:r>
+              <a:rPr lang="en-US" altLang="ko-KR" sz="1050" b="0">
+                <a:solidFill>
+                  <a:srgbClr val="D2A8FF"/>
+                </a:solidFill>
+                <a:effectLst/>
+                <a:latin typeface="Consolas" panose="020B0609020204030204" pitchFamily="49" charset="0"/>
+              </a:rPr>
+              <a:t>toList</a:t>
+            </a:r>
+            <a:r>
+              <a:rPr lang="en-US" altLang="ko-KR" sz="1050" b="0">
+                <a:solidFill>
+                  <a:srgbClr val="BBBEBF"/>
+                </a:solidFill>
+                <a:effectLst/>
+                <a:latin typeface="Consolas" panose="020B0609020204030204" pitchFamily="49" charset="0"/>
+              </a:rPr>
+              <a:t>();</a:t>
+            </a:r>
+          </a:p>
+          <a:p>
+            <a:pPr>
+              <a:lnSpc>
+                <a:spcPts val="1425"/>
+              </a:lnSpc>
+              <a:buNone/>
+            </a:pPr>
+            <a:r>
+              <a:rPr lang="en-US" altLang="ko-KR" sz="1050" b="0">
+                <a:solidFill>
+                  <a:srgbClr val="BBBEBF"/>
+                </a:solidFill>
+                <a:effectLst/>
+                <a:latin typeface="Consolas" panose="020B0609020204030204" pitchFamily="49" charset="0"/>
+              </a:rPr>
+              <a:t>    }</a:t>
+            </a:r>
+          </a:p>
+        </p:txBody>
+      </p:sp>
+      <p:grpSp>
+        <p:nvGrpSpPr>
+          <p:cNvPr id="5" name="그룹 4">
+            <a:extLst>
+              <a:ext uri="{FF2B5EF4-FFF2-40B4-BE49-F238E27FC236}">
+                <a16:creationId xmlns:a16="http://schemas.microsoft.com/office/drawing/2014/main" id="{9F0D929B-334D-9F40-EFD2-6E1E8C795776}"/>
+              </a:ext>
+            </a:extLst>
+          </p:cNvPr>
+          <p:cNvGrpSpPr/>
+          <p:nvPr/>
+        </p:nvGrpSpPr>
+        <p:grpSpPr>
+          <a:xfrm>
+            <a:off x="889814" y="1856120"/>
+            <a:ext cx="2896004" cy="4334480"/>
+            <a:chOff x="496622" y="2039000"/>
+            <a:chExt cx="2896004" cy="4334480"/>
+          </a:xfrm>
+        </p:grpSpPr>
+        <p:pic>
+          <p:nvPicPr>
+            <p:cNvPr id="6" name="그림 5">
+              <a:extLst>
+                <a:ext uri="{FF2B5EF4-FFF2-40B4-BE49-F238E27FC236}">
+                  <a16:creationId xmlns:a16="http://schemas.microsoft.com/office/drawing/2014/main" id="{CE8ED3D4-ADA1-24A8-5A75-5E431C3BC919}"/>
+                </a:ext>
+              </a:extLst>
+            </p:cNvPr>
+            <p:cNvPicPr>
+              <a:picLocks noChangeAspect="1"/>
+            </p:cNvPicPr>
+            <p:nvPr/>
+          </p:nvPicPr>
+          <p:blipFill>
+            <a:blip r:embed="rId2"/>
+            <a:stretch>
+              <a:fillRect/>
+            </a:stretch>
+          </p:blipFill>
+          <p:spPr>
+            <a:xfrm>
+              <a:off x="496622" y="2039000"/>
+              <a:ext cx="2896004" cy="4334480"/>
+            </a:xfrm>
+            <a:prstGeom prst="rect">
+              <a:avLst/>
+            </a:prstGeom>
+          </p:spPr>
+        </p:pic>
+        <p:sp>
+          <p:nvSpPr>
+            <p:cNvPr id="7" name="직사각형 6">
+              <a:extLst>
+                <a:ext uri="{FF2B5EF4-FFF2-40B4-BE49-F238E27FC236}">
+                  <a16:creationId xmlns:a16="http://schemas.microsoft.com/office/drawing/2014/main" id="{59E0D029-E5BE-7BEE-13CA-E5F5663A752E}"/>
+                </a:ext>
+              </a:extLst>
+            </p:cNvPr>
+            <p:cNvSpPr/>
+            <p:nvPr/>
+          </p:nvSpPr>
+          <p:spPr>
+            <a:xfrm>
+              <a:off x="923544" y="4992624"/>
+              <a:ext cx="1234440" cy="256032"/>
+            </a:xfrm>
+            <a:prstGeom prst="rect">
+              <a:avLst/>
+            </a:prstGeom>
+            <a:noFill/>
+            <a:ln>
+              <a:solidFill>
+                <a:srgbClr val="FF0000"/>
+              </a:solidFill>
+            </a:ln>
+          </p:spPr>
+          <p:style>
+            <a:lnRef idx="2">
+              <a:schemeClr val="accent1">
+                <a:shade val="15000"/>
+              </a:schemeClr>
+            </a:lnRef>
+            <a:fillRef idx="1">
+              <a:schemeClr val="accent1"/>
+            </a:fillRef>
+            <a:effectRef idx="0">
+              <a:schemeClr val="accent1"/>
+            </a:effectRef>
+            <a:fontRef idx="minor">
+              <a:schemeClr val="lt1"/>
+            </a:fontRef>
+          </p:style>
+          <p:txBody>
+            <a:bodyPr rtlCol="0" anchor="ctr"/>
+            <a:lstStyle/>
+            <a:p>
+              <a:pPr algn="ctr"/>
+              <a:endParaRPr lang="ko-KR" altLang="en-US"/>
+            </a:p>
+          </p:txBody>
+        </p:sp>
+      </p:grpSp>
+      <p:sp>
+        <p:nvSpPr>
+          <p:cNvPr id="8" name="직사각형 7">
+            <a:extLst>
+              <a:ext uri="{FF2B5EF4-FFF2-40B4-BE49-F238E27FC236}">
+                <a16:creationId xmlns:a16="http://schemas.microsoft.com/office/drawing/2014/main" id="{85FD8DBD-3882-2DF4-E625-E63AD738A776}"/>
+              </a:ext>
+            </a:extLst>
+          </p:cNvPr>
+          <p:cNvSpPr/>
+          <p:nvPr/>
+        </p:nvSpPr>
+        <p:spPr>
+          <a:xfrm>
+            <a:off x="8503920" y="1856120"/>
+            <a:ext cx="3044952" cy="1143112"/>
+          </a:xfrm>
+          <a:prstGeom prst="rect">
+            <a:avLst/>
+          </a:prstGeom>
+        </p:spPr>
+        <p:style>
+          <a:lnRef idx="2">
+            <a:schemeClr val="accent1">
+              <a:shade val="15000"/>
+            </a:schemeClr>
+          </a:lnRef>
+          <a:fillRef idx="1">
+            <a:schemeClr val="accent1"/>
+          </a:fillRef>
+          <a:effectRef idx="0">
+            <a:schemeClr val="accent1"/>
+          </a:effectRef>
+          <a:fontRef idx="minor">
+            <a:schemeClr val="lt1"/>
+          </a:fontRef>
+        </p:style>
+        <p:txBody>
+          <a:bodyPr rtlCol="0" anchor="ctr"/>
+          <a:lstStyle/>
+          <a:p>
+            <a:pPr algn="ctr"/>
+            <a:r>
+              <a:rPr lang="en-US" altLang="ko-KR" sz="1400"/>
+              <a:t>List&lt;Board&gt; </a:t>
+            </a:r>
+            <a:r>
+              <a:rPr lang="ko-KR" altLang="en-US" sz="1400"/>
+              <a:t>정보의 </a:t>
+            </a:r>
+            <a:r>
+              <a:rPr lang="en-US" altLang="ko-KR" sz="1400"/>
+              <a:t>userId </a:t>
+            </a:r>
+            <a:r>
+              <a:rPr lang="ko-KR" altLang="en-US" sz="1400"/>
+              <a:t>정보만을 중복제거하여 리스트화</a:t>
+            </a:r>
+          </a:p>
+        </p:txBody>
+      </p:sp>
+      <p:sp>
+        <p:nvSpPr>
+          <p:cNvPr id="9" name="직사각형 8">
+            <a:extLst>
+              <a:ext uri="{FF2B5EF4-FFF2-40B4-BE49-F238E27FC236}">
+                <a16:creationId xmlns:a16="http://schemas.microsoft.com/office/drawing/2014/main" id="{DAC61427-36C9-2E5C-CA1B-54E5A06C7C19}"/>
+              </a:ext>
+            </a:extLst>
+          </p:cNvPr>
+          <p:cNvSpPr/>
+          <p:nvPr/>
+        </p:nvSpPr>
+        <p:spPr>
+          <a:xfrm>
+            <a:off x="8610600" y="3572144"/>
+            <a:ext cx="3044952" cy="1143112"/>
+          </a:xfrm>
+          <a:prstGeom prst="rect">
+            <a:avLst/>
+          </a:prstGeom>
+        </p:spPr>
+        <p:style>
+          <a:lnRef idx="2">
+            <a:schemeClr val="accent1">
+              <a:shade val="15000"/>
+            </a:schemeClr>
+          </a:lnRef>
+          <a:fillRef idx="1">
+            <a:schemeClr val="accent1"/>
+          </a:fillRef>
+          <a:effectRef idx="0">
+            <a:schemeClr val="accent1"/>
+          </a:effectRef>
+          <a:fontRef idx="minor">
+            <a:schemeClr val="lt1"/>
+          </a:fontRef>
+        </p:style>
+        <p:txBody>
+          <a:bodyPr rtlCol="0" anchor="ctr"/>
+          <a:lstStyle/>
+          <a:p>
+            <a:pPr algn="ctr"/>
+            <a:r>
+              <a:rPr lang="en-US" altLang="ko-KR" sz="1400"/>
+              <a:t>UserId : UserResponseDto</a:t>
+            </a:r>
+            <a:br>
+              <a:rPr lang="en-US" altLang="ko-KR" sz="1400"/>
+            </a:br>
+            <a:r>
+              <a:rPr lang="ko-KR" altLang="en-US" sz="1400"/>
+              <a:t>형태의 </a:t>
+            </a:r>
+            <a:r>
+              <a:rPr lang="en-US" altLang="ko-KR" sz="1400"/>
+              <a:t>Map </a:t>
+            </a:r>
+            <a:r>
+              <a:rPr lang="ko-KR" altLang="en-US" sz="1400"/>
+              <a:t>자료구조 맵핑</a:t>
+            </a:r>
+            <a:r>
+              <a:rPr lang="en-US" altLang="ko-KR" sz="1400"/>
+              <a:t> </a:t>
+            </a:r>
+            <a:endParaRPr lang="ko-KR" altLang="en-US" sz="1400"/>
+          </a:p>
+        </p:txBody>
+      </p:sp>
+      <p:sp>
+        <p:nvSpPr>
+          <p:cNvPr id="10" name="직사각형 9">
+            <a:extLst>
+              <a:ext uri="{FF2B5EF4-FFF2-40B4-BE49-F238E27FC236}">
+                <a16:creationId xmlns:a16="http://schemas.microsoft.com/office/drawing/2014/main" id="{7D3FE5D6-EF74-D35F-F85D-9742B3C22C0F}"/>
+              </a:ext>
+            </a:extLst>
+          </p:cNvPr>
+          <p:cNvSpPr/>
+          <p:nvPr/>
+        </p:nvSpPr>
+        <p:spPr>
+          <a:xfrm>
+            <a:off x="8610600" y="5214427"/>
+            <a:ext cx="3044952" cy="1143112"/>
+          </a:xfrm>
+          <a:prstGeom prst="rect">
+            <a:avLst/>
+          </a:prstGeom>
+        </p:spPr>
+        <p:style>
+          <a:lnRef idx="2">
+            <a:schemeClr val="accent1">
+              <a:shade val="15000"/>
+            </a:schemeClr>
+          </a:lnRef>
+          <a:fillRef idx="1">
+            <a:schemeClr val="accent1"/>
+          </a:fillRef>
+          <a:effectRef idx="0">
+            <a:schemeClr val="accent1"/>
+          </a:effectRef>
+          <a:fontRef idx="minor">
+            <a:schemeClr val="lt1"/>
+          </a:fontRef>
+        </p:style>
+        <p:txBody>
+          <a:bodyPr rtlCol="0" anchor="ctr"/>
+          <a:lstStyle/>
+          <a:p>
+            <a:pPr algn="ctr"/>
+            <a:r>
+              <a:rPr lang="en-US" altLang="ko-KR" sz="1400"/>
+              <a:t>List&lt;BoardResponseDto&gt; </a:t>
+            </a:r>
+            <a:r>
+              <a:rPr lang="ko-KR" altLang="en-US" sz="1400"/>
+              <a:t>맵핑</a:t>
+            </a:r>
+          </a:p>
+        </p:txBody>
+      </p:sp>
+    </p:spTree>
+    <p:extLst>
+      <p:ext uri="{BB962C8B-B14F-4D97-AF65-F5344CB8AC3E}">
+        <p14:creationId xmlns:p14="http://schemas.microsoft.com/office/powerpoint/2010/main" val="1625598618"/>
+      </p:ext>
+    </p:extLst>
+  </p:cSld>
+  <p:clrMapOvr>
+    <a:masterClrMapping/>
+  </p:clrMapOvr>
+</p:sld>
+</file>
+
+<file path=ppt/slides/slide31.xml><?xml version="1.0" encoding="utf-8"?>
+<p:sld xmlns:a="http://schemas.openxmlformats.org/drawingml/2006/main" xmlns:r="http://schemas.openxmlformats.org/officeDocument/2006/relationships" xmlns:p="http://schemas.openxmlformats.org/presentationml/2006/main">
+  <p:cSld>
+    <p:spTree>
+      <p:nvGrpSpPr>
+        <p:cNvPr id="1" name=""/>
+        <p:cNvGrpSpPr/>
+        <p:nvPr/>
+      </p:nvGrpSpPr>
+      <p:grpSpPr>
+        <a:xfrm>
+          <a:off x="0" y="0"/>
+          <a:ext cx="0" cy="0"/>
+          <a:chOff x="0" y="0"/>
+          <a:chExt cx="0" cy="0"/>
+        </a:xfrm>
+      </p:grpSpPr>
+      <p:sp>
+        <p:nvSpPr>
+          <p:cNvPr id="2" name="제목 1">
+            <a:extLst>
+              <a:ext uri="{FF2B5EF4-FFF2-40B4-BE49-F238E27FC236}">
+                <a16:creationId xmlns:a16="http://schemas.microsoft.com/office/drawing/2014/main" id="{89C6F258-5552-D29D-C3F5-E8475AEDEDE4}"/>
+              </a:ext>
+            </a:extLst>
+          </p:cNvPr>
+          <p:cNvSpPr>
+            <a:spLocks noGrp="1"/>
+          </p:cNvSpPr>
+          <p:nvPr>
+            <p:ph type="title"/>
+          </p:nvPr>
+        </p:nvSpPr>
+        <p:spPr/>
+        <p:txBody>
+          <a:bodyPr>
+            <a:normAutofit/>
+          </a:bodyPr>
+          <a:lstStyle/>
+          <a:p>
+            <a:r>
+              <a:rPr lang="ko-KR" altLang="en-US" sz="4000"/>
+              <a:t>게시판 서비스 </a:t>
+            </a:r>
+            <a:r>
+              <a:rPr lang="en-US" altLang="ko-KR" sz="4000"/>
+              <a:t>– </a:t>
+            </a:r>
+            <a:r>
+              <a:rPr lang="ko-KR" altLang="en-US" sz="4000"/>
+              <a:t>게시판 목록 정보 반환</a:t>
+            </a:r>
+            <a:r>
+              <a:rPr lang="en-US" altLang="ko-KR" sz="4000"/>
+              <a:t>API</a:t>
+            </a:r>
+            <a:endParaRPr lang="ko-KR" altLang="en-US" sz="4000"/>
+          </a:p>
+        </p:txBody>
+      </p:sp>
+      <p:sp>
+        <p:nvSpPr>
+          <p:cNvPr id="5" name="TextBox 4">
+            <a:extLst>
+              <a:ext uri="{FF2B5EF4-FFF2-40B4-BE49-F238E27FC236}">
+                <a16:creationId xmlns:a16="http://schemas.microsoft.com/office/drawing/2014/main" id="{EF1CB985-5A8A-C3D9-84A5-FD5625DD6453}"/>
+              </a:ext>
+            </a:extLst>
+          </p:cNvPr>
+          <p:cNvSpPr txBox="1"/>
+          <p:nvPr/>
+        </p:nvSpPr>
+        <p:spPr>
+          <a:xfrm>
+            <a:off x="3943350" y="1883552"/>
+            <a:ext cx="8108442" cy="978088"/>
+          </a:xfrm>
+          <a:prstGeom prst="rect">
+            <a:avLst/>
+          </a:prstGeom>
+          <a:solidFill>
+            <a:schemeClr val="tx1"/>
+          </a:solidFill>
+        </p:spPr>
+        <p:txBody>
+          <a:bodyPr wrap="square">
+            <a:spAutoFit/>
+          </a:bodyPr>
+          <a:lstStyle/>
+          <a:p>
+            <a:pPr>
+              <a:lnSpc>
+                <a:spcPts val="1425"/>
+              </a:lnSpc>
+              <a:buNone/>
+            </a:pPr>
+            <a:r>
+              <a:rPr lang="en-US" altLang="ko-KR" sz="1000" b="0">
+                <a:solidFill>
+                  <a:srgbClr val="BBBEBF"/>
+                </a:solidFill>
+                <a:effectLst/>
+                <a:latin typeface="Consolas" panose="020B0609020204030204" pitchFamily="49" charset="0"/>
+              </a:rPr>
+              <a:t>    @</a:t>
+            </a:r>
+            <a:r>
+              <a:rPr lang="en-US" altLang="ko-KR" sz="1000" b="0">
+                <a:solidFill>
+                  <a:srgbClr val="4EC9B0"/>
+                </a:solidFill>
+                <a:effectLst/>
+                <a:latin typeface="Consolas" panose="020B0609020204030204" pitchFamily="49" charset="0"/>
+              </a:rPr>
+              <a:t>GetMapping</a:t>
+            </a:r>
+            <a:endParaRPr lang="en-US" altLang="ko-KR" sz="1000" b="0">
+              <a:solidFill>
+                <a:srgbClr val="BBBEBF"/>
+              </a:solidFill>
+              <a:effectLst/>
+              <a:latin typeface="Consolas" panose="020B0609020204030204" pitchFamily="49" charset="0"/>
+            </a:endParaRPr>
+          </a:p>
+          <a:p>
+            <a:pPr>
+              <a:lnSpc>
+                <a:spcPts val="1425"/>
+              </a:lnSpc>
+              <a:buNone/>
+            </a:pPr>
+            <a:r>
+              <a:rPr lang="en-US" altLang="ko-KR" sz="1000" b="0">
+                <a:solidFill>
+                  <a:srgbClr val="BBBEBF"/>
+                </a:solidFill>
+                <a:effectLst/>
+                <a:latin typeface="Consolas" panose="020B0609020204030204" pitchFamily="49" charset="0"/>
+              </a:rPr>
+              <a:t>    </a:t>
+            </a:r>
+            <a:r>
+              <a:rPr lang="en-US" altLang="ko-KR" sz="1000" b="0">
+                <a:solidFill>
+                  <a:srgbClr val="569CD6"/>
+                </a:solidFill>
+                <a:effectLst/>
+                <a:latin typeface="Consolas" panose="020B0609020204030204" pitchFamily="49" charset="0"/>
+              </a:rPr>
+              <a:t>public</a:t>
+            </a:r>
+            <a:r>
+              <a:rPr lang="en-US" altLang="ko-KR" sz="1000" b="0">
+                <a:solidFill>
+                  <a:srgbClr val="BBBEBF"/>
+                </a:solidFill>
+                <a:effectLst/>
+                <a:latin typeface="Consolas" panose="020B0609020204030204" pitchFamily="49" charset="0"/>
+              </a:rPr>
+              <a:t> </a:t>
+            </a:r>
+            <a:r>
+              <a:rPr lang="en-US" altLang="ko-KR" sz="1000" b="0">
+                <a:solidFill>
+                  <a:srgbClr val="4EC9B0"/>
+                </a:solidFill>
+                <a:effectLst/>
+                <a:latin typeface="Consolas" panose="020B0609020204030204" pitchFamily="49" charset="0"/>
+              </a:rPr>
+              <a:t>ResponseEntity</a:t>
+            </a:r>
+            <a:r>
+              <a:rPr lang="en-US" altLang="ko-KR" sz="1000" b="0">
+                <a:solidFill>
+                  <a:srgbClr val="BBBEBF"/>
+                </a:solidFill>
+                <a:effectLst/>
+                <a:latin typeface="Consolas" panose="020B0609020204030204" pitchFamily="49" charset="0"/>
+              </a:rPr>
+              <a:t>&lt;</a:t>
+            </a:r>
+            <a:r>
+              <a:rPr lang="en-US" altLang="ko-KR" sz="1000" b="0">
+                <a:solidFill>
+                  <a:srgbClr val="4EC9B0"/>
+                </a:solidFill>
+                <a:effectLst/>
+                <a:latin typeface="Consolas" panose="020B0609020204030204" pitchFamily="49" charset="0"/>
+              </a:rPr>
+              <a:t>List</a:t>
+            </a:r>
+            <a:r>
+              <a:rPr lang="en-US" altLang="ko-KR" sz="1000" b="0">
+                <a:solidFill>
+                  <a:srgbClr val="BBBEBF"/>
+                </a:solidFill>
+                <a:effectLst/>
+                <a:latin typeface="Consolas" panose="020B0609020204030204" pitchFamily="49" charset="0"/>
+              </a:rPr>
+              <a:t>&lt;</a:t>
+            </a:r>
+            <a:r>
+              <a:rPr lang="en-US" altLang="ko-KR" sz="1000" b="0">
+                <a:solidFill>
+                  <a:srgbClr val="4EC9B0"/>
+                </a:solidFill>
+                <a:effectLst/>
+                <a:latin typeface="Consolas" panose="020B0609020204030204" pitchFamily="49" charset="0"/>
+              </a:rPr>
+              <a:t>BoardResponseDto</a:t>
+            </a:r>
+            <a:r>
+              <a:rPr lang="en-US" altLang="ko-KR" sz="1000" b="0">
+                <a:solidFill>
+                  <a:srgbClr val="BBBEBF"/>
+                </a:solidFill>
+                <a:effectLst/>
+                <a:latin typeface="Consolas" panose="020B0609020204030204" pitchFamily="49" charset="0"/>
+              </a:rPr>
+              <a:t>&gt;&gt; </a:t>
+            </a:r>
+            <a:r>
+              <a:rPr lang="en-US" altLang="ko-KR" sz="1000" b="0">
+                <a:solidFill>
+                  <a:srgbClr val="D2A8FF"/>
+                </a:solidFill>
+                <a:effectLst/>
+                <a:latin typeface="Consolas" panose="020B0609020204030204" pitchFamily="49" charset="0"/>
+              </a:rPr>
+              <a:t>getBoards</a:t>
+            </a:r>
+            <a:r>
+              <a:rPr lang="en-US" altLang="ko-KR" sz="1000" b="0">
+                <a:solidFill>
+                  <a:srgbClr val="BBBEBF"/>
+                </a:solidFill>
+                <a:effectLst/>
+                <a:latin typeface="Consolas" panose="020B0609020204030204" pitchFamily="49" charset="0"/>
+              </a:rPr>
+              <a:t>() {</a:t>
+            </a:r>
+          </a:p>
+          <a:p>
+            <a:pPr>
+              <a:lnSpc>
+                <a:spcPts val="1425"/>
+              </a:lnSpc>
+              <a:buNone/>
+            </a:pPr>
+            <a:r>
+              <a:rPr lang="en-US" altLang="ko-KR" sz="1000" b="0">
+                <a:solidFill>
+                  <a:srgbClr val="BBBEBF"/>
+                </a:solidFill>
+                <a:effectLst/>
+                <a:latin typeface="Consolas" panose="020B0609020204030204" pitchFamily="49" charset="0"/>
+              </a:rPr>
+              <a:t>        </a:t>
+            </a:r>
+            <a:r>
+              <a:rPr lang="en-US" altLang="ko-KR" sz="1000" b="0">
+                <a:solidFill>
+                  <a:srgbClr val="4EC9B0"/>
+                </a:solidFill>
+                <a:effectLst/>
+                <a:latin typeface="Consolas" panose="020B0609020204030204" pitchFamily="49" charset="0"/>
+              </a:rPr>
+              <a:t>List</a:t>
+            </a:r>
+            <a:r>
+              <a:rPr lang="en-US" altLang="ko-KR" sz="1000" b="0">
+                <a:solidFill>
+                  <a:srgbClr val="FFA657"/>
+                </a:solidFill>
+                <a:effectLst/>
+                <a:latin typeface="Consolas" panose="020B0609020204030204" pitchFamily="49" charset="0"/>
+              </a:rPr>
+              <a:t>&lt;</a:t>
+            </a:r>
+            <a:r>
+              <a:rPr lang="en-US" altLang="ko-KR" sz="1000" b="0">
+                <a:solidFill>
+                  <a:srgbClr val="4EC9B0"/>
+                </a:solidFill>
+                <a:effectLst/>
+                <a:latin typeface="Consolas" panose="020B0609020204030204" pitchFamily="49" charset="0"/>
+              </a:rPr>
+              <a:t>BoardResponseDto</a:t>
+            </a:r>
+            <a:r>
+              <a:rPr lang="en-US" altLang="ko-KR" sz="1000" b="0">
+                <a:solidFill>
+                  <a:srgbClr val="FFA657"/>
+                </a:solidFill>
+                <a:effectLst/>
+                <a:latin typeface="Consolas" panose="020B0609020204030204" pitchFamily="49" charset="0"/>
+              </a:rPr>
+              <a:t>&gt; </a:t>
+            </a:r>
+            <a:r>
+              <a:rPr lang="en-US" altLang="ko-KR" sz="1000" b="0">
+                <a:solidFill>
+                  <a:srgbClr val="C9D1D9"/>
+                </a:solidFill>
+                <a:effectLst/>
+                <a:latin typeface="Consolas" panose="020B0609020204030204" pitchFamily="49" charset="0"/>
+              </a:rPr>
+              <a:t>boardResponseDtos</a:t>
+            </a:r>
+            <a:r>
+              <a:rPr lang="en-US" altLang="ko-KR" sz="1000" b="0">
+                <a:solidFill>
+                  <a:srgbClr val="FFA657"/>
+                </a:solidFill>
+                <a:effectLst/>
+                <a:latin typeface="Consolas" panose="020B0609020204030204" pitchFamily="49" charset="0"/>
+              </a:rPr>
+              <a:t> </a:t>
+            </a:r>
+            <a:r>
+              <a:rPr lang="en-US" altLang="ko-KR" sz="1000" b="0">
+                <a:solidFill>
+                  <a:srgbClr val="D4D4D4"/>
+                </a:solidFill>
+                <a:effectLst/>
+                <a:latin typeface="Consolas" panose="020B0609020204030204" pitchFamily="49" charset="0"/>
+              </a:rPr>
+              <a:t>=</a:t>
+            </a:r>
+            <a:r>
+              <a:rPr lang="en-US" altLang="ko-KR" sz="1000" b="0">
+                <a:solidFill>
+                  <a:srgbClr val="BBBEBF"/>
+                </a:solidFill>
+                <a:effectLst/>
+                <a:latin typeface="Consolas" panose="020B0609020204030204" pitchFamily="49" charset="0"/>
+              </a:rPr>
+              <a:t> </a:t>
+            </a:r>
+            <a:r>
+              <a:rPr lang="en-US" altLang="ko-KR" sz="1000" b="0">
+                <a:solidFill>
+                  <a:srgbClr val="79C0FF"/>
+                </a:solidFill>
+                <a:effectLst/>
+                <a:latin typeface="Consolas" panose="020B0609020204030204" pitchFamily="49" charset="0"/>
+              </a:rPr>
+              <a:t>boardService</a:t>
+            </a:r>
+            <a:r>
+              <a:rPr lang="en-US" altLang="ko-KR" sz="1000" b="0">
+                <a:solidFill>
+                  <a:srgbClr val="BBBEBF"/>
+                </a:solidFill>
+                <a:effectLst/>
+                <a:latin typeface="Consolas" panose="020B0609020204030204" pitchFamily="49" charset="0"/>
+              </a:rPr>
+              <a:t>.</a:t>
+            </a:r>
+            <a:r>
+              <a:rPr lang="en-US" altLang="ko-KR" sz="1000" b="0">
+                <a:solidFill>
+                  <a:srgbClr val="D2A8FF"/>
+                </a:solidFill>
+                <a:effectLst/>
+                <a:latin typeface="Consolas" panose="020B0609020204030204" pitchFamily="49" charset="0"/>
+              </a:rPr>
+              <a:t>getBoards</a:t>
+            </a:r>
+            <a:r>
+              <a:rPr lang="en-US" altLang="ko-KR" sz="1000" b="0">
+                <a:solidFill>
+                  <a:srgbClr val="BBBEBF"/>
+                </a:solidFill>
+                <a:effectLst/>
+                <a:latin typeface="Consolas" panose="020B0609020204030204" pitchFamily="49" charset="0"/>
+              </a:rPr>
+              <a:t>();</a:t>
+            </a:r>
+          </a:p>
+          <a:p>
+            <a:pPr>
+              <a:lnSpc>
+                <a:spcPts val="1425"/>
+              </a:lnSpc>
+              <a:buNone/>
+            </a:pPr>
+            <a:r>
+              <a:rPr lang="en-US" altLang="ko-KR" sz="1000" b="0">
+                <a:solidFill>
+                  <a:srgbClr val="BBBEBF"/>
+                </a:solidFill>
+                <a:effectLst/>
+                <a:latin typeface="Consolas" panose="020B0609020204030204" pitchFamily="49" charset="0"/>
+              </a:rPr>
+              <a:t>        </a:t>
+            </a:r>
+            <a:r>
+              <a:rPr lang="en-US" altLang="ko-KR" sz="1000" b="0">
+                <a:solidFill>
+                  <a:srgbClr val="C586C0"/>
+                </a:solidFill>
+                <a:effectLst/>
+                <a:latin typeface="Consolas" panose="020B0609020204030204" pitchFamily="49" charset="0"/>
+              </a:rPr>
+              <a:t>return</a:t>
+            </a:r>
+            <a:r>
+              <a:rPr lang="en-US" altLang="ko-KR" sz="1000" b="0">
+                <a:solidFill>
+                  <a:srgbClr val="BBBEBF"/>
+                </a:solidFill>
+                <a:effectLst/>
+                <a:latin typeface="Consolas" panose="020B0609020204030204" pitchFamily="49" charset="0"/>
+              </a:rPr>
+              <a:t> </a:t>
+            </a:r>
+            <a:r>
+              <a:rPr lang="en-US" altLang="ko-KR" sz="1000" b="0">
+                <a:solidFill>
+                  <a:srgbClr val="4EC9B0"/>
+                </a:solidFill>
+                <a:effectLst/>
+                <a:latin typeface="Consolas" panose="020B0609020204030204" pitchFamily="49" charset="0"/>
+              </a:rPr>
+              <a:t>ResponseEntity</a:t>
+            </a:r>
+            <a:r>
+              <a:rPr lang="en-US" altLang="ko-KR" sz="1000" b="0">
+                <a:solidFill>
+                  <a:srgbClr val="BBBEBF"/>
+                </a:solidFill>
+                <a:effectLst/>
+                <a:latin typeface="Consolas" panose="020B0609020204030204" pitchFamily="49" charset="0"/>
+              </a:rPr>
+              <a:t>.</a:t>
+            </a:r>
+            <a:r>
+              <a:rPr lang="en-US" altLang="ko-KR" sz="1000" b="0">
+                <a:solidFill>
+                  <a:srgbClr val="D2A8FF"/>
+                </a:solidFill>
+                <a:effectLst/>
+                <a:latin typeface="Consolas" panose="020B0609020204030204" pitchFamily="49" charset="0"/>
+              </a:rPr>
+              <a:t>ok</a:t>
+            </a:r>
+            <a:r>
+              <a:rPr lang="en-US" altLang="ko-KR" sz="1000" b="0">
+                <a:solidFill>
+                  <a:srgbClr val="BBBEBF"/>
+                </a:solidFill>
+                <a:effectLst/>
+                <a:latin typeface="Consolas" panose="020B0609020204030204" pitchFamily="49" charset="0"/>
+              </a:rPr>
+              <a:t>(</a:t>
+            </a:r>
+            <a:r>
+              <a:rPr lang="en-US" altLang="ko-KR" sz="1000" b="0">
+                <a:solidFill>
+                  <a:srgbClr val="C9D1D9"/>
+                </a:solidFill>
+                <a:effectLst/>
+                <a:latin typeface="Consolas" panose="020B0609020204030204" pitchFamily="49" charset="0"/>
+              </a:rPr>
+              <a:t>boardResponseDtos</a:t>
+            </a:r>
+            <a:r>
+              <a:rPr lang="en-US" altLang="ko-KR" sz="1000" b="0">
+                <a:solidFill>
+                  <a:srgbClr val="BBBEBF"/>
+                </a:solidFill>
+                <a:effectLst/>
+                <a:latin typeface="Consolas" panose="020B0609020204030204" pitchFamily="49" charset="0"/>
+              </a:rPr>
+              <a:t>); </a:t>
+            </a:r>
+          </a:p>
+          <a:p>
+            <a:pPr>
+              <a:lnSpc>
+                <a:spcPts val="1425"/>
+              </a:lnSpc>
+              <a:buNone/>
+            </a:pPr>
+            <a:r>
+              <a:rPr lang="en-US" altLang="ko-KR" sz="1000" b="0">
+                <a:solidFill>
+                  <a:srgbClr val="BBBEBF"/>
+                </a:solidFill>
+                <a:effectLst/>
+                <a:latin typeface="Consolas" panose="020B0609020204030204" pitchFamily="49" charset="0"/>
+              </a:rPr>
+              <a:t>    }</a:t>
+            </a:r>
+          </a:p>
+        </p:txBody>
+      </p:sp>
+      <p:grpSp>
+        <p:nvGrpSpPr>
+          <p:cNvPr id="6" name="그룹 5">
+            <a:extLst>
+              <a:ext uri="{FF2B5EF4-FFF2-40B4-BE49-F238E27FC236}">
+                <a16:creationId xmlns:a16="http://schemas.microsoft.com/office/drawing/2014/main" id="{B2957135-8519-5CEB-E661-0FACE996205E}"/>
+              </a:ext>
+            </a:extLst>
+          </p:cNvPr>
+          <p:cNvGrpSpPr/>
+          <p:nvPr/>
+        </p:nvGrpSpPr>
+        <p:grpSpPr>
+          <a:xfrm>
+            <a:off x="889814" y="1856120"/>
+            <a:ext cx="2896004" cy="4334480"/>
+            <a:chOff x="496622" y="2039000"/>
+            <a:chExt cx="2896004" cy="4334480"/>
+          </a:xfrm>
+        </p:grpSpPr>
+        <p:pic>
+          <p:nvPicPr>
+            <p:cNvPr id="7" name="그림 6">
+              <a:extLst>
+                <a:ext uri="{FF2B5EF4-FFF2-40B4-BE49-F238E27FC236}">
+                  <a16:creationId xmlns:a16="http://schemas.microsoft.com/office/drawing/2014/main" id="{5B76A6DF-CB6A-93F2-0122-8BED1F8AA5CA}"/>
+                </a:ext>
+              </a:extLst>
+            </p:cNvPr>
+            <p:cNvPicPr>
+              <a:picLocks noChangeAspect="1"/>
+            </p:cNvPicPr>
+            <p:nvPr/>
+          </p:nvPicPr>
+          <p:blipFill>
+            <a:blip r:embed="rId2"/>
+            <a:stretch>
+              <a:fillRect/>
+            </a:stretch>
+          </p:blipFill>
+          <p:spPr>
+            <a:xfrm>
+              <a:off x="496622" y="2039000"/>
+              <a:ext cx="2896004" cy="4334480"/>
+            </a:xfrm>
+            <a:prstGeom prst="rect">
+              <a:avLst/>
+            </a:prstGeom>
+          </p:spPr>
+        </p:pic>
+        <p:sp>
+          <p:nvSpPr>
+            <p:cNvPr id="8" name="직사각형 7">
+              <a:extLst>
+                <a:ext uri="{FF2B5EF4-FFF2-40B4-BE49-F238E27FC236}">
+                  <a16:creationId xmlns:a16="http://schemas.microsoft.com/office/drawing/2014/main" id="{F3AC2EDC-CC45-DAC3-07B1-64204AE0FC1B}"/>
+                </a:ext>
+              </a:extLst>
+            </p:cNvPr>
+            <p:cNvSpPr/>
+            <p:nvPr/>
+          </p:nvSpPr>
+          <p:spPr>
+            <a:xfrm>
+              <a:off x="958114" y="3355848"/>
+              <a:ext cx="1291310" cy="193258"/>
+            </a:xfrm>
+            <a:prstGeom prst="rect">
+              <a:avLst/>
+            </a:prstGeom>
+            <a:noFill/>
+            <a:ln>
+              <a:solidFill>
+                <a:srgbClr val="FF0000"/>
+              </a:solidFill>
+            </a:ln>
+          </p:spPr>
+          <p:style>
+            <a:lnRef idx="2">
+              <a:schemeClr val="accent1">
+                <a:shade val="15000"/>
+              </a:schemeClr>
+            </a:lnRef>
+            <a:fillRef idx="1">
+              <a:schemeClr val="accent1"/>
+            </a:fillRef>
+            <a:effectRef idx="0">
+              <a:schemeClr val="accent1"/>
+            </a:effectRef>
+            <a:fontRef idx="minor">
+              <a:schemeClr val="lt1"/>
+            </a:fontRef>
+          </p:style>
+          <p:txBody>
+            <a:bodyPr rtlCol="0" anchor="ctr"/>
+            <a:lstStyle/>
+            <a:p>
+              <a:pPr algn="ctr"/>
+              <a:endParaRPr lang="ko-KR" altLang="en-US"/>
+            </a:p>
+          </p:txBody>
+        </p:sp>
+      </p:grpSp>
+    </p:spTree>
+    <p:extLst>
+      <p:ext uri="{BB962C8B-B14F-4D97-AF65-F5344CB8AC3E}">
+        <p14:creationId xmlns:p14="http://schemas.microsoft.com/office/powerpoint/2010/main" val="1185045828"/>
+      </p:ext>
+    </p:extLst>
+  </p:cSld>
+  <p:clrMapOvr>
+    <a:masterClrMapping/>
+  </p:clrMapOvr>
+</p:sld>
+</file>
+
+<file path=ppt/slides/slide32.xml><?xml version="1.0" encoding="utf-8"?>
+<p:sld xmlns:a="http://schemas.openxmlformats.org/drawingml/2006/main" xmlns:r="http://schemas.openxmlformats.org/officeDocument/2006/relationships" xmlns:p="http://schemas.openxmlformats.org/presentationml/2006/main">
+  <p:cSld>
+    <p:spTree>
+      <p:nvGrpSpPr>
+        <p:cNvPr id="1" name=""/>
+        <p:cNvGrpSpPr/>
+        <p:nvPr/>
+      </p:nvGrpSpPr>
+      <p:grpSpPr>
+        <a:xfrm>
+          <a:off x="0" y="0"/>
+          <a:ext cx="0" cy="0"/>
+          <a:chOff x="0" y="0"/>
+          <a:chExt cx="0" cy="0"/>
+        </a:xfrm>
+      </p:grpSpPr>
+      <p:sp>
+        <p:nvSpPr>
+          <p:cNvPr id="2" name="제목 1">
+            <a:extLst>
+              <a:ext uri="{FF2B5EF4-FFF2-40B4-BE49-F238E27FC236}">
+                <a16:creationId xmlns:a16="http://schemas.microsoft.com/office/drawing/2014/main" id="{F94B7627-6D52-F607-A3A7-E991C0AB3788}"/>
+              </a:ext>
+            </a:extLst>
+          </p:cNvPr>
+          <p:cNvSpPr>
+            <a:spLocks noGrp="1"/>
+          </p:cNvSpPr>
+          <p:nvPr>
+            <p:ph type="title"/>
+          </p:nvPr>
+        </p:nvSpPr>
+        <p:spPr/>
+        <p:txBody>
+          <a:bodyPr/>
+          <a:lstStyle/>
+          <a:p>
+            <a:r>
+              <a:rPr lang="ko-KR" altLang="en-US"/>
+              <a:t>게시판 목록 정보 반환 </a:t>
+            </a:r>
+            <a:r>
+              <a:rPr lang="en-US" altLang="ko-KR"/>
+              <a:t>API </a:t>
+            </a:r>
+            <a:r>
+              <a:rPr lang="ko-KR" altLang="en-US"/>
+              <a:t>테스트</a:t>
+            </a:r>
+          </a:p>
+        </p:txBody>
+      </p:sp>
+      <p:pic>
+        <p:nvPicPr>
+          <p:cNvPr id="4" name="그림 3">
+            <a:extLst>
+              <a:ext uri="{FF2B5EF4-FFF2-40B4-BE49-F238E27FC236}">
+                <a16:creationId xmlns:a16="http://schemas.microsoft.com/office/drawing/2014/main" id="{51D220B3-1C42-C640-986D-A9733526EA55}"/>
+              </a:ext>
+            </a:extLst>
+          </p:cNvPr>
+          <p:cNvPicPr>
+            <a:picLocks noChangeAspect="1"/>
+          </p:cNvPicPr>
+          <p:nvPr/>
+        </p:nvPicPr>
+        <p:blipFill>
+          <a:blip r:embed="rId2"/>
+          <a:stretch>
+            <a:fillRect/>
+          </a:stretch>
+        </p:blipFill>
+        <p:spPr>
+          <a:xfrm>
+            <a:off x="1199467" y="1888698"/>
+            <a:ext cx="7734222" cy="4198148"/>
+          </a:xfrm>
+          <a:prstGeom prst="rect">
+            <a:avLst/>
+          </a:prstGeom>
+        </p:spPr>
+      </p:pic>
+    </p:spTree>
+    <p:extLst>
+      <p:ext uri="{BB962C8B-B14F-4D97-AF65-F5344CB8AC3E}">
+        <p14:creationId xmlns:p14="http://schemas.microsoft.com/office/powerpoint/2010/main" val="2065287825"/>
       </p:ext>
     </p:extLst>
   </p:cSld>
